--- a/slides/warner-claude-architect-may-2026.pptx
+++ b/slides/warner-claude-architect-may-2026.pptx
@@ -55,6 +55,10 @@
     <p:sldId id="298" r:id="rId51"/>
     <p:sldId id="299" r:id="rId52"/>
     <p:sldId id="300" r:id="rId53"/>
+    <p:sldId id="301" r:id="rId54"/>
+    <p:sldId id="302" r:id="rId55"/>
+    <p:sldId id="303" r:id="rId56"/>
+    <p:sldId id="304" r:id="rId57"/>
   </p:sldIdLst>
   <p:sldSz cx="12192000" cy="6858000"/>
   <p:notesSz cx="6858000" cy="9144000"/>
@@ -566,7 +570,7 @@
           <a:lstStyle/>
           <a:p>
             <a:r>
-              <a:t>Cold open: skills-first production-architecture course. Describe the CCA-F cert without teaching to exam items (exam not yet public). Set expectations: heavy on live demos, light on slides.</a:t>
+              <a:t>Cold open. This is a skills-first production-architecture course. Mention CCA-F (Anthropic's certification) but do NOT teach to exam items. Set expectations: heavy on live demos, light on slides. The notebooks ARE the course; slides are the scaffolding.</a:t>
             </a:r>
           </a:p>
         </p:txBody>
@@ -636,7 +640,7 @@
           <a:lstStyle/>
           <a:p>
             <a:r>
-              <a:t>Open private/claude-cookbooks-main/tool_use/customer_service_agent.ipynb. Wire 4 tools. Add the refund-cap hook from hooks-example.py. Audience sees: agent skips verification -&gt; hook blocks -&gt; agent re-plans -&gt; escalates. The aha moment is when the hook fires.</a:t>
+              <a:t>Live demo, 15 minutes. The aha moment is when the hook fires and the model re-plans to call escalate_to_human with ticket ESC-9001. Have a backup screenshot ready in case the API hiccups. Cookbook reference for further study: claude-cookbooks-main/tool_use/customer_service_agent.ipynb.</a:t>
             </a:r>
           </a:p>
         </p:txBody>
@@ -706,7 +710,7 @@
           <a:lstStyle/>
           <a:p>
             <a:r>
-              <a:t>Walk the room (chat) for 90 seconds, then share 2-3 designs out loud. Reinforce: tool descriptions &gt; tool names; isolation &gt; shared context.</a:t>
+              <a:t>Walk the chat for 90 seconds, then share 2-3 designs out loud. Reinforce: tool descriptions beat tool names, isolation beats shared context, ~5 tools per agent is the floor before selection accuracy degrades.</a:t>
             </a:r>
           </a:p>
         </p:txBody>
@@ -776,7 +780,7 @@
           <a:lstStyle/>
           <a:p>
             <a:r>
-              <a:t>Bridge: 'You just built an agent that decides what to do. Next we go one level deeper, into the tools themselves and the Claude Code surface where you author them on a real team.'</a:t>
+              <a:t>Bridge: 'You just built an agent that decides what to do. Next we go one level deeper - into the tools themselves and the Claude Code surface where you author them on a real team.'</a:t>
             </a:r>
           </a:p>
         </p:txBody>
@@ -846,7 +850,7 @@
           <a:lstStyle/>
           <a:p>
             <a:r>
-              <a:t>Domains 2 + 3. 50 minutes. Heaviest segment (38 percent of exam weight combined). Two demos.</a:t>
+              <a:t>Domains 2 + 3. 50 minutes. Combined 38% of exam weight - the biggest pairing on the blueprint. Two demos: MCP config walkthrough, claude -p headless mode.</a:t>
             </a:r>
           </a:p>
         </p:txBody>
@@ -916,7 +920,7 @@
           <a:lstStyle/>
           <a:p>
             <a:r>
-              <a:t>Explain the merge. Tools live, Claude Code is where you orchestrate them. Different domains in the blueprint, same conversation in real life.</a:t>
+              <a:t>Explain the merge. Tools are the verbs; Claude Code is where you orchestrate them. Different domains in the blueprint, same conversation in real life. Two demos in this segment - MCP config walkthrough first, then claude -p headless second.</a:t>
             </a:r>
           </a:p>
         </p:txBody>
@@ -986,7 +990,7 @@
           <a:lstStyle/>
           <a:p>
             <a:r>
-              <a:t>A tool named get_data with description 'Fetch customer record by ID' beats one named getCustomerRecordById with description 'Gets data.' Write descriptions like you're onboarding a junior engineer.</a:t>
+              <a:t>A tool named get_data with description 'Fetch customer record by ID, returns name, email, status, lifetime value' beats one named getCustomerRecordById with description 'Gets data.' Write descriptions like you're onboarding a junior engineer. The model reads descriptions, not your variable-naming convention.</a:t>
             </a:r>
           </a:p>
         </p:txBody>
@@ -1056,7 +1060,7 @@
           <a:lstStyle/>
           <a:p>
             <a:r>
-              <a:t>Thrown exceptions crash the agent. Structured errors let it recover. This is the entire reliability story for tools in one slide.</a:t>
+              <a:t>Thrown exceptions crash the agent. Structured errors let it recover. This is the entire reliability story for tools in one slide. The three categories we use: transient (retry with backoff), permanent (reformulate or surface), policy (escalate or change approach).</a:t>
             </a:r>
           </a:p>
         </p:txBody>
@@ -1126,7 +1130,7 @@
           <a:lstStyle/>
           <a:p>
             <a:r>
-              <a:t>tool_choice tool + a Pydantic schema is the cheat code for structured output. We'll prove it in Segment 3.</a:t>
+              <a:t>The traffic-light analogy from Segment 2.5: auto is green, any is green with a tow truck behind you, tool=X is a forced left turn, none is a red light. disable_parallel_tool_use lives INSIDE the tool_choice object, not as a top-level kwarg. Common multiple-choice trap.</a:t>
             </a:r>
           </a:p>
         </p:txBody>
@@ -1196,7 +1200,7 @@
           <a:lstStyle/>
           <a:p>
             <a:r>
-              <a:t>Mention the analyze_dependencies vs Grep anti-pattern: model defaults to built-in Grep if custom tool description isn't specific enough.</a:t>
+              <a:t>Mention the analyze_dependencies vs Grep anti-pattern: model defaults to built-in Grep if the custom tool description isn't specific enough. Description is the contract. Tool count is the soft cap.</a:t>
             </a:r>
           </a:p>
         </p:txBody>
@@ -1266,7 +1270,7 @@
           <a:lstStyle/>
           <a:p>
             <a:r>
-              <a:t>Show repo's own .mcp.json in the demo. Four servers, three transports, env-var expansion.</a:t>
+              <a:t>Show repo's own .mcp.json in the demo. Four servers, three transports, env-var expansion for secrets. The pattern that scales: add a new MCP server to .mcp.json, every MCP-aware agent picks it up on the next list_tools call - no source change.</a:t>
             </a:r>
           </a:p>
         </p:txBody>
@@ -1336,7 +1340,7 @@
           <a:lstStyle/>
           <a:p>
             <a:r>
-              <a:t>30 second bio. Mention you teach from first principles. No glazing, no fluff. If they want production patterns, they're in the right room.</a:t>
+              <a:t>30-second bio. I teach from first principles. No glazing, no fluff. If they want production patterns and live demos, they're in the right room. Skip the resume part if pacing is tight; the website is the call-to-action.</a:t>
             </a:r>
           </a:p>
         </p:txBody>
@@ -1406,7 +1410,7 @@
           <a:lstStyle/>
           <a:p>
             <a:r>
-              <a:t>Open C:/github/claude-architect/.mcp.json in VS Code. Walk server-by-server: filesystem (stdio), github (stdio + ${GITHUB_TOKEN}), context7 (HTTP + header), internal-knowledge-base (SSE + bearer). Show what happens when GITHUB_TOKEN is unset.</a:t>
+              <a:t>Live demo, 10 minutes. Open .mcp.json side-by-side with the notebook so learners see config-as-data. Mention that the file is the same shape Claude Code reads at startup - it's the SDK contract, not a Claude Code convention.</a:t>
             </a:r>
           </a:p>
         </p:txBody>
@@ -1476,7 +1480,7 @@
           <a:lstStyle/>
           <a:p>
             <a:r>
-              <a:t>Loaded order matters. User + project additively. Subtree on demand keeps token budget tight. Local for personal preferences without polluting team.</a:t>
+              <a:t>Load order matters. User and project are additive. Subtree on-demand keeps the token budget tight (don't load frontend rules when the agent is reading backend code). Local for personal preferences without polluting team conventions.</a:t>
             </a:r>
           </a:p>
         </p:txBody>
@@ -1546,7 +1550,7 @@
           <a:lstStyle/>
           <a:p>
             <a:r>
-              <a:t>git log --oneline -20 | claude -p 'summarize these recent commits' - this is the demo callout for Segment 2 Demo B. Three seconds, one command, real value.</a:t>
+              <a:t>Three-second demo callout: git log --oneline -20 | claude -p 'summarize these recent commits'. One command, real value. Headless mode unlocks every CI/CD use case learners have but didn't know Claude Code supported.</a:t>
             </a:r>
           </a:p>
         </p:txBody>
@@ -1616,7 +1620,7 @@
           <a:lstStyle/>
           <a:p>
             <a:r>
-              <a:t>Open this repo's own CLAUDE.md. Walk the structure. Run: claude -p 'audit this CLAUDE.md against the documented conventions'. Show the headless output. Pipe a git log into it.</a:t>
+              <a:t>Live demo, 5 minutes. Short because it's the 'oh that's just a CLI' beat - the value is obvious once they see it. Have a fallback `claude -p` output saved as text in case the CLI hiccups.</a:t>
             </a:r>
           </a:p>
         </p:txBody>
@@ -1686,7 +1690,7 @@
           <a:lstStyle/>
           <a:p>
             <a:r>
-              <a:t>The correct answer: project CLAUDE.md for shared (commit style, security), subtree CLAUDE.md for team-specific conventions, .claude/rules with paths: globs for language-specific lint rules.</a:t>
+              <a:t>Target answer: project CLAUDE.md for shared (commit style, security), subtree CLAUDE.md for team-specific conventions, .claude/rules with paths: globs for language-specific lint rules. Hierarchy is the load-bearing concept.</a:t>
             </a:r>
           </a:p>
         </p:txBody>
@@ -1756,7 +1760,7 @@
           <a:lstStyle/>
           <a:p>
             <a:r>
-              <a:t>Bridge: 'Tools give the agent hands. Prompts and schemas decide what comes out. Let's make those outputs trustworthy.'</a:t>
+              <a:t>Bridge: 'Tools give the agent hands. Prompts and schemas decide what comes out. Before we get to structured output in Segment 3, take a 10-minute break - and if you want a deep dive between segments, Segment 2.5 ships as self-study.'</a:t>
             </a:r>
           </a:p>
         </p:txBody>
@@ -1826,7 +1830,7 @@
           <a:lstStyle/>
           <a:p>
             <a:r>
-              <a:t>Domain 4: Prompt Engineering &amp; Structured Output. 50 minutes. 20 percent of exam weight.</a:t>
+              <a:t>Tell learners this is the notebook to re-walk if they're aiming at CCA-F. ~75 minutes if walked end to end against the live API. Not on the 4-hour clock. The Console asset surface section is brand new in 2026-05 and won't be in older study guides - this is where Tim's content has an edge.</a:t>
             </a:r>
           </a:p>
         </p:txBody>
@@ -1896,7 +1900,7 @@
           <a:lstStyle/>
           <a:p>
             <a:r>
-              <a:t>Set expectations: this is the LONGEST live build (20 min). Highest demo risk. If anything goes sideways, switch to the markdown walkthrough.</a:t>
+              <a:t>Domains 4 + 5. 50 minutes. Combined 35% of exam weight. Live build: invoice extractor with Pydantic + forced tool_choice + validation retry.</a:t>
             </a:r>
           </a:p>
         </p:txBody>
@@ -1966,7 +1970,7 @@
           <a:lstStyle/>
           <a:p>
             <a:r>
-              <a:t>Few-shot beats temperature tuning every time. The model needs examples, not knobs.</a:t>
+              <a:t>The merge is honest to production. A well-typed extraction call inside a 50-turn conversation needs both Domain 4 (the call itself) and Domain 5 (context pinning so turn 47 still has the case facts).</a:t>
             </a:r>
           </a:p>
         </p:txBody>
@@ -2036,7 +2040,7 @@
           <a:lstStyle/>
           <a:p>
             <a:r>
-              <a:t>Walk through this in code in the demo. The Pydantic model is the source of truth for both runtime validation AND the API contract.</a:t>
+              <a:t>Set expectations: this is the LONGEST live build (~20 min). Highest demo risk. If anything goes sideways, switch to the markdown walkthrough next to the notebook. Sonnet 4.6 for this segment - the one place reasoning depth earns its tokens.</a:t>
             </a:r>
           </a:p>
         </p:txBody>
@@ -2106,7 +2110,7 @@
           <a:lstStyle/>
           <a:p>
             <a:r>
-              <a:t>Tell them where the slides + code live: github.com/timothywarner-org/claude-architect. Cert mention deferred to the end so we don't lead with exam mechanics.</a:t>
+              <a:t>Tell them where the slides and code live: github.com/timothywarner-org/claude-architect. Call out Segment 2.5 as the self-study deep dive - not on the 4-hour clock, but the highest exam-objective density in the repo. Cert briefing is the capstone (Segment 4), not the lead. We earn the cert talk after the skills.</a:t>
             </a:r>
           </a:p>
         </p:txBody>
@@ -2176,7 +2180,7 @@
           <a:lstStyle/>
           <a:p>
             <a:r>
-              <a:t>Anti-pattern: infinite retry on missing-info failure. Burns tokens, model can't invent the data, escalation is the right move.</a:t>
+              <a:t>Few-shot beats temperature tuning every time. The model needs examples, not knobs. Temperature is the lever you reach for last, not first.</a:t>
             </a:r>
           </a:p>
         </p:txBody>
@@ -2246,7 +2250,7 @@
           <a:lstStyle/>
           <a:p>
             <a:r>
-              <a:t>Per-segment calibration warning. If you don't break it down by doc type, high-aggregate accuracy lies to you.</a:t>
+              <a:t>The Pydantic model is the source of truth for both runtime validation AND the API contract. No JSON parsing, no fence-stripping, no validation rituals. The SDK validated for you. This is the Domain 4 load-bearing pattern.</a:t>
             </a:r>
           </a:p>
         </p:txBody>
@@ -2316,7 +2320,7 @@
           <a:lstStyle/>
           <a:p>
             <a:r>
-              <a:t>Open extracting_structured_json.ipynb + tool_use_with_pydantic.ipynb. Build Pydantic schema. Register as tool. Run on 3 invoices. Add validation-retry loop. This is the highest-demo-risk block of the course; have the markdown walkthrough open as fallback.</a:t>
+              <a:t>Anti-pattern: infinite retry on missing-info failure. Burns tokens, the model can't invent the data, escalation is the right move. max_retries=1 is the production default - one chance to react to its own error, then fail loud.</a:t>
             </a:r>
           </a:p>
         </p:txBody>
@@ -2386,7 +2390,7 @@
           <a:lstStyle/>
           <a:p>
             <a:r>
-              <a:t>Reinforces: nullable fields need explicit prompt instructions, confidence is the routing key, notes catches the 'I'm not sure' cases.</a:t>
+              <a:t>Per-segment calibration warning. If you don't break it down by doc type, high-aggregate accuracy lies to you. The confidence field is a routing key, not a vanity metric.</a:t>
             </a:r>
           </a:p>
         </p:txBody>
@@ -2456,7 +2460,7 @@
           <a:lstStyle/>
           <a:p>
             <a:r>
-              <a:t>Bridge: 'We have agents, tools, prompts. Production is where context windows fill up and one bad tool result poisons the chain. Last segment is about not breaking when scale arrives.'</a:t>
+              <a:t>Longest live build of the course. Highest demo risk. Have the markdown walkthrough open as fallback. Cookbook reference for further study: claude-cookbooks-main/tool_use/extracting_structured_json.ipynb and tool_use_with_pydantic.ipynb.</a:t>
             </a:r>
           </a:p>
         </p:txBody>
@@ -2526,7 +2530,7 @@
           <a:lstStyle/>
           <a:p>
             <a:r>
-              <a:t>Domain 5: Context Management &amp; Reliability. 50 minutes. 15 percent of exam weight + production strategy.</a:t>
+              <a:t>A 48-turn conversation should not have 48 turns of tool_result clutter. The cache demo in segment-3 shows cache_control on the system block - 2019 tokens cached, the vendor policy never re-billed across calls.</a:t>
             </a:r>
           </a:p>
         </p:txBody>
@@ -2596,7 +2600,7 @@
           <a:lstStyle/>
           <a:p>
             <a:r>
-              <a:t>How lawyers manage case files. Same discipline for long agent sessions. 48-turn conversation should not have 48 turns of tool_result clutter.</a:t>
+              <a:t>Frustrated user with a $5 refund doesn't need a human. Calm user with a multi-account billing dispute does. Sentiment is not complexity. The escalation contract: structured summary, not the transcript - the human picks up faster, the agent's notes are signal.</a:t>
             </a:r>
           </a:p>
         </p:txBody>
@@ -2666,7 +2670,7 @@
           <a:lstStyle/>
           <a:p>
             <a:r>
-              <a:t>Frustrated user with a $5 refund doesn't need a human. Calm user with a multi-account billing dispute does. Sentiment is not complexity.</a:t>
+              <a:t>Reinforces: nullable fields need explicit prompt instructions, confidence is the routing key, notes catches the 'I'm not sure' cases without crashing validation.</a:t>
             </a:r>
           </a:p>
         </p:txBody>
@@ -2736,7 +2740,7 @@
           <a:lstStyle/>
           <a:p>
             <a:r>
-              <a:t>The except: pass anti-pattern is the most common reliability bug. Catch errors. Return them. Let the model recover.</a:t>
+              <a:t>Bridge: 'You have agents, tools, prompts, validation, context discipline. Last segment is the cert capstone - what's on the CCA-F exam, how the domain weights map to today's notebooks, and ten weighted practice questions.'</a:t>
             </a:r>
           </a:p>
         </p:txBody>
@@ -2806,7 +2810,7 @@
           <a:lstStyle/>
           <a:p>
             <a:r>
-              <a:t>No source = no claim. Treat attribution as a REQUIRED output field, not a nicety. This is the difference between a research agent and a hallucination machine.</a:t>
+              <a:t>All five CCA-F domains. 50 minutes. 12-minute cert briefing + 28 minutes of 10 weighted practice questions + 10 minutes of Q&amp;A and close.</a:t>
             </a:r>
           </a:p>
         </p:txBody>
@@ -2876,7 +2880,7 @@
           <a:lstStyle/>
           <a:p>
             <a:r>
-              <a:t>Frame the whole course in one sentence. Hooks are deterministic. Schemas are deterministic. Application-layer intercepts are deterministic. The model isn't, and that's fine.</a:t>
+              <a:t>Frame the whole course in one sentence. Hooks are deterministic. Schemas are deterministic. Application-layer intercepts are deterministic. The model isn't, and that's fine - it's the right tool for ambiguous decisions. Production patterns build a deterministic shell around a non-deterministic kernel. Every demo in this course is an instance of that pattern.</a:t>
             </a:r>
           </a:p>
         </p:txBody>
@@ -2946,7 +2950,7 @@
           <a:lstStyle/>
           <a:p>
             <a:r>
-              <a:t>Open automatic-context-compaction.ipynb. Run a long convo. Watch compaction event fire. Show the summary the model generates. Explain when to use this vs. manual case-facts pinning.</a:t>
+              <a:t>Skills-first framing. You already have the skills. The exam is how you signal them. This is the moment to mention CCA-F is currently partner-gated; check claude.com/partners for the current access policy.</a:t>
             </a:r>
           </a:p>
         </p:txBody>
@@ -3016,7 +3020,7 @@
           <a:lstStyle/>
           <a:p>
             <a:r>
-              <a:t>Answers: (a) better descriptions + scope tools per agent, (b) hook intercept, (c) require claim-source mappings, (d) escalate on policy/complexity not sentiment.</a:t>
+              <a:t>The one-attempt rule is the policy nobody plans around. Tell them: don't schedule until your Anthropic Practice Exam scores are consistently above 900. Treat the $99 as if it were $990 - because the cost of failing is rescheduling and starting prep over.</a:t>
             </a:r>
           </a:p>
         </p:txBody>
@@ -3086,7 +3090,7 @@
           <a:lstStyle/>
           <a:p>
             <a:r>
-              <a:t>Recap the four artifacts. Tie back to the cold-open quote: model is non-deterministic, your architecture cannot be.</a:t>
+              <a:t>D1 + D3 + D4 = 67% of the exam. Weight your study time the same way. D2 + D3 = 38% - that pairing is why we covered both in one segment. D5 is small but easy to under-teach because it feels like security common sense until scenario questions get specific.</a:t>
             </a:r>
           </a:p>
         </p:txBody>
@@ -3156,7 +3160,7 @@
           <a:lstStyle/>
           <a:p>
             <a:r>
-              <a:t>Skills-first framing. We taught the skills behind the domains. The reference files in the repo (domain-N-*.md) map skills to exam objectives when the exam goes public.</a:t>
+              <a:t>This is why Segment 4 runs against a freshly-tagged practice-questions.json. The 60-question bank distribution doesn't match exam weights, but the SAMPLER does. Same idea Anthropic uses for the real exam.</a:t>
             </a:r>
           </a:p>
         </p:txBody>
@@ -3226,7 +3230,7 @@
           <a:lstStyle/>
           <a:p>
             <a:r>
-              <a:t>If they don't ship something in 7 days, the muscle memory fades. Pick the smallest possible win and ship it.</a:t>
+              <a:t>The community-sourced disclaimer goes here: questions are calibration practice, NOT exam predictors. Use Anthropic's official Practice Exam as the authoritative signal before scheduling. Read the disclaimer out loud once at the start.</a:t>
             </a:r>
           </a:p>
         </p:txBody>
@@ -3296,7 +3300,287 @@
           <a:lstStyle/>
           <a:p>
             <a:r>
-              <a:t>Final Q&amp;A. Anticipated questions: cost story for prompt caching, when to split an agent, monitoring production agents, MCP server hosting.</a:t>
+              <a:t>Full 13-item version lives in CERT-PROGRAM-BRIEFING.md. Six headlines on the slide. Rebuilding Segment 1 from memory in 30 minutes is the load-bearing readiness test - if you can't, you're not ready to sit the exam.</a:t>
+            </a:r>
+          </a:p>
+        </p:txBody>
+      </p:sp>
+      <p:sp>
+        <p:nvSpPr>
+          <p:cNvPr id="4" name="Slide Number Placeholder 3"/>
+          <p:cNvSpPr>
+            <a:spLocks noGrp="1"/>
+          </p:cNvSpPr>
+          <p:nvPr>
+            <p:ph type="sldNum" idx="5" sz="quarter"/>
+          </p:nvPr>
+        </p:nvSpPr>
+        <p:spPr/>
+      </p:sp>
+    </p:spTree>
+  </p:cSld>
+  <p:clrMapOvr>
+    <a:masterClrMapping/>
+  </p:clrMapOvr>
+</p:notes>
+</file>
+
+<file path=ppt/notesSlides/notesSlide46.xml><?xml version="1.0" encoding="utf-8"?>
+<p:notes xmlns:a="http://schemas.openxmlformats.org/drawingml/2006/main" xmlns:p="http://schemas.openxmlformats.org/presentationml/2006/main" xmlns:r="http://schemas.openxmlformats.org/officeDocument/2006/relationships">
+  <p:cSld>
+    <p:spTree>
+      <p:nvGrpSpPr>
+        <p:cNvPr id="1" name=""/>
+        <p:cNvGrpSpPr/>
+        <p:nvPr/>
+      </p:nvGrpSpPr>
+      <p:grpSpPr>
+        <a:xfrm>
+          <a:off x="0" y="0"/>
+          <a:ext cx="0" cy="0"/>
+          <a:chOff x="0" y="0"/>
+          <a:chExt cx="0" cy="0"/>
+        </a:xfrm>
+      </p:grpSpPr>
+      <p:sp>
+        <p:nvSpPr>
+          <p:cNvPr id="2" name="Slide Image Placeholder 1"/>
+          <p:cNvSpPr>
+            <a:spLocks noGrp="1"/>
+          </p:cNvSpPr>
+          <p:nvPr>
+            <p:ph type="sldImg" idx="2"/>
+          </p:nvPr>
+        </p:nvSpPr>
+        <p:spPr/>
+      </p:sp>
+      <p:sp>
+        <p:nvSpPr>
+          <p:cNvPr id="3" name="Notes Placeholder 2"/>
+          <p:cNvSpPr>
+            <a:spLocks noGrp="1"/>
+          </p:cNvSpPr>
+          <p:nvPr>
+            <p:ph type="body" idx="3" sz="quarter"/>
+          </p:nvPr>
+        </p:nvSpPr>
+        <p:spPr/>
+        <p:txBody>
+          <a:bodyPr/>
+          <a:lstStyle/>
+          <a:p>
+            <a:r>
+              <a:t>Recap the four live artifacts plus the self-study fifth. Tie back to the cold-open quote: model is non-deterministic, your architecture cannot be. Every artifact today is an instance of that pattern.</a:t>
+            </a:r>
+          </a:p>
+        </p:txBody>
+      </p:sp>
+      <p:sp>
+        <p:nvSpPr>
+          <p:cNvPr id="4" name="Slide Number Placeholder 3"/>
+          <p:cNvSpPr>
+            <a:spLocks noGrp="1"/>
+          </p:cNvSpPr>
+          <p:nvPr>
+            <p:ph type="sldNum" idx="5" sz="quarter"/>
+          </p:nvPr>
+        </p:nvSpPr>
+        <p:spPr/>
+      </p:sp>
+    </p:spTree>
+  </p:cSld>
+  <p:clrMapOvr>
+    <a:masterClrMapping/>
+  </p:clrMapOvr>
+</p:notes>
+</file>
+
+<file path=ppt/notesSlides/notesSlide47.xml><?xml version="1.0" encoding="utf-8"?>
+<p:notes xmlns:a="http://schemas.openxmlformats.org/drawingml/2006/main" xmlns:p="http://schemas.openxmlformats.org/presentationml/2006/main" xmlns:r="http://schemas.openxmlformats.org/officeDocument/2006/relationships">
+  <p:cSld>
+    <p:spTree>
+      <p:nvGrpSpPr>
+        <p:cNvPr id="1" name=""/>
+        <p:cNvGrpSpPr/>
+        <p:nvPr/>
+      </p:nvGrpSpPr>
+      <p:grpSpPr>
+        <a:xfrm>
+          <a:off x="0" y="0"/>
+          <a:ext cx="0" cy="0"/>
+          <a:chOff x="0" y="0"/>
+          <a:chExt cx="0" cy="0"/>
+        </a:xfrm>
+      </p:grpSpPr>
+      <p:sp>
+        <p:nvSpPr>
+          <p:cNvPr id="2" name="Slide Image Placeholder 1"/>
+          <p:cNvSpPr>
+            <a:spLocks noGrp="1"/>
+          </p:cNvSpPr>
+          <p:nvPr>
+            <p:ph type="sldImg" idx="2"/>
+          </p:nvPr>
+        </p:nvSpPr>
+        <p:spPr/>
+      </p:sp>
+      <p:sp>
+        <p:nvSpPr>
+          <p:cNvPr id="3" name="Notes Placeholder 2"/>
+          <p:cNvSpPr>
+            <a:spLocks noGrp="1"/>
+          </p:cNvSpPr>
+          <p:nvPr>
+            <p:ph type="body" idx="3" sz="quarter"/>
+          </p:nvPr>
+        </p:nvSpPr>
+        <p:spPr/>
+        <p:txBody>
+          <a:bodyPr/>
+          <a:lstStyle/>
+          <a:p>
+            <a:r>
+              <a:t>If they don't ship something in 7 days, the muscle memory fades. Pick the smallest possible win and ship it. The repo carries EXAM-STUDY-PATH.md which is the post-class anchor for CCA-F prep - notebook to domain to scenario family in one table.</a:t>
+            </a:r>
+          </a:p>
+        </p:txBody>
+      </p:sp>
+      <p:sp>
+        <p:nvSpPr>
+          <p:cNvPr id="4" name="Slide Number Placeholder 3"/>
+          <p:cNvSpPr>
+            <a:spLocks noGrp="1"/>
+          </p:cNvSpPr>
+          <p:nvPr>
+            <p:ph type="sldNum" idx="5" sz="quarter"/>
+          </p:nvPr>
+        </p:nvSpPr>
+        <p:spPr/>
+      </p:sp>
+    </p:spTree>
+  </p:cSld>
+  <p:clrMapOvr>
+    <a:masterClrMapping/>
+  </p:clrMapOvr>
+</p:notes>
+</file>
+
+<file path=ppt/notesSlides/notesSlide48.xml><?xml version="1.0" encoding="utf-8"?>
+<p:notes xmlns:a="http://schemas.openxmlformats.org/drawingml/2006/main" xmlns:p="http://schemas.openxmlformats.org/presentationml/2006/main" xmlns:r="http://schemas.openxmlformats.org/officeDocument/2006/relationships">
+  <p:cSld>
+    <p:spTree>
+      <p:nvGrpSpPr>
+        <p:cNvPr id="1" name=""/>
+        <p:cNvGrpSpPr/>
+        <p:nvPr/>
+      </p:nvGrpSpPr>
+      <p:grpSpPr>
+        <a:xfrm>
+          <a:off x="0" y="0"/>
+          <a:ext cx="0" cy="0"/>
+          <a:chOff x="0" y="0"/>
+          <a:chExt cx="0" cy="0"/>
+        </a:xfrm>
+      </p:grpSpPr>
+      <p:sp>
+        <p:nvSpPr>
+          <p:cNvPr id="2" name="Slide Image Placeholder 1"/>
+          <p:cNvSpPr>
+            <a:spLocks noGrp="1"/>
+          </p:cNvSpPr>
+          <p:nvPr>
+            <p:ph type="sldImg" idx="2"/>
+          </p:nvPr>
+        </p:nvSpPr>
+        <p:spPr/>
+      </p:sp>
+      <p:sp>
+        <p:nvSpPr>
+          <p:cNvPr id="3" name="Notes Placeholder 2"/>
+          <p:cNvSpPr>
+            <a:spLocks noGrp="1"/>
+          </p:cNvSpPr>
+          <p:nvPr>
+            <p:ph type="body" idx="3" sz="quarter"/>
+          </p:nvPr>
+        </p:nvSpPr>
+        <p:spPr/>
+        <p:txBody>
+          <a:bodyPr/>
+          <a:lstStyle/>
+          <a:p>
+            <a:r>
+              <a:t>Anticipated questions to invite. Pre-answer the renewal one: Anthropic reserves the right to retire and refresh exams; certifications tied to beta products may expire when the production exam goes live. Watch the cert page.</a:t>
+            </a:r>
+          </a:p>
+        </p:txBody>
+      </p:sp>
+      <p:sp>
+        <p:nvSpPr>
+          <p:cNvPr id="4" name="Slide Number Placeholder 3"/>
+          <p:cNvSpPr>
+            <a:spLocks noGrp="1"/>
+          </p:cNvSpPr>
+          <p:nvPr>
+            <p:ph type="sldNum" idx="5" sz="quarter"/>
+          </p:nvPr>
+        </p:nvSpPr>
+        <p:spPr/>
+      </p:sp>
+    </p:spTree>
+  </p:cSld>
+  <p:clrMapOvr>
+    <a:masterClrMapping/>
+  </p:clrMapOvr>
+</p:notes>
+</file>
+
+<file path=ppt/notesSlides/notesSlide49.xml><?xml version="1.0" encoding="utf-8"?>
+<p:notes xmlns:a="http://schemas.openxmlformats.org/drawingml/2006/main" xmlns:p="http://schemas.openxmlformats.org/presentationml/2006/main" xmlns:r="http://schemas.openxmlformats.org/officeDocument/2006/relationships">
+  <p:cSld>
+    <p:spTree>
+      <p:nvGrpSpPr>
+        <p:cNvPr id="1" name=""/>
+        <p:cNvGrpSpPr/>
+        <p:nvPr/>
+      </p:nvGrpSpPr>
+      <p:grpSpPr>
+        <a:xfrm>
+          <a:off x="0" y="0"/>
+          <a:ext cx="0" cy="0"/>
+          <a:chOff x="0" y="0"/>
+          <a:chExt cx="0" cy="0"/>
+        </a:xfrm>
+      </p:grpSpPr>
+      <p:sp>
+        <p:nvSpPr>
+          <p:cNvPr id="2" name="Slide Image Placeholder 1"/>
+          <p:cNvSpPr>
+            <a:spLocks noGrp="1"/>
+          </p:cNvSpPr>
+          <p:nvPr>
+            <p:ph type="sldImg" idx="2"/>
+          </p:nvPr>
+        </p:nvSpPr>
+        <p:spPr/>
+      </p:sp>
+      <p:sp>
+        <p:nvSpPr>
+          <p:cNvPr id="3" name="Notes Placeholder 2"/>
+          <p:cNvSpPr>
+            <a:spLocks noGrp="1"/>
+          </p:cNvSpPr>
+          <p:nvPr>
+            <p:ph type="body" idx="3" sz="quarter"/>
+          </p:nvPr>
+        </p:nvSpPr>
+        <p:spPr/>
+        <p:txBody>
+          <a:bodyPr/>
+          <a:lstStyle/>
+          <a:p>
+            <a:r>
+              <a:t>Final close. The 'memento mori, ship the PR' line is the personal sign-off. Open for one last round of questions, then wrap. Recording stops after the chat clears.</a:t>
             </a:r>
           </a:p>
         </p:txBody>
@@ -3366,7 +3650,7 @@
           <a:lstStyle/>
           <a:p>
             <a:r>
-              <a:t>Domain 1: Agentic Architecture &amp; Orchestration. 50 minutes. Heaviest exam weight (27 percent of the blueprint).</a:t>
+              <a:t>Domain 1 - Agentic Architecture and Orchestration. 50 minutes. 27% of the CCA-F blueprint, the single heaviest domain. Live build: customer support agent + PreToolUse hook + coordinator-subagent demo.</a:t>
             </a:r>
           </a:p>
         </p:txBody>
@@ -3436,7 +3720,7 @@
           <a:lstStyle/>
           <a:p>
             <a:r>
-              <a:t>This is the live build. Set expectations: we WILL hit edge cases. That's the point.</a:t>
+              <a:t>This is the live build. Set expectations: we WILL hit edge cases - that's the point. The model is going to TRY to refund more than the cap. The hook is going to say no. The aha moment is watching the model re-plan and escalate correctly.</a:t>
             </a:r>
           </a:p>
         </p:txBody>
@@ -3506,7 +3790,7 @@
           <a:lstStyle/>
           <a:p>
             <a:r>
-              <a:t>The six stop_reason values: end_turn, max_tokens, stop_sequence, tool_use, pause_turn, refusal. Branch on the API field, not on what the model 'said'.</a:t>
+              <a:t>The hard rule: never parse natural language to detect completion. Always branch on the API field. Demo segment-1 prints [iter N] stop_reason= on every iteration so learners see the state transitions live. Refusal is rare; pause_turn shows up with long-running server tools like web_search.</a:t>
             </a:r>
           </a:p>
         </p:txBody>
@@ -3576,7 +3860,7 @@
           <a:lstStyle/>
           <a:p>
             <a:r>
-              <a:t>Isolation is the feature. The parent doesn't drown in subagent reasoning. Reference: chief_of_staff_agent notebook.</a:t>
+              <a:t>Isolation is the feature. The parent doesn't drown in subagent reasoning, the parent sees a clean return value. Reference cookbook: claude-cookbooks-main/claude_agent_sdk/01_The_chief_of_staff_agent.ipynb. Segment 1 demo notebook contains a stripped-down coordinator-subagent at the end.</a:t>
             </a:r>
           </a:p>
         </p:txBody>
@@ -3646,7 +3930,7 @@
           <a:lstStyle/>
           <a:p>
             <a:r>
-              <a:t>Show hooks-example.py in the demo. The $500 refund cap is the canonical example: prompt says 'don't refund over $500', hook ENFORCES it.</a:t>
+              <a:t>The prompt advises; the hook enforces. The $500 refund cap is the canonical example: prompt says 'don't exceed cap', tool description says 'cap is 500', and the hook PHYSICALLY blocks anything over. When all three layers agree, the hook never fires - but it's there for when they disagree.</a:t>
             </a:r>
           </a:p>
         </p:txBody>
@@ -43662,7 +43946,7 @@
         </p:nvSpPr>
         <p:spPr/>
         <p:txBody>
-          <a:bodyPr/>
+          <a:bodyPr wrap="square"/>
           <a:lstStyle/>
           <a:p>
             <a:r>
@@ -43671,7 +43955,7 @@
           </a:p>
           <a:p>
             <a:r>
-              <a:t>Tim Warner | techtrainertim.com</a:t>
+              <a:t>Tim Warner  |  techtrainertim.com</a:t>
             </a:r>
           </a:p>
         </p:txBody>
@@ -43696,29 +43980,47 @@
       <p:grpSpPr/>
       <p:sp>
         <p:nvSpPr>
-          <p:cNvPr id="2" name="TextBox 1"/>
-          <p:cNvSpPr txBox="1"/>
-          <p:nvPr/>
-        </p:nvSpPr>
-        <p:spPr>
-          <a:xfrm>
-            <a:off x="457200" y="2286000"/>
-            <a:ext cx="11247120" cy="2286000"/>
-          </a:xfrm>
-          <a:prstGeom prst="rect">
-            <a:avLst/>
-          </a:prstGeom>
-          <a:noFill/>
-        </p:spPr>
-        <p:txBody>
-          <a:bodyPr wrap="square">
-            <a:spAutoFit/>
-          </a:bodyPr>
+          <p:cNvPr id="2" name="Text Placeholder 1"/>
+          <p:cNvSpPr>
+            <a:spLocks noGrp="1"/>
+          </p:cNvSpPr>
+          <p:nvPr>
+            <p:ph type="body" idx="14" sz="quarter"/>
+          </p:nvPr>
+        </p:nvSpPr>
+        <p:spPr/>
+        <p:txBody>
+          <a:bodyPr wrap="square"/>
           <a:lstStyle/>
           <a:p>
             <a:r>
-              <a:rPr sz="4000" b="1"/>
-              <a:t>DEMO: Customer support agent (15 min)</a:t>
+              <a:t>Demo - customer support agent (15 min)</a:t>
+            </a:r>
+          </a:p>
+          <a:p/>
+          <a:p>
+            <a:r>
+              <a:t>Open notebooks/segment-1-customer-support-agent.ipynb</a:t>
+            </a:r>
+          </a:p>
+          <a:p>
+            <a:r>
+              <a:t>Wire 4 tools, run Scenario A ($80 refund, in-cap, agent cooperates)</a:t>
+            </a:r>
+          </a:p>
+          <a:p>
+            <a:r>
+              <a:t>Add the PreToolUse hook from hooks-example.py</a:t>
+            </a:r>
+          </a:p>
+          <a:p>
+            <a:r>
+              <a:t>Run Scenario B ($750 refund, over-cap, hook blocks, agent escalates)</a:t>
+            </a:r>
+          </a:p>
+          <a:p>
+            <a:r>
+              <a:t>Coordinator-subagent demo at the bottom of the notebook</a:t>
             </a:r>
           </a:p>
         </p:txBody>
@@ -43774,7 +44076,7 @@
         </p:nvSpPr>
         <p:spPr/>
         <p:txBody>
-          <a:bodyPr/>
+          <a:bodyPr wrap="square"/>
           <a:lstStyle/>
           <a:p>
             <a:r>
@@ -43793,12 +44095,12 @@
           </a:p>
           <a:p>
             <a:r>
-              <a:t>What's the success criterion for each?</a:t>
-            </a:r>
-          </a:p>
-          <a:p>
-            <a:r>
-              <a:t>What tools does each get? (Cap each at ~5)</a:t>
+              <a:t>What is each subagent's success criterion?</a:t>
+            </a:r>
+          </a:p>
+          <a:p>
+            <a:r>
+              <a:t>What tools does each one get? Cap each at ~5.</a:t>
             </a:r>
           </a:p>
         </p:txBody>
@@ -43823,54 +44125,56 @@
       <p:grpSpPr/>
       <p:sp>
         <p:nvSpPr>
-          <p:cNvPr id="2" name="Title 1"/>
-          <p:cNvSpPr>
-            <a:spLocks noGrp="1"/>
-          </p:cNvSpPr>
-          <p:nvPr>
-            <p:ph type="title"/>
+          <p:cNvPr id="2" name="Text Placeholder 1"/>
+          <p:cNvSpPr>
+            <a:spLocks noGrp="1"/>
+          </p:cNvSpPr>
+          <p:nvPr>
+            <p:ph type="body" idx="13" sz="quarter"/>
+          </p:nvPr>
+        </p:nvSpPr>
+        <p:spPr/>
+        <p:txBody>
+          <a:bodyPr wrap="square"/>
+          <a:lstStyle/>
+          <a:p>
+            <a:r>
+              <a:t>Segment 1 takeaways</a:t>
+            </a:r>
+          </a:p>
+          <a:p/>
+          <a:p>
+            <a:r>
+              <a:t>Branch on stop_reason, never on natural-language signals</a:t>
+            </a:r>
+          </a:p>
+          <a:p>
+            <a:r>
+              <a:t>Coordinator + isolated subagents beats one giant context</a:t>
+            </a:r>
+          </a:p>
+          <a:p>
+            <a:r>
+              <a:t>Hooks turn 'should' into 'must' - the prompt advises, the hook enforces</a:t>
+            </a:r>
+          </a:p>
+        </p:txBody>
+      </p:sp>
+      <p:sp>
+        <p:nvSpPr>
+          <p:cNvPr id="3" name="Text Placeholder 2"/>
+          <p:cNvSpPr>
+            <a:spLocks noGrp="1"/>
+          </p:cNvSpPr>
+          <p:nvPr>
+            <p:ph type="body" idx="14" sz="quarter"/>
           </p:nvPr>
         </p:nvSpPr>
         <p:spPr/>
         <p:txBody>
           <a:bodyPr/>
           <a:lstStyle/>
-          <a:p>
-            <a:r>
-              <a:t>Segment 1 takeaways</a:t>
-            </a:r>
-          </a:p>
-        </p:txBody>
-      </p:sp>
-      <p:sp>
-        <p:nvSpPr>
-          <p:cNvPr id="3" name="Content Placeholder 2"/>
-          <p:cNvSpPr>
-            <a:spLocks noGrp="1"/>
-          </p:cNvSpPr>
-          <p:nvPr>
-            <p:ph idx="1"/>
-          </p:nvPr>
-        </p:nvSpPr>
-        <p:spPr/>
-        <p:txBody>
-          <a:bodyPr/>
-          <a:lstStyle/>
-          <a:p>
-            <a:r>
-              <a:t>Branch on stop_reason, not on natural-language signals</a:t>
-            </a:r>
-          </a:p>
-          <a:p>
-            <a:r>
-              <a:t>Coordinator + isolated subagents beats one giant context</a:t>
-            </a:r>
-          </a:p>
-          <a:p>
-            <a:r>
-              <a:t>Hooks turn 'should' into 'must'</a:t>
-            </a:r>
-          </a:p>
+          <a:p/>
         </p:txBody>
       </p:sp>
     </p:spTree>
@@ -43907,7 +44211,7 @@
           <a:lstStyle/>
           <a:p>
             <a:r>
-              <a:t>SEGMENT 02</a:t>
+              <a:t>Segment 2: Tool Design, Integration, Claude Code</a:t>
             </a:r>
           </a:p>
         </p:txBody>
@@ -43963,23 +44267,24 @@
         </p:nvSpPr>
         <p:spPr/>
         <p:txBody>
-          <a:bodyPr/>
+          <a:bodyPr wrap="square"/>
           <a:lstStyle/>
           <a:p>
             <a:r>
-              <a:t>Domain 2 - Tool Design &amp; MCP Integration (18% of blueprint)</a:t>
-            </a:r>
-          </a:p>
-          <a:p>
-            <a:r>
-              <a:t>Domain 3 - Claude Code Configuration &amp; Workflows (20%)</a:t>
-            </a:r>
-          </a:p>
-          <a:p>
-            <a:r>
-              <a:t>Combined = 38%, the biggest chunk of the cert</a:t>
-            </a:r>
-          </a:p>
+              <a:t>Domain 2 - Tool Design and MCP Integration (18%)</a:t>
+            </a:r>
+          </a:p>
+          <a:p>
+            <a:r>
+              <a:t>Domain 3 - Claude Code Configuration and Workflows (20%)</a:t>
+            </a:r>
+          </a:p>
+          <a:p>
+            <a:r>
+              <a:t>Combined = 38% of the cert, the biggest single chunk</a:t>
+            </a:r>
+          </a:p>
+          <a:p/>
           <a:p>
             <a:r>
               <a:t>Why combined? Claude Code IS the primary MCP-consuming surface</a:t>
@@ -43987,7 +44292,7 @@
           </a:p>
           <a:p>
             <a:r>
-              <a:t>You can't teach one without the other in production</a:t>
+              <a:t>You cannot teach one without the other in production</a:t>
             </a:r>
           </a:p>
         </p:txBody>
@@ -44026,7 +44331,7 @@
           <a:lstStyle/>
           <a:p>
             <a:r>
-              <a:t>Tool definitions: name + description + input_schema</a:t>
+              <a:t>Tool definitions - name + description + input_schema</a:t>
             </a:r>
           </a:p>
         </p:txBody>
@@ -44043,16 +44348,16 @@
         </p:nvSpPr>
         <p:spPr/>
         <p:txBody>
-          <a:bodyPr/>
+          <a:bodyPr wrap="square"/>
           <a:lstStyle/>
           <a:p>
             <a:r>
-              <a:t>name        - how the model invokes it</a:t>
-            </a:r>
-          </a:p>
-          <a:p>
-            <a:r>
-              <a:t>description - STRONGLY recommended, drives selection</a:t>
+              <a:t>name        - how the model invokes the tool</a:t>
+            </a:r>
+          </a:p>
+          <a:p>
+            <a:r>
+              <a:t>description - STRONGLY recommended, drives tool selection</a:t>
             </a:r>
           </a:p>
           <a:p>
@@ -44062,13 +44367,13 @@
           </a:p>
           <a:p>
             <a:r>
-              <a:t>Optional: cache_control ephemeral (5m or 1h), strict: true</a:t>
+              <a:t>Optional: cache_control ephemeral (5m / 1h), strict: true</a:t>
             </a:r>
           </a:p>
           <a:p/>
           <a:p>
             <a:r>
-              <a:t>Tool DESCRIPTIONS do the work, not tool NAMES.</a:t>
+              <a:t>Tool DESCRIPTIONS do the work, not tool NAMES</a:t>
             </a:r>
           </a:p>
         </p:txBody>
@@ -44124,7 +44429,7 @@
         </p:nvSpPr>
         <p:spPr/>
         <p:txBody>
-          <a:bodyPr/>
+          <a:bodyPr wrap="square"/>
           <a:lstStyle/>
           <a:p>
             <a:r>
@@ -44138,7 +44443,7 @@
           </a:p>
           <a:p>
             <a:r>
-              <a:t>Pattern: return tool_result content with is_error: true</a:t>
+              <a:t>Pattern: return tool_result with is_error: true</a:t>
             </a:r>
           </a:p>
           <a:p>
@@ -44146,9 +44451,10 @@
               <a:t>Add structured fields: errorCategory, isRetryable</a:t>
             </a:r>
           </a:p>
-          <a:p>
-            <a:r>
-              <a:t>Model can then decide: retry, fall back, or escalate</a:t>
+          <a:p/>
+          <a:p>
+            <a:r>
+              <a:t>The model can then DECIDE: retry, fall back, or escalate</a:t>
             </a:r>
           </a:p>
         </p:txBody>
@@ -44194,44 +44500,109 @@
       </p:sp>
       <p:sp>
         <p:nvSpPr>
-          <p:cNvPr id="3" name="Content Placeholder 2"/>
-          <p:cNvSpPr>
-            <a:spLocks noGrp="1"/>
-          </p:cNvSpPr>
-          <p:nvPr>
-            <p:ph idx="1"/>
+          <p:cNvPr id="3" name="Text Placeholder 2"/>
+          <p:cNvSpPr>
+            <a:spLocks noGrp="1"/>
+          </p:cNvSpPr>
+          <p:nvPr>
+            <p:ph type="body" idx="10" sz="quarter"/>
+          </p:nvPr>
+        </p:nvSpPr>
+        <p:spPr/>
+        <p:txBody>
+          <a:bodyPr wrap="square"/>
+          <a:lstStyle/>
+          <a:p>
+            <a:r>
+              <a:t>auto</a:t>
+            </a:r>
+          </a:p>
+          <a:p>
+            <a:r>
+              <a:t>Model decides whether to call a tool. Default. May answer in prose. Pick when the model's judgment is the right call.</a:t>
+            </a:r>
+          </a:p>
+          <a:p>
+            <a:r>
+              <a:t>any</a:t>
+            </a:r>
+          </a:p>
+          <a:p>
+            <a:r>
+              <a:t>Model MUST call some tool, model picks which. Use when action is required.</a:t>
+            </a:r>
+          </a:p>
+          <a:p>
+            <a:r>
+              <a:t>tool</a:t>
+            </a:r>
+          </a:p>
+          <a:p>
+            <a:r>
+              <a:t>Model MUST call THIS specific tool. The structured-output cheat code. {type: tool, name: extract_X}.</a:t>
+            </a:r>
+          </a:p>
+          <a:p>
+            <a:r>
+              <a:t>none</a:t>
+            </a:r>
+          </a:p>
+          <a:p>
+            <a:r>
+              <a:t>Tools registered but model CANNOT call them. 'Explain, don't act' turns.</a:t>
+            </a:r>
+          </a:p>
+        </p:txBody>
+      </p:sp>
+      <p:sp>
+        <p:nvSpPr>
+          <p:cNvPr id="4" name="Text Placeholder 3"/>
+          <p:cNvSpPr>
+            <a:spLocks noGrp="1"/>
+          </p:cNvSpPr>
+          <p:nvPr>
+            <p:ph type="body" idx="15" sz="quarter"/>
           </p:nvPr>
         </p:nvSpPr>
         <p:spPr/>
         <p:txBody>
           <a:bodyPr/>
           <a:lstStyle/>
-          <a:p>
-            <a:r>
-              <a:t>auto - model decides (default)</a:t>
-            </a:r>
-          </a:p>
-          <a:p>
-            <a:r>
-              <a:t>any  - must call SOME tool</a:t>
-            </a:r>
-          </a:p>
-          <a:p>
-            <a:r>
-              <a:t>tool - must call THIS specific tool (force the schema)</a:t>
-            </a:r>
-          </a:p>
-          <a:p>
-            <a:r>
-              <a:t>none - no tools allowed</a:t>
-            </a:r>
-          </a:p>
           <a:p/>
-          <a:p>
-            <a:r>
-              <a:t>Force structured output: tool_choice {type: tool, name: extract_X}</a:t>
-            </a:r>
-          </a:p>
+        </p:txBody>
+      </p:sp>
+      <p:sp>
+        <p:nvSpPr>
+          <p:cNvPr id="5" name="Text Placeholder 4"/>
+          <p:cNvSpPr>
+            <a:spLocks noGrp="1"/>
+          </p:cNvSpPr>
+          <p:nvPr>
+            <p:ph type="body" idx="16" sz="quarter"/>
+          </p:nvPr>
+        </p:nvSpPr>
+        <p:spPr/>
+        <p:txBody>
+          <a:bodyPr/>
+          <a:lstStyle/>
+          <a:p/>
+        </p:txBody>
+      </p:sp>
+      <p:sp>
+        <p:nvSpPr>
+          <p:cNvPr id="6" name="Text Placeholder 5"/>
+          <p:cNvSpPr>
+            <a:spLocks noGrp="1"/>
+          </p:cNvSpPr>
+          <p:nvPr>
+            <p:ph type="body" idx="17" sz="quarter"/>
+          </p:nvPr>
+        </p:nvSpPr>
+        <p:spPr/>
+        <p:txBody>
+          <a:bodyPr/>
+          <a:lstStyle/>
+          <a:p/>
         </p:txBody>
       </p:sp>
     </p:spTree>
@@ -44285,11 +44656,11 @@
         </p:nvSpPr>
         <p:spPr/>
         <p:txBody>
-          <a:bodyPr/>
+          <a:bodyPr wrap="square"/>
           <a:lstStyle/>
           <a:p>
             <a:r>
-              <a:t>More tools = worse selection accuracy</a:t>
+              <a:t>More tools = worse selection accuracy (well-documented effect)</a:t>
             </a:r>
           </a:p>
           <a:p>
@@ -44302,6 +44673,7 @@
               <a:t>Specificity in descriptions beats quantity of tools</a:t>
             </a:r>
           </a:p>
+          <a:p/>
           <a:p>
             <a:r>
               <a:t>Anti-pattern: dump 30 tools into one agent because 'flexibility'</a:t>
@@ -44343,7 +44715,7 @@
           <a:lstStyle/>
           <a:p>
             <a:r>
-              <a:t>MCP server config (.mcp.json)</a:t>
+              <a:t>MCP server config - .mcp.json</a:t>
             </a:r>
           </a:p>
         </p:txBody>
@@ -44360,7 +44732,7 @@
         </p:nvSpPr>
         <p:spPr/>
         <p:txBody>
-          <a:bodyPr/>
+          <a:bodyPr wrap="square"/>
           <a:lstStyle/>
           <a:p>
             <a:r>
@@ -44382,9 +44754,10 @@
               <a:t>${ENV_VAR} expansion works in env, args, AND headers</a:t>
             </a:r>
           </a:p>
-          <a:p>
-            <a:r>
-              <a:t>Project: ./.mcp.json    User: ~/.claude.json</a:t>
+          <a:p/>
+          <a:p>
+            <a:r>
+              <a:t>Project scope: ./.mcp.json    User scope: ~/.claude.json</a:t>
             </a:r>
           </a:p>
         </p:txBody>
@@ -44440,7 +44813,7 @@
         </p:nvSpPr>
         <p:spPr/>
         <p:txBody>
-          <a:bodyPr/>
+          <a:bodyPr wrap="square"/>
           <a:lstStyle/>
           <a:p>
             <a:r>
@@ -44449,7 +44822,7 @@
           </a:p>
           <a:p>
             <a:r>
-              <a:t>Pluralsight Principal Author, 200+ courses, 1M+ learners</a:t>
+              <a:t>Pluralsight Principal Author - 200+ courses, 1M+ learners</a:t>
             </a:r>
           </a:p>
           <a:p>
@@ -44467,6 +44840,7 @@
               <a:t>28+ years on the Microsoft stack</a:t>
             </a:r>
           </a:p>
+          <a:p/>
           <a:p>
             <a:r>
               <a:t>techtrainertim.com  |  github.com/timothywarner-org</a:t>
@@ -44494,29 +44868,42 @@
       <p:grpSpPr/>
       <p:sp>
         <p:nvSpPr>
-          <p:cNvPr id="2" name="TextBox 1"/>
-          <p:cNvSpPr txBox="1"/>
-          <p:nvPr/>
-        </p:nvSpPr>
-        <p:spPr>
-          <a:xfrm>
-            <a:off x="457200" y="2286000"/>
-            <a:ext cx="11247120" cy="2286000"/>
-          </a:xfrm>
-          <a:prstGeom prst="rect">
-            <a:avLst/>
-          </a:prstGeom>
-          <a:noFill/>
-        </p:spPr>
-        <p:txBody>
-          <a:bodyPr wrap="square">
-            <a:spAutoFit/>
-          </a:bodyPr>
+          <p:cNvPr id="2" name="Text Placeholder 1"/>
+          <p:cNvSpPr>
+            <a:spLocks noGrp="1"/>
+          </p:cNvSpPr>
+          <p:nvPr>
+            <p:ph type="body" idx="14" sz="quarter"/>
+          </p:nvPr>
+        </p:nvSpPr>
+        <p:spPr/>
+        <p:txBody>
+          <a:bodyPr wrap="square"/>
           <a:lstStyle/>
           <a:p>
             <a:r>
-              <a:rPr sz="4000" b="1"/>
-              <a:t>DEMO A: MCP config walkthrough (10 min)</a:t>
+              <a:t>Demo A - MCP config walkthrough (10 min)</a:t>
+            </a:r>
+          </a:p>
+          <a:p/>
+          <a:p>
+            <a:r>
+              <a:t>Open C:/github/claude-architect/.mcp.json in VS Code</a:t>
+            </a:r>
+          </a:p>
+          <a:p>
+            <a:r>
+              <a:t>Walk server-by-server: filesystem (stdio), github (stdio + ${GITHUB_TOKEN})</a:t>
+            </a:r>
+          </a:p>
+          <a:p>
+            <a:r>
+              <a:t>Show context7 (HTTP + header), internal-knowledge-base (SSE + bearer)</a:t>
+            </a:r>
+          </a:p>
+          <a:p>
+            <a:r>
+              <a:t>Show what happens when GITHUB_TOKEN is unset</a:t>
             </a:r>
           </a:p>
         </p:txBody>
@@ -44572,26 +44959,26 @@
         </p:nvSpPr>
         <p:spPr/>
         <p:txBody>
-          <a:bodyPr/>
+          <a:bodyPr wrap="square"/>
           <a:lstStyle/>
           <a:p>
             <a:r>
-              <a:t>User    ~/.claude/CLAUDE.md           - your machine, every project</a:t>
-            </a:r>
-          </a:p>
-          <a:p>
-            <a:r>
-              <a:t>Project ./CLAUDE.md                   - team conventions, in git</a:t>
-            </a:r>
-          </a:p>
-          <a:p>
-            <a:r>
-              <a:t>Subtree ./&lt;subdir&gt;/CLAUDE.md         - on-demand when files in subdir are read</a:t>
-            </a:r>
-          </a:p>
-          <a:p>
-            <a:r>
-              <a:t>Local   ./CLAUDE.local.md             - gitignored personal override</a:t>
+              <a:t>User     ~/.claude/CLAUDE.md     - your machine, every project</a:t>
+            </a:r>
+          </a:p>
+          <a:p>
+            <a:r>
+              <a:t>Project  ./CLAUDE.md             - team conventions, in git</a:t>
+            </a:r>
+          </a:p>
+          <a:p>
+            <a:r>
+              <a:t>Subtree  ./&lt;subdir&gt;/CLAUDE.md    - loads on demand when files in subdir are read</a:t>
+            </a:r>
+          </a:p>
+          <a:p>
+            <a:r>
+              <a:t>Local    ./CLAUDE.local.md       - gitignored personal override</a:t>
             </a:r>
           </a:p>
           <a:p/>
@@ -44653,32 +45040,32 @@
         </p:nvSpPr>
         <p:spPr/>
         <p:txBody>
-          <a:bodyPr/>
+          <a:bodyPr wrap="square"/>
           <a:lstStyle/>
           <a:p>
             <a:r>
-              <a:t>Plan mode    - interactive, proposes plan, waits for approval. Default.</a:t>
-            </a:r>
-          </a:p>
-          <a:p>
-            <a:r>
-              <a:t>Headless     - claude -p 'prompt', non-interactive, pipe-friendly</a:t>
-            </a:r>
-          </a:p>
-          <a:p>
-            <a:r>
-              <a:t>             - --output-format json|stream-json for parsing</a:t>
-            </a:r>
-          </a:p>
-          <a:p>
-            <a:r>
-              <a:t>             - --allowedTools 'Read,Edit,Bash' to scope</a:t>
+              <a:t>Plan mode   - interactive, proposes plan, waits for approval (default)</a:t>
+            </a:r>
+          </a:p>
+          <a:p>
+            <a:r>
+              <a:t>Headless    - claude -p 'prompt' - non-interactive, pipe-friendly</a:t>
+            </a:r>
+          </a:p>
+          <a:p>
+            <a:r>
+              <a:t>            - --output-format json|stream-json for parsing</a:t>
+            </a:r>
+          </a:p>
+          <a:p>
+            <a:r>
+              <a:t>            - --allowed-tools 'Read,Edit,Bash' to scope</a:t>
             </a:r>
           </a:p>
           <a:p/>
           <a:p>
             <a:r>
-              <a:t>Headless = THE CI/CD answer. Pre-commit hooks. PR review. Release notes.</a:t>
+              <a:t>Headless is THE CI/CD answer - pre-commit hooks, PR review, release notes</a:t>
             </a:r>
           </a:p>
         </p:txBody>
@@ -44703,29 +45090,42 @@
       <p:grpSpPr/>
       <p:sp>
         <p:nvSpPr>
-          <p:cNvPr id="2" name="TextBox 1"/>
-          <p:cNvSpPr txBox="1"/>
-          <p:nvPr/>
-        </p:nvSpPr>
-        <p:spPr>
-          <a:xfrm>
-            <a:off x="457200" y="2286000"/>
-            <a:ext cx="11247120" cy="2286000"/>
-          </a:xfrm>
-          <a:prstGeom prst="rect">
-            <a:avLst/>
-          </a:prstGeom>
-          <a:noFill/>
-        </p:spPr>
-        <p:txBody>
-          <a:bodyPr wrap="square">
-            <a:spAutoFit/>
-          </a:bodyPr>
+          <p:cNvPr id="2" name="Text Placeholder 1"/>
+          <p:cNvSpPr>
+            <a:spLocks noGrp="1"/>
+          </p:cNvSpPr>
+          <p:nvPr>
+            <p:ph type="body" idx="14" sz="quarter"/>
+          </p:nvPr>
+        </p:nvSpPr>
+        <p:spPr/>
+        <p:txBody>
+          <a:bodyPr wrap="square"/>
           <a:lstStyle/>
           <a:p>
             <a:r>
-              <a:rPr sz="4000" b="1"/>
-              <a:t>DEMO B: CLAUDE.md hierarchy + claude -p (5 min)</a:t>
+              <a:t>Demo B - CLAUDE.md hierarchy + claude -p (5 min)</a:t>
+            </a:r>
+          </a:p>
+          <a:p/>
+          <a:p>
+            <a:r>
+              <a:t>Open this repo's own CLAUDE.md - walk the structure</a:t>
+            </a:r>
+          </a:p>
+          <a:p>
+            <a:r>
+              <a:t>Run: claude -p 'audit this CLAUDE.md against the documented conventions'</a:t>
+            </a:r>
+          </a:p>
+          <a:p>
+            <a:r>
+              <a:t>Show the headless output</a:t>
+            </a:r>
+          </a:p>
+          <a:p>
+            <a:r>
+              <a:t>Pipe a git log into it - get a release-notes draft in seconds</a:t>
             </a:r>
           </a:p>
         </p:txBody>
@@ -44781,7 +45181,7 @@
         </p:nvSpPr>
         <p:spPr/>
         <p:txBody>
-          <a:bodyPr/>
+          <a:bodyPr wrap="square"/>
           <a:lstStyle/>
           <a:p>
             <a:r>
@@ -44830,54 +45230,56 @@
       <p:grpSpPr/>
       <p:sp>
         <p:nvSpPr>
-          <p:cNvPr id="2" name="Title 1"/>
-          <p:cNvSpPr>
-            <a:spLocks noGrp="1"/>
-          </p:cNvSpPr>
-          <p:nvPr>
-            <p:ph type="title"/>
+          <p:cNvPr id="2" name="Text Placeholder 1"/>
+          <p:cNvSpPr>
+            <a:spLocks noGrp="1"/>
+          </p:cNvSpPr>
+          <p:nvPr>
+            <p:ph type="body" idx="13" sz="quarter"/>
+          </p:nvPr>
+        </p:nvSpPr>
+        <p:spPr/>
+        <p:txBody>
+          <a:bodyPr wrap="square"/>
+          <a:lstStyle/>
+          <a:p>
+            <a:r>
+              <a:t>Segment 2 takeaways</a:t>
+            </a:r>
+          </a:p>
+          <a:p/>
+          <a:p>
+            <a:r>
+              <a:t>Descriptions, not names, drive tool selection</a:t>
+            </a:r>
+          </a:p>
+          <a:p>
+            <a:r>
+              <a:t>.mcp.json - three transports, ${ENV} expansion, secrets in env never in file</a:t>
+            </a:r>
+          </a:p>
+          <a:p>
+            <a:r>
+              <a:t>CLAUDE.md hierarchy is additive; claude -p is your CI/CD primitive</a:t>
+            </a:r>
+          </a:p>
+        </p:txBody>
+      </p:sp>
+      <p:sp>
+        <p:nvSpPr>
+          <p:cNvPr id="3" name="Text Placeholder 2"/>
+          <p:cNvSpPr>
+            <a:spLocks noGrp="1"/>
+          </p:cNvSpPr>
+          <p:nvPr>
+            <p:ph type="body" idx="14" sz="quarter"/>
           </p:nvPr>
         </p:nvSpPr>
         <p:spPr/>
         <p:txBody>
           <a:bodyPr/>
           <a:lstStyle/>
-          <a:p>
-            <a:r>
-              <a:t>Segment 2 takeaways</a:t>
-            </a:r>
-          </a:p>
-        </p:txBody>
-      </p:sp>
-      <p:sp>
-        <p:nvSpPr>
-          <p:cNvPr id="3" name="Content Placeholder 2"/>
-          <p:cNvSpPr>
-            <a:spLocks noGrp="1"/>
-          </p:cNvSpPr>
-          <p:nvPr>
-            <p:ph idx="1"/>
-          </p:nvPr>
-        </p:nvSpPr>
-        <p:spPr/>
-        <p:txBody>
-          <a:bodyPr/>
-          <a:lstStyle/>
-          <a:p>
-            <a:r>
-              <a:t>Descriptions, not names, drive tool selection</a:t>
-            </a:r>
-          </a:p>
-          <a:p>
-            <a:r>
-              <a:t>.mcp.json: three transports, ${ENV} expansion, secrets in env never in file</a:t>
-            </a:r>
-          </a:p>
-          <a:p>
-            <a:r>
-              <a:t>CLAUDE.md hierarchy is additive; claude -p is your CI/CD primitive</a:t>
-            </a:r>
-          </a:p>
+          <a:p/>
         </p:txBody>
       </p:sp>
     </p:spTree>
@@ -44900,21 +45302,53 @@
       <p:grpSpPr/>
       <p:sp>
         <p:nvSpPr>
-          <p:cNvPr id="2" name="Title 1"/>
-          <p:cNvSpPr>
-            <a:spLocks noGrp="1"/>
-          </p:cNvSpPr>
-          <p:nvPr>
-            <p:ph type="title"/>
+          <p:cNvPr id="2" name="Text Placeholder 1"/>
+          <p:cNvSpPr>
+            <a:spLocks noGrp="1"/>
+          </p:cNvSpPr>
+          <p:nvPr>
+            <p:ph type="body" idx="10" sz="quarter"/>
           </p:nvPr>
         </p:nvSpPr>
         <p:spPr/>
         <p:txBody>
-          <a:bodyPr/>
+          <a:bodyPr wrap="square"/>
           <a:lstStyle/>
           <a:p>
             <a:r>
-              <a:t>SEGMENT 03</a:t>
+              <a:t>notebooks/segment-2-5-control-surfaces.ipynb</a:t>
+            </a:r>
+          </a:p>
+          <a:p/>
+          <a:p>
+            <a:r>
+              <a:t>Three tiers tools come from - server tools, MCP, Claude Code harness</a:t>
+            </a:r>
+          </a:p>
+          <a:p>
+            <a:r>
+              <a:t>All four tool_choice modes + disable_parallel_tool_use</a:t>
+            </a:r>
+          </a:p>
+          <a:p>
+            <a:r>
+              <a:t>stop_sequences + max_tokens as control levers + pause_turn + refusal</a:t>
+            </a:r>
+          </a:p>
+          <a:p>
+            <a:r>
+              <a:t>MCP list_tools runtime discovery</a:t>
+            </a:r>
+          </a:p>
+          <a:p>
+            <a:r>
+              <a:t>The live Claude Console asset surface - memory_stores, vaults, agents, sessions</a:t>
+            </a:r>
+          </a:p>
+          <a:p/>
+          <a:p>
+            <a:r>
+              <a:t>Highest exam-objective density in the repo. Walk it for CCA-F prep.</a:t>
             </a:r>
           </a:p>
         </p:txBody>
@@ -44953,48 +45387,7 @@
           <a:lstStyle/>
           <a:p>
             <a:r>
-              <a:t>What you'll build</a:t>
-            </a:r>
-          </a:p>
-        </p:txBody>
-      </p:sp>
-      <p:sp>
-        <p:nvSpPr>
-          <p:cNvPr id="3" name="Content Placeholder 2"/>
-          <p:cNvSpPr>
-            <a:spLocks noGrp="1"/>
-          </p:cNvSpPr>
-          <p:nvPr>
-            <p:ph idx="1"/>
-          </p:nvPr>
-        </p:nvSpPr>
-        <p:spPr/>
-        <p:txBody>
-          <a:bodyPr/>
-          <a:lstStyle/>
-          <a:p>
-            <a:r>
-              <a:t>An invoice extractor with Pydantic schema</a:t>
-            </a:r>
-          </a:p>
-          <a:p>
-            <a:r>
-              <a:t>tool_choice forces the model to return validated JSON</a:t>
-            </a:r>
-          </a:p>
-          <a:p>
-            <a:r>
-              <a:t>Validation-retry loop handles malformed output</a:t>
-            </a:r>
-          </a:p>
-          <a:p>
-            <a:r>
-              <a:t>3 invoices: clean, missing field, ambiguous line item</a:t>
-            </a:r>
-          </a:p>
-          <a:p>
-            <a:r>
-              <a:t>By end of segment: you can extract structured data from anything</a:t>
+              <a:t>Segment 3: Structured Output and Reliability</a:t>
             </a:r>
           </a:p>
         </p:txBody>
@@ -45033,7 +45426,7 @@
           <a:lstStyle/>
           <a:p>
             <a:r>
-              <a:t>Precise prompts &gt; vague prompts</a:t>
+              <a:t>Two domains, one segment (again)</a:t>
             </a:r>
           </a:p>
         </p:txBody>
@@ -45050,31 +45443,32 @@
         </p:nvSpPr>
         <p:spPr/>
         <p:txBody>
-          <a:bodyPr/>
+          <a:bodyPr wrap="square"/>
           <a:lstStyle/>
           <a:p>
             <a:r>
-              <a:t>Be specific: format, edge cases, missing-data handling</a:t>
-            </a:r>
-          </a:p>
-          <a:p>
-            <a:r>
-              <a:t>Plausible hallucinations: model invents values for nullable fields</a:t>
-            </a:r>
-          </a:p>
-          <a:p>
-            <a:r>
-              <a:t>Fix: explicit 'return null if not directly stated' instruction</a:t>
-            </a:r>
-          </a:p>
-          <a:p>
-            <a:r>
-              <a:t>Inconsistent formats: 'cotton blend' vs 'Cotton/Polyester mix'</a:t>
-            </a:r>
-          </a:p>
-          <a:p>
-            <a:r>
-              <a:t>Fix: 2-3 few-shot examples, not lower temperature</a:t>
+              <a:t>Domain 4 - Prompt Engineering and Structured Output (20%)</a:t>
+            </a:r>
+          </a:p>
+          <a:p>
+            <a:r>
+              <a:t>Domain 5 - Context Management and Reliability (15%)</a:t>
+            </a:r>
+          </a:p>
+          <a:p>
+            <a:r>
+              <a:t>Combined = 35% of the cert</a:t>
+            </a:r>
+          </a:p>
+          <a:p/>
+          <a:p>
+            <a:r>
+              <a:t>Why combined? Structured extraction without context discipline is fragile</a:t>
+            </a:r>
+          </a:p>
+          <a:p>
+            <a:r>
+              <a:t>Long sessions need context pinning; structured output needs validation retry</a:t>
             </a:r>
           </a:p>
         </p:txBody>
@@ -45113,7 +45507,7 @@
           <a:lstStyle/>
           <a:p>
             <a:r>
-              <a:t>JSON schema via tool use</a:t>
+              <a:t>What you'll build</a:t>
             </a:r>
           </a:p>
         </p:txBody>
@@ -45130,37 +45524,32 @@
         </p:nvSpPr>
         <p:spPr/>
         <p:txBody>
-          <a:bodyPr/>
+          <a:bodyPr wrap="square"/>
           <a:lstStyle/>
           <a:p>
             <a:r>
-              <a:t>1. Define a Pydantic model with your fields</a:t>
-            </a:r>
-          </a:p>
-          <a:p>
-            <a:r>
-              <a:t>2. Convert to JSON Schema (model.model_json_schema())</a:t>
-            </a:r>
-          </a:p>
-          <a:p>
-            <a:r>
-              <a:t>3. Register as a tool's input_schema</a:t>
-            </a:r>
-          </a:p>
-          <a:p>
-            <a:r>
-              <a:t>4. Set tool_choice {type: tool, name: &lt;your_schema&gt;}</a:t>
-            </a:r>
-          </a:p>
-          <a:p>
-            <a:r>
-              <a:t>5. Model's tool_use input is now guaranteed to match the schema</a:t>
+              <a:t>An invoice extractor with a Pydantic schema</a:t>
+            </a:r>
+          </a:p>
+          <a:p>
+            <a:r>
+              <a:t>tool_choice {type: tool, name: extract_invoice} forces valid JSON</a:t>
+            </a:r>
+          </a:p>
+          <a:p>
+            <a:r>
+              <a:t>Validation-retry loop handles malformed output (max_retries=1)</a:t>
+            </a:r>
+          </a:p>
+          <a:p>
+            <a:r>
+              <a:t>Three invoices: clean, missing field, ambiguous line item</a:t>
             </a:r>
           </a:p>
           <a:p/>
           <a:p>
             <a:r>
-              <a:t>Optional: strict: true on the tool for guaranteed validation</a:t>
+              <a:t>By the end of the segment: you can extract typed data from anything</a:t>
             </a:r>
           </a:p>
         </p:txBody>
@@ -45199,7 +45588,7 @@
           <a:lstStyle/>
           <a:p>
             <a:r>
-              <a:t>Course Flow (4 Segments x 50 min)</a:t>
+              <a:t>Course flow - 4 segments x 50 min</a:t>
             </a:r>
           </a:p>
         </p:txBody>
@@ -45216,7 +45605,7 @@
         </p:nvSpPr>
         <p:spPr/>
         <p:txBody>
-          <a:bodyPr/>
+          <a:bodyPr wrap="square"/>
           <a:lstStyle/>
           <a:p>
             <a:r>
@@ -45230,12 +45619,18 @@
           </a:p>
           <a:p>
             <a:r>
-              <a:t>Segment 3 - Prompt Engineering and Structured Output</a:t>
-            </a:r>
-          </a:p>
-          <a:p>
-            <a:r>
-              <a:t>Segment 4 - Context Management, Reliability, and Production Strategy</a:t>
+              <a:t>Segment 3 - Structured Output, Context, and Production Reliability</a:t>
+            </a:r>
+          </a:p>
+          <a:p>
+            <a:r>
+              <a:t>Segment 4 - CCA-F Certification Capstone</a:t>
+            </a:r>
+          </a:p>
+          <a:p/>
+          <a:p>
+            <a:r>
+              <a:t>Plus self-study: Segment 2.5 - Control Surfaces and the Console Asset Surface</a:t>
             </a:r>
           </a:p>
           <a:p/>
@@ -45280,7 +45675,7 @@
           <a:lstStyle/>
           <a:p>
             <a:r>
-              <a:t>Validation + retry loops</a:t>
+              <a:t>Precise prompts beat vague prompts</a:t>
             </a:r>
           </a:p>
         </p:txBody>
@@ -45297,36 +45692,31 @@
         </p:nvSpPr>
         <p:spPr/>
         <p:txBody>
-          <a:bodyPr/>
+          <a:bodyPr wrap="square"/>
           <a:lstStyle/>
           <a:p>
             <a:r>
-              <a:t>Effective: format errors, JSON parse failures, schema mismatches</a:t>
-            </a:r>
-          </a:p>
-          <a:p>
-            <a:r>
-              <a:t>    -&gt; append the error string as a user turn, retry</a:t>
-            </a:r>
-          </a:p>
-          <a:p>
-            <a:r>
-              <a:t>    -&gt; succeeds in 2-3 attempts</a:t>
-            </a:r>
-          </a:p>
-          <a:p>
-            <a:r>
-              <a:t>Ineffective: knowledge gaps, ambiguous source data</a:t>
-            </a:r>
-          </a:p>
-          <a:p>
-            <a:r>
-              <a:t>    -&gt; retries DO NOT help</a:t>
-            </a:r>
-          </a:p>
-          <a:p>
-            <a:r>
-              <a:t>    -&gt; cap at 2-3, then escalate to human review</a:t>
+              <a:t>Be specific: format, edge cases, missing-data handling</a:t>
+            </a:r>
+          </a:p>
+          <a:p>
+            <a:r>
+              <a:t>Plausible hallucinations: model invents values for nullable fields</a:t>
+            </a:r>
+          </a:p>
+          <a:p>
+            <a:r>
+              <a:t>Fix: explicit 'return null if not directly stated' instruction</a:t>
+            </a:r>
+          </a:p>
+          <a:p>
+            <a:r>
+              <a:t>Inconsistent formats: 'cotton blend' vs 'Cotton/Polyester mix'</a:t>
+            </a:r>
+          </a:p>
+          <a:p>
+            <a:r>
+              <a:t>Fix: 2-3 few-shot examples, NOT lower temperature</a:t>
             </a:r>
           </a:p>
         </p:txBody>
@@ -45365,7 +45755,7 @@
           <a:lstStyle/>
           <a:p>
             <a:r>
-              <a:t>Confidence-based routing</a:t>
+              <a:t>JSON schema via tool use - the cheat code</a:t>
             </a:r>
           </a:p>
         </p:txBody>
@@ -45382,26 +45772,31 @@
         </p:nvSpPr>
         <p:spPr/>
         <p:txBody>
-          <a:bodyPr/>
+          <a:bodyPr wrap="square"/>
           <a:lstStyle/>
           <a:p>
             <a:r>
-              <a:t>Have the model output field-level confidence: high | medium | low</a:t>
-            </a:r>
-          </a:p>
-          <a:p>
-            <a:r>
-              <a:t>Route: high -&gt; automated, medium -&gt; spot-check, low -&gt; human</a:t>
-            </a:r>
-          </a:p>
-          <a:p>
-            <a:r>
-              <a:t>CRITICAL: validate accuracy by document type AND field</a:t>
-            </a:r>
-          </a:p>
-          <a:p>
-            <a:r>
-              <a:t>Aggregate 95% accuracy can mask 60% accuracy on specific segments</a:t>
+              <a:t>1. Define a Pydantic model with your fields</a:t>
+            </a:r>
+          </a:p>
+          <a:p>
+            <a:r>
+              <a:t>2. Convert to JSON Schema (model.model_json_schema())</a:t>
+            </a:r>
+          </a:p>
+          <a:p>
+            <a:r>
+              <a:t>3. Register as a tool's input_schema</a:t>
+            </a:r>
+          </a:p>
+          <a:p>
+            <a:r>
+              <a:t>4. Set tool_choice {type: tool, name: &lt;your_schema&gt;}</a:t>
+            </a:r>
+          </a:p>
+          <a:p>
+            <a:r>
+              <a:t>5. block.input is now a typed dict matching the schema</a:t>
             </a:r>
           </a:p>
         </p:txBody>
@@ -45426,29 +45821,68 @@
       <p:grpSpPr/>
       <p:sp>
         <p:nvSpPr>
-          <p:cNvPr id="2" name="TextBox 1"/>
-          <p:cNvSpPr txBox="1"/>
-          <p:nvPr/>
-        </p:nvSpPr>
-        <p:spPr>
-          <a:xfrm>
-            <a:off x="457200" y="2286000"/>
-            <a:ext cx="11247120" cy="2286000"/>
-          </a:xfrm>
-          <a:prstGeom prst="rect">
-            <a:avLst/>
-          </a:prstGeom>
-          <a:noFill/>
-        </p:spPr>
-        <p:txBody>
-          <a:bodyPr wrap="square">
-            <a:spAutoFit/>
-          </a:bodyPr>
+          <p:cNvPr id="2" name="Title 1"/>
+          <p:cNvSpPr>
+            <a:spLocks noGrp="1"/>
+          </p:cNvSpPr>
+          <p:nvPr>
+            <p:ph type="title"/>
+          </p:nvPr>
+        </p:nvSpPr>
+        <p:spPr/>
+        <p:txBody>
+          <a:bodyPr/>
           <a:lstStyle/>
           <a:p>
             <a:r>
-              <a:rPr sz="4000" b="1"/>
-              <a:t>DEMO: Invoice extractor live build (20 min)</a:t>
+              <a:t>Validation + retry loops</a:t>
+            </a:r>
+          </a:p>
+        </p:txBody>
+      </p:sp>
+      <p:sp>
+        <p:nvSpPr>
+          <p:cNvPr id="3" name="Content Placeholder 2"/>
+          <p:cNvSpPr>
+            <a:spLocks noGrp="1"/>
+          </p:cNvSpPr>
+          <p:nvPr>
+            <p:ph idx="1"/>
+          </p:nvPr>
+        </p:nvSpPr>
+        <p:spPr/>
+        <p:txBody>
+          <a:bodyPr wrap="square"/>
+          <a:lstStyle/>
+          <a:p>
+            <a:r>
+              <a:t>Effective: format errors, JSON parse failures, schema mismatches</a:t>
+            </a:r>
+          </a:p>
+          <a:p>
+            <a:r>
+              <a:t>    -&gt; append the error as a tool_result with is_error: true, retry</a:t>
+            </a:r>
+          </a:p>
+          <a:p>
+            <a:r>
+              <a:t>    -&gt; succeeds in 2-3 attempts</a:t>
+            </a:r>
+          </a:p>
+          <a:p/>
+          <a:p>
+            <a:r>
+              <a:t>INEFFECTIVE: knowledge gaps, ambiguous source data</a:t>
+            </a:r>
+          </a:p>
+          <a:p>
+            <a:r>
+              <a:t>    -&gt; retries DO NOT help</a:t>
+            </a:r>
+          </a:p>
+          <a:p>
+            <a:r>
+              <a:t>    -&gt; cap at 2-3, then escalate to human review</a:t>
             </a:r>
           </a:p>
         </p:txBody>
@@ -45487,7 +45921,7 @@
           <a:lstStyle/>
           <a:p>
             <a:r>
-              <a:t>Exercise (5 min)</a:t>
+              <a:t>Confidence-based routing</a:t>
             </a:r>
           </a:p>
         </p:txBody>
@@ -45504,31 +45938,27 @@
         </p:nvSpPr>
         <p:spPr/>
         <p:txBody>
-          <a:bodyPr/>
+          <a:bodyPr wrap="square"/>
           <a:lstStyle/>
           <a:p>
             <a:r>
-              <a:t>Design an extraction schema for a domain you know</a:t>
-            </a:r>
-          </a:p>
-          <a:p>
-            <a:r>
-              <a:t>Fields: required vs Optional[]</a:t>
-            </a:r>
-          </a:p>
-          <a:p>
-            <a:r>
-              <a:t>Add a confidence Literal: 'high' | 'medium' | 'low'</a:t>
-            </a:r>
-          </a:p>
-          <a:p>
-            <a:r>
-              <a:t>Add a notes Optional[str] for ambiguity</a:t>
-            </a:r>
-          </a:p>
-          <a:p>
-            <a:r>
-              <a:t>Share your schema in chat</a:t>
+              <a:t>Have the model output field-level confidence: high | medium | low</a:t>
+            </a:r>
+          </a:p>
+          <a:p>
+            <a:r>
+              <a:t>Route: high -&gt; automated, medium -&gt; spot-check, low -&gt; human</a:t>
+            </a:r>
+          </a:p>
+          <a:p/>
+          <a:p>
+            <a:r>
+              <a:t>CRITICAL: validate accuracy by document type AND field</a:t>
+            </a:r>
+          </a:p>
+          <a:p>
+            <a:r>
+              <a:t>Aggregate 95% accuracy can mask 60% accuracy on specific segments</a:t>
             </a:r>
           </a:p>
         </p:txBody>
@@ -45553,52 +45983,47 @@
       <p:grpSpPr/>
       <p:sp>
         <p:nvSpPr>
-          <p:cNvPr id="2" name="Title 1"/>
-          <p:cNvSpPr>
-            <a:spLocks noGrp="1"/>
-          </p:cNvSpPr>
-          <p:nvPr>
-            <p:ph type="title"/>
+          <p:cNvPr id="2" name="Text Placeholder 1"/>
+          <p:cNvSpPr>
+            <a:spLocks noGrp="1"/>
+          </p:cNvSpPr>
+          <p:nvPr>
+            <p:ph type="body" idx="14" sz="quarter"/>
           </p:nvPr>
         </p:nvSpPr>
         <p:spPr/>
         <p:txBody>
-          <a:bodyPr/>
+          <a:bodyPr wrap="square"/>
           <a:lstStyle/>
           <a:p>
             <a:r>
-              <a:t>Segment 3 takeaways</a:t>
-            </a:r>
-          </a:p>
-        </p:txBody>
-      </p:sp>
-      <p:sp>
-        <p:nvSpPr>
-          <p:cNvPr id="3" name="Content Placeholder 2"/>
-          <p:cNvSpPr>
-            <a:spLocks noGrp="1"/>
-          </p:cNvSpPr>
-          <p:nvPr>
-            <p:ph idx="1"/>
-          </p:nvPr>
-        </p:nvSpPr>
-        <p:spPr/>
-        <p:txBody>
-          <a:bodyPr/>
-          <a:lstStyle/>
-          <a:p>
-            <a:r>
-              <a:t>Pydantic + tool_choice tool = guaranteed valid JSON</a:t>
-            </a:r>
-          </a:p>
-          <a:p>
-            <a:r>
-              <a:t>Few-shot examples beat temperature changes</a:t>
-            </a:r>
-          </a:p>
-          <a:p>
-            <a:r>
-              <a:t>Retries help format errors; retries do NOT help missing info</a:t>
+              <a:t>Demo - invoice extractor live build (20 min)</a:t>
+            </a:r>
+          </a:p>
+          <a:p/>
+          <a:p>
+            <a:r>
+              <a:t>Open notebooks/segment-3-invoice-extractor.ipynb</a:t>
+            </a:r>
+          </a:p>
+          <a:p>
+            <a:r>
+              <a:t>Build the Pydantic schema, register as a tool</a:t>
+            </a:r>
+          </a:p>
+          <a:p>
+            <a:r>
+              <a:t>Force tool_choice = {type: tool, name: extract_invoice}</a:t>
+            </a:r>
+          </a:p>
+          <a:p>
+            <a:r>
+              <a:t>Run on 3 invoices: clean, missing PO, ambiguous total</a:t>
+            </a:r>
+          </a:p>
+          <a:p>
+            <a:r>
+              <a:t>Add validation-retry loop, watch it recover from a parse failure</a:t>
             </a:r>
           </a:p>
         </p:txBody>
@@ -45637,7 +46062,49 @@
           <a:lstStyle/>
           <a:p>
             <a:r>
-              <a:t>SEGMENT 04</a:t>
+              <a:t>Context preservation in long sessions</a:t>
+            </a:r>
+          </a:p>
+        </p:txBody>
+      </p:sp>
+      <p:sp>
+        <p:nvSpPr>
+          <p:cNvPr id="3" name="Content Placeholder 2"/>
+          <p:cNvSpPr>
+            <a:spLocks noGrp="1"/>
+          </p:cNvSpPr>
+          <p:nvPr>
+            <p:ph idx="1"/>
+          </p:nvPr>
+        </p:nvSpPr>
+        <p:spPr/>
+        <p:txBody>
+          <a:bodyPr wrap="square"/>
+          <a:lstStyle/>
+          <a:p>
+            <a:r>
+              <a:t>Pin case-facts at the top of every turn</a:t>
+            </a:r>
+          </a:p>
+          <a:p>
+            <a:r>
+              <a:t>Summarize resolved turns into narrative, drop verbatim history</a:t>
+            </a:r>
+          </a:p>
+          <a:p>
+            <a:r>
+              <a:t>Prune verbose tool outputs - extract the fields you used, drop the rest</a:t>
+            </a:r>
+          </a:p>
+          <a:p>
+            <a:r>
+              <a:t>Application-side filtering, before the next turn</a:t>
+            </a:r>
+          </a:p>
+          <a:p/>
+          <a:p>
+            <a:r>
+              <a:t>How lawyers manage case files. Same discipline for long agent sessions.</a:t>
             </a:r>
           </a:p>
         </p:txBody>
@@ -45676,7 +46143,7 @@
           <a:lstStyle/>
           <a:p>
             <a:r>
-              <a:t>Context preservation in long sessions</a:t>
+              <a:t>Escalation design</a:t>
             </a:r>
           </a:p>
         </p:txBody>
@@ -45693,31 +46160,31 @@
         </p:nvSpPr>
         <p:spPr/>
         <p:txBody>
-          <a:bodyPr/>
+          <a:bodyPr wrap="square"/>
           <a:lstStyle/>
           <a:p>
             <a:r>
-              <a:t>Pin case-facts at the top of every turn</a:t>
-            </a:r>
-          </a:p>
-          <a:p>
-            <a:r>
-              <a:t>Summarize resolved turns into narrative</a:t>
-            </a:r>
-          </a:p>
-          <a:p>
-            <a:r>
-              <a:t>Keep verbatim history ONLY for the active issue</a:t>
-            </a:r>
-          </a:p>
-          <a:p>
-            <a:r>
-              <a:t>Prune verbose tool outputs - extract the fields you used, drop the rest</a:t>
-            </a:r>
-          </a:p>
-          <a:p>
-            <a:r>
-              <a:t>Application-side filtering, before the next turn</a:t>
+              <a:t>Honor explicit human requests IMMEDIATELY</a:t>
+            </a:r>
+          </a:p>
+          <a:p>
+            <a:r>
+              <a:t>    'I want a human NOW' = escalate, don't clarify, don't try one more tool</a:t>
+            </a:r>
+          </a:p>
+          <a:p>
+            <a:r>
+              <a:t>Pass STRUCTURED summary to the human queue, not the transcript</a:t>
+            </a:r>
+          </a:p>
+          <a:p>
+            <a:r>
+              <a:t>Never escalate on sentiment alone (frustration != complexity)</a:t>
+            </a:r>
+          </a:p>
+          <a:p>
+            <a:r>
+              <a:t>Confidence-based escalation: low confidence -&gt; human review</a:t>
             </a:r>
           </a:p>
         </p:txBody>
@@ -45756,7 +46223,7 @@
           <a:lstStyle/>
           <a:p>
             <a:r>
-              <a:t>Escalation design</a:t>
+              <a:t>Exercise (5 min)</a:t>
             </a:r>
           </a:p>
         </p:txBody>
@@ -45773,31 +46240,31 @@
         </p:nvSpPr>
         <p:spPr/>
         <p:txBody>
-          <a:bodyPr/>
+          <a:bodyPr wrap="square"/>
           <a:lstStyle/>
           <a:p>
             <a:r>
-              <a:t>Honor explicit human requests IMMEDIATELY</a:t>
-            </a:r>
-          </a:p>
-          <a:p>
-            <a:r>
-              <a:t>    'I want a human NOW' = escalate, don't clarify, don't try one more tool</a:t>
-            </a:r>
-          </a:p>
-          <a:p>
-            <a:r>
-              <a:t>Pass STRUCTURED summary to the human queue, not the transcript</a:t>
-            </a:r>
-          </a:p>
-          <a:p>
-            <a:r>
-              <a:t>Never escalate on sentiment alone (frustration != complexity)</a:t>
-            </a:r>
-          </a:p>
-          <a:p>
-            <a:r>
-              <a:t>Confidence-based escalation: low confidence -&gt; human review</a:t>
+              <a:t>Design an extraction schema for a domain you know</a:t>
+            </a:r>
+          </a:p>
+          <a:p>
+            <a:r>
+              <a:t>Fields: required vs Optional[]</a:t>
+            </a:r>
+          </a:p>
+          <a:p>
+            <a:r>
+              <a:t>Add a confidence Literal: 'high' | 'medium' | 'low'</a:t>
+            </a:r>
+          </a:p>
+          <a:p>
+            <a:r>
+              <a:t>Add a notes Optional[str] for ambiguity</a:t>
+            </a:r>
+          </a:p>
+          <a:p>
+            <a:r>
+              <a:t>Share your schema in chat</a:t>
             </a:r>
           </a:p>
         </p:txBody>
@@ -45822,64 +46289,61 @@
       <p:grpSpPr/>
       <p:sp>
         <p:nvSpPr>
-          <p:cNvPr id="2" name="Title 1"/>
-          <p:cNvSpPr>
-            <a:spLocks noGrp="1"/>
-          </p:cNvSpPr>
-          <p:nvPr>
-            <p:ph type="title"/>
+          <p:cNvPr id="2" name="Text Placeholder 1"/>
+          <p:cNvSpPr>
+            <a:spLocks noGrp="1"/>
+          </p:cNvSpPr>
+          <p:nvPr>
+            <p:ph type="body" idx="13" sz="quarter"/>
+          </p:nvPr>
+        </p:nvSpPr>
+        <p:spPr/>
+        <p:txBody>
+          <a:bodyPr wrap="square"/>
+          <a:lstStyle/>
+          <a:p>
+            <a:r>
+              <a:t>Segment 3 takeaways</a:t>
+            </a:r>
+          </a:p>
+          <a:p/>
+          <a:p>
+            <a:r>
+              <a:t>Pydantic + tool_choice tool = guaranteed valid JSON</a:t>
+            </a:r>
+          </a:p>
+          <a:p>
+            <a:r>
+              <a:t>Few-shot examples beat temperature tuning every time</a:t>
+            </a:r>
+          </a:p>
+          <a:p>
+            <a:r>
+              <a:t>Retries help format errors; retries do NOT help missing info</a:t>
+            </a:r>
+          </a:p>
+          <a:p>
+            <a:r>
+              <a:t>Cache the system block with cache_control - amortize policy across calls</a:t>
+            </a:r>
+          </a:p>
+        </p:txBody>
+      </p:sp>
+      <p:sp>
+        <p:nvSpPr>
+          <p:cNvPr id="3" name="Text Placeholder 2"/>
+          <p:cNvSpPr>
+            <a:spLocks noGrp="1"/>
+          </p:cNvSpPr>
+          <p:nvPr>
+            <p:ph type="body" idx="14" sz="quarter"/>
           </p:nvPr>
         </p:nvSpPr>
         <p:spPr/>
         <p:txBody>
           <a:bodyPr/>
           <a:lstStyle/>
-          <a:p>
-            <a:r>
-              <a:t>Error propagation in multi-agent systems</a:t>
-            </a:r>
-          </a:p>
-        </p:txBody>
-      </p:sp>
-      <p:sp>
-        <p:nvSpPr>
-          <p:cNvPr id="3" name="Content Placeholder 2"/>
-          <p:cNvSpPr>
-            <a:spLocks noGrp="1"/>
-          </p:cNvSpPr>
-          <p:nvPr>
-            <p:ph idx="1"/>
-          </p:nvPr>
-        </p:nvSpPr>
-        <p:spPr/>
-        <p:txBody>
-          <a:bodyPr/>
-          <a:lstStyle/>
-          <a:p>
-            <a:r>
-              <a:t>Subagents return structured error context, not silently empty results</a:t>
-            </a:r>
-          </a:p>
-          <a:p>
-            <a:r>
-              <a:t>Parent decides: retry, fall back to alternate subagent, or escalate</a:t>
-            </a:r>
-          </a:p>
-          <a:p>
-            <a:r>
-              <a:t>Never swallow exceptions in tool implementations</a:t>
-            </a:r>
-          </a:p>
-          <a:p>
-            <a:r>
-              <a:t>Tool errors as tool_result content with is_error: true</a:t>
-            </a:r>
-          </a:p>
-          <a:p>
-            <a:r>
-              <a:t>Application exceptions crash the agent. Structured errors let it recover.</a:t>
-            </a:r>
-          </a:p>
+          <a:p/>
         </p:txBody>
       </p:sp>
     </p:spTree>
@@ -45916,48 +46380,7 @@
           <a:lstStyle/>
           <a:p>
             <a:r>
-              <a:t>Provenance and source attribution</a:t>
-            </a:r>
-          </a:p>
-        </p:txBody>
-      </p:sp>
-      <p:sp>
-        <p:nvSpPr>
-          <p:cNvPr id="3" name="Content Placeholder 2"/>
-          <p:cNvSpPr>
-            <a:spLocks noGrp="1"/>
-          </p:cNvSpPr>
-          <p:nvPr>
-            <p:ph idx="1"/>
-          </p:nvPr>
-        </p:nvSpPr>
-        <p:spPr/>
-        <p:txBody>
-          <a:bodyPr/>
-          <a:lstStyle/>
-          <a:p>
-            <a:r>
-              <a:t>Synthesis agents MUST preserve claim-&gt;source mappings from subagents</a:t>
-            </a:r>
-          </a:p>
-          <a:p>
-            <a:r>
-              <a:t>Each subagent returns {claim, evidence, source, confidence}</a:t>
-            </a:r>
-          </a:p>
-          <a:p>
-            <a:r>
-              <a:t>Synthesis agent keeps the source field on every claim it surfaces</a:t>
-            </a:r>
-          </a:p>
-          <a:p>
-            <a:r>
-              <a:t>Include publication dates for dated information</a:t>
-            </a:r>
-          </a:p>
-          <a:p>
-            <a:r>
-              <a:t>Anti-pattern: synthesis prose with no attribution</a:t>
+              <a:t>Segment 4: CCA-F Certification Capstone</a:t>
             </a:r>
           </a:p>
         </p:txBody>
@@ -45982,28 +46405,20 @@
       <p:grpSpPr/>
       <p:sp>
         <p:nvSpPr>
-          <p:cNvPr id="2" name="TextBox 1"/>
-          <p:cNvSpPr txBox="1"/>
-          <p:nvPr/>
-        </p:nvSpPr>
-        <p:spPr>
-          <a:xfrm>
-            <a:off x="457200" y="2286000"/>
-            <a:ext cx="11247120" cy="2286000"/>
-          </a:xfrm>
-          <a:prstGeom prst="rect">
-            <a:avLst/>
-          </a:prstGeom>
-          <a:noFill/>
-        </p:spPr>
-        <p:txBody>
-          <a:bodyPr wrap="square">
-            <a:spAutoFit/>
-          </a:bodyPr>
+          <p:cNvPr id="2" name="Title 1"/>
+          <p:cNvSpPr>
+            <a:spLocks noGrp="1"/>
+          </p:cNvSpPr>
+          <p:nvPr>
+            <p:ph type="title"/>
+          </p:nvPr>
+        </p:nvSpPr>
+        <p:spPr/>
+        <p:txBody>
+          <a:bodyPr/>
           <a:lstStyle/>
           <a:p>
             <a:r>
-              <a:rPr sz="4000" b="1"/>
               <a:t>"The model is non-deterministic. Your architecture cannot be."</a:t>
             </a:r>
           </a:p>
@@ -46029,29 +46444,58 @@
       <p:grpSpPr/>
       <p:sp>
         <p:nvSpPr>
-          <p:cNvPr id="2" name="TextBox 1"/>
-          <p:cNvSpPr txBox="1"/>
-          <p:nvPr/>
-        </p:nvSpPr>
-        <p:spPr>
-          <a:xfrm>
-            <a:off x="457200" y="2286000"/>
-            <a:ext cx="11247120" cy="2286000"/>
-          </a:xfrm>
-          <a:prstGeom prst="rect">
-            <a:avLst/>
-          </a:prstGeom>
-          <a:noFill/>
-        </p:spPr>
-        <p:txBody>
-          <a:bodyPr wrap="square">
-            <a:spAutoFit/>
-          </a:bodyPr>
+          <p:cNvPr id="2" name="Title 1"/>
+          <p:cNvSpPr>
+            <a:spLocks noGrp="1"/>
+          </p:cNvSpPr>
+          <p:nvPr>
+            <p:ph type="title"/>
+          </p:nvPr>
+        </p:nvSpPr>
+        <p:spPr/>
+        <p:txBody>
+          <a:bodyPr/>
           <a:lstStyle/>
           <a:p>
             <a:r>
-              <a:rPr sz="4000" b="1"/>
-              <a:t>DEMO: Context compaction (10 min)</a:t>
+              <a:t>What CCA-F is</a:t>
+            </a:r>
+          </a:p>
+        </p:txBody>
+      </p:sp>
+      <p:sp>
+        <p:nvSpPr>
+          <p:cNvPr id="3" name="Content Placeholder 2"/>
+          <p:cNvSpPr>
+            <a:spLocks noGrp="1"/>
+          </p:cNvSpPr>
+          <p:nvPr>
+            <p:ph idx="1"/>
+          </p:nvPr>
+        </p:nvSpPr>
+        <p:spPr/>
+        <p:txBody>
+          <a:bodyPr wrap="square"/>
+          <a:lstStyle/>
+          <a:p>
+            <a:r>
+              <a:t>Claude Certified Architect: Foundations - Anthropic's first official certification</a:t>
+            </a:r>
+          </a:p>
+          <a:p>
+            <a:r>
+              <a:t>Targets architects shipping with Agent SDK, Claude Code, Claude API, MCP</a:t>
+            </a:r>
+          </a:p>
+          <a:p>
+            <a:r>
+              <a:t>Roughly the 301 skill level - past 'hello world', not yet 'I run distillation pipelines'</a:t>
+            </a:r>
+          </a:p>
+          <a:p/>
+          <a:p>
+            <a:r>
+              <a:t>Beta product as of 2026 - watch the official cert page for changes</a:t>
             </a:r>
           </a:p>
         </p:txBody>
@@ -46090,7 +46534,7 @@
           <a:lstStyle/>
           <a:p>
             <a:r>
-              <a:t>Production triage exercise (5 min)</a:t>
+              <a:t>Exam mechanics (the load-bearing facts)</a:t>
             </a:r>
           </a:p>
         </p:txBody>
@@ -46107,31 +46551,41 @@
         </p:nvSpPr>
         <p:spPr/>
         <p:txBody>
-          <a:bodyPr/>
+          <a:bodyPr wrap="square"/>
           <a:lstStyle/>
           <a:p>
             <a:r>
-              <a:t>For each failure, name the design fix:</a:t>
-            </a:r>
-          </a:p>
-          <a:p>
-            <a:r>
-              <a:t>(a) Agent picked wrong tool for the task</a:t>
-            </a:r>
-          </a:p>
-          <a:p>
-            <a:r>
-              <a:t>(b) Refund processed for $847 against $500 policy</a:t>
-            </a:r>
-          </a:p>
-          <a:p>
-            <a:r>
-              <a:t>(c) Synthesis output has no source attributions</a:t>
-            </a:r>
-          </a:p>
-          <a:p>
-            <a:r>
-              <a:t>(d) Agent escalated because user said 'I'm frustrated'</a:t>
+              <a:t>Questions: 60 multiple-choice</a:t>
+            </a:r>
+          </a:p>
+          <a:p>
+            <a:r>
+              <a:t>Time: 120 minutes, single session, no breaks</a:t>
+            </a:r>
+          </a:p>
+          <a:p>
+            <a:r>
+              <a:t>Scoring: scaled 100-1000, passing = 720, no guess penalty</a:t>
+            </a:r>
+          </a:p>
+          <a:p>
+            <a:r>
+              <a:t>Delivery: ProctorFree, English</a:t>
+            </a:r>
+          </a:p>
+          <a:p>
+            <a:r>
+              <a:t>Results: 2 business days</a:t>
+            </a:r>
+          </a:p>
+          <a:p>
+            <a:r>
+              <a:t>Cost: $99 per attempt</a:t>
+            </a:r>
+          </a:p>
+          <a:p>
+            <a:r>
+              <a:t>Attempts: ONE - this is the policy that catches people</a:t>
             </a:r>
           </a:p>
         </p:txBody>
@@ -46170,45 +46624,126 @@
           <a:lstStyle/>
           <a:p>
             <a:r>
-              <a:t>What you built today</a:t>
-            </a:r>
-          </a:p>
-        </p:txBody>
-      </p:sp>
-      <p:sp>
-        <p:nvSpPr>
-          <p:cNvPr id="3" name="Content Placeholder 2"/>
-          <p:cNvSpPr>
-            <a:spLocks noGrp="1"/>
-          </p:cNvSpPr>
-          <p:nvPr>
-            <p:ph idx="1"/>
+              <a:t>Domain weights and where each was taught</a:t>
+            </a:r>
+          </a:p>
+        </p:txBody>
+      </p:sp>
+      <p:sp>
+        <p:nvSpPr>
+          <p:cNvPr id="3" name="Text Placeholder 2"/>
+          <p:cNvSpPr>
+            <a:spLocks noGrp="1"/>
+          </p:cNvSpPr>
+          <p:nvPr>
+            <p:ph type="body" idx="10" sz="quarter"/>
+          </p:nvPr>
+        </p:nvSpPr>
+        <p:spPr/>
+        <p:txBody>
+          <a:bodyPr wrap="square"/>
+          <a:lstStyle/>
+          <a:p>
+            <a:r>
+              <a:t>Domain 1 - Agentic Architecture (27%)</a:t>
+            </a:r>
+          </a:p>
+          <a:p>
+            <a:r>
+              <a:t>Heaviest. Segment 1 - agents, hooks, coordinator-subagent. Re-walk segment-1.</a:t>
+            </a:r>
+          </a:p>
+          <a:p>
+            <a:r>
+              <a:t>Domain 2 - Tool Design and MCP (18%)</a:t>
+            </a:r>
+          </a:p>
+          <a:p>
+            <a:r>
+              <a:t>Segment 2 + 2.5. Tool descriptions, structured errors, MCP list_tools.</a:t>
+            </a:r>
+          </a:p>
+          <a:p>
+            <a:r>
+              <a:t>Domain 3 - Claude Code (20%)</a:t>
+            </a:r>
+          </a:p>
+          <a:p>
+            <a:r>
+              <a:t>Segment 2. CLAUDE.md hierarchy, skills, slash commands, claude -p headless.</a:t>
+            </a:r>
+          </a:p>
+          <a:p>
+            <a:r>
+              <a:t>Domain 4 - Prompts and Structured Output (20%)</a:t>
+            </a:r>
+          </a:p>
+          <a:p>
+            <a:r>
+              <a:t>Segment 3. Forced tool_choice, Pydantic schemas, few-shot, retry loops.</a:t>
+            </a:r>
+          </a:p>
+          <a:p>
+            <a:r>
+              <a:t>Domain 5 - Context and Reliability (15%)</a:t>
+            </a:r>
+          </a:p>
+          <a:p>
+            <a:r>
+              <a:t>Segment 3 + parts of Segment 1. Context pinning, escalation, structured errors.</a:t>
+            </a:r>
+          </a:p>
+        </p:txBody>
+      </p:sp>
+      <p:sp>
+        <p:nvSpPr>
+          <p:cNvPr id="4" name="Text Placeholder 3"/>
+          <p:cNvSpPr>
+            <a:spLocks noGrp="1"/>
+          </p:cNvSpPr>
+          <p:nvPr>
+            <p:ph type="body" idx="15" sz="quarter"/>
           </p:nvPr>
         </p:nvSpPr>
         <p:spPr/>
         <p:txBody>
           <a:bodyPr/>
           <a:lstStyle/>
-          <a:p>
-            <a:r>
-              <a:t>Customer support agent with hook-enforced policy</a:t>
-            </a:r>
-          </a:p>
-          <a:p>
-            <a:r>
-              <a:t>Configured Claude Code env with .mcp.json + CLAUDE.md hierarchy</a:t>
-            </a:r>
-          </a:p>
-          <a:p>
-            <a:r>
-              <a:t>Invoice extractor with schema enforcement + validation retry</a:t>
-            </a:r>
-          </a:p>
-          <a:p>
-            <a:r>
-              <a:t>Production reliability mental model: context, escalation, errors, provenance</a:t>
-            </a:r>
-          </a:p>
+          <a:p/>
+        </p:txBody>
+      </p:sp>
+      <p:sp>
+        <p:nvSpPr>
+          <p:cNvPr id="5" name="Text Placeholder 4"/>
+          <p:cNvSpPr>
+            <a:spLocks noGrp="1"/>
+          </p:cNvSpPr>
+          <p:nvPr>
+            <p:ph type="body" idx="16" sz="quarter"/>
+          </p:nvPr>
+        </p:nvSpPr>
+        <p:spPr/>
+        <p:txBody>
+          <a:bodyPr/>
+          <a:lstStyle/>
+          <a:p/>
+        </p:txBody>
+      </p:sp>
+      <p:sp>
+        <p:nvSpPr>
+          <p:cNvPr id="6" name="Text Placeholder 5"/>
+          <p:cNvSpPr>
+            <a:spLocks noGrp="1"/>
+          </p:cNvSpPr>
+          <p:nvPr>
+            <p:ph type="body" idx="17" sz="quarter"/>
+          </p:nvPr>
+        </p:nvSpPr>
+        <p:spPr/>
+        <p:txBody>
+          <a:bodyPr/>
+          <a:lstStyle/>
+          <a:p/>
         </p:txBody>
       </p:sp>
     </p:spTree>
@@ -46245,65 +46780,62 @@
           <a:lstStyle/>
           <a:p>
             <a:r>
-              <a:t>About the CCA-F certification (2 min)</a:t>
-            </a:r>
-          </a:p>
-        </p:txBody>
-      </p:sp>
-      <p:sp>
-        <p:nvSpPr>
-          <p:cNvPr id="3" name="Content Placeholder 2"/>
-          <p:cNvSpPr>
-            <a:spLocks noGrp="1"/>
-          </p:cNvSpPr>
-          <p:nvPr>
-            <p:ph idx="1"/>
+              <a:t>Why the practice sampler is domain-weighted</a:t>
+            </a:r>
+          </a:p>
+        </p:txBody>
+      </p:sp>
+      <p:sp>
+        <p:nvSpPr>
+          <p:cNvPr id="3" name="Text Placeholder 2"/>
+          <p:cNvSpPr>
+            <a:spLocks noGrp="1"/>
+          </p:cNvSpPr>
+          <p:nvPr>
+            <p:ph type="body" idx="10" sz="quarter"/>
+          </p:nvPr>
+        </p:nvSpPr>
+        <p:spPr/>
+        <p:txBody>
+          <a:bodyPr wrap="square"/>
+          <a:lstStyle/>
+          <a:p>
+            <a:r>
+              <a:t>The naive sampler</a:t>
+            </a:r>
+          </a:p>
+          <a:p>
+            <a:r>
+              <a:t>Pulls questions evenly across scenario families - which over-tests Claude Code (two scenarios are heavily D3) and under-tests context management (only fits in one).</a:t>
+            </a:r>
+          </a:p>
+          <a:p>
+            <a:r>
+              <a:t>Our sampler</a:t>
+            </a:r>
+          </a:p>
+          <a:p>
+            <a:r>
+              <a:t>Draws 3 D1 + 2 D2 + 2 D3 + 2 D4 + 1 D5 - matches the exam's 27/18/20/20/15 weighting exactly. Every cohort sees the SAME 10 questions in the same order (seed=2026) for consistency across deliveries.</a:t>
+            </a:r>
+          </a:p>
+        </p:txBody>
+      </p:sp>
+      <p:sp>
+        <p:nvSpPr>
+          <p:cNvPr id="4" name="Text Placeholder 3"/>
+          <p:cNvSpPr>
+            <a:spLocks noGrp="1"/>
+          </p:cNvSpPr>
+          <p:nvPr>
+            <p:ph type="body" idx="12" sz="quarter"/>
           </p:nvPr>
         </p:nvSpPr>
         <p:spPr/>
         <p:txBody>
           <a:bodyPr/>
           <a:lstStyle/>
-          <a:p>
-            <a:r>
-              <a:t>Anthropic's Claude Certified Architect: Foundations exam</a:t>
-            </a:r>
-          </a:p>
-          <a:p>
-            <a:r>
-              <a:t>Not publicly available yet (as of May 2026)</a:t>
-            </a:r>
-          </a:p>
-          <a:p>
-            <a:r>
-              <a:t>When it lands, the 5-domain blueprint is your study scaffold:</a:t>
-            </a:r>
-          </a:p>
-          <a:p>
-            <a:r>
-              <a:t>  1. Agentic Architecture (27%)   - covered in Segment 1</a:t>
-            </a:r>
-          </a:p>
-          <a:p>
-            <a:r>
-              <a:t>  2. Tool Design / MCP (18%)      - covered in Segment 2</a:t>
-            </a:r>
-          </a:p>
-          <a:p>
-            <a:r>
-              <a:t>  3. Claude Code (20%)            - covered in Segment 2</a:t>
-            </a:r>
-          </a:p>
-          <a:p>
-            <a:r>
-              <a:t>  4. Prompt Engineering (20%)     - covered in Segment 3</a:t>
-            </a:r>
-          </a:p>
-          <a:p>
-            <a:r>
-              <a:t>  5. Context / Reliability (15%)  - covered in Segment 4</a:t>
-            </a:r>
-          </a:p>
+          <a:p/>
         </p:txBody>
       </p:sp>
     </p:spTree>
@@ -46326,68 +46858,57 @@
       <p:grpSpPr/>
       <p:sp>
         <p:nvSpPr>
-          <p:cNvPr id="2" name="Title 1"/>
-          <p:cNvSpPr>
-            <a:spLocks noGrp="1"/>
-          </p:cNvSpPr>
-          <p:nvPr>
-            <p:ph type="title"/>
+          <p:cNvPr id="2" name="Text Placeholder 1"/>
+          <p:cNvSpPr>
+            <a:spLocks noGrp="1"/>
+          </p:cNvSpPr>
+          <p:nvPr>
+            <p:ph type="body" idx="14" sz="quarter"/>
           </p:nvPr>
         </p:nvSpPr>
         <p:spPr/>
         <p:txBody>
-          <a:bodyPr/>
+          <a:bodyPr wrap="square"/>
           <a:lstStyle/>
           <a:p>
             <a:r>
-              <a:t>Resources and next steps</a:t>
-            </a:r>
-          </a:p>
-        </p:txBody>
-      </p:sp>
-      <p:sp>
-        <p:nvSpPr>
-          <p:cNvPr id="3" name="Content Placeholder 2"/>
-          <p:cNvSpPr>
-            <a:spLocks noGrp="1"/>
-          </p:cNvSpPr>
-          <p:nvPr>
-            <p:ph idx="1"/>
-          </p:nvPr>
-        </p:nvSpPr>
-        <p:spPr/>
-        <p:txBody>
-          <a:bodyPr/>
-          <a:lstStyle/>
-          <a:p>
-            <a:r>
-              <a:t>Repo: github.com/timothywarner-org/claude-architect</a:t>
-            </a:r>
-          </a:p>
-          <a:p>
-            <a:r>
-              <a:t>Reference files: domain-1-agentic.md through domain-5-context.md</a:t>
-            </a:r>
-          </a:p>
-          <a:p>
-            <a:r>
-              <a:t>Anthropic Academy: anthropic.skilljar.com (watch for exam launch)</a:t>
-            </a:r>
-          </a:p>
-          <a:p>
-            <a:r>
-              <a:t>Anthropic docs: docs.claude.com</a:t>
-            </a:r>
-          </a:p>
-          <a:p>
-            <a:r>
-              <a:t>Anthropic cookbooks: github.com/anthropics/anthropic-cookbook</a:t>
+              <a:t>Live practice - 10 weighted questions (~28 min)</a:t>
             </a:r>
           </a:p>
           <a:p/>
           <a:p>
             <a:r>
-              <a:t>Next: wire one of today's patterns into a real workflow THIS WEEK</a:t>
+              <a:t>Open notebooks/segment-4-cca-f-capstone.ipynb</a:t>
+            </a:r>
+          </a:p>
+          <a:p>
+            <a:r>
+              <a:t>Sampler draws 10 questions by CCA-F domain weight (3/2/2/2/1)</a:t>
+            </a:r>
+          </a:p>
+          <a:p>
+            <a:r>
+              <a:t>Per question (~2.5 min):</a:t>
+            </a:r>
+          </a:p>
+          <a:p>
+            <a:r>
+              <a:t>  1. Read the situation</a:t>
+            </a:r>
+          </a:p>
+          <a:p>
+            <a:r>
+              <a:t>  2. Cohort votes A/B/C/D in chat</a:t>
+            </a:r>
+          </a:p>
+          <a:p>
+            <a:r>
+              <a:t>  3. Reveal answer + explanation</a:t>
+            </a:r>
+          </a:p>
+          <a:p>
+            <a:r>
+              <a:t>  4. Color with a production tip from the matching domain-N-*.md</a:t>
             </a:r>
           </a:p>
         </p:txBody>
@@ -46417,7 +46938,7 @@
             <a:spLocks noGrp="1"/>
           </p:cNvSpPr>
           <p:nvPr>
-            <p:ph type="ctrTitle"/>
+            <p:ph type="title"/>
           </p:nvPr>
         </p:nvSpPr>
         <p:spPr/>
@@ -46426,19 +46947,83 @@
           <a:lstStyle/>
           <a:p>
             <a:r>
-              <a:t>Thank you</a:t>
-            </a:r>
-          </a:p>
-        </p:txBody>
-      </p:sp>
-      <p:sp>
-        <p:nvSpPr>
-          <p:cNvPr id="3" name="Subtitle 2"/>
-          <p:cNvSpPr>
-            <a:spLocks noGrp="1"/>
-          </p:cNvSpPr>
-          <p:nvPr>
-            <p:ph type="subTitle" idx="1"/>
+              <a:t>Tim's week-before-the-exam punchlist</a:t>
+            </a:r>
+          </a:p>
+        </p:txBody>
+      </p:sp>
+      <p:sp>
+        <p:nvSpPr>
+          <p:cNvPr id="3" name="Content Placeholder 2"/>
+          <p:cNvSpPr>
+            <a:spLocks noGrp="1"/>
+          </p:cNvSpPr>
+          <p:nvPr>
+            <p:ph idx="1"/>
+          </p:nvPr>
+        </p:nvSpPr>
+        <p:spPr/>
+        <p:txBody>
+          <a:bodyPr wrap="square"/>
+          <a:lstStyle/>
+          <a:p>
+            <a:r>
+              <a:t>1. Score &gt;900 on the Anthropic Practice Exam cold</a:t>
+            </a:r>
+          </a:p>
+          <a:p>
+            <a:r>
+              <a:t>2. Rebuild Segment 1 from memory in 30 minutes</a:t>
+            </a:r>
+          </a:p>
+          <a:p>
+            <a:r>
+              <a:t>3. Re-read domain-1-agentic.md - the 27% domain</a:t>
+            </a:r>
+          </a:p>
+          <a:p>
+            <a:r>
+              <a:t>4. Skim domain-3-claude-code.md and domain-4-prompts.md - the 20% domains</a:t>
+            </a:r>
+          </a:p>
+          <a:p>
+            <a:r>
+              <a:t>5. Verify proctoring setup the night before (camera, mic, ID)</a:t>
+            </a:r>
+          </a:p>
+          <a:p>
+            <a:r>
+              <a:t>6. Single attempt. Do not schedule until 1-4 are green.</a:t>
+            </a:r>
+          </a:p>
+        </p:txBody>
+      </p:sp>
+    </p:spTree>
+  </p:cSld>
+  <p:clrMapOvr>
+    <a:masterClrMapping/>
+  </p:clrMapOvr>
+</p:sld>
+</file>
+
+<file path=ppt/slides/slide46.xml><?xml version="1.0" encoding="utf-8"?>
+<p:sld xmlns:a="http://schemas.openxmlformats.org/drawingml/2006/main" xmlns:p="http://schemas.openxmlformats.org/presentationml/2006/main" xmlns:r="http://schemas.openxmlformats.org/officeDocument/2006/relationships">
+  <p:cSld>
+    <p:spTree>
+      <p:nvGrpSpPr>
+        <p:cNvPr id="1" name=""/>
+        <p:cNvGrpSpPr/>
+        <p:nvPr/>
+      </p:nvGrpSpPr>
+      <p:grpSpPr/>
+      <p:sp>
+        <p:nvSpPr>
+          <p:cNvPr id="2" name="Title 1"/>
+          <p:cNvSpPr>
+            <a:spLocks noGrp="1"/>
+          </p:cNvSpPr>
+          <p:nvPr>
+            <p:ph type="title"/>
           </p:nvPr>
         </p:nvSpPr>
         <p:spPr/>
@@ -46447,12 +47032,394 @@
           <a:lstStyle/>
           <a:p>
             <a:r>
-              <a:t>Tim Warner | techtrainertim.com</a:t>
+              <a:t>What you built today</a:t>
+            </a:r>
+          </a:p>
+        </p:txBody>
+      </p:sp>
+      <p:sp>
+        <p:nvSpPr>
+          <p:cNvPr id="3" name="Content Placeholder 2"/>
+          <p:cNvSpPr>
+            <a:spLocks noGrp="1"/>
+          </p:cNvSpPr>
+          <p:nvPr>
+            <p:ph idx="1"/>
+          </p:nvPr>
+        </p:nvSpPr>
+        <p:spPr/>
+        <p:txBody>
+          <a:bodyPr wrap="square"/>
+          <a:lstStyle/>
+          <a:p>
+            <a:r>
+              <a:t>Customer support agent with PreToolUse hook enforcement</a:t>
+            </a:r>
+          </a:p>
+          <a:p>
+            <a:r>
+              <a:t>Configured Claude Code env with .mcp.json + CLAUDE.md hierarchy</a:t>
+            </a:r>
+          </a:p>
+          <a:p>
+            <a:r>
+              <a:t>Invoice extractor with Pydantic schema + validation retry</a:t>
+            </a:r>
+          </a:p>
+          <a:p>
+            <a:r>
+              <a:t>Production reliability mental model - context, escalation, errors, provenance</a:t>
+            </a:r>
+          </a:p>
+          <a:p/>
+          <a:p>
+            <a:r>
+              <a:t>Plus self-study: control surfaces and the Console asset surface (Segment 2.5)</a:t>
+            </a:r>
+          </a:p>
+        </p:txBody>
+      </p:sp>
+    </p:spTree>
+  </p:cSld>
+  <p:clrMapOvr>
+    <a:masterClrMapping/>
+  </p:clrMapOvr>
+</p:sld>
+</file>
+
+<file path=ppt/slides/slide47.xml><?xml version="1.0" encoding="utf-8"?>
+<p:sld xmlns:a="http://schemas.openxmlformats.org/drawingml/2006/main" xmlns:p="http://schemas.openxmlformats.org/presentationml/2006/main" xmlns:r="http://schemas.openxmlformats.org/officeDocument/2006/relationships">
+  <p:cSld>
+    <p:spTree>
+      <p:nvGrpSpPr>
+        <p:cNvPr id="1" name=""/>
+        <p:cNvGrpSpPr/>
+        <p:nvPr/>
+      </p:nvGrpSpPr>
+      <p:grpSpPr/>
+      <p:sp>
+        <p:nvSpPr>
+          <p:cNvPr id="2" name="Title 1"/>
+          <p:cNvSpPr>
+            <a:spLocks noGrp="1"/>
+          </p:cNvSpPr>
+          <p:nvPr>
+            <p:ph type="title"/>
+          </p:nvPr>
+        </p:nvSpPr>
+        <p:spPr/>
+        <p:txBody>
+          <a:bodyPr/>
+          <a:lstStyle/>
+          <a:p>
+            <a:r>
+              <a:t>Resources and next steps</a:t>
+            </a:r>
+          </a:p>
+        </p:txBody>
+      </p:sp>
+      <p:sp>
+        <p:nvSpPr>
+          <p:cNvPr id="3" name="Text Placeholder 2"/>
+          <p:cNvSpPr>
+            <a:spLocks noGrp="1"/>
+          </p:cNvSpPr>
+          <p:nvPr>
+            <p:ph type="body" idx="15" sz="quarter"/>
+          </p:nvPr>
+        </p:nvSpPr>
+        <p:spPr/>
+        <p:txBody>
+          <a:bodyPr wrap="square"/>
+          <a:lstStyle/>
+          <a:p>
+            <a:r>
+              <a:t>Repo</a:t>
             </a:r>
           </a:p>
           <a:p>
             <a:r>
               <a:t>github.com/timothywarner-org/claude-architect</a:t>
+            </a:r>
+          </a:p>
+          <a:p>
+            <a:r>
+              <a:t>Anthropic cookbook (official, MIT, vendored in this repo)</a:t>
+            </a:r>
+          </a:p>
+          <a:p>
+            <a:r>
+              <a:t>github.com/anthropics/claude-cookbooks   |   claude-cookbooks-main/</a:t>
+            </a:r>
+          </a:p>
+          <a:p>
+            <a:r>
+              <a:t>CCA-F study path</a:t>
+            </a:r>
+          </a:p>
+          <a:p>
+            <a:r>
+              <a:t>EXAM-STUDY-PATH.md - notebook -&gt; CCA-F domain -&gt; scenario mapping</a:t>
+            </a:r>
+          </a:p>
+          <a:p>
+            <a:r>
+              <a:t>Anthropic Academy</a:t>
+            </a:r>
+          </a:p>
+          <a:p>
+            <a:r>
+              <a:t>anthropic.skilljar.com - free courses, official Practice Exam</a:t>
+            </a:r>
+          </a:p>
+        </p:txBody>
+      </p:sp>
+      <p:sp>
+        <p:nvSpPr>
+          <p:cNvPr id="4" name="Text Placeholder 3"/>
+          <p:cNvSpPr>
+            <a:spLocks noGrp="1"/>
+          </p:cNvSpPr>
+          <p:nvPr>
+            <p:ph type="body" idx="17" sz="quarter"/>
+          </p:nvPr>
+        </p:nvSpPr>
+        <p:spPr/>
+        <p:txBody>
+          <a:bodyPr/>
+          <a:lstStyle/>
+          <a:p/>
+        </p:txBody>
+      </p:sp>
+      <p:sp>
+        <p:nvSpPr>
+          <p:cNvPr id="5" name="Text Placeholder 4"/>
+          <p:cNvSpPr>
+            <a:spLocks noGrp="1"/>
+          </p:cNvSpPr>
+          <p:nvPr>
+            <p:ph type="body" idx="19" sz="quarter"/>
+          </p:nvPr>
+        </p:nvSpPr>
+        <p:spPr/>
+        <p:txBody>
+          <a:bodyPr/>
+          <a:lstStyle/>
+          <a:p/>
+        </p:txBody>
+      </p:sp>
+      <p:sp>
+        <p:nvSpPr>
+          <p:cNvPr id="6" name="Text Placeholder 5"/>
+          <p:cNvSpPr>
+            <a:spLocks noGrp="1"/>
+          </p:cNvSpPr>
+          <p:nvPr>
+            <p:ph type="body" idx="21" sz="quarter"/>
+          </p:nvPr>
+        </p:nvSpPr>
+        <p:spPr/>
+        <p:txBody>
+          <a:bodyPr/>
+          <a:lstStyle/>
+          <a:p/>
+        </p:txBody>
+      </p:sp>
+      <p:sp>
+        <p:nvSpPr>
+          <p:cNvPr id="7" name="Picture Placeholder 6"/>
+          <p:cNvSpPr>
+            <a:spLocks noGrp="1"/>
+          </p:cNvSpPr>
+          <p:nvPr>
+            <p:ph type="pic" idx="22" sz="quarter"/>
+          </p:nvPr>
+        </p:nvSpPr>
+        <p:spPr/>
+      </p:sp>
+      <p:sp>
+        <p:nvSpPr>
+          <p:cNvPr id="8" name="Picture Placeholder 7"/>
+          <p:cNvSpPr>
+            <a:spLocks noGrp="1"/>
+          </p:cNvSpPr>
+          <p:nvPr>
+            <p:ph type="pic" idx="23" sz="quarter"/>
+          </p:nvPr>
+        </p:nvSpPr>
+        <p:spPr/>
+      </p:sp>
+      <p:sp>
+        <p:nvSpPr>
+          <p:cNvPr id="9" name="Picture Placeholder 8"/>
+          <p:cNvSpPr>
+            <a:spLocks noGrp="1"/>
+          </p:cNvSpPr>
+          <p:nvPr>
+            <p:ph type="pic" idx="24" sz="quarter"/>
+          </p:nvPr>
+        </p:nvSpPr>
+        <p:spPr/>
+      </p:sp>
+      <p:sp>
+        <p:nvSpPr>
+          <p:cNvPr id="10" name="Picture Placeholder 9"/>
+          <p:cNvSpPr>
+            <a:spLocks noGrp="1"/>
+          </p:cNvSpPr>
+          <p:nvPr>
+            <p:ph type="pic" idx="25" sz="quarter"/>
+          </p:nvPr>
+        </p:nvSpPr>
+        <p:spPr/>
+      </p:sp>
+    </p:spTree>
+  </p:cSld>
+  <p:clrMapOvr>
+    <a:masterClrMapping/>
+  </p:clrMapOvr>
+</p:sld>
+</file>
+
+<file path=ppt/slides/slide48.xml><?xml version="1.0" encoding="utf-8"?>
+<p:sld xmlns:a="http://schemas.openxmlformats.org/drawingml/2006/main" xmlns:p="http://schemas.openxmlformats.org/presentationml/2006/main" xmlns:r="http://schemas.openxmlformats.org/officeDocument/2006/relationships">
+  <p:cSld>
+    <p:spTree>
+      <p:nvGrpSpPr>
+        <p:cNvPr id="1" name=""/>
+        <p:cNvGrpSpPr/>
+        <p:nvPr/>
+      </p:nvGrpSpPr>
+      <p:grpSpPr/>
+      <p:sp>
+        <p:nvSpPr>
+          <p:cNvPr id="2" name="Title 1"/>
+          <p:cNvSpPr>
+            <a:spLocks noGrp="1"/>
+          </p:cNvSpPr>
+          <p:nvPr>
+            <p:ph type="title"/>
+          </p:nvPr>
+        </p:nvSpPr>
+        <p:spPr/>
+        <p:txBody>
+          <a:bodyPr/>
+          <a:lstStyle/>
+          <a:p>
+            <a:r>
+              <a:t>Final Q&amp;A (10 min)</a:t>
+            </a:r>
+          </a:p>
+        </p:txBody>
+      </p:sp>
+      <p:sp>
+        <p:nvSpPr>
+          <p:cNvPr id="3" name="Content Placeholder 2"/>
+          <p:cNvSpPr>
+            <a:spLocks noGrp="1"/>
+          </p:cNvSpPr>
+          <p:nvPr>
+            <p:ph idx="1"/>
+          </p:nvPr>
+        </p:nvSpPr>
+        <p:spPr/>
+        <p:txBody>
+          <a:bodyPr wrap="square"/>
+          <a:lstStyle/>
+          <a:p>
+            <a:r>
+              <a:t>How do I monitor an agent in production?</a:t>
+            </a:r>
+          </a:p>
+          <a:p>
+            <a:r>
+              <a:t>When do I split a monolithic agent into coordinator + subagents?</a:t>
+            </a:r>
+          </a:p>
+          <a:p>
+            <a:r>
+              <a:t>What is the cost story for prompt caching?</a:t>
+            </a:r>
+          </a:p>
+          <a:p>
+            <a:r>
+              <a:t>How do I know when I am ready to sit the exam?</a:t>
+            </a:r>
+          </a:p>
+          <a:p>
+            <a:r>
+              <a:t>What is the renewal path for CCA-F?</a:t>
+            </a:r>
+          </a:p>
+        </p:txBody>
+      </p:sp>
+    </p:spTree>
+  </p:cSld>
+  <p:clrMapOvr>
+    <a:masterClrMapping/>
+  </p:clrMapOvr>
+</p:sld>
+</file>
+
+<file path=ppt/slides/slide49.xml><?xml version="1.0" encoding="utf-8"?>
+<p:sld xmlns:a="http://schemas.openxmlformats.org/drawingml/2006/main" xmlns:p="http://schemas.openxmlformats.org/presentationml/2006/main" xmlns:r="http://schemas.openxmlformats.org/officeDocument/2006/relationships">
+  <p:cSld>
+    <p:spTree>
+      <p:nvGrpSpPr>
+        <p:cNvPr id="1" name=""/>
+        <p:cNvGrpSpPr/>
+        <p:nvPr/>
+      </p:nvGrpSpPr>
+      <p:grpSpPr/>
+      <p:sp>
+        <p:nvSpPr>
+          <p:cNvPr id="2" name="Title 1"/>
+          <p:cNvSpPr>
+            <a:spLocks noGrp="1"/>
+          </p:cNvSpPr>
+          <p:nvPr>
+            <p:ph type="ctrTitle"/>
+          </p:nvPr>
+        </p:nvSpPr>
+        <p:spPr/>
+        <p:txBody>
+          <a:bodyPr/>
+          <a:lstStyle/>
+          <a:p>
+            <a:r>
+              <a:t>Thank you</a:t>
+            </a:r>
+          </a:p>
+        </p:txBody>
+      </p:sp>
+      <p:sp>
+        <p:nvSpPr>
+          <p:cNvPr id="3" name="Subtitle 2"/>
+          <p:cNvSpPr>
+            <a:spLocks noGrp="1"/>
+          </p:cNvSpPr>
+          <p:nvPr>
+            <p:ph type="subTitle" idx="1"/>
+          </p:nvPr>
+        </p:nvSpPr>
+        <p:spPr/>
+        <p:txBody>
+          <a:bodyPr wrap="square"/>
+          <a:lstStyle/>
+          <a:p>
+            <a:r>
+              <a:t>Tim Warner  |  techtrainertim.com</a:t>
+            </a:r>
+          </a:p>
+          <a:p>
+            <a:r>
+              <a:t>github.com/timothywarner-org/claude-architect</a:t>
+            </a:r>
+          </a:p>
+          <a:p/>
+          <a:p>
+            <a:r>
+              <a:t>Memento mori. Also, ship the PR.</a:t>
             </a:r>
           </a:p>
         </p:txBody>
@@ -46491,7 +47458,7 @@
           <a:lstStyle/>
           <a:p>
             <a:r>
-              <a:t>SEGMENT 01</a:t>
+              <a:t>Segment 1: Building AI Agents That Use Tools</a:t>
             </a:r>
           </a:p>
         </p:txBody>
@@ -46547,26 +47514,32 @@
         </p:nvSpPr>
         <p:spPr/>
         <p:txBody>
-          <a:bodyPr/>
+          <a:bodyPr wrap="square"/>
           <a:lstStyle/>
           <a:p>
             <a:r>
-              <a:t>A customer support agent with backend tools</a:t>
-            </a:r>
-          </a:p>
-          <a:p>
-            <a:r>
-              <a:t>Hook-enforced policy (refund cap, prerequisite checks)</a:t>
-            </a:r>
-          </a:p>
-          <a:p>
-            <a:r>
-              <a:t>Structured escalation to human review</a:t>
-            </a:r>
-          </a:p>
-          <a:p>
-            <a:r>
-              <a:t>By end of segment: you can sketch any agent topology</a:t>
+              <a:t>A customer support agent with 4 tools (lookup + refund + escalate)</a:t>
+            </a:r>
+          </a:p>
+          <a:p>
+            <a:r>
+              <a:t>Hook-enforced policy - the $500 refund cap can't be talked around</a:t>
+            </a:r>
+          </a:p>
+          <a:p>
+            <a:r>
+              <a:t>Structured escalation to human review with a typed summary</a:t>
+            </a:r>
+          </a:p>
+          <a:p>
+            <a:r>
+              <a:t>Coordinator + subagent isolation demo</a:t>
+            </a:r>
+          </a:p>
+          <a:p/>
+          <a:p>
+            <a:r>
+              <a:t>By the end of the segment: you can sketch any agent topology</a:t>
             </a:r>
           </a:p>
         </p:txBody>
@@ -46622,37 +47595,37 @@
         </p:nvSpPr>
         <p:spPr/>
         <p:txBody>
-          <a:bodyPr/>
+          <a:bodyPr wrap="square"/>
           <a:lstStyle/>
           <a:p>
             <a:r>
-              <a:t>Send request -&gt; model emits content + stop_reason</a:t>
-            </a:r>
-          </a:p>
-          <a:p>
-            <a:r>
-              <a:t>Read stop_reason -&gt; branch</a:t>
-            </a:r>
-          </a:p>
-          <a:p>
-            <a:r>
-              <a:t>tool_use? Execute tool, append tool_result, loop</a:t>
-            </a:r>
-          </a:p>
-          <a:p>
-            <a:r>
-              <a:t>end_turn? Return to user, done</a:t>
-            </a:r>
-          </a:p>
-          <a:p>
-            <a:r>
-              <a:t>pause_turn? Resume in next request</a:t>
+              <a:t>1. Send request - model returns content + stop_reason</a:t>
+            </a:r>
+          </a:p>
+          <a:p>
+            <a:r>
+              <a:t>2. Read stop_reason - branch on the value, never on prose</a:t>
+            </a:r>
+          </a:p>
+          <a:p>
+            <a:r>
+              <a:t>3. tool_use? Execute tool, append tool_result, loop</a:t>
+            </a:r>
+          </a:p>
+          <a:p>
+            <a:r>
+              <a:t>4. end_turn? Return to user, done</a:t>
+            </a:r>
+          </a:p>
+          <a:p>
+            <a:r>
+              <a:t>5. pause_turn? Resume in the next request, no state change</a:t>
             </a:r>
           </a:p>
           <a:p/>
           <a:p>
             <a:r>
-              <a:t>Never parse natural language to detect completion.</a:t>
+              <a:t>Six stop_reason values: end_turn, max_tokens, stop_sequence, tool_use, pause_turn, refusal</a:t>
             </a:r>
           </a:p>
         </p:txBody>
@@ -46708,7 +47681,7 @@
         </p:nvSpPr>
         <p:spPr/>
         <p:txBody>
-          <a:bodyPr/>
+          <a:bodyPr wrap="square"/>
           <a:lstStyle/>
           <a:p>
             <a:r>
@@ -46717,12 +47690,12 @@
           </a:p>
           <a:p>
             <a:r>
-              <a:t>Subagents get isolated contexts via the Task tool</a:t>
-            </a:r>
-          </a:p>
-          <a:p>
-            <a:r>
-              <a:t>Subagent returns its final answer to the parent, not its working notes</a:t>
+              <a:t>Subagents get ISOLATED contexts via the Task tool</a:t>
+            </a:r>
+          </a:p>
+          <a:p>
+            <a:r>
+              <a:t>Subagent returns its FINAL answer to the parent, not its working notes</a:t>
             </a:r>
           </a:p>
           <a:p>
@@ -46730,9 +47703,10 @@
               <a:t>Split when: own success criteria, own tool subset, own context discipline</a:t>
             </a:r>
           </a:p>
-          <a:p>
-            <a:r>
-              <a:t>Don't split for splitting's sake. Two coordinators chatting = one slow agent.</a:t>
+          <a:p/>
+          <a:p>
+            <a:r>
+              <a:t>Don't split for splitting's sake - two coordinators chatting is one slow agent</a:t>
             </a:r>
           </a:p>
         </p:txBody>
@@ -46771,7 +47745,7 @@
           <a:lstStyle/>
           <a:p>
             <a:r>
-              <a:t>Hooks: deterministic guarantees</a:t>
+              <a:t>Hooks - deterministic guarantees</a:t>
             </a:r>
           </a:p>
         </p:txBody>
@@ -46788,26 +47762,26 @@
         </p:nvSpPr>
         <p:spPr/>
         <p:txBody>
-          <a:bodyPr/>
+          <a:bodyPr wrap="square"/>
           <a:lstStyle/>
           <a:p>
             <a:r>
-              <a:t>PreToolUse  - gate a call before it runs</a:t>
-            </a:r>
-          </a:p>
-          <a:p>
-            <a:r>
-              <a:t>PostToolUse - audit, transform, log</a:t>
-            </a:r>
-          </a:p>
-          <a:p>
-            <a:r>
-              <a:t>SessionStart - inject context</a:t>
-            </a:r>
-          </a:p>
-          <a:p>
-            <a:r>
-              <a:t>Stop        - final verification</a:t>
+              <a:t>PreToolUse - gate a call BEFORE it runs (the bouncer)</a:t>
+            </a:r>
+          </a:p>
+          <a:p>
+            <a:r>
+              <a:t>PostToolUse - audit, transform, log AFTER (the auditor)</a:t>
+            </a:r>
+          </a:p>
+          <a:p>
+            <a:r>
+              <a:t>SessionStart - inject context (the briefing room)</a:t>
+            </a:r>
+          </a:p>
+          <a:p>
+            <a:r>
+              <a:t>Stop - final verification before returning to user</a:t>
             </a:r>
           </a:p>
           <a:p/>

--- a/slides/warner-claude-architect-may-2026.pptx
+++ b/slides/warner-claude-architect-may-2026.pptx
@@ -59,6 +59,8 @@
     <p:sldId id="302" r:id="rId55"/>
     <p:sldId id="303" r:id="rId56"/>
     <p:sldId id="304" r:id="rId57"/>
+    <p:sldId id="305" r:id="rId58"/>
+    <p:sldId id="306" r:id="rId59"/>
   </p:sldIdLst>
   <p:sldSz cx="12192000" cy="6858000"/>
   <p:notesSz cx="6858000" cy="9144000"/>
@@ -570,7 +572,17 @@
           <a:lstStyle/>
           <a:p>
             <a:r>
-              <a:t>Cold open. This is a skills-first production-architecture course. Mention CCA-F (Anthropic's certification) but do NOT teach to exam items. Set expectations: heavy on live demos, light on slides. The notebooks ARE the course; slides are the scaffolding.</a:t>
+              <a:t>FRAMER: This is the cold open. One slide, one job - tell the room what they showed up for and what they walk away with.</a:t>
+            </a:r>
+          </a:p>
+          <a:p>
+            <a:r>
+              <a:t>Welcome to Claude Architect Foundations. Four hours, four segments, five teaching notebooks plus one self-study deep dive. This is a skills-first course - we build production-grade agents, tool surfaces, and structured-extraction pipelines using the same patterns that Anthropic teaches in their official cookbook. We cover the CCA-F certification at the end, but we earn that conversation by shipping the skills first.</a:t>
+            </a:r>
+          </a:p>
+          <a:p>
+            <a:r>
+              <a:t>You will write Python. You will branch on stop_reason. You will register MCP servers. You will force schema-conformant output via tool_choice. By the end of segment 4 you will have rebuilt every pattern this course teaches inside notebooks that run against the live API. No slideware demos. No hand-waving.</a:t>
             </a:r>
           </a:p>
         </p:txBody>
@@ -640,7 +652,27 @@
           <a:lstStyle/>
           <a:p>
             <a:r>
-              <a:t>Live demo, 15 minutes. The aha moment is when the hook fires and the model re-plans to call escalate_to_human with ticket ESC-9001. Have a backup screenshot ready in case the API hiccups. Cookbook reference for further study: claude-cookbooks-main/tool_use/customer_service_agent.ipynb.</a:t>
+              <a:t>FRAMER: Live demo, 15 minutes. The notebook we'll run is segment-1-customer-support-agent.ipynb. Three beats - happy path, hook block, escalation.</a:t>
+            </a:r>
+          </a:p>
+          <a:p>
+            <a:r>
+              <a:t>What you'll see: I'll open the notebook and walk the four tool definitions first. Then we run Scenario A - the customer asks for an $80 refund on an in-cap order. The agent calls get_customer, lookup_order, process_refund, and closes with end_turn. Happy path, no hook needed.</a:t>
+            </a:r>
+          </a:p>
+          <a:p>
+            <a:r>
+              <a:t>Then I add the PreToolUse hook from hooks-example.py and re-run with Scenario B - a $750 refund that exceeds the $500 cap. The hook fires, blocks the call, returns a structured error to the model. Watch what happens next: the model receives the error, recognizes "I can't do this directly," and pivots to escalate_to_human with ticket ESC-9001. That re-planning moment is the aha beat. Have eyes on the chat at that point.</a:t>
+            </a:r>
+          </a:p>
+          <a:p>
+            <a:r>
+              <a:t>Last beat - I'll scroll to the bottom of the notebook for the coordinator-subagent demo. Parent agent delegates a customer-lookup task to a subagent. The subagent's working notes never leak into the parent's context. Final answer comes back as a typed dict.</a:t>
+            </a:r>
+          </a:p>
+          <a:p>
+            <a:r>
+              <a:t>If the live API hiccups, I have a screenshot ready. Cookbook reference for further study after class: claude-cookbooks-main/tool_use/customer_service_agent.ipynb.</a:t>
             </a:r>
           </a:p>
         </p:txBody>
@@ -710,7 +742,37 @@
           <a:lstStyle/>
           <a:p>
             <a:r>
-              <a:t>Walk the chat for 90 seconds, then share 2-3 designs out loud. Reinforce: tool descriptions beat tool names, isolation beats shared context, ~5 tools per agent is the floor before selection accuracy degrades.</a:t>
+              <a:t>FRAMER: Five-minute exercise. Take what you just saw and apply it to a new scenario - Developer Productivity. Sketch, don't code.</a:t>
+            </a:r>
+          </a:p>
+          <a:p>
+            <a:r>
+              <a:t>[Sketch architecture for a Developer Productivity scenario]: Imagine a coding assistant that helps a developer review a pull request. What does the architecture look like?</a:t>
+            </a:r>
+          </a:p>
+          <a:p>
+            <a:r>
+              <a:t>[On paper or in chat: coordinator + 3 subagents + tool scope per agent]: One coordinator that talks to the developer. Three subagents underneath. Pick the right split.</a:t>
+            </a:r>
+          </a:p>
+          <a:p>
+            <a:r>
+              <a:t>[What does each subagent specialize in?]: One reads diffs. One runs tests. One checks the style guide. Or something else. Justify the boundaries.</a:t>
+            </a:r>
+          </a:p>
+          <a:p>
+            <a:r>
+              <a:t>[What is each subagent's success criterion?]: The boundary is meaningful only if each subagent has its own success criterion. If two subagents return "looks good to me" - they're one agent.</a:t>
+            </a:r>
+          </a:p>
+          <a:p>
+            <a:r>
+              <a:t>[What tools does each one get? Cap each at ~5.]: Above five and selection accuracy degrades. Cap, scope, justify.</a:t>
+            </a:r>
+          </a:p>
+          <a:p>
+            <a:r>
+              <a:t>Walk the chat for 90 seconds, then share two or three designs aloud. Reinforce the takeaway: tool descriptions beat tool names, isolation beats shared context, ~5 tools per agent is the soft cap.</a:t>
             </a:r>
           </a:p>
         </p:txBody>
@@ -780,7 +842,32 @@
           <a:lstStyle/>
           <a:p>
             <a:r>
-              <a:t>Bridge: 'You just built an agent that decides what to do. Next we go one level deeper - into the tools themselves and the Claude Code surface where you author them on a real team.'</a:t>
+              <a:t>FRAMER: Segment 1 in three sentences. Each takeaway is a CCA-F exam beat in disguise.</a:t>
+            </a:r>
+          </a:p>
+          <a:p>
+            <a:r>
+              <a:t>[Branch on stop_reason, never on natural-language signals]: The dispatcher in your agent code reads resp.stop_reason and matches on a closed set of six values. Anything else is fragile.</a:t>
+            </a:r>
+          </a:p>
+          <a:p>
+            <a:r>
+              <a:t>[Coordinator + isolated subagents beats one giant context]: When a subtask has its own success criteria, its own tool subset, and its own context discipline - split. Otherwise don't.</a:t>
+            </a:r>
+          </a:p>
+          <a:p>
+            <a:r>
+              <a:t>[Hooks turn 'should' into 'must' - the prompt advises, the hook enforces]: Business invariants live in hooks. Conventions live in prompts. Don't confuse them.</a:t>
+            </a:r>
+          </a:p>
+          <a:p>
+            <a:r>
+              <a:t>Bridge to Segment 2: "You just built an agent that decides what to do. Next we go one level deeper - into the tools themselves and the Claude Code surface where you author them on a real team."</a:t>
+            </a:r>
+          </a:p>
+          <a:p>
+            <a:r>
+              <a:t>CCA-F EXAM TIP: Three of the ten weighted practice questions in Segment 4 are Domain 1 questions. If you can recite these three takeaways without hesitation, you're set for one-third of Segment 4.</a:t>
             </a:r>
           </a:p>
         </p:txBody>
@@ -850,7 +937,12 @@
           <a:lstStyle/>
           <a:p>
             <a:r>
-              <a:t>Domains 2 + 3. 50 minutes. Combined 38% of exam weight - the biggest pairing on the blueprint. Two demos: MCP config walkthrough, claude -p headless mode.</a:t>
+              <a:t>FRAMER: Section divider for Segment 2. The biggest single chunk of the exam - two domains, one segment, 38% combined.</a:t>
+            </a:r>
+          </a:p>
+          <a:p>
+            <a:r>
+              <a:t>Segment 2 covers Domain 2 (Tool Design and MCP Integration, 18%) and Domain 3 (Claude Code Configuration and Workflows, 20%). Combined that's 38% of the cert - more than D1 alone. Two demos in this segment. Demo A is the MCP config walkthrough, Demo B is claude -p headless mode. Notebook is segment-2-tool-design-and-mcp.ipynb.</a:t>
             </a:r>
           </a:p>
         </p:txBody>
@@ -920,7 +1012,37 @@
           <a:lstStyle/>
           <a:p>
             <a:r>
-              <a:t>Explain the merge. Tools are the verbs; Claude Code is where you orchestrate them. Different domains in the blueprint, same conversation in real life. Two demos in this segment - MCP config walkthrough first, then claude -p headless second.</a:t>
+              <a:t>FRAMER: Explain the merge. Two domains, one segment. Different blueprint categories, same conversation in real life.</a:t>
+            </a:r>
+          </a:p>
+          <a:p>
+            <a:r>
+              <a:t>[Domain 2 - Tool Design and MCP Integration (18%)]: Tool descriptions, structured errors, the four tool_choice modes, MCP server config across three transports.</a:t>
+            </a:r>
+          </a:p>
+          <a:p>
+            <a:r>
+              <a:t>[Domain 3 - Claude Code Configuration and Workflows (20%)]: CLAUDE.md hierarchy, slash commands, skills, plan mode, claude -p headless.</a:t>
+            </a:r>
+          </a:p>
+          <a:p>
+            <a:r>
+              <a:t>[Combined = 38% of the cert, the biggest single chunk]: D1 is 27% alone but D2 plus D3 is 38%. Weight your prep accordingly.</a:t>
+            </a:r>
+          </a:p>
+          <a:p>
+            <a:r>
+              <a:t>[Why combined? Claude Code IS the primary MCP-consuming surface]: Claude Code reads .mcp.json at startup. The same .mcp.json shape powers your custom agents. The contract is shared.</a:t>
+            </a:r>
+          </a:p>
+          <a:p>
+            <a:r>
+              <a:t>[You cannot teach one without the other in production]: A tool description that lives in your codebase informs an MCP server that powers a Claude Code workflow. The boundaries on the exam are clean; in production they're entangled.</a:t>
+            </a:r>
+          </a:p>
+          <a:p>
+            <a:r>
+              <a:t>CCA-F EXAM TIP: When a scenario question mentions "developer productivity" or "code review" alongside MCP, both D2 and D3 are usually in play. Read carefully - the answer often hinges on which layer the question is actually probing.</a:t>
             </a:r>
           </a:p>
         </p:txBody>
@@ -990,7 +1112,37 @@
           <a:lstStyle/>
           <a:p>
             <a:r>
-              <a:t>A tool named get_data with description 'Fetch customer record by ID, returns name, email, status, lifetime value' beats one named getCustomerRecordById with description 'Gets data.' Write descriptions like you're onboarding a junior engineer. The model reads descriptions, not your variable-naming convention.</a:t>
+              <a:t>FRAMER: Tool definitions in three fields. Get the third field right or none of the other two matter.</a:t>
+            </a:r>
+          </a:p>
+          <a:p>
+            <a:r>
+              <a:t>[name - how the model invokes the tool]: A label. The model emits the name in its tool_use block. Pick something readable.</a:t>
+            </a:r>
+          </a:p>
+          <a:p>
+            <a:r>
+              <a:t>[description - STRONGLY recommended, drives tool selection]: This is the contract. The model picks tools based on descriptions, not names. "Fetch customer record by ID, returns name, email, status, lifetime value" beats "Gets customer data" every time.</a:t>
+            </a:r>
+          </a:p>
+          <a:p>
+            <a:r>
+              <a:t>[input_schema - JSON Schema draft 2020-12 (type, properties, required)]: The structural contract. Required fields are enforced; optional fields can be null. Use enum for closed value sets. Use additionalProperties: false for strict schemas.</a:t>
+            </a:r>
+          </a:p>
+          <a:p>
+            <a:r>
+              <a:t>[Optional: cache_control ephemeral (5m / 1h), strict: true]: cache_control on a tool definition lets you amortize the description tokens across calls. strict: true forces the schema to be exhaustively validated.</a:t>
+            </a:r>
+          </a:p>
+          <a:p>
+            <a:r>
+              <a:t>[Tool DESCRIPTIONS do the work, not tool NAMES]: This is the load-bearing pattern. Spend your writing time on descriptions. The name is just a label.</a:t>
+            </a:r>
+          </a:p>
+          <a:p>
+            <a:r>
+              <a:t>CCA-F EXAM TIP: When a scenario mentions that the model keeps picking the wrong tool, the answer is almost always that the descriptions are too vague or do not distinguish the tools well enough. Almost never the answer of renaming the tools.</a:t>
             </a:r>
           </a:p>
         </p:txBody>
@@ -1060,7 +1212,37 @@
           <a:lstStyle/>
           <a:p>
             <a:r>
-              <a:t>Thrown exceptions crash the agent. Structured errors let it recover. This is the entire reliability story for tools in one slide. The three categories we use: transient (retry with backoff), permanent (reformulate or surface), policy (escalate or change approach).</a:t>
+              <a:t>FRAMER: Tool errors are the reliability story for tools in one slide. Get the shape right and the model recovers gracefully. Get it wrong and the agent crashes.</a:t>
+            </a:r>
+          </a:p>
+          <a:p>
+            <a:r>
+              <a:t>[Anti-pattern: raise exceptions from tool implementations]: A raised exception crashes the agent. The model never sees the failure. Production agents need to recover from tool errors, not die from them.</a:t>
+            </a:r>
+          </a:p>
+          <a:p>
+            <a:r>
+              <a:t>[Anti-pattern: return empty strings on failure]: The model has no idea what happened. It can't distinguish "no results" from "the database is on fire." It will retry or make up an answer.</a:t>
+            </a:r>
+          </a:p>
+          <a:p>
+            <a:r>
+              <a:t>[Pattern: return tool_result with is_error: true]: The contract. The is_error flag is the signal the model uses to recognize a failure. Treat it as an HTTP status code.</a:t>
+            </a:r>
+          </a:p>
+          <a:p>
+            <a:r>
+              <a:t>[Add structured fields: errorCategory, isRetryable]: Three categories - transient (retry with backoff), permanent (reformulate or surface to the user), policy (escalate or change approach). isRetryable is the explicit yes/no.</a:t>
+            </a:r>
+          </a:p>
+          <a:p>
+            <a:r>
+              <a:t>[The model can then DECIDE: retry, fall back, or escalate]: This is the whole point. Give the model enough structured signal to choose the right recovery path.</a:t>
+            </a:r>
+          </a:p>
+          <a:p>
+            <a:r>
+              <a:t>CCA-F EXAM TIP: "How should this agent handle a flaky third-party API?" - the answer is structured tool_result with is_error and isRetryable, not an exception handler in the tool implementation.</a:t>
             </a:r>
           </a:p>
         </p:txBody>
@@ -1130,7 +1312,42 @@
           <a:lstStyle/>
           <a:p>
             <a:r>
-              <a:t>The traffic-light analogy from Segment 2.5: auto is green, any is green with a tow truck behind you, tool=X is a forced left turn, none is a red light. disable_parallel_tool_use lives INSIDE the tool_choice object, not as a top-level kwarg. Common multiple-choice trap.</a:t>
+              <a:t>FRAMER: Four tool_choice modes. Each one is a guarantee. Pick the right guarantee for the job.</a:t>
+            </a:r>
+          </a:p>
+          <a:p>
+            <a:r>
+              <a:t>[auto]: Model decides whether to call a tool. Default. May answer in prose. Pick when the model's judgment is the right call.</a:t>
+            </a:r>
+          </a:p>
+          <a:p>
+            <a:r>
+              <a:t>[any]: Model MUST call some tool, model picks which. Use when action is required - the user said "do something" and prose isn't acceptable.</a:t>
+            </a:r>
+          </a:p>
+          <a:p>
+            <a:r>
+              <a:t>[tool]: Model MUST call THIS specific tool. The structured-output cheat code. {type: tool, name: extract_X} is how you get schema-conformant output without parsing JSON.</a:t>
+            </a:r>
+          </a:p>
+          <a:p>
+            <a:r>
+              <a:t>[none]: Tools registered but model CANNOT call them. "Explain, don't act" turns. Useful in multi-step pipelines where you want narration without execution.</a:t>
+            </a:r>
+          </a:p>
+          <a:p>
+            <a:r>
+              <a:t>[The traffic-light analogy]: auto is a green light, any is a green light with a tow truck behind you (must move, you pick the lane), tool=X is a forced left turn, none is a red light.</a:t>
+            </a:r>
+          </a:p>
+          <a:p>
+            <a:r>
+              <a:t>[disable_parallel_tool_use]: Lives INSIDE the tool_choice object, not as a top-level kwarg. Setting it forces one tool call per turn. Useful for write-then-read or fetch-then-summarize patterns.</a:t>
+            </a:r>
+          </a:p>
+          <a:p>
+            <a:r>
+              <a:t>CCA-F EXAM TIP: A scenario where the agent must produce a specific JSON shape is forced tool_choice. A scenario where the agent must take SOME action but the verb is ambiguous is "any". The exam tests whether you can name the right mode.</a:t>
             </a:r>
           </a:p>
         </p:txBody>
@@ -1200,7 +1417,32 @@
           <a:lstStyle/>
           <a:p>
             <a:r>
-              <a:t>Mention the analyze_dependencies vs Grep anti-pattern: model defaults to built-in Grep if the custom tool description isn't specific enough. Description is the contract. Tool count is the soft cap.</a:t>
+              <a:t>FRAMER: Tool count has a soft cap. Production agents that exceed it get worse, not better.</a:t>
+            </a:r>
+          </a:p>
+          <a:p>
+            <a:r>
+              <a:t>[More tools = worse selection accuracy (well-documented effect)]: Above ~5 tools, the model starts picking incorrectly more often. Anthropic has published on this. It's not a hypothesis; it's a measurement.</a:t>
+            </a:r>
+          </a:p>
+          <a:p>
+            <a:r>
+              <a:t>[Beyond 5: split into subagents with scoped tool sets]: When you need more tools, you don't add to one agent - you split. Each subagent gets a focused tool surface.</a:t>
+            </a:r>
+          </a:p>
+          <a:p>
+            <a:r>
+              <a:t>[Specificity in descriptions beats quantity of tools]: Three opinionated tools beat ten vague ones. Always.</a:t>
+            </a:r>
+          </a:p>
+          <a:p>
+            <a:r>
+              <a:t>[Anti-pattern: dump 30 tools into one agent because 'flexibility']: This is the most common production failure mode. The agent becomes worse at every individual tool.</a:t>
+            </a:r>
+          </a:p>
+          <a:p>
+            <a:r>
+              <a:t>CCA-F EXAM TIP: When a scenario says "the agent has fifteen tools and is making poor selections," the right answer involves reducing the tool surface or splitting into subagents - not improving the prompt.</a:t>
             </a:r>
           </a:p>
         </p:txBody>
@@ -1270,7 +1512,37 @@
           <a:lstStyle/>
           <a:p>
             <a:r>
-              <a:t>Show repo's own .mcp.json in the demo. Four servers, three transports, env-var expansion for secrets. The pattern that scales: add a new MCP server to .mcp.json, every MCP-aware agent picks it up on the next list_tools call - no source change.</a:t>
+              <a:t>FRAMER: MCP server config is the SDK contract. Three transports, environment-variable expansion, one config file.</a:t>
+            </a:r>
+          </a:p>
+          <a:p>
+            <a:r>
+              <a:t>[Three transports: stdio, SSE, HTTP]: stdio launches a local subprocess. SSE and HTTP talk to remote servers over the network.</a:t>
+            </a:r>
+          </a:p>
+          <a:p>
+            <a:r>
+              <a:t>[stdio: command + args + env (local subprocess)]: The most common transport. The MCP client launches a subprocess and talks to it over stdin/stdout. env injects environment variables for that subprocess only.</a:t>
+            </a:r>
+          </a:p>
+          <a:p>
+            <a:r>
+              <a:t>[SSE / HTTP: type + url + headers (remote)]: For remote servers. Headers carry auth tokens. Use ${ENV_VAR} expansion so secrets never land in the config file.</a:t>
+            </a:r>
+          </a:p>
+          <a:p>
+            <a:r>
+              <a:t>[${ENV_VAR} expansion works in env, args, AND headers]: This is the production pattern. Your .mcp.json carries the SHAPE of the credential; the credential value lives in your environment.</a:t>
+            </a:r>
+          </a:p>
+          <a:p>
+            <a:r>
+              <a:t>[Project scope: ./.mcp.json    User scope: ~/.claude.json]: Project scope ships with the codebase. User scope is per-machine. Both layers can carry servers.</a:t>
+            </a:r>
+          </a:p>
+          <a:p>
+            <a:r>
+              <a:t>CCA-F EXAM TIP: The exam asks about secret management in MCP configs at least once. The answer is always env-var expansion, never inlining secrets.</a:t>
             </a:r>
           </a:p>
         </p:txBody>
@@ -1340,7 +1612,22 @@
           <a:lstStyle/>
           <a:p>
             <a:r>
-              <a:t>30-second bio. I teach from first principles. No glazing, no fluff. If they want production patterns and live demos, they're in the right room. Skip the resume part if pacing is tight; the website is the call-to-action.</a:t>
+              <a:t>FRAMER: 30-second bio. The room needs to know who they're spending four hours with.</a:t>
+            </a:r>
+          </a:p>
+          <a:p>
+            <a:r>
+              <a:t>I'm Tim Warner. Microsoft MVP focused on Azure AI, Pluralsight Principal Author with 200+ courses and over a million learners, O'Reilly Live Training instructor, and a senior content developer for Microsoft Press and Pearson. Twenty-eight years on the Microsoft stack. I teach Feynman-style - first principles, no fluff, real demos, push back on bad practice when I see it.</a:t>
+            </a:r>
+          </a:p>
+          <a:p>
+            <a:r>
+              <a:t>If you want production patterns and live builds, you're in the right room. If you want a slide deck full of architecture diagrams and zero code, you booked the wrong session.</a:t>
+            </a:r>
+          </a:p>
+          <a:p>
+            <a:r>
+              <a:t>techtrainertim.com is where the longer-form content lives. The repo for this course is github.com/timothywarner-org/claude-architect - clone it now if you haven't already.</a:t>
             </a:r>
           </a:p>
         </p:txBody>
@@ -1410,7 +1697,22 @@
           <a:lstStyle/>
           <a:p>
             <a:r>
-              <a:t>Live demo, 10 minutes. Open .mcp.json side-by-side with the notebook so learners see config-as-data. Mention that the file is the same shape Claude Code reads at startup - it's the SDK contract, not a Claude Code convention.</a:t>
+              <a:t>FRAMER: Demo A. Ten minutes on the repo's own .mcp.json. Show four servers, three transports, env-var expansion in three locations.</a:t>
+            </a:r>
+          </a:p>
+          <a:p>
+            <a:r>
+              <a:t>What you'll see: I'll open C:/github/claude-architect/.mcp.json in VS Code side-by-side with the segment-2 notebook. Walk it server by server. The filesystem server is stdio. The github server is stdio with a GITHUB_TOKEN env var. The context7 server is HTTP with an Authorization header. The internal-knowledge-base server is SSE with a bearer token.</a:t>
+            </a:r>
+          </a:p>
+          <a:p>
+            <a:r>
+              <a:t>What to watch for: when I unset GITHUB_TOKEN and re-launch, the github server fails CLEAR - it doesn't silently silently work with an empty token. The env-var expansion either resolves to a value or the server tells you it's missing.</a:t>
+            </a:r>
+          </a:p>
+          <a:p>
+            <a:r>
+              <a:t>After class, the same .mcp.json shape powers your own custom agents through the MCP Python SDK. The file is the SDK contract, not a Claude Code convention. That's why Segment 2.5 covers MCP list_tools discovery as the runtime counterpart.</a:t>
             </a:r>
           </a:p>
         </p:txBody>
@@ -1480,7 +1782,37 @@
           <a:lstStyle/>
           <a:p>
             <a:r>
-              <a:t>Load order matters. User and project are additive. Subtree on-demand keeps the token budget tight (don't load frontend rules when the agent is reading backend code). Local for personal preferences without polluting team conventions.</a:t>
+              <a:t>FRAMER: CLAUDE.md hierarchy is additive across four scopes. Load order matters; on-demand scopes keep the token budget tight.</a:t>
+            </a:r>
+          </a:p>
+          <a:p>
+            <a:r>
+              <a:t>[User     ~/.claude/CLAUDE.md     - your machine, every project]: Personal preferences and conventions that apply to everything you work on.</a:t>
+            </a:r>
+          </a:p>
+          <a:p>
+            <a:r>
+              <a:t>[Project  ./CLAUDE.md             - team conventions, in git]: Shipped with the repo. Every contributor inherits it. Code style, security policies, build commands.</a:t>
+            </a:r>
+          </a:p>
+          <a:p>
+            <a:r>
+              <a:t>[Subtree  ./&lt;subdir&gt;/CLAUDE.md    - loads on demand when files in subdir are read]: This is the cost optimization. Frontend rules don't load when the agent is reading backend code. Per-area context.</a:t>
+            </a:r>
+          </a:p>
+          <a:p>
+            <a:r>
+              <a:t>[Local    ./CLAUDE.local.md       - gitignored personal override]: Your overrides for THIS project that you don't want to commit. Often path-specific.</a:t>
+            </a:r>
+          </a:p>
+          <a:p>
+            <a:r>
+              <a:t>[Agent SDK: settingSources [user, project] loads both]: Programmatic agents (not Claude Code) load CLAUDE.md via settingSources. The default is project-only; user + project loads both layers.</a:t>
+            </a:r>
+          </a:p>
+          <a:p>
+            <a:r>
+              <a:t>CCA-F EXAM TIP: When the exam asks "where should this rule live," the answer maps to scope - shared with team = project, personal to me = user or local, area-specific = subtree.</a:t>
             </a:r>
           </a:p>
         </p:txBody>
@@ -1550,7 +1882,37 @@
           <a:lstStyle/>
           <a:p>
             <a:r>
-              <a:t>Three-second demo callout: git log --oneline -20 | claude -p 'summarize these recent commits'. One command, real value. Headless mode unlocks every CI/CD use case learners have but didn't know Claude Code supported.</a:t>
+              <a:t>FRAMER: Plan mode is the default. Headless mode is the CI/CD primitive. Both ship with Claude Code, both are exam-relevant.</a:t>
+            </a:r>
+          </a:p>
+          <a:p>
+            <a:r>
+              <a:t>[Plan mode   - interactive, proposes plan, waits for approval (default)]: You type, Claude proposes, you approve. Designed for the human-in-the-loop case.</a:t>
+            </a:r>
+          </a:p>
+          <a:p>
+            <a:r>
+              <a:t>[Headless    - claude -p 'prompt' - non-interactive, pipe-friendly]: One command, one prompt, one response. Designed for scripts and pipelines.</a:t>
+            </a:r>
+          </a:p>
+          <a:p>
+            <a:r>
+              <a:t>[--output-format json|stream-json for parsing]: Structured output so your pipeline can parse it. stream-json for live consumption, json for batch.</a:t>
+            </a:r>
+          </a:p>
+          <a:p>
+            <a:r>
+              <a:t>[--allowed-tools 'Read,Edit,Bash' to scope]: Restrict the tool surface for the pipeline run. Belt and suspenders for CI/CD safety.</a:t>
+            </a:r>
+          </a:p>
+          <a:p>
+            <a:r>
+              <a:t>[Headless is THE CI/CD answer - pre-commit hooks, PR review, release notes]: This is what unlocks Claude Code for automated workflows. Pre-commit hook that runs claude -p to lint your CHANGELOG. PR comment bot that runs claude -p on the diff. Release-notes generator from git log piped through claude -p.</a:t>
+            </a:r>
+          </a:p>
+          <a:p>
+            <a:r>
+              <a:t>CCA-F EXAM TIP: When a scenario mentions "CI/CD," "automated review," or "pipeline," the answer is almost always claude -p with --output-format json and --allowed-tools scoping.</a:t>
             </a:r>
           </a:p>
         </p:txBody>
@@ -1620,7 +1982,22 @@
           <a:lstStyle/>
           <a:p>
             <a:r>
-              <a:t>Live demo, 5 minutes. Short because it's the 'oh that's just a CLI' beat - the value is obvious once they see it. Have a fallback `claude -p` output saved as text in case the CLI hiccups.</a:t>
+              <a:t>FRAMER: Demo B. Five minutes. Show the headless CLI doing real work in a real shell.</a:t>
+            </a:r>
+          </a:p>
+          <a:p>
+            <a:r>
+              <a:t>What you'll see: I'll open this repo's own CLAUDE.md and walk the structure. Then I'll run `claude -p "audit this CLAUDE.md against the documented conventions"` in PowerShell. Claude reads CLAUDE.md, applies the conventions back against itself, and prints a structured audit.</a:t>
+            </a:r>
+          </a:p>
+          <a:p>
+            <a:r>
+              <a:t>What to watch for: the output is just text on stdout. Pipe it. Save it. Push it into a CI artifact. The pattern is `git log --oneline -20 | claude -p "summarize these commits for a release note"` - one command, real value, three seconds.</a:t>
+            </a:r>
+          </a:p>
+          <a:p>
+            <a:r>
+              <a:t>If the CLI hiccups, I have a saved transcript. Cookbook reference for further study: scripts/run-mcp-cli.ps1 in this repo shows the patterns for piping MCP-CLI work into headless mode.</a:t>
             </a:r>
           </a:p>
         </p:txBody>
@@ -1690,7 +2067,37 @@
           <a:lstStyle/>
           <a:p>
             <a:r>
-              <a:t>Target answer: project CLAUDE.md for shared (commit style, security), subtree CLAUDE.md for team-specific conventions, .claude/rules with paths: globs for language-specific lint rules. Hierarchy is the load-bearing concept.</a:t>
+              <a:t>FRAMER: Five-minute exercise. Design a CLAUDE.md hierarchy for a real 3-team monorepo. Sketch the file tree.</a:t>
+            </a:r>
+          </a:p>
+          <a:p>
+            <a:r>
+              <a:t>[Design a CLAUDE.md hierarchy for a 3-team monorepo]: The teams are backend (Go), frontend (React/TypeScript), and infra (Terraform). All in one repo.</a:t>
+            </a:r>
+          </a:p>
+          <a:p>
+            <a:r>
+              <a:t>[Teams: backend (Go), frontend (React/TS), infra (Terraform)]: Different languages, different toolchains, different conventions. One Claude Code session might touch all three.</a:t>
+            </a:r>
+          </a:p>
+          <a:p>
+            <a:r>
+              <a:t>[Each team has different conventions]: Go has gofmt and go vet. React has ESLint and Prettier. Terraform has tflint. Same repo, different lint contracts.</a:t>
+            </a:r>
+          </a:p>
+          <a:p>
+            <a:r>
+              <a:t>[Where does each rule go? User, project, subtree, or .claude/rules?]: Shared rules (commit style, security policies, no committing secrets) go in project CLAUDE.md. Team-specific rules go in subtree CLAUDE.md per directory.</a:t>
+            </a:r>
+          </a:p>
+          <a:p>
+            <a:r>
+              <a:t>[What goes in .claude/rules/ with paths: globs?]: Language-specific lint rules that should only fire on matching paths. Go rules with paths: backend/**/*.go.</a:t>
+            </a:r>
+          </a:p>
+          <a:p>
+            <a:r>
+              <a:t>Target answer: project CLAUDE.md for shared, subtree CLAUDE.md per team, .claude/rules with paths globs for lint rules. Hierarchy is the load-bearing concept.</a:t>
             </a:r>
           </a:p>
         </p:txBody>
@@ -1760,7 +2167,32 @@
           <a:lstStyle/>
           <a:p>
             <a:r>
-              <a:t>Bridge: 'Tools give the agent hands. Prompts and schemas decide what comes out. Before we get to structured output in Segment 3, take a 10-minute break - and if you want a deep dive between segments, Segment 2.5 ships as self-study.'</a:t>
+              <a:t>FRAMER: Segment 2 in three takeaways. Each one maps to a CCA-F question shape.</a:t>
+            </a:r>
+          </a:p>
+          <a:p>
+            <a:r>
+              <a:t>[Descriptions, not names, drive tool selection]: When the model picks wrong, the description is the lever. Always.</a:t>
+            </a:r>
+          </a:p>
+          <a:p>
+            <a:r>
+              <a:t>[.mcp.json - three transports, ${ENV} expansion, secrets in env never in file]: One config file, three transports, environment variables for everything sensitive. Memorize the shape.</a:t>
+            </a:r>
+          </a:p>
+          <a:p>
+            <a:r>
+              <a:t>[CLAUDE.md hierarchy is additive; claude -p is your CI/CD primitive]: Layered context loads additively. The headless CLI unlocks automation. Both are exam-relevant.</a:t>
+            </a:r>
+          </a:p>
+          <a:p>
+            <a:r>
+              <a:t>Bridge to Segment 3 (and the 10-minute break in between): "Tools give the agent hands. Prompts and schemas decide what comes out. Take ten minutes. If you want a deep dive between segments, segment-2-5-control-surfaces.ipynb is the off-clock self-study notebook - we'll preview it next."</a:t>
+            </a:r>
+          </a:p>
+          <a:p>
+            <a:r>
+              <a:t>CCA-F EXAM TIP: D2 + D3 = 38% of the exam. Six of the ten Segment 4 practice questions touch these two domains. If you can name the patterns above without prompting, you're well-prepared.</a:t>
             </a:r>
           </a:p>
         </p:txBody>
@@ -1830,7 +2262,27 @@
           <a:lstStyle/>
           <a:p>
             <a:r>
-              <a:t>Tell learners this is the notebook to re-walk if they're aiming at CCA-F. ~75 minutes if walked end to end against the live API. Not on the 4-hour clock. The Console asset surface section is brand new in 2026-05 and won't be in older study guides - this is where Tim's content has an edge.</a:t>
+              <a:t>FRAMER: One slide on the three tiers tools come from. The most common confusion in the room is about to be untangled.</a:t>
+            </a:r>
+          </a:p>
+          <a:p>
+            <a:r>
+              <a:t>[Tier 1 - Server tools]: Anthropic-hosted. You register them in your custom agent by type (bash_20250124, code_execution_20250522, web_search_20250305, text_editor_20250728, memory_20250818). The model invokes them; Anthropic executes them server-side. For some, like code_execution, the result lands inside the same response - no client tool loop required.</a:t>
+            </a:r>
+          </a:p>
+          <a:p>
+            <a:r>
+              <a:t>[Tier 2 - MCP tools]: You or a vendor host them. Discovered at runtime via the list_tools RPC. The pattern that scales by configuration - add a server to .mcp.json and every MCP-aware agent picks up its tools on the next discovery call.</a:t>
+            </a:r>
+          </a:p>
+          <a:p>
+            <a:r>
+              <a:t>[Tier 3 - Harness tools]: Claude Code's Read, Edit, Bash, Grep, Glob - implemented in TypeScript inside the harness process. They never appear in messages.create tools=[...]. You can't register them in a custom agent. Same noun (Bash) as tier 1, completely different runtime.</a:t>
+            </a:r>
+          </a:p>
+          <a:p>
+            <a:r>
+              <a:t>CCA-F EXAM TIP: When a scenario describes a custom agent that "uses Bash," check whether the answer choices are talking about tier 1 (bash_20250124 server tool) or tier 3 (Claude Code's Bash). They're not interchangeable - the wrong one is always a distractor.</a:t>
             </a:r>
           </a:p>
         </p:txBody>
@@ -1900,7 +2352,42 @@
           <a:lstStyle/>
           <a:p>
             <a:r>
-              <a:t>Domains 4 + 5. 50 minutes. Combined 35% of exam weight. Live build: invoice extractor with Pydantic + forced tool_choice + validation retry.</a:t>
+              <a:t>FRAMER: The Segment 2.5 self-study notebook is off the 4-hour clock but on the CCA-F radar. Tell the room what's in it and why to walk it.</a:t>
+            </a:r>
+          </a:p>
+          <a:p>
+            <a:r>
+              <a:t>[notebooks/segment-2-5-control-surfaces.ipynb]: The deep-dive notebook. ~75 minutes if walked end to end against the live API.</a:t>
+            </a:r>
+          </a:p>
+          <a:p>
+            <a:r>
+              <a:t>[Three tiers tools come from - server tools, MCP, Claude Code harness]: The previous slide expanded.</a:t>
+            </a:r>
+          </a:p>
+          <a:p>
+            <a:r>
+              <a:t>[All four tool_choice modes + disable_parallel_tool_use]: Every mode demonstrated live, with output proving the contract.</a:t>
+            </a:r>
+          </a:p>
+          <a:p>
+            <a:r>
+              <a:t>[stop_sequences + max_tokens as control levers + pause_turn + refusal]: The full stop_reason surface, including the rare values most learners have never seen.</a:t>
+            </a:r>
+          </a:p>
+          <a:p>
+            <a:r>
+              <a:t>[MCP list_tools runtime discovery]: The protocol-level discovery primitive.</a:t>
+            </a:r>
+          </a:p>
+          <a:p>
+            <a:r>
+              <a:t>[The live Claude Console asset surface - memory_stores, vaults, agents, sessions]: Brand new in 2026-05. Won't be in older study guides. The notebook hits the live SDK against memory_stores.list(), vaults.list(), agents.list(), and shows the session-as-runtime pattern.</a:t>
+            </a:r>
+          </a:p>
+          <a:p>
+            <a:r>
+              <a:t>[Highest exam-objective density in the repo. Walk it for CCA-F prep.]: If you only re-walk one notebook before the exam, walk this one. It compresses every domain into one teaching surface.</a:t>
             </a:r>
           </a:p>
         </p:txBody>
@@ -1970,7 +2457,12 @@
           <a:lstStyle/>
           <a:p>
             <a:r>
-              <a:t>The merge is honest to production. A well-typed extraction call inside a 50-turn conversation needs both Domain 4 (the call itself) and Domain 5 (context pinning so turn 47 still has the case facts).</a:t>
+              <a:t>FRAMER: Section divider for Segment 3. Two more domains, one segment, 35% combined.</a:t>
+            </a:r>
+          </a:p>
+          <a:p>
+            <a:r>
+              <a:t>Segment 3 covers Domain 4 (Prompt Engineering and Structured Output, 20%) and Domain 5 (Context Management and Reliability, 15%). The live build is segment-3-invoice-extractor.ipynb - a Pydantic-schema-driven extraction pipeline with forced tool_choice and a validation retry loop. This is the longest demo of the day; if you've ever wanted to extract structured JSON from messy text, the next 50 minutes are for you.</a:t>
             </a:r>
           </a:p>
         </p:txBody>
@@ -2040,7 +2532,37 @@
           <a:lstStyle/>
           <a:p>
             <a:r>
-              <a:t>Set expectations: this is the LONGEST live build (~20 min). Highest demo risk. If anything goes sideways, switch to the markdown walkthrough next to the notebook. Sonnet 4.6 for this segment - the one place reasoning depth earns its tokens.</a:t>
+              <a:t>FRAMER: Why both domains in one segment. They're entangled in production.</a:t>
+            </a:r>
+          </a:p>
+          <a:p>
+            <a:r>
+              <a:t>[Domain 4 - Prompt Engineering and Structured Output (20%)]: Forced tool_choice, Pydantic schemas, few-shot examples, validation retry.</a:t>
+            </a:r>
+          </a:p>
+          <a:p>
+            <a:r>
+              <a:t>[Domain 5 - Context Management and Reliability (15%)]: Context pinning across long sessions, escalation design, structured error propagation.</a:t>
+            </a:r>
+          </a:p>
+          <a:p>
+            <a:r>
+              <a:t>[Combined = 35% of the cert]: Not as big as D2+D3 but still over a third of the exam.</a:t>
+            </a:r>
+          </a:p>
+          <a:p>
+            <a:r>
+              <a:t>[Why combined? Structured extraction without context discipline is fragile]: A well-typed extraction call inside a 50-turn conversation needs context pinning OR the case facts drift away. The two domains are one workflow.</a:t>
+            </a:r>
+          </a:p>
+          <a:p>
+            <a:r>
+              <a:t>[Long sessions need context pinning; structured output needs validation retry]: Both are the same architecture - a deterministic shell around a non-deterministic model. Different surface, same pattern.</a:t>
+            </a:r>
+          </a:p>
+          <a:p>
+            <a:r>
+              <a:t>CCA-F EXAM TIP: When a scenario describes "extraction quality degrading over time" or "the model forgets the case facts," D5 is in play even if the question feels like D4.</a:t>
             </a:r>
           </a:p>
         </p:txBody>
@@ -2110,7 +2632,32 @@
           <a:lstStyle/>
           <a:p>
             <a:r>
-              <a:t>Tell them where the slides and code live: github.com/timothywarner-org/claude-architect. Call out Segment 2.5 as the self-study deep dive - not on the 4-hour clock, but the highest exam-objective density in the repo. Cert briefing is the capstone (Segment 4), not the lead. We earn the cert talk after the skills.</a:t>
+              <a:t>FRAMER: The four-hour arc in one slide. Four segments, 50 minutes each, with 10-minute breaks between them.</a:t>
+            </a:r>
+          </a:p>
+          <a:p>
+            <a:r>
+              <a:t>[Segment 1 - Building AI Agents That Use Tools]: Domain 1 of the CCA-F blueprint, 27% of the exam, the single heaviest domain. Live build: customer support agent with hook-enforced policy.</a:t>
+            </a:r>
+          </a:p>
+          <a:p>
+            <a:r>
+              <a:t>[Segment 2 - Tool Design, Integration, and Claude Code Workflows]: Domains 2 plus 3, combined 38% of the exam. The biggest pairing. Tool descriptions, MCP, structured errors, CLAUDE.md hierarchy, claude -p headless.</a:t>
+            </a:r>
+          </a:p>
+          <a:p>
+            <a:r>
+              <a:t>[Segment 3 - Structured Output, Context, and Production Reliability]: Domains 4 plus 5, combined 35% of the exam. The Pydantic + forced tool_choice + validation retry pattern. Plus context discipline and escalation.</a:t>
+            </a:r>
+          </a:p>
+          <a:p>
+            <a:r>
+              <a:t>[Segment 4 - CCA-F Certification Capstone]: 50-minute cert briefing plus 10 weighted practice questions plus take-home punchlist. We earn this segment after building the skills.</a:t>
+            </a:r>
+          </a:p>
+          <a:p>
+            <a:r>
+              <a:t>[Plus self-study: Segment 2.5 - Control Surfaces and the Console Asset Surface]: Not on the 4-hour clock. The off-clock notebook is the highest exam-objective density in the repo. Bookmark it and re-walk it before sitting the exam.</a:t>
             </a:r>
           </a:p>
         </p:txBody>
@@ -2180,7 +2727,37 @@
           <a:lstStyle/>
           <a:p>
             <a:r>
-              <a:t>Few-shot beats temperature tuning every time. The model needs examples, not knobs. Temperature is the lever you reach for last, not first.</a:t>
+              <a:t>FRAMER: Set expectations for the longest live build of the day. Pydantic, forced tool_choice, retry loop, three test invoices.</a:t>
+            </a:r>
+          </a:p>
+          <a:p>
+            <a:r>
+              <a:t>[An invoice extractor with a Pydantic schema]: BaseModel subclass with required and Optional fields, each with descriptions.</a:t>
+            </a:r>
+          </a:p>
+          <a:p>
+            <a:r>
+              <a:t>[tool_choice {type: tool, name: extract_invoice} forces valid JSON]: The model has no choice but to call extract_invoice. The tool's input_schema is your Pydantic schema converted to JSON Schema.</a:t>
+            </a:r>
+          </a:p>
+          <a:p>
+            <a:r>
+              <a:t>[Validation-retry loop handles malformed output (max_retries=1)]: One retry, no more. If the model can't produce valid JSON in two attempts, escalate.</a:t>
+            </a:r>
+          </a:p>
+          <a:p>
+            <a:r>
+              <a:t>[Three invoices: clean, missing field, ambiguous line item]: Three test cases that exercise the three failure modes.</a:t>
+            </a:r>
+          </a:p>
+          <a:p>
+            <a:r>
+              <a:t>[By the end of the segment: you can extract typed data from anything]: This pattern generalizes - resumes, contracts, support tickets, customer records.</a:t>
+            </a:r>
+          </a:p>
+          <a:p>
+            <a:r>
+              <a:t>CCA-F EXAM TIP: If you see "guaranteed schema compliance" anywhere in the answer choices, the answer involves forced tool_choice plus Pydantic. Not prompt engineering alone. Not structured output instructions.</a:t>
             </a:r>
           </a:p>
         </p:txBody>
@@ -2250,7 +2827,37 @@
           <a:lstStyle/>
           <a:p>
             <a:r>
-              <a:t>The Pydantic model is the source of truth for both runtime validation AND the API contract. No JSON parsing, no fence-stripping, no validation rituals. The SDK validated for you. This is the Domain 4 load-bearing pattern.</a:t>
+              <a:t>FRAMER: Prompt engineering principle in five bullets. Each one is a specific failure mode and its fix.</a:t>
+            </a:r>
+          </a:p>
+          <a:p>
+            <a:r>
+              <a:t>[Be specific: format, edge cases, missing-data handling]: Vague prompts produce vague outputs. Specify the exact format, the edge cases you've thought through, and what to do when data is missing.</a:t>
+            </a:r>
+          </a:p>
+          <a:p>
+            <a:r>
+              <a:t>[Plausible hallucinations: model invents values for nullable fields]: The most common failure mode. The model fills in plausible-looking values for fields it doesn't actually have data for.</a:t>
+            </a:r>
+          </a:p>
+          <a:p>
+            <a:r>
+              <a:t>[Fix: explicit 'return null if not directly stated' instruction]: One sentence in the prompt eliminates 90% of this failure mode. Be explicit; the model takes you literally.</a:t>
+            </a:r>
+          </a:p>
+          <a:p>
+            <a:r>
+              <a:t>[Inconsistent formats: 'cotton blend' vs 'Cotton/Polyester mix']: Same concept, two different output strings. Statistical, not catastrophic - but consumes downstream cleanup time.</a:t>
+            </a:r>
+          </a:p>
+          <a:p>
+            <a:r>
+              <a:t>[Fix: 2-3 few-shot examples, NOT lower temperature]: Few-shot examples are the cheapest, most reliable fix. Temperature changes barely move the needle for structured output.</a:t>
+            </a:r>
+          </a:p>
+          <a:p>
+            <a:r>
+              <a:t>CCA-F EXAM TIP: When the exam asks about output consistency, the answer is almost always to add few-shot examples or tighten the schema description. Rarely the answer of lowering the temperature.</a:t>
             </a:r>
           </a:p>
         </p:txBody>
@@ -2320,7 +2927,37 @@
           <a:lstStyle/>
           <a:p>
             <a:r>
-              <a:t>Anti-pattern: infinite retry on missing-info failure. Burns tokens, the model can't invent the data, escalation is the right move. max_retries=1 is the production default - one chance to react to its own error, then fail loud.</a:t>
+              <a:t>FRAMER: The structured-output cheat code. Five steps, one pattern, guaranteed valid JSON.</a:t>
+            </a:r>
+          </a:p>
+          <a:p>
+            <a:r>
+              <a:t>[1. Define a Pydantic model with your fields]: BaseModel subclass with required and Optional fields. Use descriptions on every field so they flow into the JSON Schema.</a:t>
+            </a:r>
+          </a:p>
+          <a:p>
+            <a:r>
+              <a:t>[2. Convert to JSON Schema (model.model_json_schema())]: Pydantic does this for free. The result is a draft 2020-12 JSON Schema, compatible with Claude's tool input_schema.</a:t>
+            </a:r>
+          </a:p>
+          <a:p>
+            <a:r>
+              <a:t>[3. Register as a tool's input_schema]: Pass the schema dict as input_schema in the tool definition. Same shape as any other tool, the input_schema just happens to come from Pydantic.</a:t>
+            </a:r>
+          </a:p>
+          <a:p>
+            <a:r>
+              <a:t>[4. Set tool_choice {type: tool, name: &lt;your_schema&gt;}]: This is the forcing function. The model has no choice but to call the named tool. No prose escape hatch.</a:t>
+            </a:r>
+          </a:p>
+          <a:p>
+            <a:r>
+              <a:t>[5. block.input is now a typed dict matching the schema]: The model's tool_use block carries an input field that is ALREADY a Python dict (not a JSON string), already conforming to the schema. Pass it directly to YourModel(**block.input) for full Pydantic validation.</a:t>
+            </a:r>
+          </a:p>
+          <a:p>
+            <a:r>
+              <a:t>CCA-F EXAM TIP: If the exam shows code with forced tool_choice and asks what's guaranteed, the answer is 'the response includes a tool_use block whose input matches the schema.' Not 'the response is valid JSON' - that's a weaker, often-wrong distractor.</a:t>
             </a:r>
           </a:p>
         </p:txBody>
@@ -2390,7 +3027,27 @@
           <a:lstStyle/>
           <a:p>
             <a:r>
-              <a:t>Per-segment calibration warning. If you don't break it down by doc type, high-aggregate accuracy lies to you. The confidence field is a routing key, not a vanity metric.</a:t>
+              <a:t>FRAMER: The code that makes forced tool_choice work. Three load-bearing lines.</a:t>
+            </a:r>
+          </a:p>
+          <a:p>
+            <a:r>
+              <a:t>What you're looking at: a stripped-down version of the Segment 3 invoice extractor. The Pydantic model defines the schema. The EXTRACT_TOOL dict registers it as a tool whose input_schema IS the Pydantic JSON schema. The messages.create call uses tool_choice {type: tool, name: extract_invoice} to force the model to call it. The response is parsed back into a typed Invoice instance.</a:t>
+            </a:r>
+          </a:p>
+          <a:p>
+            <a:r>
+              <a:t>The three load-bearing lines are: the tool_choice setting that forces the call, the access pattern tool_block.input which is a typed dict not a JSON string, and the Pydantic validation gate Invoice(**tool_block.input) which raises ValidationError on any schema violation.</a:t>
+            </a:r>
+          </a:p>
+          <a:p>
+            <a:r>
+              <a:t>Common copy-paste trap: calling json.loads(tool_block.input) crashes because input is already a dict. Don't do that.</a:t>
+            </a:r>
+          </a:p>
+          <a:p>
+            <a:r>
+              <a:t>CCA-F EXAM TIP: If the exam shows code with tool_choice and asks what's guaranteed, the answer is "the model's response includes a tool_use block whose input matches the schema." It is not "the model's response is valid JSON" - that's a weaker claim.</a:t>
             </a:r>
           </a:p>
         </p:txBody>
@@ -2460,7 +3117,42 @@
           <a:lstStyle/>
           <a:p>
             <a:r>
-              <a:t>Longest live build of the course. Highest demo risk. Have the markdown walkthrough open as fallback. Cookbook reference for further study: claude-cookbooks-main/tool_use/extracting_structured_json.ipynb and tool_use_with_pydantic.ipynb.</a:t>
+              <a:t>FRAMER: Validation retry loops have a sharp line between what works and what doesn't.</a:t>
+            </a:r>
+          </a:p>
+          <a:p>
+            <a:r>
+              <a:t>[Effective: format errors, JSON parse failures, schema mismatches]: When the model produces malformed output, feeding the validation error back as a tool_result with is_error=true usually fixes it in one retry.</a:t>
+            </a:r>
+          </a:p>
+          <a:p>
+            <a:r>
+              <a:t>[-&gt; append the error as a tool_result with is_error: true, retry]: The retry pattern. The model sees the error, recognizes its mistake, produces corrected output.</a:t>
+            </a:r>
+          </a:p>
+          <a:p>
+            <a:r>
+              <a:t>[-&gt; succeeds in 2-3 attempts]: Empirically. Format errors are easy for the model to fix once it sees what was wrong.</a:t>
+            </a:r>
+          </a:p>
+          <a:p>
+            <a:r>
+              <a:t>[INEFFECTIVE: knowledge gaps, ambiguous source data]: When the source data is missing or ambiguous, retries don't help. The model can't invent data it doesn't have.</a:t>
+            </a:r>
+          </a:p>
+          <a:p>
+            <a:r>
+              <a:t>[-&gt; retries DO NOT help]: Important contract. Burning tokens on retries that can't succeed is a common production failure.</a:t>
+            </a:r>
+          </a:p>
+          <a:p>
+            <a:r>
+              <a:t>[-&gt; cap at 2-3, then escalate to human review]: Hard cap. max_retries=1 is the production default. Anything more and you're paying for failure.</a:t>
+            </a:r>
+          </a:p>
+          <a:p>
+            <a:r>
+              <a:t>CCA-F EXAM TIP: When a scenario describes "the model keeps producing the same wrong answer after multiple retries," the answer involves escalation, not more retries. Retries fix format; humans fix substance.</a:t>
             </a:r>
           </a:p>
         </p:txBody>
@@ -2530,7 +3222,32 @@
           <a:lstStyle/>
           <a:p>
             <a:r>
-              <a:t>A 48-turn conversation should not have 48 turns of tool_result clutter. The cache demo in segment-3 shows cache_control on the system block - 2019 tokens cached, the vendor policy never re-billed across calls.</a:t>
+              <a:t>FRAMER: Confidence-based routing is the production pattern that makes extraction pipelines auditable.</a:t>
+            </a:r>
+          </a:p>
+          <a:p>
+            <a:r>
+              <a:t>[Have the model output field-level confidence: high | medium | low]: Add a confidence field to your Pydantic model. The model populates it. Closed enum, not a free float.</a:t>
+            </a:r>
+          </a:p>
+          <a:p>
+            <a:r>
+              <a:t>[Route: high -&gt; automated, medium -&gt; spot-check, low -&gt; human]: Three queues. High-confidence outputs go straight to production. Medium gets sampled for QA. Low always sees a human.</a:t>
+            </a:r>
+          </a:p>
+          <a:p>
+            <a:r>
+              <a:t>[CRITICAL: validate accuracy by document type AND field]: Aggregate accuracy can hide segment-specific failures. A 95% overall accuracy can mask 60% accuracy on invoices from a particular vendor.</a:t>
+            </a:r>
+          </a:p>
+          <a:p>
+            <a:r>
+              <a:t>[Aggregate 95% accuracy can mask 60% accuracy on specific segments]: The per-segment calibration warning. If you're not breaking down accuracy by doc type, your numbers lie to you.</a:t>
+            </a:r>
+          </a:p>
+          <a:p>
+            <a:r>
+              <a:t>CCA-F EXAM TIP: When the exam asks about extraction pipeline reliability, the answer involves field-level confidence and per-segment validation. Not improve-the-prompt and not tune-the-model.</a:t>
             </a:r>
           </a:p>
         </p:txBody>
@@ -2600,7 +3317,27 @@
           <a:lstStyle/>
           <a:p>
             <a:r>
-              <a:t>Frustrated user with a $5 refund doesn't need a human. Calm user with a multi-account billing dispute does. Sentiment is not complexity. The escalation contract: structured summary, not the transcript - the human picks up faster, the agent's notes are signal.</a:t>
+              <a:t>FRAMER: The 20-minute live build. The longest demo of the day. Highest demo risk.</a:t>
+            </a:r>
+          </a:p>
+          <a:p>
+            <a:r>
+              <a:t>What you'll see: I'll open segment-3-invoice-extractor.ipynb and walk it cell by cell. First the Pydantic model definition with required and Optional fields. Then EXTRACT_TOOL with input_schema set to Invoice.model_json_schema(). Then a messages.create call with tool_choice forcing the extract_invoice tool. We'll run it on a clean invoice first - immediate success.</a:t>
+            </a:r>
+          </a:p>
+          <a:p>
+            <a:r>
+              <a:t>Then we'll move to the missing-PO invoice. The po_number field is Optional with default=None. The model should leave it null. If it invents a value, Pydantic catches it.</a:t>
+            </a:r>
+          </a:p>
+          <a:p>
+            <a:r>
+              <a:t>Then the ambiguous-total invoice. Multiple totals appear in the text. The model has to pick one with the system-prompt guidance. We add the retry loop here - on validation failure, the error gets fed back as a tool_result with is_error=true, the model retries with the correction.</a:t>
+            </a:r>
+          </a:p>
+          <a:p>
+            <a:r>
+              <a:t>If anything goes sideways, I have the markdown walkthrough open next to the notebook. Cookbook references for after class: claude-cookbooks-main/tool_use/extracting_structured_json.ipynb and tool_use_with_pydantic.ipynb.</a:t>
             </a:r>
           </a:p>
         </p:txBody>
@@ -2670,7 +3407,37 @@
           <a:lstStyle/>
           <a:p>
             <a:r>
-              <a:t>Reinforces: nullable fields need explicit prompt instructions, confidence is the routing key, notes catches the 'I'm not sure' cases without crashing validation.</a:t>
+              <a:t>FRAMER: Context discipline in five bullets. How you keep a 50-turn conversation from drowning in tool output.</a:t>
+            </a:r>
+          </a:p>
+          <a:p>
+            <a:r>
+              <a:t>[Pin case-facts at the top of every turn]: Critical facts about the user, the order, the case go in the system prompt and stay there. The model never has to re-derive them from history.</a:t>
+            </a:r>
+          </a:p>
+          <a:p>
+            <a:r>
+              <a:t>[Summarize resolved turns into narrative, drop verbatim history]: Once a sub-issue is resolved, summarize it. Don't carry every tool_result for it forward.</a:t>
+            </a:r>
+          </a:p>
+          <a:p>
+            <a:r>
+              <a:t>[Prune verbose tool outputs - extract the fields you used, drop the rest]: If a tool returned 50 fields and you used 3, strip the 47 unused fields before appending the tool_result.</a:t>
+            </a:r>
+          </a:p>
+          <a:p>
+            <a:r>
+              <a:t>[Application-side filtering, before the next turn]: This is YOUR code, not the model's job. The model can't prune its own context.</a:t>
+            </a:r>
+          </a:p>
+          <a:p>
+            <a:r>
+              <a:t>[How lawyers manage case files. Same discipline for long agent sessions.]: The analogy. Lawyers don't carry every interview transcript into every meeting. They carry summaries with citations.</a:t>
+            </a:r>
+          </a:p>
+          <a:p>
+            <a:r>
+              <a:t>CCA-F EXAM TIP: When a scenario mentions context window pressure or the agent losing track of the case, the answer involves application-side pruning and case-facts pinning. Never use-a-bigger-model and never increase-max_tokens.</a:t>
             </a:r>
           </a:p>
         </p:txBody>
@@ -2740,7 +3507,37 @@
           <a:lstStyle/>
           <a:p>
             <a:r>
-              <a:t>Bridge: 'You have agents, tools, prompts, validation, context discipline. Last segment is the cert capstone - what's on the CCA-F exam, how the domain weights map to today's notebooks, and ten weighted practice questions.'</a:t>
+              <a:t>FRAMER: Escalation design. The rules for when an agent should hand off to a human.</a:t>
+            </a:r>
+          </a:p>
+          <a:p>
+            <a:r>
+              <a:t>[Honor explicit human requests IMMEDIATELY]: When the user says "I want a human," the agent escalates. No clarifying questions, no "let me try one more thing." Immediate.</a:t>
+            </a:r>
+          </a:p>
+          <a:p>
+            <a:r>
+              <a:t>['I want a human NOW' = escalate, don't clarify, don't try one more tool]: This is a hard rule. Violating it destroys user trust.</a:t>
+            </a:r>
+          </a:p>
+          <a:p>
+            <a:r>
+              <a:t>[Pass STRUCTURED summary to the human queue, not the transcript]: The escalation handoff is the model's chance to be useful one last time. A typed summary of the situation, not the raw conversation log.</a:t>
+            </a:r>
+          </a:p>
+          <a:p>
+            <a:r>
+              <a:t>[Never escalate on sentiment alone (frustration != complexity)]: Frustrated users with simple issues get faster resolutions from the agent. Calm users with billing disputes need humans. Sentiment is not a complexity signal.</a:t>
+            </a:r>
+          </a:p>
+          <a:p>
+            <a:r>
+              <a:t>[Confidence-based escalation: low confidence -&gt; human review]: When the model's confidence on a key field drops below threshold, escalate. Confidence is signal; sentiment isn't.</a:t>
+            </a:r>
+          </a:p>
+          <a:p>
+            <a:r>
+              <a:t>CCA-F EXAM TIP: Wrong answers on escalation questions usually involve "escalate when the customer seems upset." Right answers involve explicit user requests, policy limits, low confidence, or complexity beyond agent authority.</a:t>
             </a:r>
           </a:p>
         </p:txBody>
@@ -2810,7 +3607,32 @@
           <a:lstStyle/>
           <a:p>
             <a:r>
-              <a:t>All five CCA-F domains. 50 minutes. 12-minute cert briefing + 28 minutes of 10 weighted practice questions + 10 minutes of Q&amp;A and close.</a:t>
+              <a:t>FRAMER: Five-minute exercise. Take the extraction pattern and apply it to a domain you actually work in.</a:t>
+            </a:r>
+          </a:p>
+          <a:p>
+            <a:r>
+              <a:t>[Design an extraction schema for a domain you know]: Pick a real domain - invoices, resumes, tickets, contracts, whatever you actually work with.</a:t>
+            </a:r>
+          </a:p>
+          <a:p>
+            <a:r>
+              <a:t>[Fields: required vs Optional[]]: Distinguish what MUST be present from what MIGHT be present. Required fields fail validation if missing; Optional fields can be null.</a:t>
+            </a:r>
+          </a:p>
+          <a:p>
+            <a:r>
+              <a:t>[Add a confidence Literal: 'high' | 'medium' | 'low']: Closed enum. The model has three options. Pick one.</a:t>
+            </a:r>
+          </a:p>
+          <a:p>
+            <a:r>
+              <a:t>[Add a notes Optional[str] for ambiguity]: A free-form field where the model can flag "I'm not sure about this" without breaking validation.</a:t>
+            </a:r>
+          </a:p>
+          <a:p>
+            <a:r>
+              <a:t>[Share your schema in chat]: Show two or three out loud. Reinforce: nullable fields need explicit prompt instructions, confidence is the routing key, notes catches the "I'm not sure" cases.</a:t>
             </a:r>
           </a:p>
         </p:txBody>
@@ -2880,7 +3702,17 @@
           <a:lstStyle/>
           <a:p>
             <a:r>
-              <a:t>Frame the whole course in one sentence. Hooks are deterministic. Schemas are deterministic. Application-layer intercepts are deterministic. The model isn't, and that's fine - it's the right tool for ambiguous decisions. Production patterns build a deterministic shell around a non-deterministic kernel. Every demo in this course is an instance of that pattern.</a:t>
+              <a:t>FRAMER: Frame the entire course in one sentence, then earn that sentence over the next four hours.</a:t>
+            </a:r>
+          </a:p>
+          <a:p>
+            <a:r>
+              <a:t>The model is non-deterministic. Your architecture cannot be. Hooks are deterministic. Schemas are deterministic. Application-layer intercepts are deterministic. The model itself isn't - it's the right tool for ambiguous, context-sensitive decisions, but the system around it has to hold.</a:t>
+            </a:r>
+          </a:p>
+          <a:p>
+            <a:r>
+              <a:t>Every demo today is an instance of that pattern. A non-deterministic kernel inside a deterministic shell. When the model wobbles, the shell catches it. When the model behaves, the shell stays out of the way. That's the production architect's job.</a:t>
             </a:r>
           </a:p>
         </p:txBody>
@@ -2950,7 +3782,37 @@
           <a:lstStyle/>
           <a:p>
             <a:r>
-              <a:t>Skills-first framing. You already have the skills. The exam is how you signal them. This is the moment to mention CCA-F is currently partner-gated; check claude.com/partners for the current access policy.</a:t>
+              <a:t>FRAMER: Segment 3 in four takeaways. Plus a cache-control bonus that ties to context discipline.</a:t>
+            </a:r>
+          </a:p>
+          <a:p>
+            <a:r>
+              <a:t>[Pydantic + tool_choice tool = guaranteed valid JSON]: The cheat code. Memorize the pattern.</a:t>
+            </a:r>
+          </a:p>
+          <a:p>
+            <a:r>
+              <a:t>[Few-shot examples beat temperature tuning every time]: The first lever for output consistency. Don't reach for temperature.</a:t>
+            </a:r>
+          </a:p>
+          <a:p>
+            <a:r>
+              <a:t>[Retries help format errors; retries do NOT help missing info]: The sharp line. max_retries=1, then escalate.</a:t>
+            </a:r>
+          </a:p>
+          <a:p>
+            <a:r>
+              <a:t>[Cache the system block with cache_control - amortize policy across calls]: When your system prompt is long (policy, case-facts, schema documentation), set cache_control on it. Subsequent calls within the cache TTL pay 10% for cache reads instead of full input cost.</a:t>
+            </a:r>
+          </a:p>
+          <a:p>
+            <a:r>
+              <a:t>Bridge to Segment 4: "You have agents, tools, prompts, validation, context discipline. The last segment is the cert capstone - what's on the CCA-F exam, how the domain weights map to today's notebooks, and ten weighted practice questions."</a:t>
+            </a:r>
+          </a:p>
+          <a:p>
+            <a:r>
+              <a:t>CCA-F EXAM TIP: D4 + D5 = 35% of the exam. Three of the ten Segment 4 questions touch these domains. The Pydantic + forced tool_choice pattern is virtually guaranteed to appear in at least one D4 question.</a:t>
             </a:r>
           </a:p>
         </p:txBody>
@@ -3020,7 +3882,12 @@
           <a:lstStyle/>
           <a:p>
             <a:r>
-              <a:t>The one-attempt rule is the policy nobody plans around. Tell them: don't schedule until your Anthropic Practice Exam scores are consistently above 900. Treat the $99 as if it were $990 - because the cost of failing is rescheduling and starting prep over.</a:t>
+              <a:t>FRAMER: Section divider for Segment 4. The cert capstone. We earned this conversation.</a:t>
+            </a:r>
+          </a:p>
+          <a:p>
+            <a:r>
+              <a:t>Segment 4 covers all five CCA-F domains. 50 minutes - 12 minutes of cert briefing, 28 minutes of 10 weighted practice questions, 10 minutes of Q&amp;A and course close. Notebook is segment-4-cca-f-capstone.ipynb. No live API calls in this segment; the notebook runs locally against practice-questions.json.</a:t>
             </a:r>
           </a:p>
         </p:txBody>
@@ -3090,7 +3957,32 @@
           <a:lstStyle/>
           <a:p>
             <a:r>
-              <a:t>D1 + D3 + D4 = 67% of the exam. Weight your study time the same way. D2 + D3 = 38% - that pairing is why we covered both in one segment. D5 is small but easy to under-teach because it feels like security common sense until scenario questions get specific.</a:t>
+              <a:t>FRAMER: What CCA-F is. Anthropic's first official certification, partner-gated as of 2026.</a:t>
+            </a:r>
+          </a:p>
+          <a:p>
+            <a:r>
+              <a:t>[Claude Certified Architect: Foundations - Anthropic's first official certification]: This is the entry-level cert. Foundations means the production patterns we taught today, not advanced topics like distillation or multimodal pipelines.</a:t>
+            </a:r>
+          </a:p>
+          <a:p>
+            <a:r>
+              <a:t>[Targets architects shipping with Agent SDK, Claude Code, Claude API, MCP]: Four surfaces. If you've shipped with any combination of them, you're in scope.</a:t>
+            </a:r>
+          </a:p>
+          <a:p>
+            <a:r>
+              <a:t>[Roughly the 301 skill level - past 'hello world', not yet 'I run distillation pipelines']: Calibration. The exam assumes you've built real things. It doesn't assume you've trained a model.</a:t>
+            </a:r>
+          </a:p>
+          <a:p>
+            <a:r>
+              <a:t>[Beta product as of 2026 - watch the official cert page for changes]: Anthropic ships exams the same way they ship features. Headers change. Question shapes change. Check claude.com/partners before you sit it.</a:t>
+            </a:r>
+          </a:p>
+          <a:p>
+            <a:r>
+              <a:t>The framing for the room: skills first, then the cert talk. You already have the skills - the exam is how you signal them.</a:t>
             </a:r>
           </a:p>
         </p:txBody>
@@ -3160,7 +4052,47 @@
           <a:lstStyle/>
           <a:p>
             <a:r>
-              <a:t>This is why Segment 4 runs against a freshly-tagged practice-questions.json. The 60-question bank distribution doesn't match exam weights, but the SAMPLER does. Same idea Anthropic uses for the real exam.</a:t>
+              <a:t>FRAMER: Exam mechanics. Seven facts. Memorize them; they're the load-bearing operational data.</a:t>
+            </a:r>
+          </a:p>
+          <a:p>
+            <a:r>
+              <a:t>[Questions: 60 multiple-choice]: Scenario-based. Each question has a situation, a question, four options, one correct answer.</a:t>
+            </a:r>
+          </a:p>
+          <a:p>
+            <a:r>
+              <a:t>[Time: 120 minutes, single session, no breaks]: Two hours, end to end. Plan accordingly.</a:t>
+            </a:r>
+          </a:p>
+          <a:p>
+            <a:r>
+              <a:t>[Scoring: scaled 100-1000, passing = 720, no guess penalty]: Scaled scoring means the cut score is fixed in difficulty terms, not raw percent. 720 to pass.</a:t>
+            </a:r>
+          </a:p>
+          <a:p>
+            <a:r>
+              <a:t>[Delivery: ProctorFree, English]: Remote-proctored. English only as of 2026.</a:t>
+            </a:r>
+          </a:p>
+          <a:p>
+            <a:r>
+              <a:t>[Results: 2 business days]: You don't get the score live. Two business days to find out.</a:t>
+            </a:r>
+          </a:p>
+          <a:p>
+            <a:r>
+              <a:t>[Cost: $99 per attempt]: Partner discount may apply. Check the cert page.</a:t>
+            </a:r>
+          </a:p>
+          <a:p>
+            <a:r>
+              <a:t>[Attempts: ONE - this is the policy that catches people]: Single attempt per registration. Plan around it. Don't schedule until you're scoring 900+ on Anthropic's official Practice Exam.</a:t>
+            </a:r>
+          </a:p>
+          <a:p>
+            <a:r>
+              <a:t>CCA-F EXAM TIP: The one-attempt rule is the policy nobody plans around. Treat the $99 as if it were $990 - because the cost of failing is rescheduling and starting prep over.</a:t>
             </a:r>
           </a:p>
         </p:txBody>
@@ -3230,7 +4162,62 @@
           <a:lstStyle/>
           <a:p>
             <a:r>
-              <a:t>The community-sourced disclaimer goes here: questions are calibration practice, NOT exam predictors. Use Anthropic's official Practice Exam as the authoritative signal before scheduling. Read the disclaimer out loud once at the start.</a:t>
+              <a:t>FRAMER: Domain weights mapped to today's segments. Where each piece of the exam was taught.</a:t>
+            </a:r>
+          </a:p>
+          <a:p>
+            <a:r>
+              <a:t>[Domain 1 - Agentic Architecture (27%)]: Heaviest single domain. Segment 1. Agents, hooks, coordinator-subagent. Re-walk segment-1 before the exam.</a:t>
+            </a:r>
+          </a:p>
+          <a:p>
+            <a:r>
+              <a:t>[Heaviest. Segment 1 - agents, hooks, coordinator-subagent. Re-walk segment-1.]: If a domain feels easy, the practice questions for it are the ones to re-walk. D1 is heaviest; don't assume.</a:t>
+            </a:r>
+          </a:p>
+          <a:p>
+            <a:r>
+              <a:t>[Domain 2 - Tool Design and MCP (18%)]: Segment 2 plus Segment 2.5. Tool descriptions, structured errors, MCP list_tools, tool_choice modes.</a:t>
+            </a:r>
+          </a:p>
+          <a:p>
+            <a:r>
+              <a:t>[Segment 2 + 2.5. Tool descriptions, structured errors, MCP list_tools.]: 2.5 is the off-clock notebook. Walk it before the exam.</a:t>
+            </a:r>
+          </a:p>
+          <a:p>
+            <a:r>
+              <a:t>[Domain 3 - Claude Code (20%)]: Segment 2. CLAUDE.md hierarchy, skills, slash commands, claude -p headless mode.</a:t>
+            </a:r>
+          </a:p>
+          <a:p>
+            <a:r>
+              <a:t>[Segment 2. CLAUDE.md hierarchy, skills, slash commands, claude -p headless.]: The most operationally-focused domain. Hands-on with the CLI.</a:t>
+            </a:r>
+          </a:p>
+          <a:p>
+            <a:r>
+              <a:t>[Domain 4 - Prompts and Structured Output (20%)]: Segment 3. Forced tool_choice, Pydantic schemas, few-shot, retry loops.</a:t>
+            </a:r>
+          </a:p>
+          <a:p>
+            <a:r>
+              <a:t>[Segment 3. Forced tool_choice, Pydantic schemas, few-shot, retry loops.]: The cheat code lives here. Memorize the pattern.</a:t>
+            </a:r>
+          </a:p>
+          <a:p>
+            <a:r>
+              <a:t>[Domain 5 - Context and Reliability (15%)]: Segment 3 plus parts of Segment 1. Context pinning, escalation, structured errors.</a:t>
+            </a:r>
+          </a:p>
+          <a:p>
+            <a:r>
+              <a:t>[Segment 3 + parts of Segment 1. Context pinning, escalation, structured errors.]: The smallest domain by weight. Easy to under-teach because it feels like common sense.</a:t>
+            </a:r>
+          </a:p>
+          <a:p>
+            <a:r>
+              <a:t>CCA-F EXAM TIP: D1 + D3 + D4 = 67% of the exam. Weight your prep accordingly. D5 is the easiest to under-teach because it feels like security common sense until scenario questions get specific.</a:t>
             </a:r>
           </a:p>
         </p:txBody>
@@ -3300,7 +4287,32 @@
           <a:lstStyle/>
           <a:p>
             <a:r>
-              <a:t>Full 13-item version lives in CERT-PROGRAM-BRIEFING.md. Six headlines on the slide. Rebuilding Segment 1 from memory in 30 minutes is the load-bearing readiness test - if you can't, you're not ready to sit the exam.</a:t>
+              <a:t>FRAMER: One slide explaining why the Segment 4 sampler is domain-weighted, not scenario-weighted.</a:t>
+            </a:r>
+          </a:p>
+          <a:p>
+            <a:r>
+              <a:t>[The naive sampler]: Pulls questions evenly across scenario families. The bank has 60 questions across 4 scenarios; uniform sampling gives 2-3 per scenario. The problem: two of the four scenarios are heavily D3, which over-tests Claude Code and under-tests Context Management.</a:t>
+            </a:r>
+          </a:p>
+          <a:p>
+            <a:r>
+              <a:t>[Pulls questions evenly across scenario families - which over-tests Claude Code (two scenarios are heavily D3) and under-tests context management (only fits in one).]: The diagnosis. The scenario-weighted sampler matches the source data shape, not the exam shape.</a:t>
+            </a:r>
+          </a:p>
+          <a:p>
+            <a:r>
+              <a:t>[Our sampler]: Draws 3 D1 + 2 D2 + 2 D3 + 2 D4 + 1 D5. Matches the exam's 27/18/20/20/15 weighting exactly.</a:t>
+            </a:r>
+          </a:p>
+          <a:p>
+            <a:r>
+              <a:t>[Draws 3 D1 + 2 D2 + 2 D3 + 2 D4 + 1 D5 - matches the exam's 27/18/20/20/15 weighting exactly. Every cohort sees the SAME 10 questions in the same order (seed=2026) for consistency across deliveries.]: Reproducibility matters - every cohort gets the same set so we can compare cohort-to-cohort.</a:t>
+            </a:r>
+          </a:p>
+          <a:p>
+            <a:r>
+              <a:t>CCA-F EXAM TIP: When you take Anthropic's official Practice Exam, the question mix mirrors this same domain weighting. The Segment 4 sampler is calibrated to feel like a Practice Exam mini-run.</a:t>
             </a:r>
           </a:p>
         </p:txBody>
@@ -3370,7 +4382,22 @@
           <a:lstStyle/>
           <a:p>
             <a:r>
-              <a:t>Recap the four live artifacts plus the self-study fifth. Tie back to the cold-open quote: model is non-deterministic, your architecture cannot be. Every artifact today is an instance of that pattern.</a:t>
+              <a:t>FRAMER: Demo - 28 minutes on 10 weighted practice questions. The longest single block of Segment 4.</a:t>
+            </a:r>
+          </a:p>
+          <a:p>
+            <a:r>
+              <a:t>What you'll see: I'll open segment-4-cca-f-capstone.ipynb. The sampler cell runs locally - no API calls - and draws 10 questions by domain weight from practice-questions.json. The render cell prints them as collapsible Markdown blocks with the situation, the question, four options, and a hidden answer + explanation.</a:t>
+            </a:r>
+          </a:p>
+          <a:p>
+            <a:r>
+              <a:t>For each question, we'll do four beats. First I read the situation aloud. Second, the cohort votes A/B/C/D in chat - 30 seconds. Third, I reveal the correct answer. Fourth, I walk through why the distractors are plausible-but-wrong, and color the right answer with a production tip from the matching domain-N-*.md reference.</a:t>
+            </a:r>
+          </a:p>
+          <a:p>
+            <a:r>
+              <a:t>Source disclaimer to read aloud once at the start: these questions are community-sourced from Paul Larionov's study repo. They are calibration practice, not exam predictors. Use Anthropic's official Practice Exam as the authoritative readiness signal before scheduling.</a:t>
             </a:r>
           </a:p>
         </p:txBody>
@@ -3440,7 +4467,42 @@
           <a:lstStyle/>
           <a:p>
             <a:r>
-              <a:t>If they don't ship something in 7 days, the muscle memory fades. Pick the smallest possible win and ship it. The repo carries EXAM-STUDY-PATH.md which is the post-class anchor for CCA-F prep - notebook to domain to scenario family in one table.</a:t>
+              <a:t>FRAMER: Tim's week-before-the-exam punchlist. Six items, in order. Full 13-item version lives in CERT-PROGRAM-BRIEFING.md.</a:t>
+            </a:r>
+          </a:p>
+          <a:p>
+            <a:r>
+              <a:t>[1. Score &gt;900 on the Anthropic Practice Exam cold]: Cold means without prep notes open. If you can't score 900 cold, you're not ready.</a:t>
+            </a:r>
+          </a:p>
+          <a:p>
+            <a:r>
+              <a:t>[2. Rebuild Segment 1 from memory in 30 minutes]: The load-bearing readiness test. If you can write the agent loop, the tool dispatch, and the hook without looking at the notebook, you've internalized D1.</a:t>
+            </a:r>
+          </a:p>
+          <a:p>
+            <a:r>
+              <a:t>[3. Re-read domain-1-agentic.md - the 27% domain]: The biggest single domain. Re-read it carefully.</a:t>
+            </a:r>
+          </a:p>
+          <a:p>
+            <a:r>
+              <a:t>[4. Skim domain-3-claude-code.md and domain-4-prompts.md - the 20% domains]: The next-biggest pair. Skim is enough if your scores are already in the 900s.</a:t>
+            </a:r>
+          </a:p>
+          <a:p>
+            <a:r>
+              <a:t>[5. Verify proctoring setup the night before (camera, mic, ID)]: ProctorFree has technical requirements. Test them the night before, not the morning of.</a:t>
+            </a:r>
+          </a:p>
+          <a:p>
+            <a:r>
+              <a:t>[6. Single attempt. Do not schedule until 1-4 are green.]: The policy that catches people. Treat it like a one-shot deploy to production.</a:t>
+            </a:r>
+          </a:p>
+          <a:p>
+            <a:r>
+              <a:t>CCA-F EXAM TIP: When you're scoring 900+ on the Practice Exam AND you can rebuild Segment 1 from memory in 30 minutes, you're ready. Both conditions, not just one.</a:t>
             </a:r>
           </a:p>
         </p:txBody>
@@ -3510,7 +4572,37 @@
           <a:lstStyle/>
           <a:p>
             <a:r>
-              <a:t>Anticipated questions to invite. Pre-answer the renewal one: Anthropic reserves the right to retire and refresh exams; certifications tied to beta products may expire when the production exam goes live. Watch the cert page.</a:t>
+              <a:t>FRAMER: Recap what we built. Four live artifacts plus one self-study notebook.</a:t>
+            </a:r>
+          </a:p>
+          <a:p>
+            <a:r>
+              <a:t>[Customer support agent with PreToolUse hook enforcement]: Segment 1. The deterministic shell around a non-deterministic model.</a:t>
+            </a:r>
+          </a:p>
+          <a:p>
+            <a:r>
+              <a:t>[Configured Claude Code env with .mcp.json + CLAUDE.md hierarchy]: Segment 2. The team-shareable configuration surface that scales by file, not code.</a:t>
+            </a:r>
+          </a:p>
+          <a:p>
+            <a:r>
+              <a:t>[Invoice extractor with Pydantic schema + validation retry]: Segment 3. The forced-tool_choice cheat code in production form.</a:t>
+            </a:r>
+          </a:p>
+          <a:p>
+            <a:r>
+              <a:t>[Production reliability mental model - context, escalation, errors, provenance]: Segment 3 plus the through-line in Segments 1 and 4. The reliability story isn't a feature; it's a discipline.</a:t>
+            </a:r>
+          </a:p>
+          <a:p>
+            <a:r>
+              <a:t>[Plus self-study: control surfaces and the Console asset surface (Segment 2.5)]: Off-clock notebook. Walk it before the exam.</a:t>
+            </a:r>
+          </a:p>
+          <a:p>
+            <a:r>
+              <a:t>Tie back to the cold open: model is non-deterministic, your architecture cannot be. Every artifact today is an instance of that pattern. The shell catches the model when it wobbles; the shell stays out of the way when it behaves.</a:t>
             </a:r>
           </a:p>
         </p:txBody>
@@ -3580,7 +4672,52 @@
           <a:lstStyle/>
           <a:p>
             <a:r>
-              <a:t>Final close. The 'memento mori, ship the PR' line is the personal sign-off. Open for one last round of questions, then wrap. Recording stops after the chat clears.</a:t>
+              <a:t>FRAMER: Resources for after class. Four locations. Walk learners through each one.</a:t>
+            </a:r>
+          </a:p>
+          <a:p>
+            <a:r>
+              <a:t>[Repo]: github.com/timothywarner-org/claude-architect. Today's slides, notebooks, scripts, and the EXAM-STUDY-PATH.md learner-facing CCA-F study scaffold.</a:t>
+            </a:r>
+          </a:p>
+          <a:p>
+            <a:r>
+              <a:t>[github.com/timothywarner-org/claude-architect]: Clone it if you haven't. Star it if you found today useful.</a:t>
+            </a:r>
+          </a:p>
+          <a:p>
+            <a:r>
+              <a:t>[Anthropic cookbook (official, MIT, vendored in this repo)]: Vendored in claude-cookbooks-main/ at the repo root. No second clone required. Every demo today cites a specific cookbook for further self-study.</a:t>
+            </a:r>
+          </a:p>
+          <a:p>
+            <a:r>
+              <a:t>[github.com/anthropics/claude-cookbooks   |   claude-cookbooks-main/]: The upstream repo and the local vendored copy. Pick whichever is easier.</a:t>
+            </a:r>
+          </a:p>
+          <a:p>
+            <a:r>
+              <a:t>[CCA-F study path]: EXAM-STUDY-PATH.md. The notebook-to-domain-to-scenario mapping plus the after-class study plan.</a:t>
+            </a:r>
+          </a:p>
+          <a:p>
+            <a:r>
+              <a:t>[EXAM-STUDY-PATH.md - notebook -&gt; CCA-F domain -&gt; scenario mapping]: The map. Print it if you're aiming at the cert.</a:t>
+            </a:r>
+          </a:p>
+          <a:p>
+            <a:r>
+              <a:t>[Anthropic Academy]: Free courses. The Practice Exam lives here.</a:t>
+            </a:r>
+          </a:p>
+          <a:p>
+            <a:r>
+              <a:t>[anthropic.skilljar.com - free courses, official Practice Exam]: Bookmark it. The Practice Exam is the authoritative readiness signal before you schedule.</a:t>
+            </a:r>
+          </a:p>
+          <a:p>
+            <a:r>
+              <a:t>If you don't ship something in 7 days, the muscle memory fades. Pick the smallest possible win and ship it.</a:t>
             </a:r>
           </a:p>
         </p:txBody>
@@ -3650,7 +4787,202 @@
           <a:lstStyle/>
           <a:p>
             <a:r>
-              <a:t>Domain 1 - Agentic Architecture and Orchestration. 50 minutes. 27% of the CCA-F blueprint, the single heaviest domain. Live build: customer support agent + PreToolUse hook + coordinator-subagent demo.</a:t>
+              <a:t>FRAMER: Section divider for Segment 1. We're spending 50 minutes on the heaviest domain on the exam.</a:t>
+            </a:r>
+          </a:p>
+          <a:p>
+            <a:r>
+              <a:t>Segment 1 is Domain 1 - Agentic Architecture and Orchestration. 27% of the CCA-F blueprint, the single biggest weighting. Live build: a customer support agent with four tools, a PreToolUse hook that enforces a refund cap, and a coordinator-subagent demo showing context isolation. Notebook is segment-1-customer-support-agent.ipynb. Run cells as we go.</a:t>
+            </a:r>
+          </a:p>
+        </p:txBody>
+      </p:sp>
+      <p:sp>
+        <p:nvSpPr>
+          <p:cNvPr id="4" name="Slide Number Placeholder 3"/>
+          <p:cNvSpPr>
+            <a:spLocks noGrp="1"/>
+          </p:cNvSpPr>
+          <p:nvPr>
+            <p:ph type="sldNum" idx="5" sz="quarter"/>
+          </p:nvPr>
+        </p:nvSpPr>
+        <p:spPr/>
+      </p:sp>
+    </p:spTree>
+  </p:cSld>
+  <p:clrMapOvr>
+    <a:masterClrMapping/>
+  </p:clrMapOvr>
+</p:notes>
+</file>
+
+<file path=ppt/notesSlides/notesSlide50.xml><?xml version="1.0" encoding="utf-8"?>
+<p:notes xmlns:a="http://schemas.openxmlformats.org/drawingml/2006/main" xmlns:p="http://schemas.openxmlformats.org/presentationml/2006/main" xmlns:r="http://schemas.openxmlformats.org/officeDocument/2006/relationships">
+  <p:cSld>
+    <p:spTree>
+      <p:nvGrpSpPr>
+        <p:cNvPr id="1" name=""/>
+        <p:cNvGrpSpPr/>
+        <p:nvPr/>
+      </p:nvGrpSpPr>
+      <p:grpSpPr>
+        <a:xfrm>
+          <a:off x="0" y="0"/>
+          <a:ext cx="0" cy="0"/>
+          <a:chOff x="0" y="0"/>
+          <a:chExt cx="0" cy="0"/>
+        </a:xfrm>
+      </p:grpSpPr>
+      <p:sp>
+        <p:nvSpPr>
+          <p:cNvPr id="2" name="Slide Image Placeholder 1"/>
+          <p:cNvSpPr>
+            <a:spLocks noGrp="1"/>
+          </p:cNvSpPr>
+          <p:nvPr>
+            <p:ph type="sldImg" idx="2"/>
+          </p:nvPr>
+        </p:nvSpPr>
+        <p:spPr/>
+      </p:sp>
+      <p:sp>
+        <p:nvSpPr>
+          <p:cNvPr id="3" name="Notes Placeholder 2"/>
+          <p:cNvSpPr>
+            <a:spLocks noGrp="1"/>
+          </p:cNvSpPr>
+          <p:nvPr>
+            <p:ph type="body" idx="3" sz="quarter"/>
+          </p:nvPr>
+        </p:nvSpPr>
+        <p:spPr/>
+        <p:txBody>
+          <a:bodyPr/>
+          <a:lstStyle/>
+          <a:p>
+            <a:r>
+              <a:t>FRAMER: Final Q&amp;A. 10 minutes. Pre-answer the questions I expect from the chat.</a:t>
+            </a:r>
+          </a:p>
+          <a:p>
+            <a:r>
+              <a:t>[How do I monitor an agent in production?]: Log every stop_reason, every tool call, every hook block. Three streams, one dashboard. Build it before you ship, not after.</a:t>
+            </a:r>
+          </a:p>
+          <a:p>
+            <a:r>
+              <a:t>[When do I split a monolithic agent into coordinator + subagents?]: Three conditions, all required - own success criteria, own tool subset, own context discipline. Don't split for theoretical purity.</a:t>
+            </a:r>
+          </a:p>
+          <a:p>
+            <a:r>
+              <a:t>[What is the cost story for prompt caching?]: cache_control on system prompts and large tool blocks. Hits run roughly 90% cheaper than misses. Cache writes cost more than reads, so do the math before assuming caching is free.</a:t>
+            </a:r>
+          </a:p>
+          <a:p>
+            <a:r>
+              <a:t>[How do I know when I am ready to sit the exam?]: When the Anthropic Practice Exam scores 900+ cold AND you can rebuild Segment 1 from memory in 30 minutes. Both conditions.</a:t>
+            </a:r>
+          </a:p>
+          <a:p>
+            <a:r>
+              <a:t>[What is the renewal path for CCA-F?]: Anthropic reserves the right to retire and refresh exams. Certifications tied to beta products may expire when the production exam goes live. Watch the cert page.</a:t>
+            </a:r>
+          </a:p>
+          <a:p>
+            <a:r>
+              <a:t>Open the floor for live questions. Anything not pre-answered above is fair game.</a:t>
+            </a:r>
+          </a:p>
+        </p:txBody>
+      </p:sp>
+      <p:sp>
+        <p:nvSpPr>
+          <p:cNvPr id="4" name="Slide Number Placeholder 3"/>
+          <p:cNvSpPr>
+            <a:spLocks noGrp="1"/>
+          </p:cNvSpPr>
+          <p:nvPr>
+            <p:ph type="sldNum" idx="5" sz="quarter"/>
+          </p:nvPr>
+        </p:nvSpPr>
+        <p:spPr/>
+      </p:sp>
+    </p:spTree>
+  </p:cSld>
+  <p:clrMapOvr>
+    <a:masterClrMapping/>
+  </p:clrMapOvr>
+</p:notes>
+</file>
+
+<file path=ppt/notesSlides/notesSlide51.xml><?xml version="1.0" encoding="utf-8"?>
+<p:notes xmlns:a="http://schemas.openxmlformats.org/drawingml/2006/main" xmlns:p="http://schemas.openxmlformats.org/presentationml/2006/main" xmlns:r="http://schemas.openxmlformats.org/officeDocument/2006/relationships">
+  <p:cSld>
+    <p:spTree>
+      <p:nvGrpSpPr>
+        <p:cNvPr id="1" name=""/>
+        <p:cNvGrpSpPr/>
+        <p:nvPr/>
+      </p:nvGrpSpPr>
+      <p:grpSpPr>
+        <a:xfrm>
+          <a:off x="0" y="0"/>
+          <a:ext cx="0" cy="0"/>
+          <a:chOff x="0" y="0"/>
+          <a:chExt cx="0" cy="0"/>
+        </a:xfrm>
+      </p:grpSpPr>
+      <p:sp>
+        <p:nvSpPr>
+          <p:cNvPr id="2" name="Slide Image Placeholder 1"/>
+          <p:cNvSpPr>
+            <a:spLocks noGrp="1"/>
+          </p:cNvSpPr>
+          <p:nvPr>
+            <p:ph type="sldImg" idx="2"/>
+          </p:nvPr>
+        </p:nvSpPr>
+        <p:spPr/>
+      </p:sp>
+      <p:sp>
+        <p:nvSpPr>
+          <p:cNvPr id="3" name="Notes Placeholder 2"/>
+          <p:cNvSpPr>
+            <a:spLocks noGrp="1"/>
+          </p:cNvSpPr>
+          <p:nvPr>
+            <p:ph type="body" idx="3" sz="quarter"/>
+          </p:nvPr>
+        </p:nvSpPr>
+        <p:spPr/>
+        <p:txBody>
+          <a:bodyPr/>
+          <a:lstStyle/>
+          <a:p>
+            <a:r>
+              <a:t>FRAMER: Final close. Sign-off in three beats. Q&amp;A is done; this is the goodbye.</a:t>
+            </a:r>
+          </a:p>
+          <a:p>
+            <a:r>
+              <a:t>Thank you for spending four hours with me today. We built three live artifacts plus a self-study fifth. We covered every CCA-F domain. We earned the cert conversation by shipping the skills first.</a:t>
+            </a:r>
+          </a:p>
+          <a:p>
+            <a:r>
+              <a:t>The repo is yours - clone it, fork it, send PRs if you find something to improve. techtrainertim.com is where the longer-form content lives. LinkedIn @timothywarner is where I post when new courses drop.</a:t>
+            </a:r>
+          </a:p>
+          <a:p>
+            <a:r>
+              <a:t>If today gave you ONE pattern you can wire into a real workflow this week - that's the win. The notebooks aren't theory; they're production patterns dressed up in teaching clothes. Ship something.</a:t>
+            </a:r>
+          </a:p>
+          <a:p>
+            <a:r>
+              <a:t>Memento mori. Also, ship the PR.</a:t>
             </a:r>
           </a:p>
         </p:txBody>
@@ -3720,7 +5052,37 @@
           <a:lstStyle/>
           <a:p>
             <a:r>
-              <a:t>This is the live build. Set expectations: we WILL hit edge cases - that's the point. The model is going to TRY to refund more than the cap. The hook is going to say no. The aha moment is watching the model re-plan and escalate correctly.</a:t>
+              <a:t>FRAMER: Set expectations for the live build. What you walk away with, what to watch for, what NOT to fear.</a:t>
+            </a:r>
+          </a:p>
+          <a:p>
+            <a:r>
+              <a:t>[A customer support agent with 4 tools (lookup + refund + escalate)]: Four tools is the floor before tool-selection accuracy starts to degrade. We'll wire get_customer, lookup_order, process_refund, and escalate_to_human.</a:t>
+            </a:r>
+          </a:p>
+          <a:p>
+            <a:r>
+              <a:t>[Hook-enforced policy - the $500 refund cap can't be talked around]: This is the load-bearing demo beat. The prompt says don't exceed cap. The tool description says don't exceed cap. The hook physically blocks it. When all three layers agree, the hook never fires. The hook is there for when they disagree.</a:t>
+            </a:r>
+          </a:p>
+          <a:p>
+            <a:r>
+              <a:t>[Structured escalation to human review with a typed summary]: When the agent escalates, it passes a STRUCTURED summary, not the raw transcript. The human picks up faster. The agent's notes become signal.</a:t>
+            </a:r>
+          </a:p>
+          <a:p>
+            <a:r>
+              <a:t>[Coordinator + subagent isolation demo]: At the bottom of the notebook. Parent agent delegates to a subagent via the Task tool; subagent's working notes stay isolated from the parent's context.</a:t>
+            </a:r>
+          </a:p>
+          <a:p>
+            <a:r>
+              <a:t>[By the end of the segment: you can sketch any agent topology]: Production agent design is mostly four questions - what tools, what hook, what isolation, what escalation. You'll have answers by the next break.</a:t>
+            </a:r>
+          </a:p>
+          <a:p>
+            <a:r>
+              <a:t>CCA-F EXAM TIP: When the exam asks about agent design, the wrong answer almost always involves the model "trying really hard not to violate policy." The right answer involves a hook, a structured error, or a forced tool_choice.</a:t>
             </a:r>
           </a:p>
         </p:txBody>
@@ -3790,7 +5152,42 @@
           <a:lstStyle/>
           <a:p>
             <a:r>
-              <a:t>The hard rule: never parse natural language to detect completion. Always branch on the API field. Demo segment-1 prints [iter N] stop_reason= on every iteration so learners see the state transitions live. Refusal is rare; pause_turn shows up with long-running server tools like web_search.</a:t>
+              <a:t>FRAMER: The four-step loop is the agentic pattern. Memorize the branches; the rest of the course is built on top.</a:t>
+            </a:r>
+          </a:p>
+          <a:p>
+            <a:r>
+              <a:t>[1. Send request - model returns content + stop_reason]: Every messages.create call returns a Message with a stop_reason field. That field is the dispatcher in your code.</a:t>
+            </a:r>
+          </a:p>
+          <a:p>
+            <a:r>
+              <a:t>[2. Read stop_reason - branch on the value, never on prose]: The hard rule. Six possible values, each with a defined next action. Never inspect the text to decide what to do next.</a:t>
+            </a:r>
+          </a:p>
+          <a:p>
+            <a:r>
+              <a:t>[3. tool_use? Execute tool, append tool_result, loop]: This is the agentic part. You execute the tool YOUR code defines, append a tool_result block, send the whole conversation back. Loop.</a:t>
+            </a:r>
+          </a:p>
+          <a:p>
+            <a:r>
+              <a:t>[4. end_turn? Return to user, done]: Clean termination. The model has nothing more to add.</a:t>
+            </a:r>
+          </a:p>
+          <a:p>
+            <a:r>
+              <a:t>[5. pause_turn? Resume in the next request, no state change]: Long-running server tools (web_search, computer_use) sometimes return pause_turn. Send the message back unchanged in the next request and the model resumes where it left off.</a:t>
+            </a:r>
+          </a:p>
+          <a:p>
+            <a:r>
+              <a:t>[Six stop_reason values: end_turn, max_tokens, stop_sequence, tool_use, pause_turn, refusal]: Memorize these. They're the API contract. The demo prints [iter N] stop_reason= on every loop iteration so you SEE the state transitions live.</a:t>
+            </a:r>
+          </a:p>
+          <a:p>
+            <a:r>
+              <a:t>CCA-F EXAM TIP: If you see an answer that says "check the assistant message for keywords like 'done' or 'finished' to detect completion," it's wrong. The exam tests whether you branch on stop_reason.</a:t>
             </a:r>
           </a:p>
         </p:txBody>
@@ -3860,7 +5257,37 @@
           <a:lstStyle/>
           <a:p>
             <a:r>
-              <a:t>Isolation is the feature. The parent doesn't drown in subagent reasoning, the parent sees a clean return value. Reference cookbook: claude-cookbooks-main/claude_agent_sdk/01_The_chief_of_staff_agent.ipynb. Segment 1 demo notebook contains a stripped-down coordinator-subagent at the end.</a:t>
+              <a:t>FRAMER: When you split an agent into pieces, the boundaries matter more than the names. Coordinator-subagent is the production pattern for context isolation.</a:t>
+            </a:r>
+          </a:p>
+          <a:p>
+            <a:r>
+              <a:t>[ONE coordinator holds the user-facing thread]: There's exactly one place where the user is talking. Multiple coordinators is two cars driving the same lane - confusion, slow handoffs, lost state.</a:t>
+            </a:r>
+          </a:p>
+          <a:p>
+            <a:r>
+              <a:t>[Subagents get ISOLATED contexts via the Task tool]: The Task tool is the boundary. The subagent runs in its own context window, with its own tool set, returning only what it produces. The parent never sees the subagent's working notes.</a:t>
+            </a:r>
+          </a:p>
+          <a:p>
+            <a:r>
+              <a:t>[Subagent returns its FINAL answer to the parent, not its working notes]: This is the isolation contract. If the parent had to read every turn the subagent took, you've gained nothing.</a:t>
+            </a:r>
+          </a:p>
+          <a:p>
+            <a:r>
+              <a:t>[Split when: own success criteria, own tool subset, own context discipline]: Three conditions, all three required. If a subtask shares success criteria with its parent, it's not a separate agent - it's a step.</a:t>
+            </a:r>
+          </a:p>
+          <a:p>
+            <a:r>
+              <a:t>[Don't split for splitting's sake - two coordinators chatting is one slow agent]: Resist the urge to over-decompose. Most monolithic agents work fine. Split when you have a reason, not when it sounds architecturally pure.</a:t>
+            </a:r>
+          </a:p>
+          <a:p>
+            <a:r>
+              <a:t>CCA-F EXAM TIP: The wrong answer on subagent questions usually involves the parent reading the subagent's intermediate tool calls. The right answer involves the parent reading only the subagent's structured return value.</a:t>
             </a:r>
           </a:p>
         </p:txBody>
@@ -3930,7 +5357,37 @@
           <a:lstStyle/>
           <a:p>
             <a:r>
-              <a:t>The prompt advises; the hook enforces. The $500 refund cap is the canonical example: prompt says 'don't exceed cap', tool description says 'cap is 500', and the hook PHYSICALLY blocks anything over. When all three layers agree, the hook never fires - but it's there for when they disagree.</a:t>
+              <a:t>FRAMER: Hooks turn "should" into "must." The prompt is advisory; the hook is enforcement. This is the deterministic shell around the non-deterministic model.</a:t>
+            </a:r>
+          </a:p>
+          <a:p>
+            <a:r>
+              <a:t>[PreToolUse - gate a call BEFORE it runs (the bouncer)]: Your code inspects the tool name and inputs. Return a structured error to block; return None to allow. The model gets a tool_result with is_error=true and re-plans.</a:t>
+            </a:r>
+          </a:p>
+          <a:p>
+            <a:r>
+              <a:t>[PostToolUse - audit, transform, log AFTER (the auditor)]: The tool ran. You see what happened. Strip sensitive fields, log the call for audit, transform shapes if needed.</a:t>
+            </a:r>
+          </a:p>
+          <a:p>
+            <a:r>
+              <a:t>[SessionStart - inject context (the briefing room)]: Loaded at the top of every session. Tools, identity, policy. The agent boots with the context already in hand.</a:t>
+            </a:r>
+          </a:p>
+          <a:p>
+            <a:r>
+              <a:t>[Stop - final verification before returning to user]: One last check before the response leaves your code. Useful for final-output policy (don't echo PII, redact credit card numbers).</a:t>
+            </a:r>
+          </a:p>
+          <a:p>
+            <a:r>
+              <a:t>[Hooks run as YOUR code, not the model's. Anything that MUST happen, hook it.]: The rule. If a behavior is a business invariant, it lives in a hook. The prompt and tool description help the model do the right thing; the hook makes sure it CANNOT do the wrong thing.</a:t>
+            </a:r>
+          </a:p>
+          <a:p>
+            <a:r>
+              <a:t>CCA-F EXAM TIP: When the exam describes a policy that the agent "must" enforce, the answer involves a hook. When it says the agent "should" prefer one approach, the answer involves prompting and tool descriptions. Memorize the must-vs-should split.</a:t>
             </a:r>
           </a:p>
         </p:txBody>
@@ -45302,53 +46759,147 @@
       <p:grpSpPr/>
       <p:sp>
         <p:nvSpPr>
-          <p:cNvPr id="2" name="Text Placeholder 1"/>
-          <p:cNvSpPr>
-            <a:spLocks noGrp="1"/>
-          </p:cNvSpPr>
-          <p:nvPr>
-            <p:ph type="body" idx="10" sz="quarter"/>
+          <p:cNvPr id="2" name="Title 1"/>
+          <p:cNvSpPr>
+            <a:spLocks noGrp="1"/>
+          </p:cNvSpPr>
+          <p:nvPr>
+            <p:ph type="title"/>
           </p:nvPr>
         </p:nvSpPr>
         <p:spPr/>
         <p:txBody>
-          <a:bodyPr wrap="square"/>
+          <a:bodyPr/>
           <a:lstStyle/>
           <a:p>
             <a:r>
-              <a:t>notebooks/segment-2-5-control-surfaces.ipynb</a:t>
-            </a:r>
-          </a:p>
-          <a:p/>
-          <a:p>
-            <a:r>
-              <a:t>Three tiers tools come from - server tools, MCP, Claude Code harness</a:t>
-            </a:r>
-          </a:p>
-          <a:p>
-            <a:r>
-              <a:t>All four tool_choice modes + disable_parallel_tool_use</a:t>
-            </a:r>
-          </a:p>
-          <a:p>
-            <a:r>
-              <a:t>stop_sequences + max_tokens as control levers + pause_turn + refusal</a:t>
-            </a:r>
-          </a:p>
-          <a:p>
-            <a:r>
-              <a:t>MCP list_tools runtime discovery</a:t>
-            </a:r>
-          </a:p>
-          <a:p>
-            <a:r>
-              <a:t>The live Claude Console asset surface - memory_stores, vaults, agents, sessions</a:t>
-            </a:r>
-          </a:p>
-          <a:p/>
-          <a:p>
-            <a:r>
-              <a:t>Highest exam-objective density in the repo. Walk it for CCA-F prep.</a:t>
+              <a:t>Three tiers tools come from</a:t>
+            </a:r>
+          </a:p>
+        </p:txBody>
+      </p:sp>
+      <p:sp>
+        <p:nvSpPr>
+          <p:cNvPr id="3" name="Content Placeholder 2"/>
+          <p:cNvSpPr>
+            <a:spLocks noGrp="1"/>
+          </p:cNvSpPr>
+          <p:nvPr>
+            <p:ph idx="12" sz="quarter"/>
+          </p:nvPr>
+        </p:nvSpPr>
+        <p:spPr/>
+        <p:txBody>
+          <a:bodyPr/>
+          <a:lstStyle/>
+          <a:p>
+            <a:r>
+              <a:t>Tier 1 - Server tools</a:t>
+            </a:r>
+          </a:p>
+        </p:txBody>
+      </p:sp>
+      <p:sp>
+        <p:nvSpPr>
+          <p:cNvPr id="4" name="Text Placeholder 3"/>
+          <p:cNvSpPr>
+            <a:spLocks noGrp="1"/>
+          </p:cNvSpPr>
+          <p:nvPr>
+            <p:ph type="body" idx="15" sz="quarter"/>
+          </p:nvPr>
+        </p:nvSpPr>
+        <p:spPr/>
+        <p:txBody>
+          <a:bodyPr/>
+          <a:lstStyle/>
+          <a:p>
+            <a:r>
+              <a:t>Anthropic hosts. You register by type (bash_20250124, code_execution_20250522, web_search_20250305). Model invokes, Anthropic executes server-side.</a:t>
+            </a:r>
+          </a:p>
+        </p:txBody>
+      </p:sp>
+      <p:sp>
+        <p:nvSpPr>
+          <p:cNvPr id="5" name="Content Placeholder 4"/>
+          <p:cNvSpPr>
+            <a:spLocks noGrp="1"/>
+          </p:cNvSpPr>
+          <p:nvPr>
+            <p:ph idx="16" sz="quarter"/>
+          </p:nvPr>
+        </p:nvSpPr>
+        <p:spPr/>
+        <p:txBody>
+          <a:bodyPr/>
+          <a:lstStyle/>
+          <a:p>
+            <a:r>
+              <a:t>Tier 2 - MCP tools</a:t>
+            </a:r>
+          </a:p>
+        </p:txBody>
+      </p:sp>
+      <p:sp>
+        <p:nvSpPr>
+          <p:cNvPr id="6" name="Text Placeholder 5"/>
+          <p:cNvSpPr>
+            <a:spLocks noGrp="1"/>
+          </p:cNvSpPr>
+          <p:nvPr>
+            <p:ph type="body" idx="17" sz="quarter"/>
+          </p:nvPr>
+        </p:nvSpPr>
+        <p:spPr/>
+        <p:txBody>
+          <a:bodyPr/>
+          <a:lstStyle/>
+          <a:p>
+            <a:r>
+              <a:t>You (or a vendor) host. Discovered at runtime via list_tools(). The pattern that scales by configuration, not code.</a:t>
+            </a:r>
+          </a:p>
+        </p:txBody>
+      </p:sp>
+      <p:sp>
+        <p:nvSpPr>
+          <p:cNvPr id="7" name="Content Placeholder 6"/>
+          <p:cNvSpPr>
+            <a:spLocks noGrp="1"/>
+          </p:cNvSpPr>
+          <p:nvPr>
+            <p:ph idx="18" sz="quarter"/>
+          </p:nvPr>
+        </p:nvSpPr>
+        <p:spPr/>
+        <p:txBody>
+          <a:bodyPr/>
+          <a:lstStyle/>
+          <a:p>
+            <a:r>
+              <a:t>Tier 3 - Harness tools</a:t>
+            </a:r>
+          </a:p>
+        </p:txBody>
+      </p:sp>
+      <p:sp>
+        <p:nvSpPr>
+          <p:cNvPr id="8" name="Text Placeholder 7"/>
+          <p:cNvSpPr>
+            <a:spLocks noGrp="1"/>
+          </p:cNvSpPr>
+          <p:nvPr>
+            <p:ph type="body" idx="19" sz="quarter"/>
+          </p:nvPr>
+        </p:nvSpPr>
+        <p:spPr/>
+        <p:txBody>
+          <a:bodyPr/>
+          <a:lstStyle/>
+          <a:p>
+            <a:r>
+              <a:t>Claude Code's Read, Edit, Bash, Grep. Harness-private TypeScript. NOT API-reachable. Same noun, different runtime.</a:t>
             </a:r>
           </a:p>
         </p:txBody>
@@ -45373,21 +46924,53 @@
       <p:grpSpPr/>
       <p:sp>
         <p:nvSpPr>
-          <p:cNvPr id="2" name="Title 1"/>
-          <p:cNvSpPr>
-            <a:spLocks noGrp="1"/>
-          </p:cNvSpPr>
-          <p:nvPr>
-            <p:ph type="title"/>
+          <p:cNvPr id="2" name="Text Placeholder 1"/>
+          <p:cNvSpPr>
+            <a:spLocks noGrp="1"/>
+          </p:cNvSpPr>
+          <p:nvPr>
+            <p:ph type="body" idx="10" sz="quarter"/>
           </p:nvPr>
         </p:nvSpPr>
         <p:spPr/>
         <p:txBody>
-          <a:bodyPr/>
+          <a:bodyPr wrap="square"/>
           <a:lstStyle/>
           <a:p>
             <a:r>
-              <a:t>Segment 3: Structured Output and Reliability</a:t>
+              <a:t>notebooks/segment-2-5-control-surfaces.ipynb</a:t>
+            </a:r>
+          </a:p>
+          <a:p/>
+          <a:p>
+            <a:r>
+              <a:t>Three tiers tools come from - server tools, MCP, Claude Code harness</a:t>
+            </a:r>
+          </a:p>
+          <a:p>
+            <a:r>
+              <a:t>All four tool_choice modes + disable_parallel_tool_use</a:t>
+            </a:r>
+          </a:p>
+          <a:p>
+            <a:r>
+              <a:t>stop_sequences + max_tokens as control levers + pause_turn + refusal</a:t>
+            </a:r>
+          </a:p>
+          <a:p>
+            <a:r>
+              <a:t>MCP list_tools runtime discovery</a:t>
+            </a:r>
+          </a:p>
+          <a:p>
+            <a:r>
+              <a:t>The live Claude Console asset surface - memory_stores, vaults, agents, sessions</a:t>
+            </a:r>
+          </a:p>
+          <a:p/>
+          <a:p>
+            <a:r>
+              <a:t>Highest exam-objective density in the repo. Walk it for CCA-F prep.</a:t>
             </a:r>
           </a:p>
         </p:txBody>
@@ -45426,49 +47009,7 @@
           <a:lstStyle/>
           <a:p>
             <a:r>
-              <a:t>Two domains, one segment (again)</a:t>
-            </a:r>
-          </a:p>
-        </p:txBody>
-      </p:sp>
-      <p:sp>
-        <p:nvSpPr>
-          <p:cNvPr id="3" name="Content Placeholder 2"/>
-          <p:cNvSpPr>
-            <a:spLocks noGrp="1"/>
-          </p:cNvSpPr>
-          <p:nvPr>
-            <p:ph idx="1"/>
-          </p:nvPr>
-        </p:nvSpPr>
-        <p:spPr/>
-        <p:txBody>
-          <a:bodyPr wrap="square"/>
-          <a:lstStyle/>
-          <a:p>
-            <a:r>
-              <a:t>Domain 4 - Prompt Engineering and Structured Output (20%)</a:t>
-            </a:r>
-          </a:p>
-          <a:p>
-            <a:r>
-              <a:t>Domain 5 - Context Management and Reliability (15%)</a:t>
-            </a:r>
-          </a:p>
-          <a:p>
-            <a:r>
-              <a:t>Combined = 35% of the cert</a:t>
-            </a:r>
-          </a:p>
-          <a:p/>
-          <a:p>
-            <a:r>
-              <a:t>Why combined? Structured extraction without context discipline is fragile</a:t>
-            </a:r>
-          </a:p>
-          <a:p>
-            <a:r>
-              <a:t>Long sessions need context pinning; structured output needs validation retry</a:t>
+              <a:t>Segment 3: Structured Output and Reliability</a:t>
             </a:r>
           </a:p>
         </p:txBody>
@@ -45507,7 +47048,7 @@
           <a:lstStyle/>
           <a:p>
             <a:r>
-              <a:t>What you'll build</a:t>
+              <a:t>Two domains, one segment (again)</a:t>
             </a:r>
           </a:p>
         </p:txBody>
@@ -45528,28 +47069,28 @@
           <a:lstStyle/>
           <a:p>
             <a:r>
-              <a:t>An invoice extractor with a Pydantic schema</a:t>
-            </a:r>
-          </a:p>
-          <a:p>
-            <a:r>
-              <a:t>tool_choice {type: tool, name: extract_invoice} forces valid JSON</a:t>
-            </a:r>
-          </a:p>
-          <a:p>
-            <a:r>
-              <a:t>Validation-retry loop handles malformed output (max_retries=1)</a:t>
-            </a:r>
-          </a:p>
-          <a:p>
-            <a:r>
-              <a:t>Three invoices: clean, missing field, ambiguous line item</a:t>
+              <a:t>Domain 4 - Prompt Engineering and Structured Output (20%)</a:t>
+            </a:r>
+          </a:p>
+          <a:p>
+            <a:r>
+              <a:t>Domain 5 - Context Management and Reliability (15%)</a:t>
+            </a:r>
+          </a:p>
+          <a:p>
+            <a:r>
+              <a:t>Combined = 35% of the cert</a:t>
             </a:r>
           </a:p>
           <a:p/>
           <a:p>
             <a:r>
-              <a:t>By the end of the segment: you can extract typed data from anything</a:t>
+              <a:t>Why combined? Structured extraction without context discipline is fragile</a:t>
+            </a:r>
+          </a:p>
+          <a:p>
+            <a:r>
+              <a:t>Long sessions need context pinning; structured output needs validation retry</a:t>
             </a:r>
           </a:p>
         </p:txBody>
@@ -45675,7 +47216,7 @@
           <a:lstStyle/>
           <a:p>
             <a:r>
-              <a:t>Precise prompts beat vague prompts</a:t>
+              <a:t>What you'll build</a:t>
             </a:r>
           </a:p>
         </p:txBody>
@@ -45696,27 +47237,28 @@
           <a:lstStyle/>
           <a:p>
             <a:r>
-              <a:t>Be specific: format, edge cases, missing-data handling</a:t>
-            </a:r>
-          </a:p>
-          <a:p>
-            <a:r>
-              <a:t>Plausible hallucinations: model invents values for nullable fields</a:t>
-            </a:r>
-          </a:p>
-          <a:p>
-            <a:r>
-              <a:t>Fix: explicit 'return null if not directly stated' instruction</a:t>
-            </a:r>
-          </a:p>
-          <a:p>
-            <a:r>
-              <a:t>Inconsistent formats: 'cotton blend' vs 'Cotton/Polyester mix'</a:t>
-            </a:r>
-          </a:p>
-          <a:p>
-            <a:r>
-              <a:t>Fix: 2-3 few-shot examples, NOT lower temperature</a:t>
+              <a:t>An invoice extractor with a Pydantic schema</a:t>
+            </a:r>
+          </a:p>
+          <a:p>
+            <a:r>
+              <a:t>tool_choice {type: tool, name: extract_invoice} forces valid JSON</a:t>
+            </a:r>
+          </a:p>
+          <a:p>
+            <a:r>
+              <a:t>Validation-retry loop handles malformed output (max_retries=1)</a:t>
+            </a:r>
+          </a:p>
+          <a:p>
+            <a:r>
+              <a:t>Three invoices: clean, missing field, ambiguous line item</a:t>
+            </a:r>
+          </a:p>
+          <a:p/>
+          <a:p>
+            <a:r>
+              <a:t>By the end of the segment: you can extract typed data from anything</a:t>
             </a:r>
           </a:p>
         </p:txBody>
@@ -45755,7 +47297,7 @@
           <a:lstStyle/>
           <a:p>
             <a:r>
-              <a:t>JSON schema via tool use - the cheat code</a:t>
+              <a:t>Precise prompts beat vague prompts</a:t>
             </a:r>
           </a:p>
         </p:txBody>
@@ -45776,27 +47318,27 @@
           <a:lstStyle/>
           <a:p>
             <a:r>
-              <a:t>1. Define a Pydantic model with your fields</a:t>
-            </a:r>
-          </a:p>
-          <a:p>
-            <a:r>
-              <a:t>2. Convert to JSON Schema (model.model_json_schema())</a:t>
-            </a:r>
-          </a:p>
-          <a:p>
-            <a:r>
-              <a:t>3. Register as a tool's input_schema</a:t>
-            </a:r>
-          </a:p>
-          <a:p>
-            <a:r>
-              <a:t>4. Set tool_choice {type: tool, name: &lt;your_schema&gt;}</a:t>
-            </a:r>
-          </a:p>
-          <a:p>
-            <a:r>
-              <a:t>5. block.input is now a typed dict matching the schema</a:t>
+              <a:t>Be specific: format, edge cases, missing-data handling</a:t>
+            </a:r>
+          </a:p>
+          <a:p>
+            <a:r>
+              <a:t>Plausible hallucinations: model invents values for nullable fields</a:t>
+            </a:r>
+          </a:p>
+          <a:p>
+            <a:r>
+              <a:t>Fix: explicit 'return null if not directly stated' instruction</a:t>
+            </a:r>
+          </a:p>
+          <a:p>
+            <a:r>
+              <a:t>Inconsistent formats: 'cotton blend' vs 'Cotton/Polyester mix'</a:t>
+            </a:r>
+          </a:p>
+          <a:p>
+            <a:r>
+              <a:t>Fix: 2-3 few-shot examples, NOT lower temperature</a:t>
             </a:r>
           </a:p>
         </p:txBody>
@@ -45835,7 +47377,7 @@
           <a:lstStyle/>
           <a:p>
             <a:r>
-              <a:t>Validation + retry loops</a:t>
+              <a:t>JSON schema via tool use - the cheat code</a:t>
             </a:r>
           </a:p>
         </p:txBody>
@@ -45856,33 +47398,27 @@
           <a:lstStyle/>
           <a:p>
             <a:r>
-              <a:t>Effective: format errors, JSON parse failures, schema mismatches</a:t>
-            </a:r>
-          </a:p>
-          <a:p>
-            <a:r>
-              <a:t>    -&gt; append the error as a tool_result with is_error: true, retry</a:t>
-            </a:r>
-          </a:p>
-          <a:p>
-            <a:r>
-              <a:t>    -&gt; succeeds in 2-3 attempts</a:t>
-            </a:r>
-          </a:p>
-          <a:p/>
-          <a:p>
-            <a:r>
-              <a:t>INEFFECTIVE: knowledge gaps, ambiguous source data</a:t>
-            </a:r>
-          </a:p>
-          <a:p>
-            <a:r>
-              <a:t>    -&gt; retries DO NOT help</a:t>
-            </a:r>
-          </a:p>
-          <a:p>
-            <a:r>
-              <a:t>    -&gt; cap at 2-3, then escalate to human review</a:t>
+              <a:t>1. Define a Pydantic model with your fields</a:t>
+            </a:r>
+          </a:p>
+          <a:p>
+            <a:r>
+              <a:t>2. Convert to JSON Schema (model.model_json_schema())</a:t>
+            </a:r>
+          </a:p>
+          <a:p>
+            <a:r>
+              <a:t>3. Register as a tool's input_schema</a:t>
+            </a:r>
+          </a:p>
+          <a:p>
+            <a:r>
+              <a:t>4. Set tool_choice {type: tool, name: &lt;your_schema&gt;}</a:t>
+            </a:r>
+          </a:p>
+          <a:p>
+            <a:r>
+              <a:t>5. block.input is now a typed dict matching the schema</a:t>
             </a:r>
           </a:p>
         </p:txBody>
@@ -45921,19 +47457,19 @@
           <a:lstStyle/>
           <a:p>
             <a:r>
-              <a:t>Confidence-based routing</a:t>
-            </a:r>
-          </a:p>
-        </p:txBody>
-      </p:sp>
-      <p:sp>
-        <p:nvSpPr>
-          <p:cNvPr id="3" name="Content Placeholder 2"/>
-          <p:cNvSpPr>
-            <a:spLocks noGrp="1"/>
-          </p:cNvSpPr>
-          <p:nvPr>
-            <p:ph idx="1"/>
+              <a:t>The forced-tool_choice pattern in code</a:t>
+            </a:r>
+          </a:p>
+        </p:txBody>
+      </p:sp>
+      <p:sp>
+        <p:nvSpPr>
+          <p:cNvPr id="3" name="Text Placeholder 2"/>
+          <p:cNvSpPr>
+            <a:spLocks noGrp="1"/>
+          </p:cNvSpPr>
+          <p:nvPr>
+            <p:ph type="body" idx="10" sz="quarter"/>
           </p:nvPr>
         </p:nvSpPr>
         <p:spPr/>
@@ -45942,23 +47478,116 @@
           <a:lstStyle/>
           <a:p>
             <a:r>
-              <a:t>Have the model output field-level confidence: high | medium | low</a:t>
-            </a:r>
-          </a:p>
-          <a:p>
-            <a:r>
-              <a:t>Route: high -&gt; automated, medium -&gt; spot-check, low -&gt; human</a:t>
+              <a:t>class Invoice(BaseModel):</a:t>
+            </a:r>
+          </a:p>
+          <a:p>
+            <a:r>
+              <a:t>    invoice_number: str</a:t>
+            </a:r>
+          </a:p>
+          <a:p>
+            <a:r>
+              <a:t>    vendor: str</a:t>
+            </a:r>
+          </a:p>
+          <a:p>
+            <a:r>
+              <a:t>    total: float</a:t>
+            </a:r>
+          </a:p>
+          <a:p>
+            <a:r>
+              <a:t>    po_number: Optional[str] = None</a:t>
             </a:r>
           </a:p>
           <a:p/>
           <a:p>
             <a:r>
-              <a:t>CRITICAL: validate accuracy by document type AND field</a:t>
-            </a:r>
-          </a:p>
-          <a:p>
-            <a:r>
-              <a:t>Aggregate 95% accuracy can mask 60% accuracy on specific segments</a:t>
+              <a:t>EXTRACT_TOOL = {</a:t>
+            </a:r>
+          </a:p>
+          <a:p>
+            <a:r>
+              <a:t>    "name": "extract_invoice",</a:t>
+            </a:r>
+          </a:p>
+          <a:p>
+            <a:r>
+              <a:t>    "description": "Extract invoice fields. Do NOT invent values.",</a:t>
+            </a:r>
+          </a:p>
+          <a:p>
+            <a:r>
+              <a:t>    "input_schema": Invoice.model_json_schema(),</a:t>
+            </a:r>
+          </a:p>
+          <a:p>
+            <a:r>
+              <a:t>}</a:t>
+            </a:r>
+          </a:p>
+          <a:p/>
+          <a:p>
+            <a:r>
+              <a:t>resp = client.messages.create(</a:t>
+            </a:r>
+          </a:p>
+          <a:p>
+            <a:r>
+              <a:t>    model=MODEL,</a:t>
+            </a:r>
+          </a:p>
+          <a:p>
+            <a:r>
+              <a:t>    tools=[EXTRACT_TOOL],</a:t>
+            </a:r>
+          </a:p>
+          <a:p>
+            <a:r>
+              <a:t>    tool_choice={"type": "tool", "name": "extract_invoice"},</a:t>
+            </a:r>
+          </a:p>
+          <a:p>
+            <a:r>
+              <a:t>    messages=[{"role": "user", "content": raw_invoice_text}],</a:t>
+            </a:r>
+          </a:p>
+          <a:p>
+            <a:r>
+              <a:t>)</a:t>
+            </a:r>
+          </a:p>
+          <a:p/>
+          <a:p>
+            <a:r>
+              <a:t>tool_block = next(b for b in resp.content if b.type == "tool_use")</a:t>
+            </a:r>
+          </a:p>
+          <a:p>
+            <a:r>
+              <a:t>invoice = Invoice(**tool_block.input)   # validated, typed</a:t>
+            </a:r>
+          </a:p>
+        </p:txBody>
+      </p:sp>
+      <p:sp>
+        <p:nvSpPr>
+          <p:cNvPr id="4" name="Text Placeholder 3"/>
+          <p:cNvSpPr>
+            <a:spLocks noGrp="1"/>
+          </p:cNvSpPr>
+          <p:nvPr>
+            <p:ph type="body" idx="18" sz="quarter"/>
+          </p:nvPr>
+        </p:nvSpPr>
+        <p:spPr/>
+        <p:txBody>
+          <a:bodyPr/>
+          <a:lstStyle/>
+          <a:p>
+            <a:r>
+              <a:t>Three load-bearing lines. tool_choice={"type": "tool", "name": ...} forces the model to call that exact tool. block.input is a typed dict matching the schema. Invoice(**tool_block.input) is the validation gate. The full retry loop lives in segment-3-invoice-extractor.ipynb; this is the skeleton.</a:t>
             </a:r>
           </a:p>
         </p:txBody>
@@ -45983,12 +47612,33 @@
       <p:grpSpPr/>
       <p:sp>
         <p:nvSpPr>
-          <p:cNvPr id="2" name="Text Placeholder 1"/>
-          <p:cNvSpPr>
-            <a:spLocks noGrp="1"/>
-          </p:cNvSpPr>
-          <p:nvPr>
-            <p:ph type="body" idx="14" sz="quarter"/>
+          <p:cNvPr id="2" name="Title 1"/>
+          <p:cNvSpPr>
+            <a:spLocks noGrp="1"/>
+          </p:cNvSpPr>
+          <p:nvPr>
+            <p:ph type="title"/>
+          </p:nvPr>
+        </p:nvSpPr>
+        <p:spPr/>
+        <p:txBody>
+          <a:bodyPr/>
+          <a:lstStyle/>
+          <a:p>
+            <a:r>
+              <a:t>Validation + retry loops</a:t>
+            </a:r>
+          </a:p>
+        </p:txBody>
+      </p:sp>
+      <p:sp>
+        <p:nvSpPr>
+          <p:cNvPr id="3" name="Content Placeholder 2"/>
+          <p:cNvSpPr>
+            <a:spLocks noGrp="1"/>
+          </p:cNvSpPr>
+          <p:nvPr>
+            <p:ph idx="1"/>
           </p:nvPr>
         </p:nvSpPr>
         <p:spPr/>
@@ -45997,33 +47647,33 @@
           <a:lstStyle/>
           <a:p>
             <a:r>
-              <a:t>Demo - invoice extractor live build (20 min)</a:t>
+              <a:t>Effective: format errors, JSON parse failures, schema mismatches</a:t>
+            </a:r>
+          </a:p>
+          <a:p>
+            <a:r>
+              <a:t>    -&gt; append the error as a tool_result with is_error: true, retry</a:t>
+            </a:r>
+          </a:p>
+          <a:p>
+            <a:r>
+              <a:t>    -&gt; succeeds in 2-3 attempts</a:t>
             </a:r>
           </a:p>
           <a:p/>
           <a:p>
             <a:r>
-              <a:t>Open notebooks/segment-3-invoice-extractor.ipynb</a:t>
-            </a:r>
-          </a:p>
-          <a:p>
-            <a:r>
-              <a:t>Build the Pydantic schema, register as a tool</a:t>
-            </a:r>
-          </a:p>
-          <a:p>
-            <a:r>
-              <a:t>Force tool_choice = {type: tool, name: extract_invoice}</a:t>
-            </a:r>
-          </a:p>
-          <a:p>
-            <a:r>
-              <a:t>Run on 3 invoices: clean, missing PO, ambiguous total</a:t>
-            </a:r>
-          </a:p>
-          <a:p>
-            <a:r>
-              <a:t>Add validation-retry loop, watch it recover from a parse failure</a:t>
+              <a:t>INEFFECTIVE: knowledge gaps, ambiguous source data</a:t>
+            </a:r>
+          </a:p>
+          <a:p>
+            <a:r>
+              <a:t>    -&gt; retries DO NOT help</a:t>
+            </a:r>
+          </a:p>
+          <a:p>
+            <a:r>
+              <a:t>    -&gt; cap at 2-3, then escalate to human review</a:t>
             </a:r>
           </a:p>
         </p:txBody>
@@ -46062,7 +47712,7 @@
           <a:lstStyle/>
           <a:p>
             <a:r>
-              <a:t>Context preservation in long sessions</a:t>
+              <a:t>Confidence-based routing</a:t>
             </a:r>
           </a:p>
         </p:txBody>
@@ -46083,28 +47733,23 @@
           <a:lstStyle/>
           <a:p>
             <a:r>
-              <a:t>Pin case-facts at the top of every turn</a:t>
-            </a:r>
-          </a:p>
-          <a:p>
-            <a:r>
-              <a:t>Summarize resolved turns into narrative, drop verbatim history</a:t>
-            </a:r>
-          </a:p>
-          <a:p>
-            <a:r>
-              <a:t>Prune verbose tool outputs - extract the fields you used, drop the rest</a:t>
-            </a:r>
-          </a:p>
-          <a:p>
-            <a:r>
-              <a:t>Application-side filtering, before the next turn</a:t>
+              <a:t>Have the model output field-level confidence: high | medium | low</a:t>
+            </a:r>
+          </a:p>
+          <a:p>
+            <a:r>
+              <a:t>Route: high -&gt; automated, medium -&gt; spot-check, low -&gt; human</a:t>
             </a:r>
           </a:p>
           <a:p/>
           <a:p>
             <a:r>
-              <a:t>How lawyers manage case files. Same discipline for long agent sessions.</a:t>
+              <a:t>CRITICAL: validate accuracy by document type AND field</a:t>
+            </a:r>
+          </a:p>
+          <a:p>
+            <a:r>
+              <a:t>Aggregate 95% accuracy can mask 60% accuracy on specific segments</a:t>
             </a:r>
           </a:p>
         </p:txBody>
@@ -46129,33 +47774,12 @@
       <p:grpSpPr/>
       <p:sp>
         <p:nvSpPr>
-          <p:cNvPr id="2" name="Title 1"/>
-          <p:cNvSpPr>
-            <a:spLocks noGrp="1"/>
-          </p:cNvSpPr>
-          <p:nvPr>
-            <p:ph type="title"/>
-          </p:nvPr>
-        </p:nvSpPr>
-        <p:spPr/>
-        <p:txBody>
-          <a:bodyPr/>
-          <a:lstStyle/>
-          <a:p>
-            <a:r>
-              <a:t>Escalation design</a:t>
-            </a:r>
-          </a:p>
-        </p:txBody>
-      </p:sp>
-      <p:sp>
-        <p:nvSpPr>
-          <p:cNvPr id="3" name="Content Placeholder 2"/>
-          <p:cNvSpPr>
-            <a:spLocks noGrp="1"/>
-          </p:cNvSpPr>
-          <p:nvPr>
-            <p:ph idx="1"/>
+          <p:cNvPr id="2" name="Text Placeholder 1"/>
+          <p:cNvSpPr>
+            <a:spLocks noGrp="1"/>
+          </p:cNvSpPr>
+          <p:nvPr>
+            <p:ph type="body" idx="14" sz="quarter"/>
           </p:nvPr>
         </p:nvSpPr>
         <p:spPr/>
@@ -46164,27 +47788,33 @@
           <a:lstStyle/>
           <a:p>
             <a:r>
-              <a:t>Honor explicit human requests IMMEDIATELY</a:t>
-            </a:r>
-          </a:p>
-          <a:p>
-            <a:r>
-              <a:t>    'I want a human NOW' = escalate, don't clarify, don't try one more tool</a:t>
-            </a:r>
-          </a:p>
-          <a:p>
-            <a:r>
-              <a:t>Pass STRUCTURED summary to the human queue, not the transcript</a:t>
-            </a:r>
-          </a:p>
-          <a:p>
-            <a:r>
-              <a:t>Never escalate on sentiment alone (frustration != complexity)</a:t>
-            </a:r>
-          </a:p>
-          <a:p>
-            <a:r>
-              <a:t>Confidence-based escalation: low confidence -&gt; human review</a:t>
+              <a:t>Demo - invoice extractor live build (20 min)</a:t>
+            </a:r>
+          </a:p>
+          <a:p/>
+          <a:p>
+            <a:r>
+              <a:t>Open notebooks/segment-3-invoice-extractor.ipynb</a:t>
+            </a:r>
+          </a:p>
+          <a:p>
+            <a:r>
+              <a:t>Build the Pydantic schema, register as a tool</a:t>
+            </a:r>
+          </a:p>
+          <a:p>
+            <a:r>
+              <a:t>Force tool_choice = {type: tool, name: extract_invoice}</a:t>
+            </a:r>
+          </a:p>
+          <a:p>
+            <a:r>
+              <a:t>Run on 3 invoices: clean, missing PO, ambiguous total</a:t>
+            </a:r>
+          </a:p>
+          <a:p>
+            <a:r>
+              <a:t>Add validation-retry loop, watch it recover from a parse failure</a:t>
             </a:r>
           </a:p>
         </p:txBody>
@@ -46223,7 +47853,7 @@
           <a:lstStyle/>
           <a:p>
             <a:r>
-              <a:t>Exercise (5 min)</a:t>
+              <a:t>Context preservation in long sessions</a:t>
             </a:r>
           </a:p>
         </p:txBody>
@@ -46244,27 +47874,28 @@
           <a:lstStyle/>
           <a:p>
             <a:r>
-              <a:t>Design an extraction schema for a domain you know</a:t>
-            </a:r>
-          </a:p>
-          <a:p>
-            <a:r>
-              <a:t>Fields: required vs Optional[]</a:t>
-            </a:r>
-          </a:p>
-          <a:p>
-            <a:r>
-              <a:t>Add a confidence Literal: 'high' | 'medium' | 'low'</a:t>
-            </a:r>
-          </a:p>
-          <a:p>
-            <a:r>
-              <a:t>Add a notes Optional[str] for ambiguity</a:t>
-            </a:r>
-          </a:p>
-          <a:p>
-            <a:r>
-              <a:t>Share your schema in chat</a:t>
+              <a:t>Pin case-facts at the top of every turn</a:t>
+            </a:r>
+          </a:p>
+          <a:p>
+            <a:r>
+              <a:t>Summarize resolved turns into narrative, drop verbatim history</a:t>
+            </a:r>
+          </a:p>
+          <a:p>
+            <a:r>
+              <a:t>Prune verbose tool outputs - extract the fields you used, drop the rest</a:t>
+            </a:r>
+          </a:p>
+          <a:p>
+            <a:r>
+              <a:t>Application-side filtering, before the next turn</a:t>
+            </a:r>
+          </a:p>
+          <a:p/>
+          <a:p>
+            <a:r>
+              <a:t>How lawyers manage case files. Same discipline for long agent sessions.</a:t>
             </a:r>
           </a:p>
         </p:txBody>
@@ -46289,12 +47920,33 @@
       <p:grpSpPr/>
       <p:sp>
         <p:nvSpPr>
-          <p:cNvPr id="2" name="Text Placeholder 1"/>
-          <p:cNvSpPr>
-            <a:spLocks noGrp="1"/>
-          </p:cNvSpPr>
-          <p:nvPr>
-            <p:ph type="body" idx="13" sz="quarter"/>
+          <p:cNvPr id="2" name="Title 1"/>
+          <p:cNvSpPr>
+            <a:spLocks noGrp="1"/>
+          </p:cNvSpPr>
+          <p:nvPr>
+            <p:ph type="title"/>
+          </p:nvPr>
+        </p:nvSpPr>
+        <p:spPr/>
+        <p:txBody>
+          <a:bodyPr/>
+          <a:lstStyle/>
+          <a:p>
+            <a:r>
+              <a:t>Escalation design</a:t>
+            </a:r>
+          </a:p>
+        </p:txBody>
+      </p:sp>
+      <p:sp>
+        <p:nvSpPr>
+          <p:cNvPr id="3" name="Content Placeholder 2"/>
+          <p:cNvSpPr>
+            <a:spLocks noGrp="1"/>
+          </p:cNvSpPr>
+          <p:nvPr>
+            <p:ph idx="1"/>
           </p:nvPr>
         </p:nvSpPr>
         <p:spPr/>
@@ -46303,47 +47955,29 @@
           <a:lstStyle/>
           <a:p>
             <a:r>
-              <a:t>Segment 3 takeaways</a:t>
-            </a:r>
-          </a:p>
-          <a:p/>
-          <a:p>
-            <a:r>
-              <a:t>Pydantic + tool_choice tool = guaranteed valid JSON</a:t>
-            </a:r>
-          </a:p>
-          <a:p>
-            <a:r>
-              <a:t>Few-shot examples beat temperature tuning every time</a:t>
-            </a:r>
-          </a:p>
-          <a:p>
-            <a:r>
-              <a:t>Retries help format errors; retries do NOT help missing info</a:t>
-            </a:r>
-          </a:p>
-          <a:p>
-            <a:r>
-              <a:t>Cache the system block with cache_control - amortize policy across calls</a:t>
-            </a:r>
-          </a:p>
-        </p:txBody>
-      </p:sp>
-      <p:sp>
-        <p:nvSpPr>
-          <p:cNvPr id="3" name="Text Placeholder 2"/>
-          <p:cNvSpPr>
-            <a:spLocks noGrp="1"/>
-          </p:cNvSpPr>
-          <p:nvPr>
-            <p:ph type="body" idx="14" sz="quarter"/>
-          </p:nvPr>
-        </p:nvSpPr>
-        <p:spPr/>
-        <p:txBody>
-          <a:bodyPr/>
-          <a:lstStyle/>
-          <a:p/>
+              <a:t>Honor explicit human requests IMMEDIATELY</a:t>
+            </a:r>
+          </a:p>
+          <a:p>
+            <a:r>
+              <a:t>    'I want a human NOW' = escalate, don't clarify, don't try one more tool</a:t>
+            </a:r>
+          </a:p>
+          <a:p>
+            <a:r>
+              <a:t>Pass STRUCTURED summary to the human queue, not the transcript</a:t>
+            </a:r>
+          </a:p>
+          <a:p>
+            <a:r>
+              <a:t>Never escalate on sentiment alone (frustration != complexity)</a:t>
+            </a:r>
+          </a:p>
+          <a:p>
+            <a:r>
+              <a:t>Confidence-based escalation: low confidence -&gt; human review</a:t>
+            </a:r>
+          </a:p>
         </p:txBody>
       </p:sp>
     </p:spTree>
@@ -46380,7 +48014,48 @@
           <a:lstStyle/>
           <a:p>
             <a:r>
-              <a:t>Segment 4: CCA-F Certification Capstone</a:t>
+              <a:t>Exercise (5 min)</a:t>
+            </a:r>
+          </a:p>
+        </p:txBody>
+      </p:sp>
+      <p:sp>
+        <p:nvSpPr>
+          <p:cNvPr id="3" name="Content Placeholder 2"/>
+          <p:cNvSpPr>
+            <a:spLocks noGrp="1"/>
+          </p:cNvSpPr>
+          <p:nvPr>
+            <p:ph idx="1"/>
+          </p:nvPr>
+        </p:nvSpPr>
+        <p:spPr/>
+        <p:txBody>
+          <a:bodyPr wrap="square"/>
+          <a:lstStyle/>
+          <a:p>
+            <a:r>
+              <a:t>Design an extraction schema for a domain you know</a:t>
+            </a:r>
+          </a:p>
+          <a:p>
+            <a:r>
+              <a:t>Fields: required vs Optional[]</a:t>
+            </a:r>
+          </a:p>
+          <a:p>
+            <a:r>
+              <a:t>Add a confidence Literal: 'high' | 'medium' | 'low'</a:t>
+            </a:r>
+          </a:p>
+          <a:p>
+            <a:r>
+              <a:t>Add a notes Optional[str] for ambiguity</a:t>
+            </a:r>
+          </a:p>
+          <a:p>
+            <a:r>
+              <a:t>Share your schema in chat</a:t>
             </a:r>
           </a:p>
         </p:txBody>
@@ -46444,60 +48119,61 @@
       <p:grpSpPr/>
       <p:sp>
         <p:nvSpPr>
-          <p:cNvPr id="2" name="Title 1"/>
-          <p:cNvSpPr>
-            <a:spLocks noGrp="1"/>
-          </p:cNvSpPr>
-          <p:nvPr>
-            <p:ph type="title"/>
+          <p:cNvPr id="2" name="Text Placeholder 1"/>
+          <p:cNvSpPr>
+            <a:spLocks noGrp="1"/>
+          </p:cNvSpPr>
+          <p:nvPr>
+            <p:ph type="body" idx="13" sz="quarter"/>
+          </p:nvPr>
+        </p:nvSpPr>
+        <p:spPr/>
+        <p:txBody>
+          <a:bodyPr wrap="square"/>
+          <a:lstStyle/>
+          <a:p>
+            <a:r>
+              <a:t>Segment 3 takeaways</a:t>
+            </a:r>
+          </a:p>
+          <a:p/>
+          <a:p>
+            <a:r>
+              <a:t>Pydantic + tool_choice tool = guaranteed valid JSON</a:t>
+            </a:r>
+          </a:p>
+          <a:p>
+            <a:r>
+              <a:t>Few-shot examples beat temperature tuning every time</a:t>
+            </a:r>
+          </a:p>
+          <a:p>
+            <a:r>
+              <a:t>Retries help format errors; retries do NOT help missing info</a:t>
+            </a:r>
+          </a:p>
+          <a:p>
+            <a:r>
+              <a:t>Cache the system block with cache_control - amortize policy across calls</a:t>
+            </a:r>
+          </a:p>
+        </p:txBody>
+      </p:sp>
+      <p:sp>
+        <p:nvSpPr>
+          <p:cNvPr id="3" name="Text Placeholder 2"/>
+          <p:cNvSpPr>
+            <a:spLocks noGrp="1"/>
+          </p:cNvSpPr>
+          <p:nvPr>
+            <p:ph type="body" idx="14" sz="quarter"/>
           </p:nvPr>
         </p:nvSpPr>
         <p:spPr/>
         <p:txBody>
           <a:bodyPr/>
           <a:lstStyle/>
-          <a:p>
-            <a:r>
-              <a:t>What CCA-F is</a:t>
-            </a:r>
-          </a:p>
-        </p:txBody>
-      </p:sp>
-      <p:sp>
-        <p:nvSpPr>
-          <p:cNvPr id="3" name="Content Placeholder 2"/>
-          <p:cNvSpPr>
-            <a:spLocks noGrp="1"/>
-          </p:cNvSpPr>
-          <p:nvPr>
-            <p:ph idx="1"/>
-          </p:nvPr>
-        </p:nvSpPr>
-        <p:spPr/>
-        <p:txBody>
-          <a:bodyPr wrap="square"/>
-          <a:lstStyle/>
-          <a:p>
-            <a:r>
-              <a:t>Claude Certified Architect: Foundations - Anthropic's first official certification</a:t>
-            </a:r>
-          </a:p>
-          <a:p>
-            <a:r>
-              <a:t>Targets architects shipping with Agent SDK, Claude Code, Claude API, MCP</a:t>
-            </a:r>
-          </a:p>
-          <a:p>
-            <a:r>
-              <a:t>Roughly the 301 skill level - past 'hello world', not yet 'I run distillation pipelines'</a:t>
-            </a:r>
-          </a:p>
           <a:p/>
-          <a:p>
-            <a:r>
-              <a:t>Beta product as of 2026 - watch the official cert page for changes</a:t>
-            </a:r>
-          </a:p>
         </p:txBody>
       </p:sp>
     </p:spTree>
@@ -46534,58 +48210,7 @@
           <a:lstStyle/>
           <a:p>
             <a:r>
-              <a:t>Exam mechanics (the load-bearing facts)</a:t>
-            </a:r>
-          </a:p>
-        </p:txBody>
-      </p:sp>
-      <p:sp>
-        <p:nvSpPr>
-          <p:cNvPr id="3" name="Content Placeholder 2"/>
-          <p:cNvSpPr>
-            <a:spLocks noGrp="1"/>
-          </p:cNvSpPr>
-          <p:nvPr>
-            <p:ph idx="1"/>
-          </p:nvPr>
-        </p:nvSpPr>
-        <p:spPr/>
-        <p:txBody>
-          <a:bodyPr wrap="square"/>
-          <a:lstStyle/>
-          <a:p>
-            <a:r>
-              <a:t>Questions: 60 multiple-choice</a:t>
-            </a:r>
-          </a:p>
-          <a:p>
-            <a:r>
-              <a:t>Time: 120 minutes, single session, no breaks</a:t>
-            </a:r>
-          </a:p>
-          <a:p>
-            <a:r>
-              <a:t>Scoring: scaled 100-1000, passing = 720, no guess penalty</a:t>
-            </a:r>
-          </a:p>
-          <a:p>
-            <a:r>
-              <a:t>Delivery: ProctorFree, English</a:t>
-            </a:r>
-          </a:p>
-          <a:p>
-            <a:r>
-              <a:t>Results: 2 business days</a:t>
-            </a:r>
-          </a:p>
-          <a:p>
-            <a:r>
-              <a:t>Cost: $99 per attempt</a:t>
-            </a:r>
-          </a:p>
-          <a:p>
-            <a:r>
-              <a:t>Attempts: ONE - this is the policy that catches people</a:t>
+              <a:t>Segment 4: CCA-F Certification Capstone</a:t>
             </a:r>
           </a:p>
         </p:txBody>
@@ -46624,19 +48249,19 @@
           <a:lstStyle/>
           <a:p>
             <a:r>
-              <a:t>Domain weights and where each was taught</a:t>
-            </a:r>
-          </a:p>
-        </p:txBody>
-      </p:sp>
-      <p:sp>
-        <p:nvSpPr>
-          <p:cNvPr id="3" name="Text Placeholder 2"/>
-          <p:cNvSpPr>
-            <a:spLocks noGrp="1"/>
-          </p:cNvSpPr>
-          <p:nvPr>
-            <p:ph type="body" idx="10" sz="quarter"/>
+              <a:t>What CCA-F is</a:t>
+            </a:r>
+          </a:p>
+        </p:txBody>
+      </p:sp>
+      <p:sp>
+        <p:nvSpPr>
+          <p:cNvPr id="3" name="Content Placeholder 2"/>
+          <p:cNvSpPr>
+            <a:spLocks noGrp="1"/>
+          </p:cNvSpPr>
+          <p:nvPr>
+            <p:ph idx="1"/>
           </p:nvPr>
         </p:nvSpPr>
         <p:spPr/>
@@ -46645,105 +48270,25 @@
           <a:lstStyle/>
           <a:p>
             <a:r>
-              <a:t>Domain 1 - Agentic Architecture (27%)</a:t>
-            </a:r>
-          </a:p>
-          <a:p>
-            <a:r>
-              <a:t>Heaviest. Segment 1 - agents, hooks, coordinator-subagent. Re-walk segment-1.</a:t>
-            </a:r>
-          </a:p>
-          <a:p>
-            <a:r>
-              <a:t>Domain 2 - Tool Design and MCP (18%)</a:t>
-            </a:r>
-          </a:p>
-          <a:p>
-            <a:r>
-              <a:t>Segment 2 + 2.5. Tool descriptions, structured errors, MCP list_tools.</a:t>
-            </a:r>
-          </a:p>
-          <a:p>
-            <a:r>
-              <a:t>Domain 3 - Claude Code (20%)</a:t>
-            </a:r>
-          </a:p>
-          <a:p>
-            <a:r>
-              <a:t>Segment 2. CLAUDE.md hierarchy, skills, slash commands, claude -p headless.</a:t>
-            </a:r>
-          </a:p>
-          <a:p>
-            <a:r>
-              <a:t>Domain 4 - Prompts and Structured Output (20%)</a:t>
-            </a:r>
-          </a:p>
-          <a:p>
-            <a:r>
-              <a:t>Segment 3. Forced tool_choice, Pydantic schemas, few-shot, retry loops.</a:t>
-            </a:r>
-          </a:p>
-          <a:p>
-            <a:r>
-              <a:t>Domain 5 - Context and Reliability (15%)</a:t>
-            </a:r>
-          </a:p>
-          <a:p>
-            <a:r>
-              <a:t>Segment 3 + parts of Segment 1. Context pinning, escalation, structured errors.</a:t>
-            </a:r>
-          </a:p>
-        </p:txBody>
-      </p:sp>
-      <p:sp>
-        <p:nvSpPr>
-          <p:cNvPr id="4" name="Text Placeholder 3"/>
-          <p:cNvSpPr>
-            <a:spLocks noGrp="1"/>
-          </p:cNvSpPr>
-          <p:nvPr>
-            <p:ph type="body" idx="15" sz="quarter"/>
-          </p:nvPr>
-        </p:nvSpPr>
-        <p:spPr/>
-        <p:txBody>
-          <a:bodyPr/>
-          <a:lstStyle/>
+              <a:t>Claude Certified Architect: Foundations - Anthropic's first official certification</a:t>
+            </a:r>
+          </a:p>
+          <a:p>
+            <a:r>
+              <a:t>Targets architects shipping with Agent SDK, Claude Code, Claude API, MCP</a:t>
+            </a:r>
+          </a:p>
+          <a:p>
+            <a:r>
+              <a:t>Roughly the 301 skill level - past 'hello world', not yet 'I run distillation pipelines'</a:t>
+            </a:r>
+          </a:p>
           <a:p/>
-        </p:txBody>
-      </p:sp>
-      <p:sp>
-        <p:nvSpPr>
-          <p:cNvPr id="5" name="Text Placeholder 4"/>
-          <p:cNvSpPr>
-            <a:spLocks noGrp="1"/>
-          </p:cNvSpPr>
-          <p:nvPr>
-            <p:ph type="body" idx="16" sz="quarter"/>
-          </p:nvPr>
-        </p:nvSpPr>
-        <p:spPr/>
-        <p:txBody>
-          <a:bodyPr/>
-          <a:lstStyle/>
-          <a:p/>
-        </p:txBody>
-      </p:sp>
-      <p:sp>
-        <p:nvSpPr>
-          <p:cNvPr id="6" name="Text Placeholder 5"/>
-          <p:cNvSpPr>
-            <a:spLocks noGrp="1"/>
-          </p:cNvSpPr>
-          <p:nvPr>
-            <p:ph type="body" idx="17" sz="quarter"/>
-          </p:nvPr>
-        </p:nvSpPr>
-        <p:spPr/>
-        <p:txBody>
-          <a:bodyPr/>
-          <a:lstStyle/>
-          <a:p/>
+          <a:p>
+            <a:r>
+              <a:t>Beta product as of 2026 - watch the official cert page for changes</a:t>
+            </a:r>
+          </a:p>
         </p:txBody>
       </p:sp>
     </p:spTree>
@@ -46780,19 +48325,19 @@
           <a:lstStyle/>
           <a:p>
             <a:r>
-              <a:t>Why the practice sampler is domain-weighted</a:t>
-            </a:r>
-          </a:p>
-        </p:txBody>
-      </p:sp>
-      <p:sp>
-        <p:nvSpPr>
-          <p:cNvPr id="3" name="Text Placeholder 2"/>
-          <p:cNvSpPr>
-            <a:spLocks noGrp="1"/>
-          </p:cNvSpPr>
-          <p:nvPr>
-            <p:ph type="body" idx="10" sz="quarter"/>
+              <a:t>Exam mechanics (the load-bearing facts)</a:t>
+            </a:r>
+          </a:p>
+        </p:txBody>
+      </p:sp>
+      <p:sp>
+        <p:nvSpPr>
+          <p:cNvPr id="3" name="Content Placeholder 2"/>
+          <p:cNvSpPr>
+            <a:spLocks noGrp="1"/>
+          </p:cNvSpPr>
+          <p:nvPr>
+            <p:ph idx="1"/>
           </p:nvPr>
         </p:nvSpPr>
         <p:spPr/>
@@ -46801,41 +48346,39 @@
           <a:lstStyle/>
           <a:p>
             <a:r>
-              <a:t>The naive sampler</a:t>
-            </a:r>
-          </a:p>
-          <a:p>
-            <a:r>
-              <a:t>Pulls questions evenly across scenario families - which over-tests Claude Code (two scenarios are heavily D3) and under-tests context management (only fits in one).</a:t>
-            </a:r>
-          </a:p>
-          <a:p>
-            <a:r>
-              <a:t>Our sampler</a:t>
-            </a:r>
-          </a:p>
-          <a:p>
-            <a:r>
-              <a:t>Draws 3 D1 + 2 D2 + 2 D3 + 2 D4 + 1 D5 - matches the exam's 27/18/20/20/15 weighting exactly. Every cohort sees the SAME 10 questions in the same order (seed=2026) for consistency across deliveries.</a:t>
-            </a:r>
-          </a:p>
-        </p:txBody>
-      </p:sp>
-      <p:sp>
-        <p:nvSpPr>
-          <p:cNvPr id="4" name="Text Placeholder 3"/>
-          <p:cNvSpPr>
-            <a:spLocks noGrp="1"/>
-          </p:cNvSpPr>
-          <p:nvPr>
-            <p:ph type="body" idx="12" sz="quarter"/>
-          </p:nvPr>
-        </p:nvSpPr>
-        <p:spPr/>
-        <p:txBody>
-          <a:bodyPr/>
-          <a:lstStyle/>
-          <a:p/>
+              <a:t>Questions: 60 multiple-choice</a:t>
+            </a:r>
+          </a:p>
+          <a:p>
+            <a:r>
+              <a:t>Time: 120 minutes, single session, no breaks</a:t>
+            </a:r>
+          </a:p>
+          <a:p>
+            <a:r>
+              <a:t>Scoring: scaled 100-1000, passing = 720, no guess penalty</a:t>
+            </a:r>
+          </a:p>
+          <a:p>
+            <a:r>
+              <a:t>Delivery: ProctorFree, English</a:t>
+            </a:r>
+          </a:p>
+          <a:p>
+            <a:r>
+              <a:t>Results: 2 business days</a:t>
+            </a:r>
+          </a:p>
+          <a:p>
+            <a:r>
+              <a:t>Cost: $99 per attempt</a:t>
+            </a:r>
+          </a:p>
+          <a:p>
+            <a:r>
+              <a:t>Attempts: ONE - this is the policy that catches people</a:t>
+            </a:r>
+          </a:p>
         </p:txBody>
       </p:sp>
     </p:spTree>
@@ -46858,12 +48401,33 @@
       <p:grpSpPr/>
       <p:sp>
         <p:nvSpPr>
-          <p:cNvPr id="2" name="Text Placeholder 1"/>
-          <p:cNvSpPr>
-            <a:spLocks noGrp="1"/>
-          </p:cNvSpPr>
-          <p:nvPr>
-            <p:ph type="body" idx="14" sz="quarter"/>
+          <p:cNvPr id="2" name="Title 1"/>
+          <p:cNvSpPr>
+            <a:spLocks noGrp="1"/>
+          </p:cNvSpPr>
+          <p:nvPr>
+            <p:ph type="title"/>
+          </p:nvPr>
+        </p:nvSpPr>
+        <p:spPr/>
+        <p:txBody>
+          <a:bodyPr/>
+          <a:lstStyle/>
+          <a:p>
+            <a:r>
+              <a:t>Domain weights and where each was taught</a:t>
+            </a:r>
+          </a:p>
+        </p:txBody>
+      </p:sp>
+      <p:sp>
+        <p:nvSpPr>
+          <p:cNvPr id="3" name="Text Placeholder 2"/>
+          <p:cNvSpPr>
+            <a:spLocks noGrp="1"/>
+          </p:cNvSpPr>
+          <p:nvPr>
+            <p:ph type="body" idx="10" sz="quarter"/>
           </p:nvPr>
         </p:nvSpPr>
         <p:spPr/>
@@ -46872,45 +48436,105 @@
           <a:lstStyle/>
           <a:p>
             <a:r>
-              <a:t>Live practice - 10 weighted questions (~28 min)</a:t>
-            </a:r>
-          </a:p>
+              <a:t>Domain 1 - Agentic Architecture (27%)</a:t>
+            </a:r>
+          </a:p>
+          <a:p>
+            <a:r>
+              <a:t>Heaviest. Segment 1 - agents, hooks, coordinator-subagent. Re-walk segment-1.</a:t>
+            </a:r>
+          </a:p>
+          <a:p>
+            <a:r>
+              <a:t>Domain 2 - Tool Design and MCP (18%)</a:t>
+            </a:r>
+          </a:p>
+          <a:p>
+            <a:r>
+              <a:t>Segment 2 + 2.5. Tool descriptions, structured errors, MCP list_tools.</a:t>
+            </a:r>
+          </a:p>
+          <a:p>
+            <a:r>
+              <a:t>Domain 3 - Claude Code (20%)</a:t>
+            </a:r>
+          </a:p>
+          <a:p>
+            <a:r>
+              <a:t>Segment 2. CLAUDE.md hierarchy, skills, slash commands, claude -p headless.</a:t>
+            </a:r>
+          </a:p>
+          <a:p>
+            <a:r>
+              <a:t>Domain 4 - Prompts and Structured Output (20%)</a:t>
+            </a:r>
+          </a:p>
+          <a:p>
+            <a:r>
+              <a:t>Segment 3. Forced tool_choice, Pydantic schemas, few-shot, retry loops.</a:t>
+            </a:r>
+          </a:p>
+          <a:p>
+            <a:r>
+              <a:t>Domain 5 - Context and Reliability (15%)</a:t>
+            </a:r>
+          </a:p>
+          <a:p>
+            <a:r>
+              <a:t>Segment 3 + parts of Segment 1. Context pinning, escalation, structured errors.</a:t>
+            </a:r>
+          </a:p>
+        </p:txBody>
+      </p:sp>
+      <p:sp>
+        <p:nvSpPr>
+          <p:cNvPr id="4" name="Text Placeholder 3"/>
+          <p:cNvSpPr>
+            <a:spLocks noGrp="1"/>
+          </p:cNvSpPr>
+          <p:nvPr>
+            <p:ph type="body" idx="15" sz="quarter"/>
+          </p:nvPr>
+        </p:nvSpPr>
+        <p:spPr/>
+        <p:txBody>
+          <a:bodyPr/>
+          <a:lstStyle/>
           <a:p/>
-          <a:p>
-            <a:r>
-              <a:t>Open notebooks/segment-4-cca-f-capstone.ipynb</a:t>
-            </a:r>
-          </a:p>
-          <a:p>
-            <a:r>
-              <a:t>Sampler draws 10 questions by CCA-F domain weight (3/2/2/2/1)</a:t>
-            </a:r>
-          </a:p>
-          <a:p>
-            <a:r>
-              <a:t>Per question (~2.5 min):</a:t>
-            </a:r>
-          </a:p>
-          <a:p>
-            <a:r>
-              <a:t>  1. Read the situation</a:t>
-            </a:r>
-          </a:p>
-          <a:p>
-            <a:r>
-              <a:t>  2. Cohort votes A/B/C/D in chat</a:t>
-            </a:r>
-          </a:p>
-          <a:p>
-            <a:r>
-              <a:t>  3. Reveal answer + explanation</a:t>
-            </a:r>
-          </a:p>
-          <a:p>
-            <a:r>
-              <a:t>  4. Color with a production tip from the matching domain-N-*.md</a:t>
-            </a:r>
-          </a:p>
+        </p:txBody>
+      </p:sp>
+      <p:sp>
+        <p:nvSpPr>
+          <p:cNvPr id="5" name="Text Placeholder 4"/>
+          <p:cNvSpPr>
+            <a:spLocks noGrp="1"/>
+          </p:cNvSpPr>
+          <p:nvPr>
+            <p:ph type="body" idx="16" sz="quarter"/>
+          </p:nvPr>
+        </p:nvSpPr>
+        <p:spPr/>
+        <p:txBody>
+          <a:bodyPr/>
+          <a:lstStyle/>
+          <a:p/>
+        </p:txBody>
+      </p:sp>
+      <p:sp>
+        <p:nvSpPr>
+          <p:cNvPr id="6" name="Text Placeholder 5"/>
+          <p:cNvSpPr>
+            <a:spLocks noGrp="1"/>
+          </p:cNvSpPr>
+          <p:nvPr>
+            <p:ph type="body" idx="17" sz="quarter"/>
+          </p:nvPr>
+        </p:nvSpPr>
+        <p:spPr/>
+        <p:txBody>
+          <a:bodyPr/>
+          <a:lstStyle/>
+          <a:p/>
         </p:txBody>
       </p:sp>
     </p:spTree>
@@ -46947,19 +48571,19 @@
           <a:lstStyle/>
           <a:p>
             <a:r>
-              <a:t>Tim's week-before-the-exam punchlist</a:t>
-            </a:r>
-          </a:p>
-        </p:txBody>
-      </p:sp>
-      <p:sp>
-        <p:nvSpPr>
-          <p:cNvPr id="3" name="Content Placeholder 2"/>
-          <p:cNvSpPr>
-            <a:spLocks noGrp="1"/>
-          </p:cNvSpPr>
-          <p:nvPr>
-            <p:ph idx="1"/>
+              <a:t>Why the practice sampler is domain-weighted</a:t>
+            </a:r>
+          </a:p>
+        </p:txBody>
+      </p:sp>
+      <p:sp>
+        <p:nvSpPr>
+          <p:cNvPr id="3" name="Text Placeholder 2"/>
+          <p:cNvSpPr>
+            <a:spLocks noGrp="1"/>
+          </p:cNvSpPr>
+          <p:nvPr>
+            <p:ph type="body" idx="10" sz="quarter"/>
           </p:nvPr>
         </p:nvSpPr>
         <p:spPr/>
@@ -46968,34 +48592,41 @@
           <a:lstStyle/>
           <a:p>
             <a:r>
-              <a:t>1. Score &gt;900 on the Anthropic Practice Exam cold</a:t>
-            </a:r>
-          </a:p>
-          <a:p>
-            <a:r>
-              <a:t>2. Rebuild Segment 1 from memory in 30 minutes</a:t>
-            </a:r>
-          </a:p>
-          <a:p>
-            <a:r>
-              <a:t>3. Re-read domain-1-agentic.md - the 27% domain</a:t>
-            </a:r>
-          </a:p>
-          <a:p>
-            <a:r>
-              <a:t>4. Skim domain-3-claude-code.md and domain-4-prompts.md - the 20% domains</a:t>
-            </a:r>
-          </a:p>
-          <a:p>
-            <a:r>
-              <a:t>5. Verify proctoring setup the night before (camera, mic, ID)</a:t>
-            </a:r>
-          </a:p>
-          <a:p>
-            <a:r>
-              <a:t>6. Single attempt. Do not schedule until 1-4 are green.</a:t>
-            </a:r>
-          </a:p>
+              <a:t>The naive sampler</a:t>
+            </a:r>
+          </a:p>
+          <a:p>
+            <a:r>
+              <a:t>Pulls questions evenly across scenario families - which over-tests Claude Code (two scenarios are heavily D3) and under-tests context management (only fits in one).</a:t>
+            </a:r>
+          </a:p>
+          <a:p>
+            <a:r>
+              <a:t>Our sampler</a:t>
+            </a:r>
+          </a:p>
+          <a:p>
+            <a:r>
+              <a:t>Draws 3 D1 + 2 D2 + 2 D3 + 2 D4 + 1 D5 - matches the exam's 27/18/20/20/15 weighting exactly. Every cohort sees the SAME 10 questions in the same order (seed=2026) for consistency across deliveries.</a:t>
+            </a:r>
+          </a:p>
+        </p:txBody>
+      </p:sp>
+      <p:sp>
+        <p:nvSpPr>
+          <p:cNvPr id="4" name="Text Placeholder 3"/>
+          <p:cNvSpPr>
+            <a:spLocks noGrp="1"/>
+          </p:cNvSpPr>
+          <p:nvPr>
+            <p:ph type="body" idx="12" sz="quarter"/>
+          </p:nvPr>
+        </p:nvSpPr>
+        <p:spPr/>
+        <p:txBody>
+          <a:bodyPr/>
+          <a:lstStyle/>
+          <a:p/>
         </p:txBody>
       </p:sp>
     </p:spTree>
@@ -47018,33 +48649,12 @@
       <p:grpSpPr/>
       <p:sp>
         <p:nvSpPr>
-          <p:cNvPr id="2" name="Title 1"/>
-          <p:cNvSpPr>
-            <a:spLocks noGrp="1"/>
-          </p:cNvSpPr>
-          <p:nvPr>
-            <p:ph type="title"/>
-          </p:nvPr>
-        </p:nvSpPr>
-        <p:spPr/>
-        <p:txBody>
-          <a:bodyPr/>
-          <a:lstStyle/>
-          <a:p>
-            <a:r>
-              <a:t>What you built today</a:t>
-            </a:r>
-          </a:p>
-        </p:txBody>
-      </p:sp>
-      <p:sp>
-        <p:nvSpPr>
-          <p:cNvPr id="3" name="Content Placeholder 2"/>
-          <p:cNvSpPr>
-            <a:spLocks noGrp="1"/>
-          </p:cNvSpPr>
-          <p:nvPr>
-            <p:ph idx="1"/>
+          <p:cNvPr id="2" name="Text Placeholder 1"/>
+          <p:cNvSpPr>
+            <a:spLocks noGrp="1"/>
+          </p:cNvSpPr>
+          <p:nvPr>
+            <p:ph type="body" idx="14" sz="quarter"/>
           </p:nvPr>
         </p:nvSpPr>
         <p:spPr/>
@@ -47053,28 +48663,43 @@
           <a:lstStyle/>
           <a:p>
             <a:r>
-              <a:t>Customer support agent with PreToolUse hook enforcement</a:t>
-            </a:r>
-          </a:p>
-          <a:p>
-            <a:r>
-              <a:t>Configured Claude Code env with .mcp.json + CLAUDE.md hierarchy</a:t>
-            </a:r>
-          </a:p>
-          <a:p>
-            <a:r>
-              <a:t>Invoice extractor with Pydantic schema + validation retry</a:t>
-            </a:r>
-          </a:p>
-          <a:p>
-            <a:r>
-              <a:t>Production reliability mental model - context, escalation, errors, provenance</a:t>
+              <a:t>Live practice - 10 weighted questions (~28 min)</a:t>
             </a:r>
           </a:p>
           <a:p/>
           <a:p>
             <a:r>
-              <a:t>Plus self-study: control surfaces and the Console asset surface (Segment 2.5)</a:t>
+              <a:t>Open notebooks/segment-4-cca-f-capstone.ipynb</a:t>
+            </a:r>
+          </a:p>
+          <a:p>
+            <a:r>
+              <a:t>Sampler draws 10 questions by CCA-F domain weight (3/2/2/2/1)</a:t>
+            </a:r>
+          </a:p>
+          <a:p>
+            <a:r>
+              <a:t>Per question (~2.5 min):</a:t>
+            </a:r>
+          </a:p>
+          <a:p>
+            <a:r>
+              <a:t>  1. Read the situation</a:t>
+            </a:r>
+          </a:p>
+          <a:p>
+            <a:r>
+              <a:t>  2. Cohort votes A/B/C/D in chat</a:t>
+            </a:r>
+          </a:p>
+          <a:p>
+            <a:r>
+              <a:t>  3. Reveal answer + explanation</a:t>
+            </a:r>
+          </a:p>
+          <a:p>
+            <a:r>
+              <a:t>  4. Color with a production tip from the matching domain-N-*.md</a:t>
             </a:r>
           </a:p>
         </p:txBody>
@@ -47113,19 +48738,19 @@
           <a:lstStyle/>
           <a:p>
             <a:r>
-              <a:t>Resources and next steps</a:t>
-            </a:r>
-          </a:p>
-        </p:txBody>
-      </p:sp>
-      <p:sp>
-        <p:nvSpPr>
-          <p:cNvPr id="3" name="Text Placeholder 2"/>
-          <p:cNvSpPr>
-            <a:spLocks noGrp="1"/>
-          </p:cNvSpPr>
-          <p:nvPr>
-            <p:ph type="body" idx="15" sz="quarter"/>
+              <a:t>Tim's week-before-the-exam punchlist</a:t>
+            </a:r>
+          </a:p>
+        </p:txBody>
+      </p:sp>
+      <p:sp>
+        <p:nvSpPr>
+          <p:cNvPr id="3" name="Content Placeholder 2"/>
+          <p:cNvSpPr>
+            <a:spLocks noGrp="1"/>
+          </p:cNvSpPr>
+          <p:nvPr>
+            <p:ph idx="1"/>
           </p:nvPr>
         </p:nvSpPr>
         <p:spPr/>
@@ -47134,144 +48759,35 @@
           <a:lstStyle/>
           <a:p>
             <a:r>
-              <a:t>Repo</a:t>
-            </a:r>
-          </a:p>
-          <a:p>
-            <a:r>
-              <a:t>github.com/timothywarner-org/claude-architect</a:t>
-            </a:r>
-          </a:p>
-          <a:p>
-            <a:r>
-              <a:t>Anthropic cookbook (official, MIT, vendored in this repo)</a:t>
-            </a:r>
-          </a:p>
-          <a:p>
-            <a:r>
-              <a:t>github.com/anthropics/claude-cookbooks   |   claude-cookbooks-main/</a:t>
-            </a:r>
-          </a:p>
-          <a:p>
-            <a:r>
-              <a:t>CCA-F study path</a:t>
-            </a:r>
-          </a:p>
-          <a:p>
-            <a:r>
-              <a:t>EXAM-STUDY-PATH.md - notebook -&gt; CCA-F domain -&gt; scenario mapping</a:t>
-            </a:r>
-          </a:p>
-          <a:p>
-            <a:r>
-              <a:t>Anthropic Academy</a:t>
-            </a:r>
-          </a:p>
-          <a:p>
-            <a:r>
-              <a:t>anthropic.skilljar.com - free courses, official Practice Exam</a:t>
-            </a:r>
-          </a:p>
-        </p:txBody>
-      </p:sp>
-      <p:sp>
-        <p:nvSpPr>
-          <p:cNvPr id="4" name="Text Placeholder 3"/>
-          <p:cNvSpPr>
-            <a:spLocks noGrp="1"/>
-          </p:cNvSpPr>
-          <p:nvPr>
-            <p:ph type="body" idx="17" sz="quarter"/>
-          </p:nvPr>
-        </p:nvSpPr>
-        <p:spPr/>
-        <p:txBody>
-          <a:bodyPr/>
-          <a:lstStyle/>
-          <a:p/>
-        </p:txBody>
-      </p:sp>
-      <p:sp>
-        <p:nvSpPr>
-          <p:cNvPr id="5" name="Text Placeholder 4"/>
-          <p:cNvSpPr>
-            <a:spLocks noGrp="1"/>
-          </p:cNvSpPr>
-          <p:nvPr>
-            <p:ph type="body" idx="19" sz="quarter"/>
-          </p:nvPr>
-        </p:nvSpPr>
-        <p:spPr/>
-        <p:txBody>
-          <a:bodyPr/>
-          <a:lstStyle/>
-          <a:p/>
-        </p:txBody>
-      </p:sp>
-      <p:sp>
-        <p:nvSpPr>
-          <p:cNvPr id="6" name="Text Placeholder 5"/>
-          <p:cNvSpPr>
-            <a:spLocks noGrp="1"/>
-          </p:cNvSpPr>
-          <p:nvPr>
-            <p:ph type="body" idx="21" sz="quarter"/>
-          </p:nvPr>
-        </p:nvSpPr>
-        <p:spPr/>
-        <p:txBody>
-          <a:bodyPr/>
-          <a:lstStyle/>
-          <a:p/>
-        </p:txBody>
-      </p:sp>
-      <p:sp>
-        <p:nvSpPr>
-          <p:cNvPr id="7" name="Picture Placeholder 6"/>
-          <p:cNvSpPr>
-            <a:spLocks noGrp="1"/>
-          </p:cNvSpPr>
-          <p:nvPr>
-            <p:ph type="pic" idx="22" sz="quarter"/>
-          </p:nvPr>
-        </p:nvSpPr>
-        <p:spPr/>
-      </p:sp>
-      <p:sp>
-        <p:nvSpPr>
-          <p:cNvPr id="8" name="Picture Placeholder 7"/>
-          <p:cNvSpPr>
-            <a:spLocks noGrp="1"/>
-          </p:cNvSpPr>
-          <p:nvPr>
-            <p:ph type="pic" idx="23" sz="quarter"/>
-          </p:nvPr>
-        </p:nvSpPr>
-        <p:spPr/>
-      </p:sp>
-      <p:sp>
-        <p:nvSpPr>
-          <p:cNvPr id="9" name="Picture Placeholder 8"/>
-          <p:cNvSpPr>
-            <a:spLocks noGrp="1"/>
-          </p:cNvSpPr>
-          <p:nvPr>
-            <p:ph type="pic" idx="24" sz="quarter"/>
-          </p:nvPr>
-        </p:nvSpPr>
-        <p:spPr/>
-      </p:sp>
-      <p:sp>
-        <p:nvSpPr>
-          <p:cNvPr id="10" name="Picture Placeholder 9"/>
-          <p:cNvSpPr>
-            <a:spLocks noGrp="1"/>
-          </p:cNvSpPr>
-          <p:nvPr>
-            <p:ph type="pic" idx="25" sz="quarter"/>
-          </p:nvPr>
-        </p:nvSpPr>
-        <p:spPr/>
+              <a:t>1. Score &gt;900 on the Anthropic Practice Exam cold</a:t>
+            </a:r>
+          </a:p>
+          <a:p>
+            <a:r>
+              <a:t>2. Rebuild Segment 1 from memory in 30 minutes</a:t>
+            </a:r>
+          </a:p>
+          <a:p>
+            <a:r>
+              <a:t>3. Re-read domain-1-agentic.md - the 27% domain</a:t>
+            </a:r>
+          </a:p>
+          <a:p>
+            <a:r>
+              <a:t>4. Skim domain-3-claude-code.md and domain-4-prompts.md - the 20% domains</a:t>
+            </a:r>
+          </a:p>
+          <a:p>
+            <a:r>
+              <a:t>5. Verify proctoring setup the night before (camera, mic, ID)</a:t>
+            </a:r>
+          </a:p>
+          <a:p>
+            <a:r>
+              <a:t>6. Single attempt. Do not schedule until 1-4 are green.</a:t>
+            </a:r>
+          </a:p>
+        </p:txBody>
       </p:sp>
     </p:spTree>
   </p:cSld>
@@ -47307,7 +48823,7 @@
           <a:lstStyle/>
           <a:p>
             <a:r>
-              <a:t>Final Q&amp;A (10 min)</a:t>
+              <a:t>What you built today</a:t>
             </a:r>
           </a:p>
         </p:txBody>
@@ -47328,27 +48844,28 @@
           <a:lstStyle/>
           <a:p>
             <a:r>
-              <a:t>How do I monitor an agent in production?</a:t>
-            </a:r>
-          </a:p>
-          <a:p>
-            <a:r>
-              <a:t>When do I split a monolithic agent into coordinator + subagents?</a:t>
-            </a:r>
-          </a:p>
-          <a:p>
-            <a:r>
-              <a:t>What is the cost story for prompt caching?</a:t>
-            </a:r>
-          </a:p>
-          <a:p>
-            <a:r>
-              <a:t>How do I know when I am ready to sit the exam?</a:t>
-            </a:r>
-          </a:p>
-          <a:p>
-            <a:r>
-              <a:t>What is the renewal path for CCA-F?</a:t>
+              <a:t>Customer support agent with PreToolUse hook enforcement</a:t>
+            </a:r>
+          </a:p>
+          <a:p>
+            <a:r>
+              <a:t>Configured Claude Code env with .mcp.json + CLAUDE.md hierarchy</a:t>
+            </a:r>
+          </a:p>
+          <a:p>
+            <a:r>
+              <a:t>Invoice extractor with Pydantic schema + validation retry</a:t>
+            </a:r>
+          </a:p>
+          <a:p>
+            <a:r>
+              <a:t>Production reliability mental model - context, escalation, errors, provenance</a:t>
+            </a:r>
+          </a:p>
+          <a:p/>
+          <a:p>
+            <a:r>
+              <a:t>Plus self-study: control surfaces and the Console asset surface (Segment 2.5)</a:t>
             </a:r>
           </a:p>
         </p:txBody>
@@ -47378,7 +48895,7 @@
             <a:spLocks noGrp="1"/>
           </p:cNvSpPr>
           <p:nvPr>
-            <p:ph type="ctrTitle"/>
+            <p:ph type="title"/>
           </p:nvPr>
         </p:nvSpPr>
         <p:spPr/>
@@ -47387,19 +48904,19 @@
           <a:lstStyle/>
           <a:p>
             <a:r>
-              <a:t>Thank you</a:t>
-            </a:r>
-          </a:p>
-        </p:txBody>
-      </p:sp>
-      <p:sp>
-        <p:nvSpPr>
-          <p:cNvPr id="3" name="Subtitle 2"/>
-          <p:cNvSpPr>
-            <a:spLocks noGrp="1"/>
-          </p:cNvSpPr>
-          <p:nvPr>
-            <p:ph type="subTitle" idx="1"/>
+              <a:t>Resources and next steps</a:t>
+            </a:r>
+          </a:p>
+        </p:txBody>
+      </p:sp>
+      <p:sp>
+        <p:nvSpPr>
+          <p:cNvPr id="3" name="Text Placeholder 2"/>
+          <p:cNvSpPr>
+            <a:spLocks noGrp="1"/>
+          </p:cNvSpPr>
+          <p:nvPr>
+            <p:ph type="body" idx="15" sz="quarter"/>
           </p:nvPr>
         </p:nvSpPr>
         <p:spPr/>
@@ -47408,7 +48925,7 @@
           <a:lstStyle/>
           <a:p>
             <a:r>
-              <a:t>Tim Warner  |  techtrainertim.com</a:t>
+              <a:t>Repo</a:t>
             </a:r>
           </a:p>
           <a:p>
@@ -47416,12 +48933,151 @@
               <a:t>github.com/timothywarner-org/claude-architect</a:t>
             </a:r>
           </a:p>
+          <a:p>
+            <a:r>
+              <a:t>Anthropic cookbook (official, MIT, vendored in this repo)</a:t>
+            </a:r>
+          </a:p>
+          <a:p>
+            <a:r>
+              <a:t>github.com/anthropics/claude-cookbooks   |   claude-cookbooks-main/</a:t>
+            </a:r>
+          </a:p>
+          <a:p>
+            <a:r>
+              <a:t>CCA-F study path</a:t>
+            </a:r>
+          </a:p>
+          <a:p>
+            <a:r>
+              <a:t>EXAM-STUDY-PATH.md - notebook -&gt; CCA-F domain -&gt; scenario mapping</a:t>
+            </a:r>
+          </a:p>
+          <a:p>
+            <a:r>
+              <a:t>Anthropic Academy</a:t>
+            </a:r>
+          </a:p>
+          <a:p>
+            <a:r>
+              <a:t>anthropic.skilljar.com - free courses, official Practice Exam</a:t>
+            </a:r>
+          </a:p>
+        </p:txBody>
+      </p:sp>
+      <p:sp>
+        <p:nvSpPr>
+          <p:cNvPr id="4" name="Text Placeholder 3"/>
+          <p:cNvSpPr>
+            <a:spLocks noGrp="1"/>
+          </p:cNvSpPr>
+          <p:nvPr>
+            <p:ph type="body" idx="17" sz="quarter"/>
+          </p:nvPr>
+        </p:nvSpPr>
+        <p:spPr/>
+        <p:txBody>
+          <a:bodyPr/>
+          <a:lstStyle/>
           <a:p/>
-          <a:p>
-            <a:r>
-              <a:t>Memento mori. Also, ship the PR.</a:t>
-            </a:r>
-          </a:p>
+        </p:txBody>
+      </p:sp>
+      <p:sp>
+        <p:nvSpPr>
+          <p:cNvPr id="5" name="Text Placeholder 4"/>
+          <p:cNvSpPr>
+            <a:spLocks noGrp="1"/>
+          </p:cNvSpPr>
+          <p:nvPr>
+            <p:ph type="body" idx="19" sz="quarter"/>
+          </p:nvPr>
+        </p:nvSpPr>
+        <p:spPr/>
+        <p:txBody>
+          <a:bodyPr/>
+          <a:lstStyle/>
+          <a:p/>
+        </p:txBody>
+      </p:sp>
+      <p:sp>
+        <p:nvSpPr>
+          <p:cNvPr id="6" name="Text Placeholder 5"/>
+          <p:cNvSpPr>
+            <a:spLocks noGrp="1"/>
+          </p:cNvSpPr>
+          <p:nvPr>
+            <p:ph type="body" idx="21" sz="quarter"/>
+          </p:nvPr>
+        </p:nvSpPr>
+        <p:spPr/>
+        <p:txBody>
+          <a:bodyPr/>
+          <a:lstStyle/>
+          <a:p/>
+        </p:txBody>
+      </p:sp>
+      <p:sp>
+        <p:nvSpPr>
+          <p:cNvPr id="7" name="Picture Placeholder 6"/>
+          <p:cNvSpPr>
+            <a:spLocks noGrp="1"/>
+          </p:cNvSpPr>
+          <p:nvPr>
+            <p:ph type="pic" idx="22" sz="quarter"/>
+          </p:nvPr>
+        </p:nvSpPr>
+        <p:spPr/>
+        <p:txBody>
+          <a:bodyPr/>
+          <a:p/>
+        </p:txBody>
+      </p:sp>
+      <p:sp>
+        <p:nvSpPr>
+          <p:cNvPr id="8" name="Picture Placeholder 7"/>
+          <p:cNvSpPr>
+            <a:spLocks noGrp="1"/>
+          </p:cNvSpPr>
+          <p:nvPr>
+            <p:ph type="pic" idx="23" sz="quarter"/>
+          </p:nvPr>
+        </p:nvSpPr>
+        <p:spPr/>
+        <p:txBody>
+          <a:bodyPr/>
+          <a:p/>
+        </p:txBody>
+      </p:sp>
+      <p:sp>
+        <p:nvSpPr>
+          <p:cNvPr id="9" name="Picture Placeholder 8"/>
+          <p:cNvSpPr>
+            <a:spLocks noGrp="1"/>
+          </p:cNvSpPr>
+          <p:nvPr>
+            <p:ph type="pic" idx="24" sz="quarter"/>
+          </p:nvPr>
+        </p:nvSpPr>
+        <p:spPr/>
+        <p:txBody>
+          <a:bodyPr/>
+          <a:p/>
+        </p:txBody>
+      </p:sp>
+      <p:sp>
+        <p:nvSpPr>
+          <p:cNvPr id="10" name="Picture Placeholder 9"/>
+          <p:cNvSpPr>
+            <a:spLocks noGrp="1"/>
+          </p:cNvSpPr>
+          <p:nvPr>
+            <p:ph type="pic" idx="25" sz="quarter"/>
+          </p:nvPr>
+        </p:nvSpPr>
+        <p:spPr/>
+        <p:txBody>
+          <a:bodyPr/>
+          <a:p/>
         </p:txBody>
       </p:sp>
     </p:spTree>
@@ -47459,6 +49115,157 @@
           <a:p>
             <a:r>
               <a:t>Segment 1: Building AI Agents That Use Tools</a:t>
+            </a:r>
+          </a:p>
+        </p:txBody>
+      </p:sp>
+    </p:spTree>
+  </p:cSld>
+  <p:clrMapOvr>
+    <a:masterClrMapping/>
+  </p:clrMapOvr>
+</p:sld>
+</file>
+
+<file path=ppt/slides/slide50.xml><?xml version="1.0" encoding="utf-8"?>
+<p:sld xmlns:a="http://schemas.openxmlformats.org/drawingml/2006/main" xmlns:p="http://schemas.openxmlformats.org/presentationml/2006/main" xmlns:r="http://schemas.openxmlformats.org/officeDocument/2006/relationships">
+  <p:cSld>
+    <p:spTree>
+      <p:nvGrpSpPr>
+        <p:cNvPr id="1" name=""/>
+        <p:cNvGrpSpPr/>
+        <p:nvPr/>
+      </p:nvGrpSpPr>
+      <p:grpSpPr/>
+      <p:sp>
+        <p:nvSpPr>
+          <p:cNvPr id="2" name="Title 1"/>
+          <p:cNvSpPr>
+            <a:spLocks noGrp="1"/>
+          </p:cNvSpPr>
+          <p:nvPr>
+            <p:ph type="title"/>
+          </p:nvPr>
+        </p:nvSpPr>
+        <p:spPr/>
+        <p:txBody>
+          <a:bodyPr/>
+          <a:lstStyle/>
+          <a:p>
+            <a:r>
+              <a:t>Final Q&amp;A (10 min)</a:t>
+            </a:r>
+          </a:p>
+        </p:txBody>
+      </p:sp>
+      <p:sp>
+        <p:nvSpPr>
+          <p:cNvPr id="3" name="Content Placeholder 2"/>
+          <p:cNvSpPr>
+            <a:spLocks noGrp="1"/>
+          </p:cNvSpPr>
+          <p:nvPr>
+            <p:ph idx="1"/>
+          </p:nvPr>
+        </p:nvSpPr>
+        <p:spPr/>
+        <p:txBody>
+          <a:bodyPr wrap="square"/>
+          <a:lstStyle/>
+          <a:p>
+            <a:r>
+              <a:t>How do I monitor an agent in production?</a:t>
+            </a:r>
+          </a:p>
+          <a:p>
+            <a:r>
+              <a:t>When do I split a monolithic agent into coordinator + subagents?</a:t>
+            </a:r>
+          </a:p>
+          <a:p>
+            <a:r>
+              <a:t>What is the cost story for prompt caching?</a:t>
+            </a:r>
+          </a:p>
+          <a:p>
+            <a:r>
+              <a:t>How do I know when I am ready to sit the exam?</a:t>
+            </a:r>
+          </a:p>
+          <a:p>
+            <a:r>
+              <a:t>What is the renewal path for CCA-F?</a:t>
+            </a:r>
+          </a:p>
+        </p:txBody>
+      </p:sp>
+    </p:spTree>
+  </p:cSld>
+  <p:clrMapOvr>
+    <a:masterClrMapping/>
+  </p:clrMapOvr>
+</p:sld>
+</file>
+
+<file path=ppt/slides/slide51.xml><?xml version="1.0" encoding="utf-8"?>
+<p:sld xmlns:a="http://schemas.openxmlformats.org/drawingml/2006/main" xmlns:p="http://schemas.openxmlformats.org/presentationml/2006/main" xmlns:r="http://schemas.openxmlformats.org/officeDocument/2006/relationships">
+  <p:cSld>
+    <p:spTree>
+      <p:nvGrpSpPr>
+        <p:cNvPr id="1" name=""/>
+        <p:cNvGrpSpPr/>
+        <p:nvPr/>
+      </p:nvGrpSpPr>
+      <p:grpSpPr/>
+      <p:sp>
+        <p:nvSpPr>
+          <p:cNvPr id="2" name="Title 1"/>
+          <p:cNvSpPr>
+            <a:spLocks noGrp="1"/>
+          </p:cNvSpPr>
+          <p:nvPr>
+            <p:ph type="ctrTitle"/>
+          </p:nvPr>
+        </p:nvSpPr>
+        <p:spPr/>
+        <p:txBody>
+          <a:bodyPr/>
+          <a:lstStyle/>
+          <a:p>
+            <a:r>
+              <a:t>Thank you</a:t>
+            </a:r>
+          </a:p>
+        </p:txBody>
+      </p:sp>
+      <p:sp>
+        <p:nvSpPr>
+          <p:cNvPr id="3" name="Subtitle 2"/>
+          <p:cNvSpPr>
+            <a:spLocks noGrp="1"/>
+          </p:cNvSpPr>
+          <p:nvPr>
+            <p:ph type="subTitle" idx="1"/>
+          </p:nvPr>
+        </p:nvSpPr>
+        <p:spPr/>
+        <p:txBody>
+          <a:bodyPr wrap="square"/>
+          <a:lstStyle/>
+          <a:p>
+            <a:r>
+              <a:t>Tim Warner  |  techtrainertim.com</a:t>
+            </a:r>
+          </a:p>
+          <a:p>
+            <a:r>
+              <a:t>github.com/timothywarner-org/claude-architect</a:t>
+            </a:r>
+          </a:p>
+          <a:p/>
+          <a:p>
+            <a:r>
+              <a:t>Memento mori. Also, ship the PR.</a:t>
             </a:r>
           </a:p>
         </p:txBody>

--- a/slides/warner-claude-architect-may-2026.pptx
+++ b/slides/warner-claude-architect-may-2026.pptx
@@ -61,6 +61,14 @@
     <p:sldId id="304" r:id="rId57"/>
     <p:sldId id="305" r:id="rId58"/>
     <p:sldId id="306" r:id="rId59"/>
+    <p:sldId id="307" r:id="rId60"/>
+    <p:sldId id="308" r:id="rId61"/>
+    <p:sldId id="309" r:id="rId62"/>
+    <p:sldId id="310" r:id="rId63"/>
+    <p:sldId id="311" r:id="rId64"/>
+    <p:sldId id="312" r:id="rId65"/>
+    <p:sldId id="313" r:id="rId66"/>
+    <p:sldId id="314" r:id="rId67"/>
   </p:sldIdLst>
   <p:sldSz cx="12192000" cy="6858000"/>
   <p:notesSz cx="6858000" cy="9144000"/>
@@ -572,17 +580,7 @@
           <a:lstStyle/>
           <a:p>
             <a:r>
-              <a:t>FRAMER: This is the cold open. One slide, one job - tell the room what they showed up for and what they walk away with.</a:t>
-            </a:r>
-          </a:p>
-          <a:p>
-            <a:r>
-              <a:t>Welcome to Claude Architect Foundations. Four hours, four segments, five teaching notebooks plus one self-study deep dive. This is a skills-first course - we build production-grade agents, tool surfaces, and structured-extraction pipelines using the same patterns that Anthropic teaches in their official cookbook. We cover the CCA-F certification at the end, but we earn that conversation by shipping the skills first.</a:t>
-            </a:r>
-          </a:p>
-          <a:p>
-            <a:r>
-              <a:t>You will write Python. You will branch on stop_reason. You will register MCP servers. You will force schema-conformant output via tool_choice. By the end of segment 4 you will have rebuilt every pattern this course teaches inside notebooks that run against the live API. No slideware demos. No hand-waving.</a:t>
+              <a:t>Cold open. This is a skills-first production-architecture course. Mention CCA-F (Anthropic's certification) but do NOT teach to exam items. Set expectations: heavy on live demos, light on slides. The notebooks ARE the course; slides are the scaffolding.</a:t>
             </a:r>
           </a:p>
         </p:txBody>
@@ -652,27 +650,7 @@
           <a:lstStyle/>
           <a:p>
             <a:r>
-              <a:t>FRAMER: Live demo, 15 minutes. The notebook we'll run is segment-1-customer-support-agent.ipynb. Three beats - happy path, hook block, escalation.</a:t>
-            </a:r>
-          </a:p>
-          <a:p>
-            <a:r>
-              <a:t>What you'll see: I'll open the notebook and walk the four tool definitions first. Then we run Scenario A - the customer asks for an $80 refund on an in-cap order. The agent calls get_customer, lookup_order, process_refund, and closes with end_turn. Happy path, no hook needed.</a:t>
-            </a:r>
-          </a:p>
-          <a:p>
-            <a:r>
-              <a:t>Then I add the PreToolUse hook from hooks-example.py and re-run with Scenario B - a $750 refund that exceeds the $500 cap. The hook fires, blocks the call, returns a structured error to the model. Watch what happens next: the model receives the error, recognizes "I can't do this directly," and pivots to escalate_to_human with ticket ESC-9001. That re-planning moment is the aha beat. Have eyes on the chat at that point.</a:t>
-            </a:r>
-          </a:p>
-          <a:p>
-            <a:r>
-              <a:t>Last beat - I'll scroll to the bottom of the notebook for the coordinator-subagent demo. Parent agent delegates a customer-lookup task to a subagent. The subagent's working notes never leak into the parent's context. Final answer comes back as a typed dict.</a:t>
-            </a:r>
-          </a:p>
-          <a:p>
-            <a:r>
-              <a:t>If the live API hiccups, I have a screenshot ready. Cookbook reference for further study after class: claude-cookbooks-main/tool_use/customer_service_agent.ipynb.</a:t>
+              <a:t>FRAMER: this slide answers 'why hooks at all.' The prompt is soft. The schema is structural. The hook is hard. Each layer catches a different class of failure.  Walk it top to bottom. Spend extra time on Layer 3 - this is the one that matters when production money is on the line. The orange stripe and dark navy background telegraph 'this is the answer.'  Production tip:  if the hook itself errors, FAIL CLOSED. Default to deny, log loudly, alert. A silent hook failure is how policy quietly evaporates.  Optional callout for the cohort:  in the SDK, you can register multiple PreToolUse hooks; the most restrictive decision wins. authorization_check + input_validator + audit_logger run in parallel.</a:t>
             </a:r>
           </a:p>
         </p:txBody>
@@ -742,37 +720,7 @@
           <a:lstStyle/>
           <a:p>
             <a:r>
-              <a:t>FRAMER: Five-minute exercise. Take what you just saw and apply it to a new scenario - Developer Productivity. Sketch, don't code.</a:t>
-            </a:r>
-          </a:p>
-          <a:p>
-            <a:r>
-              <a:t>[Sketch architecture for a Developer Productivity scenario]: Imagine a coding assistant that helps a developer review a pull request. What does the architecture look like?</a:t>
-            </a:r>
-          </a:p>
-          <a:p>
-            <a:r>
-              <a:t>[On paper or in chat: coordinator + 3 subagents + tool scope per agent]: One coordinator that talks to the developer. Three subagents underneath. Pick the right split.</a:t>
-            </a:r>
-          </a:p>
-          <a:p>
-            <a:r>
-              <a:t>[What does each subagent specialize in?]: One reads diffs. One runs tests. One checks the style guide. Or something else. Justify the boundaries.</a:t>
-            </a:r>
-          </a:p>
-          <a:p>
-            <a:r>
-              <a:t>[What is each subagent's success criterion?]: The boundary is meaningful only if each subagent has its own success criterion. If two subagents return "looks good to me" - they're one agent.</a:t>
-            </a:r>
-          </a:p>
-          <a:p>
-            <a:r>
-              <a:t>[What tools does each one get? Cap each at ~5.]: Above five and selection accuracy degrades. Cap, scope, justify.</a:t>
-            </a:r>
-          </a:p>
-          <a:p>
-            <a:r>
-              <a:t>Walk the chat for 90 seconds, then share two or three designs aloud. Reinforce the takeaway: tool descriptions beat tool names, isolation beats shared context, ~5 tools per agent is the soft cap.</a:t>
+              <a:t>The prompt advises; the hook enforces. The $500 refund cap is the canonical example: prompt says 'don't exceed cap', tool description says 'cap is 500', and the hook PHYSICALLY blocks anything over. When all three layers agree, the hook never fires - but it's there for when they disagree.</a:t>
             </a:r>
           </a:p>
         </p:txBody>
@@ -842,32 +790,7 @@
           <a:lstStyle/>
           <a:p>
             <a:r>
-              <a:t>FRAMER: Segment 1 in three sentences. Each takeaway is a CCA-F exam beat in disguise.</a:t>
-            </a:r>
-          </a:p>
-          <a:p>
-            <a:r>
-              <a:t>[Branch on stop_reason, never on natural-language signals]: The dispatcher in your agent code reads resp.stop_reason and matches on a closed set of six values. Anything else is fragile.</a:t>
-            </a:r>
-          </a:p>
-          <a:p>
-            <a:r>
-              <a:t>[Coordinator + isolated subagents beats one giant context]: When a subtask has its own success criteria, its own tool subset, and its own context discipline - split. Otherwise don't.</a:t>
-            </a:r>
-          </a:p>
-          <a:p>
-            <a:r>
-              <a:t>[Hooks turn 'should' into 'must' - the prompt advises, the hook enforces]: Business invariants live in hooks. Conventions live in prompts. Don't confuse them.</a:t>
-            </a:r>
-          </a:p>
-          <a:p>
-            <a:r>
-              <a:t>Bridge to Segment 2: "You just built an agent that decides what to do. Next we go one level deeper - into the tools themselves and the Claude Code surface where you author them on a real team."</a:t>
-            </a:r>
-          </a:p>
-          <a:p>
-            <a:r>
-              <a:t>CCA-F EXAM TIP: Three of the ten weighted practice questions in Segment 4 are Domain 1 questions. If you can recite these three takeaways without hesitation, you're set for one-third of Segment 4.</a:t>
+              <a:t>Live demo, 15 minutes. The aha moment is when the hook fires and the model re-plans to call escalate_to_human with ticket ESC-9001. Have a backup screenshot ready in case the API hiccups. Cookbook reference for further study: claude-cookbooks-main/tool_use/customer_service_agent.ipynb.</a:t>
             </a:r>
           </a:p>
         </p:txBody>
@@ -937,12 +860,7 @@
           <a:lstStyle/>
           <a:p>
             <a:r>
-              <a:t>FRAMER: Section divider for Segment 2. The biggest single chunk of the exam - two domains, one segment, 38% combined.</a:t>
-            </a:r>
-          </a:p>
-          <a:p>
-            <a:r>
-              <a:t>Segment 2 covers Domain 2 (Tool Design and MCP Integration, 18%) and Domain 3 (Claude Code Configuration and Workflows, 20%). Combined that's 38% of the cert - more than D1 alone. Two demos in this segment. Demo A is the MCP config walkthrough, Demo B is claude -p headless mode. Notebook is segment-2-tool-design-and-mcp.ipynb.</a:t>
+              <a:t>Walk the chat for 90 seconds, then share 2-3 designs out loud. Reinforce: tool descriptions beat tool names, isolation beats shared context, ~5 tools per agent is the floor before selection accuracy degrades.</a:t>
             </a:r>
           </a:p>
         </p:txBody>
@@ -1012,37 +930,7 @@
           <a:lstStyle/>
           <a:p>
             <a:r>
-              <a:t>FRAMER: Explain the merge. Two domains, one segment. Different blueprint categories, same conversation in real life.</a:t>
-            </a:r>
-          </a:p>
-          <a:p>
-            <a:r>
-              <a:t>[Domain 2 - Tool Design and MCP Integration (18%)]: Tool descriptions, structured errors, the four tool_choice modes, MCP server config across three transports.</a:t>
-            </a:r>
-          </a:p>
-          <a:p>
-            <a:r>
-              <a:t>[Domain 3 - Claude Code Configuration and Workflows (20%)]: CLAUDE.md hierarchy, slash commands, skills, plan mode, claude -p headless.</a:t>
-            </a:r>
-          </a:p>
-          <a:p>
-            <a:r>
-              <a:t>[Combined = 38% of the cert, the biggest single chunk]: D1 is 27% alone but D2 plus D3 is 38%. Weight your prep accordingly.</a:t>
-            </a:r>
-          </a:p>
-          <a:p>
-            <a:r>
-              <a:t>[Why combined? Claude Code IS the primary MCP-consuming surface]: Claude Code reads .mcp.json at startup. The same .mcp.json shape powers your custom agents. The contract is shared.</a:t>
-            </a:r>
-          </a:p>
-          <a:p>
-            <a:r>
-              <a:t>[You cannot teach one without the other in production]: A tool description that lives in your codebase informs an MCP server that powers a Claude Code workflow. The boundaries on the exam are clean; in production they're entangled.</a:t>
-            </a:r>
-          </a:p>
-          <a:p>
-            <a:r>
-              <a:t>CCA-F EXAM TIP: When a scenario question mentions "developer productivity" or "code review" alongside MCP, both D2 and D3 are usually in play. Read carefully - the answer often hinges on which layer the question is actually probing.</a:t>
+              <a:t>Bridge: 'You just built an agent that decides what to do. Next we go one level deeper - into the tools themselves and the Claude Code surface where you author them on a real team.'</a:t>
             </a:r>
           </a:p>
         </p:txBody>
@@ -1112,37 +1000,7 @@
           <a:lstStyle/>
           <a:p>
             <a:r>
-              <a:t>FRAMER: Tool definitions in three fields. Get the third field right or none of the other two matter.</a:t>
-            </a:r>
-          </a:p>
-          <a:p>
-            <a:r>
-              <a:t>[name - how the model invokes the tool]: A label. The model emits the name in its tool_use block. Pick something readable.</a:t>
-            </a:r>
-          </a:p>
-          <a:p>
-            <a:r>
-              <a:t>[description - STRONGLY recommended, drives tool selection]: This is the contract. The model picks tools based on descriptions, not names. "Fetch customer record by ID, returns name, email, status, lifetime value" beats "Gets customer data" every time.</a:t>
-            </a:r>
-          </a:p>
-          <a:p>
-            <a:r>
-              <a:t>[input_schema - JSON Schema draft 2020-12 (type, properties, required)]: The structural contract. Required fields are enforced; optional fields can be null. Use enum for closed value sets. Use additionalProperties: false for strict schemas.</a:t>
-            </a:r>
-          </a:p>
-          <a:p>
-            <a:r>
-              <a:t>[Optional: cache_control ephemeral (5m / 1h), strict: true]: cache_control on a tool definition lets you amortize the description tokens across calls. strict: true forces the schema to be exhaustively validated.</a:t>
-            </a:r>
-          </a:p>
-          <a:p>
-            <a:r>
-              <a:t>[Tool DESCRIPTIONS do the work, not tool NAMES]: This is the load-bearing pattern. Spend your writing time on descriptions. The name is just a label.</a:t>
-            </a:r>
-          </a:p>
-          <a:p>
-            <a:r>
-              <a:t>CCA-F EXAM TIP: When a scenario mentions that the model keeps picking the wrong tool, the answer is almost always that the descriptions are too vague or do not distinguish the tools well enough. Almost never the answer of renaming the tools.</a:t>
+              <a:t>Domains 2 + 3. 50 minutes. Combined 38% of exam weight - the biggest pairing on the blueprint. Two demos: MCP config walkthrough, claude -p headless mode.</a:t>
             </a:r>
           </a:p>
         </p:txBody>
@@ -1212,37 +1070,7 @@
           <a:lstStyle/>
           <a:p>
             <a:r>
-              <a:t>FRAMER: Tool errors are the reliability story for tools in one slide. Get the shape right and the model recovers gracefully. Get it wrong and the agent crashes.</a:t>
-            </a:r>
-          </a:p>
-          <a:p>
-            <a:r>
-              <a:t>[Anti-pattern: raise exceptions from tool implementations]: A raised exception crashes the agent. The model never sees the failure. Production agents need to recover from tool errors, not die from them.</a:t>
-            </a:r>
-          </a:p>
-          <a:p>
-            <a:r>
-              <a:t>[Anti-pattern: return empty strings on failure]: The model has no idea what happened. It can't distinguish "no results" from "the database is on fire." It will retry or make up an answer.</a:t>
-            </a:r>
-          </a:p>
-          <a:p>
-            <a:r>
-              <a:t>[Pattern: return tool_result with is_error: true]: The contract. The is_error flag is the signal the model uses to recognize a failure. Treat it as an HTTP status code.</a:t>
-            </a:r>
-          </a:p>
-          <a:p>
-            <a:r>
-              <a:t>[Add structured fields: errorCategory, isRetryable]: Three categories - transient (retry with backoff), permanent (reformulate or surface to the user), policy (escalate or change approach). isRetryable is the explicit yes/no.</a:t>
-            </a:r>
-          </a:p>
-          <a:p>
-            <a:r>
-              <a:t>[The model can then DECIDE: retry, fall back, or escalate]: This is the whole point. Give the model enough structured signal to choose the right recovery path.</a:t>
-            </a:r>
-          </a:p>
-          <a:p>
-            <a:r>
-              <a:t>CCA-F EXAM TIP: "How should this agent handle a flaky third-party API?" - the answer is structured tool_result with is_error and isRetryable, not an exception handler in the tool implementation.</a:t>
+              <a:t>Explain the merge. Tools are the verbs; Claude Code is where you orchestrate them. Different domains in the blueprint, same conversation in real life. Two demos in this segment - MCP config walkthrough first, then claude -p headless second.</a:t>
             </a:r>
           </a:p>
         </p:txBody>
@@ -1312,42 +1140,7 @@
           <a:lstStyle/>
           <a:p>
             <a:r>
-              <a:t>FRAMER: Four tool_choice modes. Each one is a guarantee. Pick the right guarantee for the job.</a:t>
-            </a:r>
-          </a:p>
-          <a:p>
-            <a:r>
-              <a:t>[auto]: Model decides whether to call a tool. Default. May answer in prose. Pick when the model's judgment is the right call.</a:t>
-            </a:r>
-          </a:p>
-          <a:p>
-            <a:r>
-              <a:t>[any]: Model MUST call some tool, model picks which. Use when action is required - the user said "do something" and prose isn't acceptable.</a:t>
-            </a:r>
-          </a:p>
-          <a:p>
-            <a:r>
-              <a:t>[tool]: Model MUST call THIS specific tool. The structured-output cheat code. {type: tool, name: extract_X} is how you get schema-conformant output without parsing JSON.</a:t>
-            </a:r>
-          </a:p>
-          <a:p>
-            <a:r>
-              <a:t>[none]: Tools registered but model CANNOT call them. "Explain, don't act" turns. Useful in multi-step pipelines where you want narration without execution.</a:t>
-            </a:r>
-          </a:p>
-          <a:p>
-            <a:r>
-              <a:t>[The traffic-light analogy]: auto is a green light, any is a green light with a tow truck behind you (must move, you pick the lane), tool=X is a forced left turn, none is a red light.</a:t>
-            </a:r>
-          </a:p>
-          <a:p>
-            <a:r>
-              <a:t>[disable_parallel_tool_use]: Lives INSIDE the tool_choice object, not as a top-level kwarg. Setting it forces one tool call per turn. Useful for write-then-read or fetch-then-summarize patterns.</a:t>
-            </a:r>
-          </a:p>
-          <a:p>
-            <a:r>
-              <a:t>CCA-F EXAM TIP: A scenario where the agent must produce a specific JSON shape is forced tool_choice. A scenario where the agent must take SOME action but the verb is ambiguous is "any". The exam tests whether you can name the right mode.</a:t>
+              <a:t>A tool named get_data with description 'Fetch customer record by ID, returns name, email, status, lifetime value' beats one named getCustomerRecordById with description 'Gets data.' Write descriptions like you're onboarding a junior engineer. The model reads descriptions, not your variable-naming convention.</a:t>
             </a:r>
           </a:p>
         </p:txBody>
@@ -1417,32 +1210,7 @@
           <a:lstStyle/>
           <a:p>
             <a:r>
-              <a:t>FRAMER: Tool count has a soft cap. Production agents that exceed it get worse, not better.</a:t>
-            </a:r>
-          </a:p>
-          <a:p>
-            <a:r>
-              <a:t>[More tools = worse selection accuracy (well-documented effect)]: Above ~5 tools, the model starts picking incorrectly more often. Anthropic has published on this. It's not a hypothesis; it's a measurement.</a:t>
-            </a:r>
-          </a:p>
-          <a:p>
-            <a:r>
-              <a:t>[Beyond 5: split into subagents with scoped tool sets]: When you need more tools, you don't add to one agent - you split. Each subagent gets a focused tool surface.</a:t>
-            </a:r>
-          </a:p>
-          <a:p>
-            <a:r>
-              <a:t>[Specificity in descriptions beats quantity of tools]: Three opinionated tools beat ten vague ones. Always.</a:t>
-            </a:r>
-          </a:p>
-          <a:p>
-            <a:r>
-              <a:t>[Anti-pattern: dump 30 tools into one agent because 'flexibility']: This is the most common production failure mode. The agent becomes worse at every individual tool.</a:t>
-            </a:r>
-          </a:p>
-          <a:p>
-            <a:r>
-              <a:t>CCA-F EXAM TIP: When a scenario says "the agent has fifteen tools and is making poor selections," the right answer involves reducing the tool surface or splitting into subagents - not improving the prompt.</a:t>
+              <a:t>Thrown exceptions crash the agent. Structured errors let it recover. This is the entire reliability story for tools in one slide. The three categories we use: transient (retry with backoff), permanent (reformulate or surface), policy (escalate or change approach).</a:t>
             </a:r>
           </a:p>
         </p:txBody>
@@ -1512,37 +1280,7 @@
           <a:lstStyle/>
           <a:p>
             <a:r>
-              <a:t>FRAMER: MCP server config is the SDK contract. Three transports, environment-variable expansion, one config file.</a:t>
-            </a:r>
-          </a:p>
-          <a:p>
-            <a:r>
-              <a:t>[Three transports: stdio, SSE, HTTP]: stdio launches a local subprocess. SSE and HTTP talk to remote servers over the network.</a:t>
-            </a:r>
-          </a:p>
-          <a:p>
-            <a:r>
-              <a:t>[stdio: command + args + env (local subprocess)]: The most common transport. The MCP client launches a subprocess and talks to it over stdin/stdout. env injects environment variables for that subprocess only.</a:t>
-            </a:r>
-          </a:p>
-          <a:p>
-            <a:r>
-              <a:t>[SSE / HTTP: type + url + headers (remote)]: For remote servers. Headers carry auth tokens. Use ${ENV_VAR} expansion so secrets never land in the config file.</a:t>
-            </a:r>
-          </a:p>
-          <a:p>
-            <a:r>
-              <a:t>[${ENV_VAR} expansion works in env, args, AND headers]: This is the production pattern. Your .mcp.json carries the SHAPE of the credential; the credential value lives in your environment.</a:t>
-            </a:r>
-          </a:p>
-          <a:p>
-            <a:r>
-              <a:t>[Project scope: ./.mcp.json    User scope: ~/.claude.json]: Project scope ships with the codebase. User scope is per-machine. Both layers can carry servers.</a:t>
-            </a:r>
-          </a:p>
-          <a:p>
-            <a:r>
-              <a:t>CCA-F EXAM TIP: The exam asks about secret management in MCP configs at least once. The answer is always env-var expansion, never inlining secrets.</a:t>
+              <a:t>The traffic-light analogy from Segment 2.5: auto is green, any is green with a tow truck behind you, tool=X is a forced left turn, none is a red light. disable_parallel_tool_use lives INSIDE the tool_choice object, not as a top-level kwarg. Common multiple-choice trap.</a:t>
             </a:r>
           </a:p>
         </p:txBody>
@@ -1612,22 +1350,7 @@
           <a:lstStyle/>
           <a:p>
             <a:r>
-              <a:t>FRAMER: 30-second bio. The room needs to know who they're spending four hours with.</a:t>
-            </a:r>
-          </a:p>
-          <a:p>
-            <a:r>
-              <a:t>I'm Tim Warner. Microsoft MVP focused on Azure AI, Pluralsight Principal Author with 200+ courses and over a million learners, O'Reilly Live Training instructor, and a senior content developer for Microsoft Press and Pearson. Twenty-eight years on the Microsoft stack. I teach Feynman-style - first principles, no fluff, real demos, push back on bad practice when I see it.</a:t>
-            </a:r>
-          </a:p>
-          <a:p>
-            <a:r>
-              <a:t>If you want production patterns and live builds, you're in the right room. If you want a slide deck full of architecture diagrams and zero code, you booked the wrong session.</a:t>
-            </a:r>
-          </a:p>
-          <a:p>
-            <a:r>
-              <a:t>techtrainertim.com is where the longer-form content lives. The repo for this course is github.com/timothywarner-org/claude-architect - clone it now if you haven't already.</a:t>
+              <a:t>30-second bio. I teach from first principles. No glazing, no fluff. If they want production patterns and live demos, they're in the right room. Skip the resume part if pacing is tight; the website is the call-to-action.</a:t>
             </a:r>
           </a:p>
         </p:txBody>
@@ -1697,22 +1420,7 @@
           <a:lstStyle/>
           <a:p>
             <a:r>
-              <a:t>FRAMER: Demo A. Ten minutes on the repo's own .mcp.json. Show four servers, three transports, env-var expansion in three locations.</a:t>
-            </a:r>
-          </a:p>
-          <a:p>
-            <a:r>
-              <a:t>What you'll see: I'll open C:/github/claude-architect/.mcp.json in VS Code side-by-side with the segment-2 notebook. Walk it server by server. The filesystem server is stdio. The github server is stdio with a GITHUB_TOKEN env var. The context7 server is HTTP with an Authorization header. The internal-knowledge-base server is SSE with a bearer token.</a:t>
-            </a:r>
-          </a:p>
-          <a:p>
-            <a:r>
-              <a:t>What to watch for: when I unset GITHUB_TOKEN and re-launch, the github server fails CLEAR - it doesn't silently silently work with an empty token. The env-var expansion either resolves to a value or the server tells you it's missing.</a:t>
-            </a:r>
-          </a:p>
-          <a:p>
-            <a:r>
-              <a:t>After class, the same .mcp.json shape powers your own custom agents through the MCP Python SDK. The file is the SDK contract, not a Claude Code convention. That's why Segment 2.5 covers MCP list_tools discovery as the runtime counterpart.</a:t>
+              <a:t>Mention the analyze_dependencies vs Grep anti-pattern: model defaults to built-in Grep if the custom tool description isn't specific enough. Description is the contract. Tool count is the soft cap.</a:t>
             </a:r>
           </a:p>
         </p:txBody>
@@ -1782,37 +1490,7 @@
           <a:lstStyle/>
           <a:p>
             <a:r>
-              <a:t>FRAMER: CLAUDE.md hierarchy is additive across four scopes. Load order matters; on-demand scopes keep the token budget tight.</a:t>
-            </a:r>
-          </a:p>
-          <a:p>
-            <a:r>
-              <a:t>[User     ~/.claude/CLAUDE.md     - your machine, every project]: Personal preferences and conventions that apply to everything you work on.</a:t>
-            </a:r>
-          </a:p>
-          <a:p>
-            <a:r>
-              <a:t>[Project  ./CLAUDE.md             - team conventions, in git]: Shipped with the repo. Every contributor inherits it. Code style, security policies, build commands.</a:t>
-            </a:r>
-          </a:p>
-          <a:p>
-            <a:r>
-              <a:t>[Subtree  ./&lt;subdir&gt;/CLAUDE.md    - loads on demand when files in subdir are read]: This is the cost optimization. Frontend rules don't load when the agent is reading backend code. Per-area context.</a:t>
-            </a:r>
-          </a:p>
-          <a:p>
-            <a:r>
-              <a:t>[Local    ./CLAUDE.local.md       - gitignored personal override]: Your overrides for THIS project that you don't want to commit. Often path-specific.</a:t>
-            </a:r>
-          </a:p>
-          <a:p>
-            <a:r>
-              <a:t>[Agent SDK: settingSources [user, project] loads both]: Programmatic agents (not Claude Code) load CLAUDE.md via settingSources. The default is project-only; user + project loads both layers.</a:t>
-            </a:r>
-          </a:p>
-          <a:p>
-            <a:r>
-              <a:t>CCA-F EXAM TIP: When the exam asks "where should this rule live," the answer maps to scope - shared with team = project, personal to me = user or local, area-specific = subtree.</a:t>
+              <a:t>FRAMER: the slide they SHOULD screenshot if they're going to configure MCP this week. Walk the four columns left to right for each of the three transports.  Mention the SSE -&gt; HTTP deprecation explicitly. Anthropic is moving the ecosystem to HTTP; SSE still works but new vendor integrations should pick HTTP.  ${ENV_VAR} expansion is the load-bearing detail. Commit the .mcp.json, source the secrets. Then open the repo's own .mcp.json in Demo A to make the abstract concrete - filesystem (stdio), github (stdio + ${GITHUB_TOKEN}), context7 (HTTP), internal-knowledge-base (SSE + bearer).</a:t>
             </a:r>
           </a:p>
         </p:txBody>
@@ -1882,37 +1560,7 @@
           <a:lstStyle/>
           <a:p>
             <a:r>
-              <a:t>FRAMER: Plan mode is the default. Headless mode is the CI/CD primitive. Both ship with Claude Code, both are exam-relevant.</a:t>
-            </a:r>
-          </a:p>
-          <a:p>
-            <a:r>
-              <a:t>[Plan mode   - interactive, proposes plan, waits for approval (default)]: You type, Claude proposes, you approve. Designed for the human-in-the-loop case.</a:t>
-            </a:r>
-          </a:p>
-          <a:p>
-            <a:r>
-              <a:t>[Headless    - claude -p 'prompt' - non-interactive, pipe-friendly]: One command, one prompt, one response. Designed for scripts and pipelines.</a:t>
-            </a:r>
-          </a:p>
-          <a:p>
-            <a:r>
-              <a:t>[--output-format json|stream-json for parsing]: Structured output so your pipeline can parse it. stream-json for live consumption, json for batch.</a:t>
-            </a:r>
-          </a:p>
-          <a:p>
-            <a:r>
-              <a:t>[--allowed-tools 'Read,Edit,Bash' to scope]: Restrict the tool surface for the pipeline run. Belt and suspenders for CI/CD safety.</a:t>
-            </a:r>
-          </a:p>
-          <a:p>
-            <a:r>
-              <a:t>[Headless is THE CI/CD answer - pre-commit hooks, PR review, release notes]: This is what unlocks Claude Code for automated workflows. Pre-commit hook that runs claude -p to lint your CHANGELOG. PR comment bot that runs claude -p on the diff. Release-notes generator from git log piped through claude -p.</a:t>
-            </a:r>
-          </a:p>
-          <a:p>
-            <a:r>
-              <a:t>CCA-F EXAM TIP: When a scenario mentions "CI/CD," "automated review," or "pipeline," the answer is almost always claude -p with --output-format json and --allowed-tools scoping.</a:t>
+              <a:t>Show repo's own .mcp.json in the demo. Four servers, three transports, env-var expansion for secrets. The pattern that scales: add a new MCP server to .mcp.json, every MCP-aware agent picks it up on the next list_tools call - no source change.</a:t>
             </a:r>
           </a:p>
         </p:txBody>
@@ -1982,22 +1630,7 @@
           <a:lstStyle/>
           <a:p>
             <a:r>
-              <a:t>FRAMER: Demo B. Five minutes. Show the headless CLI doing real work in a real shell.</a:t>
-            </a:r>
-          </a:p>
-          <a:p>
-            <a:r>
-              <a:t>What you'll see: I'll open this repo's own CLAUDE.md and walk the structure. Then I'll run `claude -p "audit this CLAUDE.md against the documented conventions"` in PowerShell. Claude reads CLAUDE.md, applies the conventions back against itself, and prints a structured audit.</a:t>
-            </a:r>
-          </a:p>
-          <a:p>
-            <a:r>
-              <a:t>What to watch for: the output is just text on stdout. Pipe it. Save it. Push it into a CI artifact. The pattern is `git log --oneline -20 | claude -p "summarize these commits for a release note"` - one command, real value, three seconds.</a:t>
-            </a:r>
-          </a:p>
-          <a:p>
-            <a:r>
-              <a:t>If the CLI hiccups, I have a saved transcript. Cookbook reference for further study: scripts/run-mcp-cli.ps1 in this repo shows the patterns for piping MCP-CLI work into headless mode.</a:t>
+              <a:t>Live demo, 10 minutes. Open .mcp.json side-by-side with the notebook so learners see config-as-data. Mention that the file is the same shape Claude Code reads at startup - it's the SDK contract, not a Claude Code convention.</a:t>
             </a:r>
           </a:p>
         </p:txBody>
@@ -2067,37 +1700,7 @@
           <a:lstStyle/>
           <a:p>
             <a:r>
-              <a:t>FRAMER: Five-minute exercise. Design a CLAUDE.md hierarchy for a real 3-team monorepo. Sketch the file tree.</a:t>
-            </a:r>
-          </a:p>
-          <a:p>
-            <a:r>
-              <a:t>[Design a CLAUDE.md hierarchy for a 3-team monorepo]: The teams are backend (Go), frontend (React/TypeScript), and infra (Terraform). All in one repo.</a:t>
-            </a:r>
-          </a:p>
-          <a:p>
-            <a:r>
-              <a:t>[Teams: backend (Go), frontend (React/TS), infra (Terraform)]: Different languages, different toolchains, different conventions. One Claude Code session might touch all three.</a:t>
-            </a:r>
-          </a:p>
-          <a:p>
-            <a:r>
-              <a:t>[Each team has different conventions]: Go has gofmt and go vet. React has ESLint and Prettier. Terraform has tflint. Same repo, different lint contracts.</a:t>
-            </a:r>
-          </a:p>
-          <a:p>
-            <a:r>
-              <a:t>[Where does each rule go? User, project, subtree, or .claude/rules?]: Shared rules (commit style, security policies, no committing secrets) go in project CLAUDE.md. Team-specific rules go in subtree CLAUDE.md per directory.</a:t>
-            </a:r>
-          </a:p>
-          <a:p>
-            <a:r>
-              <a:t>[What goes in .claude/rules/ with paths: globs?]: Language-specific lint rules that should only fire on matching paths. Go rules with paths: backend/**/*.go.</a:t>
-            </a:r>
-          </a:p>
-          <a:p>
-            <a:r>
-              <a:t>Target answer: project CLAUDE.md for shared, subtree CLAUDE.md per team, .claude/rules with paths globs for lint rules. Hierarchy is the load-bearing concept.</a:t>
+              <a:t>FRAMER: this is the diagram the team-lead in the room screenshots and shares in Slack on Monday. The load-order arrow on the left is the load-bearing visual. User and project ALWAYS load. Subtree loads on demand - only when the agent reads files in that subdir.  Walk each band:  who writes it, what belongs there, what does NOT belong there.  Production tip:  do NOT put team-specific conventions in user CLAUDE.md - those leak between projects. Do NOT put personal preferences in project CLAUDE.md - those pollute the team's git diff.  The gray callout at the bottom is the Agent SDK note - settingSources lets you scope which tiers load.</a:t>
             </a:r>
           </a:p>
         </p:txBody>
@@ -2167,32 +1770,7 @@
           <a:lstStyle/>
           <a:p>
             <a:r>
-              <a:t>FRAMER: Segment 2 in three takeaways. Each one maps to a CCA-F question shape.</a:t>
-            </a:r>
-          </a:p>
-          <a:p>
-            <a:r>
-              <a:t>[Descriptions, not names, drive tool selection]: When the model picks wrong, the description is the lever. Always.</a:t>
-            </a:r>
-          </a:p>
-          <a:p>
-            <a:r>
-              <a:t>[.mcp.json - three transports, ${ENV} expansion, secrets in env never in file]: One config file, three transports, environment variables for everything sensitive. Memorize the shape.</a:t>
-            </a:r>
-          </a:p>
-          <a:p>
-            <a:r>
-              <a:t>[CLAUDE.md hierarchy is additive; claude -p is your CI/CD primitive]: Layered context loads additively. The headless CLI unlocks automation. Both are exam-relevant.</a:t>
-            </a:r>
-          </a:p>
-          <a:p>
-            <a:r>
-              <a:t>Bridge to Segment 3 (and the 10-minute break in between): "Tools give the agent hands. Prompts and schemas decide what comes out. Take ten minutes. If you want a deep dive between segments, segment-2-5-control-surfaces.ipynb is the off-clock self-study notebook - we'll preview it next."</a:t>
-            </a:r>
-          </a:p>
-          <a:p>
-            <a:r>
-              <a:t>CCA-F EXAM TIP: D2 + D3 = 38% of the exam. Six of the ten Segment 4 practice questions touch these two domains. If you can name the patterns above without prompting, you're well-prepared.</a:t>
+              <a:t>Load order matters. User and project are additive. Subtree on-demand keeps the token budget tight (don't load frontend rules when the agent is reading backend code). Local for personal preferences without polluting team conventions.</a:t>
             </a:r>
           </a:p>
         </p:txBody>
@@ -2262,27 +1840,7 @@
           <a:lstStyle/>
           <a:p>
             <a:r>
-              <a:t>FRAMER: One slide on the three tiers tools come from. The most common confusion in the room is about to be untangled.</a:t>
-            </a:r>
-          </a:p>
-          <a:p>
-            <a:r>
-              <a:t>[Tier 1 - Server tools]: Anthropic-hosted. You register them in your custom agent by type (bash_20250124, code_execution_20250522, web_search_20250305, text_editor_20250728, memory_20250818). The model invokes them; Anthropic executes them server-side. For some, like code_execution, the result lands inside the same response - no client tool loop required.</a:t>
-            </a:r>
-          </a:p>
-          <a:p>
-            <a:r>
-              <a:t>[Tier 2 - MCP tools]: You or a vendor host them. Discovered at runtime via the list_tools RPC. The pattern that scales by configuration - add a server to .mcp.json and every MCP-aware agent picks up its tools on the next discovery call.</a:t>
-            </a:r>
-          </a:p>
-          <a:p>
-            <a:r>
-              <a:t>[Tier 3 - Harness tools]: Claude Code's Read, Edit, Bash, Grep, Glob - implemented in TypeScript inside the harness process. They never appear in messages.create tools=[...]. You can't register them in a custom agent. Same noun (Bash) as tier 1, completely different runtime.</a:t>
-            </a:r>
-          </a:p>
-          <a:p>
-            <a:r>
-              <a:t>CCA-F EXAM TIP: When a scenario describes a custom agent that "uses Bash," check whether the answer choices are talking about tier 1 (bash_20250124 server tool) or tier 3 (Claude Code's Bash). They're not interchangeable - the wrong one is always a distractor.</a:t>
+              <a:t>Three-second demo callout: git log --oneline -20 | claude -p 'summarize these recent commits'. One command, real value. Headless mode unlocks every CI/CD use case learners have but didn't know Claude Code supported.</a:t>
             </a:r>
           </a:p>
         </p:txBody>
@@ -2352,42 +1910,7 @@
           <a:lstStyle/>
           <a:p>
             <a:r>
-              <a:t>FRAMER: The Segment 2.5 self-study notebook is off the 4-hour clock but on the CCA-F radar. Tell the room what's in it and why to walk it.</a:t>
-            </a:r>
-          </a:p>
-          <a:p>
-            <a:r>
-              <a:t>[notebooks/segment-2-5-control-surfaces.ipynb]: The deep-dive notebook. ~75 minutes if walked end to end against the live API.</a:t>
-            </a:r>
-          </a:p>
-          <a:p>
-            <a:r>
-              <a:t>[Three tiers tools come from - server tools, MCP, Claude Code harness]: The previous slide expanded.</a:t>
-            </a:r>
-          </a:p>
-          <a:p>
-            <a:r>
-              <a:t>[All four tool_choice modes + disable_parallel_tool_use]: Every mode demonstrated live, with output proving the contract.</a:t>
-            </a:r>
-          </a:p>
-          <a:p>
-            <a:r>
-              <a:t>[stop_sequences + max_tokens as control levers + pause_turn + refusal]: The full stop_reason surface, including the rare values most learners have never seen.</a:t>
-            </a:r>
-          </a:p>
-          <a:p>
-            <a:r>
-              <a:t>[MCP list_tools runtime discovery]: The protocol-level discovery primitive.</a:t>
-            </a:r>
-          </a:p>
-          <a:p>
-            <a:r>
-              <a:t>[The live Claude Console asset surface - memory_stores, vaults, agents, sessions]: Brand new in 2026-05. Won't be in older study guides. The notebook hits the live SDK against memory_stores.list(), vaults.list(), agents.list(), and shows the session-as-runtime pattern.</a:t>
-            </a:r>
-          </a:p>
-          <a:p>
-            <a:r>
-              <a:t>[Highest exam-objective density in the repo. Walk it for CCA-F prep.]: If you only re-walk one notebook before the exam, walk this one. It compresses every domain into one teaching surface.</a:t>
+              <a:t>Live demo, 5 minutes. Short because it's the 'oh that's just a CLI' beat - the value is obvious once they see it. Have a fallback `claude -p` output saved as text in case the CLI hiccups.</a:t>
             </a:r>
           </a:p>
         </p:txBody>
@@ -2457,12 +1980,7 @@
           <a:lstStyle/>
           <a:p>
             <a:r>
-              <a:t>FRAMER: Section divider for Segment 3. Two more domains, one segment, 35% combined.</a:t>
-            </a:r>
-          </a:p>
-          <a:p>
-            <a:r>
-              <a:t>Segment 3 covers Domain 4 (Prompt Engineering and Structured Output, 20%) and Domain 5 (Context Management and Reliability, 15%). The live build is segment-3-invoice-extractor.ipynb - a Pydantic-schema-driven extraction pipeline with forced tool_choice and a validation retry loop. This is the longest demo of the day; if you've ever wanted to extract structured JSON from messy text, the next 50 minutes are for you.</a:t>
+              <a:t>Target answer: project CLAUDE.md for shared (commit style, security), subtree CLAUDE.md for team-specific conventions, .claude/rules with paths: globs for language-specific lint rules. Hierarchy is the load-bearing concept.</a:t>
             </a:r>
           </a:p>
         </p:txBody>
@@ -2532,37 +2050,7 @@
           <a:lstStyle/>
           <a:p>
             <a:r>
-              <a:t>FRAMER: Why both domains in one segment. They're entangled in production.</a:t>
-            </a:r>
-          </a:p>
-          <a:p>
-            <a:r>
-              <a:t>[Domain 4 - Prompt Engineering and Structured Output (20%)]: Forced tool_choice, Pydantic schemas, few-shot examples, validation retry.</a:t>
-            </a:r>
-          </a:p>
-          <a:p>
-            <a:r>
-              <a:t>[Domain 5 - Context Management and Reliability (15%)]: Context pinning across long sessions, escalation design, structured error propagation.</a:t>
-            </a:r>
-          </a:p>
-          <a:p>
-            <a:r>
-              <a:t>[Combined = 35% of the cert]: Not as big as D2+D3 but still over a third of the exam.</a:t>
-            </a:r>
-          </a:p>
-          <a:p>
-            <a:r>
-              <a:t>[Why combined? Structured extraction without context discipline is fragile]: A well-typed extraction call inside a 50-turn conversation needs context pinning OR the case facts drift away. The two domains are one workflow.</a:t>
-            </a:r>
-          </a:p>
-          <a:p>
-            <a:r>
-              <a:t>[Long sessions need context pinning; structured output needs validation retry]: Both are the same architecture - a deterministic shell around a non-deterministic model. Different surface, same pattern.</a:t>
-            </a:r>
-          </a:p>
-          <a:p>
-            <a:r>
-              <a:t>CCA-F EXAM TIP: When a scenario describes "extraction quality degrading over time" or "the model forgets the case facts," D5 is in play even if the question feels like D4.</a:t>
+              <a:t>Bridge: 'Tools give the agent hands. Prompts and schemas decide what comes out. Before we get to structured output in Segment 3, take a 10-minute break - and if you want a deep dive between segments, Segment 2.5 ships as self-study.'</a:t>
             </a:r>
           </a:p>
         </p:txBody>
@@ -2632,32 +2120,7 @@
           <a:lstStyle/>
           <a:p>
             <a:r>
-              <a:t>FRAMER: The four-hour arc in one slide. Four segments, 50 minutes each, with 10-minute breaks between them.</a:t>
-            </a:r>
-          </a:p>
-          <a:p>
-            <a:r>
-              <a:t>[Segment 1 - Building AI Agents That Use Tools]: Domain 1 of the CCA-F blueprint, 27% of the exam, the single heaviest domain. Live build: customer support agent with hook-enforced policy.</a:t>
-            </a:r>
-          </a:p>
-          <a:p>
-            <a:r>
-              <a:t>[Segment 2 - Tool Design, Integration, and Claude Code Workflows]: Domains 2 plus 3, combined 38% of the exam. The biggest pairing. Tool descriptions, MCP, structured errors, CLAUDE.md hierarchy, claude -p headless.</a:t>
-            </a:r>
-          </a:p>
-          <a:p>
-            <a:r>
-              <a:t>[Segment 3 - Structured Output, Context, and Production Reliability]: Domains 4 plus 5, combined 35% of the exam. The Pydantic + forced tool_choice + validation retry pattern. Plus context discipline and escalation.</a:t>
-            </a:r>
-          </a:p>
-          <a:p>
-            <a:r>
-              <a:t>[Segment 4 - CCA-F Certification Capstone]: 50-minute cert briefing plus 10 weighted practice questions plus take-home punchlist. We earn this segment after building the skills.</a:t>
-            </a:r>
-          </a:p>
-          <a:p>
-            <a:r>
-              <a:t>[Plus self-study: Segment 2.5 - Control Surfaces and the Console Asset Surface]: Not on the 4-hour clock. The off-clock notebook is the highest exam-objective density in the repo. Bookmark it and re-walk it before sitting the exam.</a:t>
+              <a:t>Tell them where the slides and code live: github.com/timothywarner-org/claude-architect. Call out Segment 2.5 as the self-study deep dive - not on the 4-hour clock, but the highest exam-objective density in the repo. Cert briefing is the capstone (Segment 4), not the lead. We earn the cert talk after the skills.</a:t>
             </a:r>
           </a:p>
         </p:txBody>
@@ -2727,37 +2190,7 @@
           <a:lstStyle/>
           <a:p>
             <a:r>
-              <a:t>FRAMER: Set expectations for the longest live build of the day. Pydantic, forced tool_choice, retry loop, three test invoices.</a:t>
-            </a:r>
-          </a:p>
-          <a:p>
-            <a:r>
-              <a:t>[An invoice extractor with a Pydantic schema]: BaseModel subclass with required and Optional fields, each with descriptions.</a:t>
-            </a:r>
-          </a:p>
-          <a:p>
-            <a:r>
-              <a:t>[tool_choice {type: tool, name: extract_invoice} forces valid JSON]: The model has no choice but to call extract_invoice. The tool's input_schema is your Pydantic schema converted to JSON Schema.</a:t>
-            </a:r>
-          </a:p>
-          <a:p>
-            <a:r>
-              <a:t>[Validation-retry loop handles malformed output (max_retries=1)]: One retry, no more. If the model can't produce valid JSON in two attempts, escalate.</a:t>
-            </a:r>
-          </a:p>
-          <a:p>
-            <a:r>
-              <a:t>[Three invoices: clean, missing field, ambiguous line item]: Three test cases that exercise the three failure modes.</a:t>
-            </a:r>
-          </a:p>
-          <a:p>
-            <a:r>
-              <a:t>[By the end of the segment: you can extract typed data from anything]: This pattern generalizes - resumes, contracts, support tickets, customer records.</a:t>
-            </a:r>
-          </a:p>
-          <a:p>
-            <a:r>
-              <a:t>CCA-F EXAM TIP: If you see "guaranteed schema compliance" anywhere in the answer choices, the answer involves forced tool_choice plus Pydantic. Not prompt engineering alone. Not structured output instructions.</a:t>
+              <a:t>The 60-second visual: three tiers, three runtimes, three sets of expectations. Most architects conflate Claude Code's Bash (tier 3, harness-private) with bash_20250124 (tier 1, Anthropic-hosted). Same noun, different sandbox model, different streaming semantics. The trap that catches working architects is registering 'bash' in their custom agent and expecting the harness behavior. Segment 2.5 has a live demo proving the spectrum: bash emits a tool_use you still execute; code_execution returns a code_execution_tool_result inside the same response with no client loop.</a:t>
             </a:r>
           </a:p>
         </p:txBody>
@@ -2827,37 +2260,7 @@
           <a:lstStyle/>
           <a:p>
             <a:r>
-              <a:t>FRAMER: Prompt engineering principle in five bullets. Each one is a specific failure mode and its fix.</a:t>
-            </a:r>
-          </a:p>
-          <a:p>
-            <a:r>
-              <a:t>[Be specific: format, edge cases, missing-data handling]: Vague prompts produce vague outputs. Specify the exact format, the edge cases you've thought through, and what to do when data is missing.</a:t>
-            </a:r>
-          </a:p>
-          <a:p>
-            <a:r>
-              <a:t>[Plausible hallucinations: model invents values for nullable fields]: The most common failure mode. The model fills in plausible-looking values for fields it doesn't actually have data for.</a:t>
-            </a:r>
-          </a:p>
-          <a:p>
-            <a:r>
-              <a:t>[Fix: explicit 'return null if not directly stated' instruction]: One sentence in the prompt eliminates 90% of this failure mode. Be explicit; the model takes you literally.</a:t>
-            </a:r>
-          </a:p>
-          <a:p>
-            <a:r>
-              <a:t>[Inconsistent formats: 'cotton blend' vs 'Cotton/Polyester mix']: Same concept, two different output strings. Statistical, not catastrophic - but consumes downstream cleanup time.</a:t>
-            </a:r>
-          </a:p>
-          <a:p>
-            <a:r>
-              <a:t>[Fix: 2-3 few-shot examples, NOT lower temperature]: Few-shot examples are the cheapest, most reliable fix. Temperature changes barely move the needle for structured output.</a:t>
-            </a:r>
-          </a:p>
-          <a:p>
-            <a:r>
-              <a:t>CCA-F EXAM TIP: When the exam asks about output consistency, the answer is almost always to add few-shot examples or tighten the schema description. Rarely the answer of lowering the temperature.</a:t>
+              <a:t>FRAMER: this slide LIVES in Segment 2.5 territory but earns a moment in Segment 2 because the trap catches working architects.  Walk the three columns:  Tier 1 (server tools, Anthropic-hosted), Tier 2 (MCP, you/vendor host), Tier 3 (Claude Code harness, NOT API-reachable).  Same noun, different runtime. 'Bash' in Claude Code is a TypeScript harness tool. 'bash_20250124' in the API is an Anthropic-hosted server tool. They behave differently, stream differently, error differently. The trap on the bottom is the punchline.  Optional deeper dive:  segment-2-5-control-surfaces.ipynb has the live demo.</a:t>
             </a:r>
           </a:p>
         </p:txBody>
@@ -2927,37 +2330,7 @@
           <a:lstStyle/>
           <a:p>
             <a:r>
-              <a:t>FRAMER: The structured-output cheat code. Five steps, one pattern, guaranteed valid JSON.</a:t>
-            </a:r>
-          </a:p>
-          <a:p>
-            <a:r>
-              <a:t>[1. Define a Pydantic model with your fields]: BaseModel subclass with required and Optional fields. Use descriptions on every field so they flow into the JSON Schema.</a:t>
-            </a:r>
-          </a:p>
-          <a:p>
-            <a:r>
-              <a:t>[2. Convert to JSON Schema (model.model_json_schema())]: Pydantic does this for free. The result is a draft 2020-12 JSON Schema, compatible with Claude's tool input_schema.</a:t>
-            </a:r>
-          </a:p>
-          <a:p>
-            <a:r>
-              <a:t>[3. Register as a tool's input_schema]: Pass the schema dict as input_schema in the tool definition. Same shape as any other tool, the input_schema just happens to come from Pydantic.</a:t>
-            </a:r>
-          </a:p>
-          <a:p>
-            <a:r>
-              <a:t>[4. Set tool_choice {type: tool, name: &lt;your_schema&gt;}]: This is the forcing function. The model has no choice but to call the named tool. No prose escape hatch.</a:t>
-            </a:r>
-          </a:p>
-          <a:p>
-            <a:r>
-              <a:t>[5. block.input is now a typed dict matching the schema]: The model's tool_use block carries an input field that is ALREADY a Python dict (not a JSON string), already conforming to the schema. Pass it directly to YourModel(**block.input) for full Pydantic validation.</a:t>
-            </a:r>
-          </a:p>
-          <a:p>
-            <a:r>
-              <a:t>CCA-F EXAM TIP: If the exam shows code with forced tool_choice and asks what's guaranteed, the answer is 'the response includes a tool_use block whose input matches the schema.' Not 'the response is valid JSON' - that's a weaker, often-wrong distractor.</a:t>
+              <a:t>Tell learners this is the notebook to re-walk if they're aiming at CCA-F. ~75 minutes if walked end to end against the live API. Not on the 4-hour clock. The Console asset surface section is brand new in 2026-05 and won't be in older study guides - this is where Tim's content has an edge.</a:t>
             </a:r>
           </a:p>
         </p:txBody>
@@ -3027,27 +2400,7 @@
           <a:lstStyle/>
           <a:p>
             <a:r>
-              <a:t>FRAMER: The code that makes forced tool_choice work. Three load-bearing lines.</a:t>
-            </a:r>
-          </a:p>
-          <a:p>
-            <a:r>
-              <a:t>What you're looking at: a stripped-down version of the Segment 3 invoice extractor. The Pydantic model defines the schema. The EXTRACT_TOOL dict registers it as a tool whose input_schema IS the Pydantic JSON schema. The messages.create call uses tool_choice {type: tool, name: extract_invoice} to force the model to call it. The response is parsed back into a typed Invoice instance.</a:t>
-            </a:r>
-          </a:p>
-          <a:p>
-            <a:r>
-              <a:t>The three load-bearing lines are: the tool_choice setting that forces the call, the access pattern tool_block.input which is a typed dict not a JSON string, and the Pydantic validation gate Invoice(**tool_block.input) which raises ValidationError on any schema violation.</a:t>
-            </a:r>
-          </a:p>
-          <a:p>
-            <a:r>
-              <a:t>Common copy-paste trap: calling json.loads(tool_block.input) crashes because input is already a dict. Don't do that.</a:t>
-            </a:r>
-          </a:p>
-          <a:p>
-            <a:r>
-              <a:t>CCA-F EXAM TIP: If the exam shows code with tool_choice and asks what's guaranteed, the answer is "the model's response includes a tool_use block whose input matches the schema." It is not "the model's response is valid JSON" - that's a weaker claim.</a:t>
+              <a:t>Domains 4 + 5. 50 minutes. Combined 35% of exam weight. Live build: invoice extractor with Pydantic + forced tool_choice + validation retry.</a:t>
             </a:r>
           </a:p>
         </p:txBody>
@@ -3117,42 +2470,7 @@
           <a:lstStyle/>
           <a:p>
             <a:r>
-              <a:t>FRAMER: Validation retry loops have a sharp line between what works and what doesn't.</a:t>
-            </a:r>
-          </a:p>
-          <a:p>
-            <a:r>
-              <a:t>[Effective: format errors, JSON parse failures, schema mismatches]: When the model produces malformed output, feeding the validation error back as a tool_result with is_error=true usually fixes it in one retry.</a:t>
-            </a:r>
-          </a:p>
-          <a:p>
-            <a:r>
-              <a:t>[-&gt; append the error as a tool_result with is_error: true, retry]: The retry pattern. The model sees the error, recognizes its mistake, produces corrected output.</a:t>
-            </a:r>
-          </a:p>
-          <a:p>
-            <a:r>
-              <a:t>[-&gt; succeeds in 2-3 attempts]: Empirically. Format errors are easy for the model to fix once it sees what was wrong.</a:t>
-            </a:r>
-          </a:p>
-          <a:p>
-            <a:r>
-              <a:t>[INEFFECTIVE: knowledge gaps, ambiguous source data]: When the source data is missing or ambiguous, retries don't help. The model can't invent data it doesn't have.</a:t>
-            </a:r>
-          </a:p>
-          <a:p>
-            <a:r>
-              <a:t>[-&gt; retries DO NOT help]: Important contract. Burning tokens on retries that can't succeed is a common production failure.</a:t>
-            </a:r>
-          </a:p>
-          <a:p>
-            <a:r>
-              <a:t>[-&gt; cap at 2-3, then escalate to human review]: Hard cap. max_retries=1 is the production default. Anything more and you're paying for failure.</a:t>
-            </a:r>
-          </a:p>
-          <a:p>
-            <a:r>
-              <a:t>CCA-F EXAM TIP: When a scenario describes "the model keeps producing the same wrong answer after multiple retries," the answer involves escalation, not more retries. Retries fix format; humans fix substance.</a:t>
+              <a:t>The merge is honest to production. A well-typed extraction call inside a 50-turn conversation needs both Domain 4 (the call itself) and Domain 5 (context pinning so turn 47 still has the case facts).</a:t>
             </a:r>
           </a:p>
         </p:txBody>
@@ -3222,32 +2540,7 @@
           <a:lstStyle/>
           <a:p>
             <a:r>
-              <a:t>FRAMER: Confidence-based routing is the production pattern that makes extraction pipelines auditable.</a:t>
-            </a:r>
-          </a:p>
-          <a:p>
-            <a:r>
-              <a:t>[Have the model output field-level confidence: high | medium | low]: Add a confidence field to your Pydantic model. The model populates it. Closed enum, not a free float.</a:t>
-            </a:r>
-          </a:p>
-          <a:p>
-            <a:r>
-              <a:t>[Route: high -&gt; automated, medium -&gt; spot-check, low -&gt; human]: Three queues. High-confidence outputs go straight to production. Medium gets sampled for QA. Low always sees a human.</a:t>
-            </a:r>
-          </a:p>
-          <a:p>
-            <a:r>
-              <a:t>[CRITICAL: validate accuracy by document type AND field]: Aggregate accuracy can hide segment-specific failures. A 95% overall accuracy can mask 60% accuracy on invoices from a particular vendor.</a:t>
-            </a:r>
-          </a:p>
-          <a:p>
-            <a:r>
-              <a:t>[Aggregate 95% accuracy can mask 60% accuracy on specific segments]: The per-segment calibration warning. If you're not breaking down accuracy by doc type, your numbers lie to you.</a:t>
-            </a:r>
-          </a:p>
-          <a:p>
-            <a:r>
-              <a:t>CCA-F EXAM TIP: When the exam asks about extraction pipeline reliability, the answer involves field-level confidence and per-segment validation. Not improve-the-prompt and not tune-the-model.</a:t>
+              <a:t>Set expectations: this is the LONGEST live build (~20 min). Highest demo risk. If anything goes sideways, switch to the markdown walkthrough next to the notebook. Sonnet 4.6 for this segment - the one place reasoning depth earns its tokens.</a:t>
             </a:r>
           </a:p>
         </p:txBody>
@@ -3317,27 +2610,7 @@
           <a:lstStyle/>
           <a:p>
             <a:r>
-              <a:t>FRAMER: The 20-minute live build. The longest demo of the day. Highest demo risk.</a:t>
-            </a:r>
-          </a:p>
-          <a:p>
-            <a:r>
-              <a:t>What you'll see: I'll open segment-3-invoice-extractor.ipynb and walk it cell by cell. First the Pydantic model definition with required and Optional fields. Then EXTRACT_TOOL with input_schema set to Invoice.model_json_schema(). Then a messages.create call with tool_choice forcing the extract_invoice tool. We'll run it on a clean invoice first - immediate success.</a:t>
-            </a:r>
-          </a:p>
-          <a:p>
-            <a:r>
-              <a:t>Then we'll move to the missing-PO invoice. The po_number field is Optional with default=None. The model should leave it null. If it invents a value, Pydantic catches it.</a:t>
-            </a:r>
-          </a:p>
-          <a:p>
-            <a:r>
-              <a:t>Then the ambiguous-total invoice. Multiple totals appear in the text. The model has to pick one with the system-prompt guidance. We add the retry loop here - on validation failure, the error gets fed back as a tool_result with is_error=true, the model retries with the correction.</a:t>
-            </a:r>
-          </a:p>
-          <a:p>
-            <a:r>
-              <a:t>If anything goes sideways, I have the markdown walkthrough open next to the notebook. Cookbook references for after class: claude-cookbooks-main/tool_use/extracting_structured_json.ipynb and tool_use_with_pydantic.ipynb.</a:t>
+              <a:t>Few-shot beats temperature tuning every time. The model needs examples, not knobs. Temperature is the lever you reach for last, not first.</a:t>
             </a:r>
           </a:p>
         </p:txBody>
@@ -3407,37 +2680,7 @@
           <a:lstStyle/>
           <a:p>
             <a:r>
-              <a:t>FRAMER: Context discipline in five bullets. How you keep a 50-turn conversation from drowning in tool output.</a:t>
-            </a:r>
-          </a:p>
-          <a:p>
-            <a:r>
-              <a:t>[Pin case-facts at the top of every turn]: Critical facts about the user, the order, the case go in the system prompt and stay there. The model never has to re-derive them from history.</a:t>
-            </a:r>
-          </a:p>
-          <a:p>
-            <a:r>
-              <a:t>[Summarize resolved turns into narrative, drop verbatim history]: Once a sub-issue is resolved, summarize it. Don't carry every tool_result for it forward.</a:t>
-            </a:r>
-          </a:p>
-          <a:p>
-            <a:r>
-              <a:t>[Prune verbose tool outputs - extract the fields you used, drop the rest]: If a tool returned 50 fields and you used 3, strip the 47 unused fields before appending the tool_result.</a:t>
-            </a:r>
-          </a:p>
-          <a:p>
-            <a:r>
-              <a:t>[Application-side filtering, before the next turn]: This is YOUR code, not the model's job. The model can't prune its own context.</a:t>
-            </a:r>
-          </a:p>
-          <a:p>
-            <a:r>
-              <a:t>[How lawyers manage case files. Same discipline for long agent sessions.]: The analogy. Lawyers don't carry every interview transcript into every meeting. They carry summaries with citations.</a:t>
-            </a:r>
-          </a:p>
-          <a:p>
-            <a:r>
-              <a:t>CCA-F EXAM TIP: When a scenario mentions context window pressure or the agent losing track of the case, the answer involves application-side pruning and case-facts pinning. Never use-a-bigger-model and never increase-max_tokens.</a:t>
+              <a:t>The Pydantic model is the source of truth for both runtime validation AND the API contract. No JSON parsing, no fence-stripping, no validation rituals. The SDK validated for you. This is the Domain 4 load-bearing pattern.</a:t>
             </a:r>
           </a:p>
         </p:txBody>
@@ -3507,37 +2750,7 @@
           <a:lstStyle/>
           <a:p>
             <a:r>
-              <a:t>FRAMER: Escalation design. The rules for when an agent should hand off to a human.</a:t>
-            </a:r>
-          </a:p>
-          <a:p>
-            <a:r>
-              <a:t>[Honor explicit human requests IMMEDIATELY]: When the user says "I want a human," the agent escalates. No clarifying questions, no "let me try one more thing." Immediate.</a:t>
-            </a:r>
-          </a:p>
-          <a:p>
-            <a:r>
-              <a:t>['I want a human NOW' = escalate, don't clarify, don't try one more tool]: This is a hard rule. Violating it destroys user trust.</a:t>
-            </a:r>
-          </a:p>
-          <a:p>
-            <a:r>
-              <a:t>[Pass STRUCTURED summary to the human queue, not the transcript]: The escalation handoff is the model's chance to be useful one last time. A typed summary of the situation, not the raw conversation log.</a:t>
-            </a:r>
-          </a:p>
-          <a:p>
-            <a:r>
-              <a:t>[Never escalate on sentiment alone (frustration != complexity)]: Frustrated users with simple issues get faster resolutions from the agent. Calm users with billing disputes need humans. Sentiment is not a complexity signal.</a:t>
-            </a:r>
-          </a:p>
-          <a:p>
-            <a:r>
-              <a:t>[Confidence-based escalation: low confidence -&gt; human review]: When the model's confidence on a key field drops below threshold, escalate. Confidence is signal; sentiment isn't.</a:t>
-            </a:r>
-          </a:p>
-          <a:p>
-            <a:r>
-              <a:t>CCA-F EXAM TIP: Wrong answers on escalation questions usually involve "escalate when the customer seems upset." Right answers involve explicit user requests, policy limits, low confidence, or complexity beyond agent authority.</a:t>
+              <a:t>FRAMER: this is the architecture in one picture. Trace top-down through the five blue/teal/gold boxes, then the diamond, then YES (typed object, ship it) vs. NO (retry once).  Spotlight on the GOLD box ('Force the call'). The forced-tool_choice is the cheat code. The model has no other path; it MUST return data matching your schema or fail.  Spotlight on max_retries=1. Format errors get one chance to fix themselves; missing information will NEVER be fixed by retrying. Cap the loop or burn tokens.  Cookbook anchors:  claude-cookbooks-main/tool_use/tool_use_with_pydantic.ipynb (Pydantic), extracting_structured_json.ipynb (the broader pattern).</a:t>
             </a:r>
           </a:p>
         </p:txBody>
@@ -3607,32 +2820,7 @@
           <a:lstStyle/>
           <a:p>
             <a:r>
-              <a:t>FRAMER: Five-minute exercise. Take the extraction pattern and apply it to a domain you actually work in.</a:t>
-            </a:r>
-          </a:p>
-          <a:p>
-            <a:r>
-              <a:t>[Design an extraction schema for a domain you know]: Pick a real domain - invoices, resumes, tickets, contracts, whatever you actually work with.</a:t>
-            </a:r>
-          </a:p>
-          <a:p>
-            <a:r>
-              <a:t>[Fields: required vs Optional[]]: Distinguish what MUST be present from what MIGHT be present. Required fields fail validation if missing; Optional fields can be null.</a:t>
-            </a:r>
-          </a:p>
-          <a:p>
-            <a:r>
-              <a:t>[Add a confidence Literal: 'high' | 'medium' | 'low']: Closed enum. The model has three options. Pick one.</a:t>
-            </a:r>
-          </a:p>
-          <a:p>
-            <a:r>
-              <a:t>[Add a notes Optional[str] for ambiguity]: A free-form field where the model can flag "I'm not sure about this" without breaking validation.</a:t>
-            </a:r>
-          </a:p>
-          <a:p>
-            <a:r>
-              <a:t>[Share your schema in chat]: Show two or three out loud. Reinforce: nullable fields need explicit prompt instructions, confidence is the routing key, notes catches the "I'm not sure" cases.</a:t>
+              <a:t>Stay on this slide for 60 seconds. Walk the three load-bearing lines: forced tool_choice, schema-conformant input, Pydantic validation. Mention that block.input is a Python dict not a JSON string - common copy-paste trap is to call json.loads() on it and crash. The full notebook adds a retry loop with max_retries=1 that feeds the validation error back to the model as a tool_result with is_error=True. The model gets one chance to fix its own mistake.</a:t>
             </a:r>
           </a:p>
         </p:txBody>
@@ -3702,17 +2890,7 @@
           <a:lstStyle/>
           <a:p>
             <a:r>
-              <a:t>FRAMER: Frame the entire course in one sentence, then earn that sentence over the next four hours.</a:t>
-            </a:r>
-          </a:p>
-          <a:p>
-            <a:r>
-              <a:t>The model is non-deterministic. Your architecture cannot be. Hooks are deterministic. Schemas are deterministic. Application-layer intercepts are deterministic. The model itself isn't - it's the right tool for ambiguous, context-sensitive decisions, but the system around it has to hold.</a:t>
-            </a:r>
-          </a:p>
-          <a:p>
-            <a:r>
-              <a:t>Every demo today is an instance of that pattern. A non-deterministic kernel inside a deterministic shell. When the model wobbles, the shell catches it. When the model behaves, the shell stays out of the way. That's the production architect's job.</a:t>
+              <a:t>Frame the whole course in one sentence. Hooks are deterministic. Schemas are deterministic. Application-layer intercepts are deterministic. The model isn't, and that's fine - it's the right tool for ambiguous decisions. Production patterns build a deterministic shell around a non-deterministic kernel. Every demo in this course is an instance of that pattern.</a:t>
             </a:r>
           </a:p>
         </p:txBody>
@@ -3782,37 +2960,7 @@
           <a:lstStyle/>
           <a:p>
             <a:r>
-              <a:t>FRAMER: Segment 3 in four takeaways. Plus a cache-control bonus that ties to context discipline.</a:t>
-            </a:r>
-          </a:p>
-          <a:p>
-            <a:r>
-              <a:t>[Pydantic + tool_choice tool = guaranteed valid JSON]: The cheat code. Memorize the pattern.</a:t>
-            </a:r>
-          </a:p>
-          <a:p>
-            <a:r>
-              <a:t>[Few-shot examples beat temperature tuning every time]: The first lever for output consistency. Don't reach for temperature.</a:t>
-            </a:r>
-          </a:p>
-          <a:p>
-            <a:r>
-              <a:t>[Retries help format errors; retries do NOT help missing info]: The sharp line. max_retries=1, then escalate.</a:t>
-            </a:r>
-          </a:p>
-          <a:p>
-            <a:r>
-              <a:t>[Cache the system block with cache_control - amortize policy across calls]: When your system prompt is long (policy, case-facts, schema documentation), set cache_control on it. Subsequent calls within the cache TTL pay 10% for cache reads instead of full input cost.</a:t>
-            </a:r>
-          </a:p>
-          <a:p>
-            <a:r>
-              <a:t>Bridge to Segment 4: "You have agents, tools, prompts, validation, context discipline. The last segment is the cert capstone - what's on the CCA-F exam, how the domain weights map to today's notebooks, and ten weighted practice questions."</a:t>
-            </a:r>
-          </a:p>
-          <a:p>
-            <a:r>
-              <a:t>CCA-F EXAM TIP: D4 + D5 = 35% of the exam. Three of the ten Segment 4 questions touch these domains. The Pydantic + forced tool_choice pattern is virtually guaranteed to appear in at least one D4 question.</a:t>
+              <a:t>Anti-pattern: infinite retry on missing-info failure. Burns tokens, the model can't invent the data, escalation is the right move. max_retries=1 is the production default - one chance to react to its own error, then fail loud.</a:t>
             </a:r>
           </a:p>
         </p:txBody>
@@ -3882,12 +3030,7 @@
           <a:lstStyle/>
           <a:p>
             <a:r>
-              <a:t>FRAMER: Section divider for Segment 4. The cert capstone. We earned this conversation.</a:t>
-            </a:r>
-          </a:p>
-          <a:p>
-            <a:r>
-              <a:t>Segment 4 covers all five CCA-F domains. 50 minutes - 12 minutes of cert briefing, 28 minutes of 10 weighted practice questions, 10 minutes of Q&amp;A and course close. Notebook is segment-4-cca-f-capstone.ipynb. No live API calls in this segment; the notebook runs locally against practice-questions.json.</a:t>
+              <a:t>Per-segment calibration warning. If you don't break it down by doc type, high-aggregate accuracy lies to you. The confidence field is a routing key, not a vanity metric.</a:t>
             </a:r>
           </a:p>
         </p:txBody>
@@ -3957,32 +3100,7 @@
           <a:lstStyle/>
           <a:p>
             <a:r>
-              <a:t>FRAMER: What CCA-F is. Anthropic's first official certification, partner-gated as of 2026.</a:t>
-            </a:r>
-          </a:p>
-          <a:p>
-            <a:r>
-              <a:t>[Claude Certified Architect: Foundations - Anthropic's first official certification]: This is the entry-level cert. Foundations means the production patterns we taught today, not advanced topics like distillation or multimodal pipelines.</a:t>
-            </a:r>
-          </a:p>
-          <a:p>
-            <a:r>
-              <a:t>[Targets architects shipping with Agent SDK, Claude Code, Claude API, MCP]: Four surfaces. If you've shipped with any combination of them, you're in scope.</a:t>
-            </a:r>
-          </a:p>
-          <a:p>
-            <a:r>
-              <a:t>[Roughly the 301 skill level - past 'hello world', not yet 'I run distillation pipelines']: Calibration. The exam assumes you've built real things. It doesn't assume you've trained a model.</a:t>
-            </a:r>
-          </a:p>
-          <a:p>
-            <a:r>
-              <a:t>[Beta product as of 2026 - watch the official cert page for changes]: Anthropic ships exams the same way they ship features. Headers change. Question shapes change. Check claude.com/partners before you sit it.</a:t>
-            </a:r>
-          </a:p>
-          <a:p>
-            <a:r>
-              <a:t>The framing for the room: skills first, then the cert talk. You already have the skills - the exam is how you signal them.</a:t>
+              <a:t>Longest live build of the course. Highest demo risk. Have the markdown walkthrough open as fallback. Cookbook reference for further study: claude-cookbooks-main/tool_use/extracting_structured_json.ipynb and tool_use_with_pydantic.ipynb.</a:t>
             </a:r>
           </a:p>
         </p:txBody>
@@ -4052,47 +3170,7 @@
           <a:lstStyle/>
           <a:p>
             <a:r>
-              <a:t>FRAMER: Exam mechanics. Seven facts. Memorize them; they're the load-bearing operational data.</a:t>
-            </a:r>
-          </a:p>
-          <a:p>
-            <a:r>
-              <a:t>[Questions: 60 multiple-choice]: Scenario-based. Each question has a situation, a question, four options, one correct answer.</a:t>
-            </a:r>
-          </a:p>
-          <a:p>
-            <a:r>
-              <a:t>[Time: 120 minutes, single session, no breaks]: Two hours, end to end. Plan accordingly.</a:t>
-            </a:r>
-          </a:p>
-          <a:p>
-            <a:r>
-              <a:t>[Scoring: scaled 100-1000, passing = 720, no guess penalty]: Scaled scoring means the cut score is fixed in difficulty terms, not raw percent. 720 to pass.</a:t>
-            </a:r>
-          </a:p>
-          <a:p>
-            <a:r>
-              <a:t>[Delivery: ProctorFree, English]: Remote-proctored. English only as of 2026.</a:t>
-            </a:r>
-          </a:p>
-          <a:p>
-            <a:r>
-              <a:t>[Results: 2 business days]: You don't get the score live. Two business days to find out.</a:t>
-            </a:r>
-          </a:p>
-          <a:p>
-            <a:r>
-              <a:t>[Cost: $99 per attempt]: Partner discount may apply. Check the cert page.</a:t>
-            </a:r>
-          </a:p>
-          <a:p>
-            <a:r>
-              <a:t>[Attempts: ONE - this is the policy that catches people]: Single attempt per registration. Plan around it. Don't schedule until you're scoring 900+ on Anthropic's official Practice Exam.</a:t>
-            </a:r>
-          </a:p>
-          <a:p>
-            <a:r>
-              <a:t>CCA-F EXAM TIP: The one-attempt rule is the policy nobody plans around. Treat the $99 as if it were $990 - because the cost of failing is rescheduling and starting prep over.</a:t>
+              <a:t>A 48-turn conversation should not have 48 turns of tool_result clutter. The cache demo in segment-3 shows cache_control on the system block - 2019 tokens cached, the vendor policy never re-billed across calls.</a:t>
             </a:r>
           </a:p>
         </p:txBody>
@@ -4162,62 +3240,7 @@
           <a:lstStyle/>
           <a:p>
             <a:r>
-              <a:t>FRAMER: Domain weights mapped to today's segments. Where each piece of the exam was taught.</a:t>
-            </a:r>
-          </a:p>
-          <a:p>
-            <a:r>
-              <a:t>[Domain 1 - Agentic Architecture (27%)]: Heaviest single domain. Segment 1. Agents, hooks, coordinator-subagent. Re-walk segment-1 before the exam.</a:t>
-            </a:r>
-          </a:p>
-          <a:p>
-            <a:r>
-              <a:t>[Heaviest. Segment 1 - agents, hooks, coordinator-subagent. Re-walk segment-1.]: If a domain feels easy, the practice questions for it are the ones to re-walk. D1 is heaviest; don't assume.</a:t>
-            </a:r>
-          </a:p>
-          <a:p>
-            <a:r>
-              <a:t>[Domain 2 - Tool Design and MCP (18%)]: Segment 2 plus Segment 2.5. Tool descriptions, structured errors, MCP list_tools, tool_choice modes.</a:t>
-            </a:r>
-          </a:p>
-          <a:p>
-            <a:r>
-              <a:t>[Segment 2 + 2.5. Tool descriptions, structured errors, MCP list_tools.]: 2.5 is the off-clock notebook. Walk it before the exam.</a:t>
-            </a:r>
-          </a:p>
-          <a:p>
-            <a:r>
-              <a:t>[Domain 3 - Claude Code (20%)]: Segment 2. CLAUDE.md hierarchy, skills, slash commands, claude -p headless mode.</a:t>
-            </a:r>
-          </a:p>
-          <a:p>
-            <a:r>
-              <a:t>[Segment 2. CLAUDE.md hierarchy, skills, slash commands, claude -p headless.]: The most operationally-focused domain. Hands-on with the CLI.</a:t>
-            </a:r>
-          </a:p>
-          <a:p>
-            <a:r>
-              <a:t>[Domain 4 - Prompts and Structured Output (20%)]: Segment 3. Forced tool_choice, Pydantic schemas, few-shot, retry loops.</a:t>
-            </a:r>
-          </a:p>
-          <a:p>
-            <a:r>
-              <a:t>[Segment 3. Forced tool_choice, Pydantic schemas, few-shot, retry loops.]: The cheat code lives here. Memorize the pattern.</a:t>
-            </a:r>
-          </a:p>
-          <a:p>
-            <a:r>
-              <a:t>[Domain 5 - Context and Reliability (15%)]: Segment 3 plus parts of Segment 1. Context pinning, escalation, structured errors.</a:t>
-            </a:r>
-          </a:p>
-          <a:p>
-            <a:r>
-              <a:t>[Segment 3 + parts of Segment 1. Context pinning, escalation, structured errors.]: The smallest domain by weight. Easy to under-teach because it feels like common sense.</a:t>
-            </a:r>
-          </a:p>
-          <a:p>
-            <a:r>
-              <a:t>CCA-F EXAM TIP: D1 + D3 + D4 = 67% of the exam. Weight your prep accordingly. D5 is the easiest to under-teach because it feels like security common sense until scenario questions get specific.</a:t>
+              <a:t>Frustrated user with a $5 refund doesn't need a human. Calm user with a multi-account billing dispute does. Sentiment is not complexity. The escalation contract: structured summary, not the transcript - the human picks up faster, the agent's notes are signal.</a:t>
             </a:r>
           </a:p>
         </p:txBody>
@@ -4287,32 +3310,7 @@
           <a:lstStyle/>
           <a:p>
             <a:r>
-              <a:t>FRAMER: One slide explaining why the Segment 4 sampler is domain-weighted, not scenario-weighted.</a:t>
-            </a:r>
-          </a:p>
-          <a:p>
-            <a:r>
-              <a:t>[The naive sampler]: Pulls questions evenly across scenario families. The bank has 60 questions across 4 scenarios; uniform sampling gives 2-3 per scenario. The problem: two of the four scenarios are heavily D3, which over-tests Claude Code and under-tests Context Management.</a:t>
-            </a:r>
-          </a:p>
-          <a:p>
-            <a:r>
-              <a:t>[Pulls questions evenly across scenario families - which over-tests Claude Code (two scenarios are heavily D3) and under-tests context management (only fits in one).]: The diagnosis. The scenario-weighted sampler matches the source data shape, not the exam shape.</a:t>
-            </a:r>
-          </a:p>
-          <a:p>
-            <a:r>
-              <a:t>[Our sampler]: Draws 3 D1 + 2 D2 + 2 D3 + 2 D4 + 1 D5. Matches the exam's 27/18/20/20/15 weighting exactly.</a:t>
-            </a:r>
-          </a:p>
-          <a:p>
-            <a:r>
-              <a:t>[Draws 3 D1 + 2 D2 + 2 D3 + 2 D4 + 1 D5 - matches the exam's 27/18/20/20/15 weighting exactly. Every cohort sees the SAME 10 questions in the same order (seed=2026) for consistency across deliveries.]: Reproducibility matters - every cohort gets the same set so we can compare cohort-to-cohort.</a:t>
-            </a:r>
-          </a:p>
-          <a:p>
-            <a:r>
-              <a:t>CCA-F EXAM TIP: When you take Anthropic's official Practice Exam, the question mix mirrors this same domain weighting. The Segment 4 sampler is calibrated to feel like a Practice Exam mini-run.</a:t>
+              <a:t>FRAMER: this slide is for the engineer in the room whose product manager has been asking 'why do we escalate so much?' Show them the LEFT column (real signals) and the RIGHT column (not signals).  Walk the four ESCALATE conditions:  explicit request, policy, complexity, risk. Then walk the four NOT-A-SIGNAL conditions:  frustration, length, sentiment, repeat contacts.  The gold callout at the bottom is the operational rule:  pass a STRUCTURED summary to the queue, not the transcript. Human agents pick up faster; the agent's notes are signal not noise.  Anti-pattern callout in the room:  'every angry customer gets escalated' is a routing rule that burns the human queue. Sentiment is not complexity.</a:t>
             </a:r>
           </a:p>
         </p:txBody>
@@ -4382,22 +3380,7 @@
           <a:lstStyle/>
           <a:p>
             <a:r>
-              <a:t>FRAMER: Demo - 28 minutes on 10 weighted practice questions. The longest single block of Segment 4.</a:t>
-            </a:r>
-          </a:p>
-          <a:p>
-            <a:r>
-              <a:t>What you'll see: I'll open segment-4-cca-f-capstone.ipynb. The sampler cell runs locally - no API calls - and draws 10 questions by domain weight from practice-questions.json. The render cell prints them as collapsible Markdown blocks with the situation, the question, four options, and a hidden answer + explanation.</a:t>
-            </a:r>
-          </a:p>
-          <a:p>
-            <a:r>
-              <a:t>For each question, we'll do four beats. First I read the situation aloud. Second, the cohort votes A/B/C/D in chat - 30 seconds. Third, I reveal the correct answer. Fourth, I walk through why the distractors are plausible-but-wrong, and color the right answer with a production tip from the matching domain-N-*.md reference.</a:t>
-            </a:r>
-          </a:p>
-          <a:p>
-            <a:r>
-              <a:t>Source disclaimer to read aloud once at the start: these questions are community-sourced from Paul Larionov's study repo. They are calibration practice, not exam predictors. Use Anthropic's official Practice Exam as the authoritative readiness signal before scheduling.</a:t>
+              <a:t>Reinforces: nullable fields need explicit prompt instructions, confidence is the routing key, notes catches the 'I'm not sure' cases without crashing validation.</a:t>
             </a:r>
           </a:p>
         </p:txBody>
@@ -4467,42 +3450,7 @@
           <a:lstStyle/>
           <a:p>
             <a:r>
-              <a:t>FRAMER: Tim's week-before-the-exam punchlist. Six items, in order. Full 13-item version lives in CERT-PROGRAM-BRIEFING.md.</a:t>
-            </a:r>
-          </a:p>
-          <a:p>
-            <a:r>
-              <a:t>[1. Score &gt;900 on the Anthropic Practice Exam cold]: Cold means without prep notes open. If you can't score 900 cold, you're not ready.</a:t>
-            </a:r>
-          </a:p>
-          <a:p>
-            <a:r>
-              <a:t>[2. Rebuild Segment 1 from memory in 30 minutes]: The load-bearing readiness test. If you can write the agent loop, the tool dispatch, and the hook without looking at the notebook, you've internalized D1.</a:t>
-            </a:r>
-          </a:p>
-          <a:p>
-            <a:r>
-              <a:t>[3. Re-read domain-1-agentic.md - the 27% domain]: The biggest single domain. Re-read it carefully.</a:t>
-            </a:r>
-          </a:p>
-          <a:p>
-            <a:r>
-              <a:t>[4. Skim domain-3-claude-code.md and domain-4-prompts.md - the 20% domains]: The next-biggest pair. Skim is enough if your scores are already in the 900s.</a:t>
-            </a:r>
-          </a:p>
-          <a:p>
-            <a:r>
-              <a:t>[5. Verify proctoring setup the night before (camera, mic, ID)]: ProctorFree has technical requirements. Test them the night before, not the morning of.</a:t>
-            </a:r>
-          </a:p>
-          <a:p>
-            <a:r>
-              <a:t>[6. Single attempt. Do not schedule until 1-4 are green.]: The policy that catches people. Treat it like a one-shot deploy to production.</a:t>
-            </a:r>
-          </a:p>
-          <a:p>
-            <a:r>
-              <a:t>CCA-F EXAM TIP: When you're scoring 900+ on the Practice Exam AND you can rebuild Segment 1 from memory in 30 minutes, you're ready. Both conditions, not just one.</a:t>
+              <a:t>Bridge: 'You have agents, tools, prompts, validation, context discipline. Last segment is the cert capstone - what's on the CCA-F exam, how the domain weights map to today's notebooks, and ten weighted practice questions.'</a:t>
             </a:r>
           </a:p>
         </p:txBody>
@@ -4572,37 +3520,7 @@
           <a:lstStyle/>
           <a:p>
             <a:r>
-              <a:t>FRAMER: Recap what we built. Four live artifacts plus one self-study notebook.</a:t>
-            </a:r>
-          </a:p>
-          <a:p>
-            <a:r>
-              <a:t>[Customer support agent with PreToolUse hook enforcement]: Segment 1. The deterministic shell around a non-deterministic model.</a:t>
-            </a:r>
-          </a:p>
-          <a:p>
-            <a:r>
-              <a:t>[Configured Claude Code env with .mcp.json + CLAUDE.md hierarchy]: Segment 2. The team-shareable configuration surface that scales by file, not code.</a:t>
-            </a:r>
-          </a:p>
-          <a:p>
-            <a:r>
-              <a:t>[Invoice extractor with Pydantic schema + validation retry]: Segment 3. The forced-tool_choice cheat code in production form.</a:t>
-            </a:r>
-          </a:p>
-          <a:p>
-            <a:r>
-              <a:t>[Production reliability mental model - context, escalation, errors, provenance]: Segment 3 plus the through-line in Segments 1 and 4. The reliability story isn't a feature; it's a discipline.</a:t>
-            </a:r>
-          </a:p>
-          <a:p>
-            <a:r>
-              <a:t>[Plus self-study: control surfaces and the Console asset surface (Segment 2.5)]: Off-clock notebook. Walk it before the exam.</a:t>
-            </a:r>
-          </a:p>
-          <a:p>
-            <a:r>
-              <a:t>Tie back to the cold open: model is non-deterministic, your architecture cannot be. Every artifact today is an instance of that pattern. The shell catches the model when it wobbles; the shell stays out of the way when it behaves.</a:t>
+              <a:t>All five CCA-F domains. 50 minutes. 12-minute cert briefing + 28 minutes of 10 weighted practice questions + 10 minutes of Q&amp;A and close.</a:t>
             </a:r>
           </a:p>
         </p:txBody>
@@ -4672,52 +3590,7 @@
           <a:lstStyle/>
           <a:p>
             <a:r>
-              <a:t>FRAMER: Resources for after class. Four locations. Walk learners through each one.</a:t>
-            </a:r>
-          </a:p>
-          <a:p>
-            <a:r>
-              <a:t>[Repo]: github.com/timothywarner-org/claude-architect. Today's slides, notebooks, scripts, and the EXAM-STUDY-PATH.md learner-facing CCA-F study scaffold.</a:t>
-            </a:r>
-          </a:p>
-          <a:p>
-            <a:r>
-              <a:t>[github.com/timothywarner-org/claude-architect]: Clone it if you haven't. Star it if you found today useful.</a:t>
-            </a:r>
-          </a:p>
-          <a:p>
-            <a:r>
-              <a:t>[Anthropic cookbook (official, MIT, vendored in this repo)]: Vendored in claude-cookbooks-main/ at the repo root. No second clone required. Every demo today cites a specific cookbook for further self-study.</a:t>
-            </a:r>
-          </a:p>
-          <a:p>
-            <a:r>
-              <a:t>[github.com/anthropics/claude-cookbooks   |   claude-cookbooks-main/]: The upstream repo and the local vendored copy. Pick whichever is easier.</a:t>
-            </a:r>
-          </a:p>
-          <a:p>
-            <a:r>
-              <a:t>[CCA-F study path]: EXAM-STUDY-PATH.md. The notebook-to-domain-to-scenario mapping plus the after-class study plan.</a:t>
-            </a:r>
-          </a:p>
-          <a:p>
-            <a:r>
-              <a:t>[EXAM-STUDY-PATH.md - notebook -&gt; CCA-F domain -&gt; scenario mapping]: The map. Print it if you're aiming at the cert.</a:t>
-            </a:r>
-          </a:p>
-          <a:p>
-            <a:r>
-              <a:t>[Anthropic Academy]: Free courses. The Practice Exam lives here.</a:t>
-            </a:r>
-          </a:p>
-          <a:p>
-            <a:r>
-              <a:t>[anthropic.skilljar.com - free courses, official Practice Exam]: Bookmark it. The Practice Exam is the authoritative readiness signal before you schedule.</a:t>
-            </a:r>
-          </a:p>
-          <a:p>
-            <a:r>
-              <a:t>If you don't ship something in 7 days, the muscle memory fades. Pick the smallest possible win and ship it.</a:t>
+              <a:t>Skills-first framing. You already have the skills. The exam is how you signal them. This is the moment to mention CCA-F is currently partner-gated; check claude.com/partners for the current access policy.</a:t>
             </a:r>
           </a:p>
         </p:txBody>
@@ -4787,12 +3660,7 @@
           <a:lstStyle/>
           <a:p>
             <a:r>
-              <a:t>FRAMER: Section divider for Segment 1. We're spending 50 minutes on the heaviest domain on the exam.</a:t>
-            </a:r>
-          </a:p>
-          <a:p>
-            <a:r>
-              <a:t>Segment 1 is Domain 1 - Agentic Architecture and Orchestration. 27% of the CCA-F blueprint, the single biggest weighting. Live build: a customer support agent with four tools, a PreToolUse hook that enforces a refund cap, and a coordinator-subagent demo showing context isolation. Notebook is segment-1-customer-support-agent.ipynb. Run cells as we go.</a:t>
+              <a:t>Domain 1 - Agentic Architecture and Orchestration. 50 minutes. 27% of the CCA-F blueprint, the single heaviest domain. Live build: customer support agent + PreToolUse hook + coordinator-subagent demo.</a:t>
             </a:r>
           </a:p>
         </p:txBody>
@@ -4862,37 +3730,7 @@
           <a:lstStyle/>
           <a:p>
             <a:r>
-              <a:t>FRAMER: Final Q&amp;A. 10 minutes. Pre-answer the questions I expect from the chat.</a:t>
-            </a:r>
-          </a:p>
-          <a:p>
-            <a:r>
-              <a:t>[How do I monitor an agent in production?]: Log every stop_reason, every tool call, every hook block. Three streams, one dashboard. Build it before you ship, not after.</a:t>
-            </a:r>
-          </a:p>
-          <a:p>
-            <a:r>
-              <a:t>[When do I split a monolithic agent into coordinator + subagents?]: Three conditions, all required - own success criteria, own tool subset, own context discipline. Don't split for theoretical purity.</a:t>
-            </a:r>
-          </a:p>
-          <a:p>
-            <a:r>
-              <a:t>[What is the cost story for prompt caching?]: cache_control on system prompts and large tool blocks. Hits run roughly 90% cheaper than misses. Cache writes cost more than reads, so do the math before assuming caching is free.</a:t>
-            </a:r>
-          </a:p>
-          <a:p>
-            <a:r>
-              <a:t>[How do I know when I am ready to sit the exam?]: When the Anthropic Practice Exam scores 900+ cold AND you can rebuild Segment 1 from memory in 30 minutes. Both conditions.</a:t>
-            </a:r>
-          </a:p>
-          <a:p>
-            <a:r>
-              <a:t>[What is the renewal path for CCA-F?]: Anthropic reserves the right to retire and refresh exams. Certifications tied to beta products may expire when the production exam goes live. Watch the cert page.</a:t>
-            </a:r>
-          </a:p>
-          <a:p>
-            <a:r>
-              <a:t>Open the floor for live questions. Anything not pre-answered above is fair game.</a:t>
+              <a:t>The one-attempt rule is the policy nobody plans around. Tell them: don't schedule until your Anthropic Practice Exam scores are consistently above 900. Treat the $99 as if it were $990 - because the cost of failing is rescheduling and starting prep over.</a:t>
             </a:r>
           </a:p>
         </p:txBody>
@@ -4962,27 +3800,567 @@
           <a:lstStyle/>
           <a:p>
             <a:r>
-              <a:t>FRAMER: Final close. Sign-off in three beats. Q&amp;A is done; this is the goodbye.</a:t>
-            </a:r>
-          </a:p>
-          <a:p>
-            <a:r>
-              <a:t>Thank you for spending four hours with me today. We built three live artifacts plus a self-study fifth. We covered every CCA-F domain. We earned the cert conversation by shipping the skills first.</a:t>
-            </a:r>
-          </a:p>
-          <a:p>
-            <a:r>
-              <a:t>The repo is yours - clone it, fork it, send PRs if you find something to improve. techtrainertim.com is where the longer-form content lives. LinkedIn @timothywarner is where I post when new courses drop.</a:t>
-            </a:r>
-          </a:p>
-          <a:p>
-            <a:r>
-              <a:t>If today gave you ONE pattern you can wire into a real workflow this week - that's the win. The notebooks aren't theory; they're production patterns dressed up in teaching clothes. Ship something.</a:t>
-            </a:r>
-          </a:p>
-          <a:p>
-            <a:r>
-              <a:t>Memento mori. Also, ship the PR.</a:t>
+              <a:t>D1 + D3 + D4 = 67% of the exam. Weight your study time the same way. D2 + D3 = 38% - that pairing is why we covered both in one segment. D5 is small but easy to under-teach because it feels like security common sense until scenario questions get specific.</a:t>
+            </a:r>
+          </a:p>
+        </p:txBody>
+      </p:sp>
+      <p:sp>
+        <p:nvSpPr>
+          <p:cNvPr id="4" name="Slide Number Placeholder 3"/>
+          <p:cNvSpPr>
+            <a:spLocks noGrp="1"/>
+          </p:cNvSpPr>
+          <p:nvPr>
+            <p:ph type="sldNum" idx="5" sz="quarter"/>
+          </p:nvPr>
+        </p:nvSpPr>
+        <p:spPr/>
+      </p:sp>
+    </p:spTree>
+  </p:cSld>
+  <p:clrMapOvr>
+    <a:masterClrMapping/>
+  </p:clrMapOvr>
+</p:notes>
+</file>
+
+<file path=ppt/notesSlides/notesSlide52.xml><?xml version="1.0" encoding="utf-8"?>
+<p:notes xmlns:a="http://schemas.openxmlformats.org/drawingml/2006/main" xmlns:p="http://schemas.openxmlformats.org/presentationml/2006/main" xmlns:r="http://schemas.openxmlformats.org/officeDocument/2006/relationships">
+  <p:cSld>
+    <p:spTree>
+      <p:nvGrpSpPr>
+        <p:cNvPr id="1" name=""/>
+        <p:cNvGrpSpPr/>
+        <p:nvPr/>
+      </p:nvGrpSpPr>
+      <p:grpSpPr>
+        <a:xfrm>
+          <a:off x="0" y="0"/>
+          <a:ext cx="0" cy="0"/>
+          <a:chOff x="0" y="0"/>
+          <a:chExt cx="0" cy="0"/>
+        </a:xfrm>
+      </p:grpSpPr>
+      <p:sp>
+        <p:nvSpPr>
+          <p:cNvPr id="2" name="Slide Image Placeholder 1"/>
+          <p:cNvSpPr>
+            <a:spLocks noGrp="1"/>
+          </p:cNvSpPr>
+          <p:nvPr>
+            <p:ph type="sldImg" idx="2"/>
+          </p:nvPr>
+        </p:nvSpPr>
+        <p:spPr/>
+      </p:sp>
+      <p:sp>
+        <p:nvSpPr>
+          <p:cNvPr id="3" name="Notes Placeholder 2"/>
+          <p:cNvSpPr>
+            <a:spLocks noGrp="1"/>
+          </p:cNvSpPr>
+          <p:nvPr>
+            <p:ph type="body" idx="3" sz="quarter"/>
+          </p:nvPr>
+        </p:nvSpPr>
+        <p:spPr/>
+        <p:txBody>
+          <a:bodyPr/>
+          <a:lstStyle/>
+          <a:p>
+            <a:r>
+              <a:t>FRAMER: the donut on the left tells them the weighting. The table on the right tells them which notebook teaches what.  Spotlight on the gold slice (D1, 27%) - biggest single lever, biggest single domain. Then walk the 67% combination of D1+D3+D4. That's two thirds of the exam in three domains.  Production framing:  the same weighting holds in real life. D1 (agentic) and D3 (Claude Code) show up in every production system; D5 (context) shows up when sessions get long.  Take-home punchlist:  rebuild segment-1 from memory in 30 minutes before scheduling the exam. If you can't, you're not ready. The Anthropic Practice Exam is the authoritative calibration.</a:t>
+            </a:r>
+          </a:p>
+        </p:txBody>
+      </p:sp>
+      <p:sp>
+        <p:nvSpPr>
+          <p:cNvPr id="4" name="Slide Number Placeholder 3"/>
+          <p:cNvSpPr>
+            <a:spLocks noGrp="1"/>
+          </p:cNvSpPr>
+          <p:nvPr>
+            <p:ph type="sldNum" idx="5" sz="quarter"/>
+          </p:nvPr>
+        </p:nvSpPr>
+        <p:spPr/>
+      </p:sp>
+    </p:spTree>
+  </p:cSld>
+  <p:clrMapOvr>
+    <a:masterClrMapping/>
+  </p:clrMapOvr>
+</p:notes>
+</file>
+
+<file path=ppt/notesSlides/notesSlide53.xml><?xml version="1.0" encoding="utf-8"?>
+<p:notes xmlns:a="http://schemas.openxmlformats.org/drawingml/2006/main" xmlns:p="http://schemas.openxmlformats.org/presentationml/2006/main" xmlns:r="http://schemas.openxmlformats.org/officeDocument/2006/relationships">
+  <p:cSld>
+    <p:spTree>
+      <p:nvGrpSpPr>
+        <p:cNvPr id="1" name=""/>
+        <p:cNvGrpSpPr/>
+        <p:nvPr/>
+      </p:nvGrpSpPr>
+      <p:grpSpPr>
+        <a:xfrm>
+          <a:off x="0" y="0"/>
+          <a:ext cx="0" cy="0"/>
+          <a:chOff x="0" y="0"/>
+          <a:chExt cx="0" cy="0"/>
+        </a:xfrm>
+      </p:grpSpPr>
+      <p:sp>
+        <p:nvSpPr>
+          <p:cNvPr id="2" name="Slide Image Placeholder 1"/>
+          <p:cNvSpPr>
+            <a:spLocks noGrp="1"/>
+          </p:cNvSpPr>
+          <p:nvPr>
+            <p:ph type="sldImg" idx="2"/>
+          </p:nvPr>
+        </p:nvSpPr>
+        <p:spPr/>
+      </p:sp>
+      <p:sp>
+        <p:nvSpPr>
+          <p:cNvPr id="3" name="Notes Placeholder 2"/>
+          <p:cNvSpPr>
+            <a:spLocks noGrp="1"/>
+          </p:cNvSpPr>
+          <p:nvPr>
+            <p:ph type="body" idx="3" sz="quarter"/>
+          </p:nvPr>
+        </p:nvSpPr>
+        <p:spPr/>
+        <p:txBody>
+          <a:bodyPr/>
+          <a:lstStyle/>
+          <a:p>
+            <a:r>
+              <a:t>This is why Segment 4 runs against a freshly-tagged practice-questions.json. The 60-question bank distribution doesn't match exam weights, but the SAMPLER does. Same idea Anthropic uses for the real exam.</a:t>
+            </a:r>
+          </a:p>
+        </p:txBody>
+      </p:sp>
+      <p:sp>
+        <p:nvSpPr>
+          <p:cNvPr id="4" name="Slide Number Placeholder 3"/>
+          <p:cNvSpPr>
+            <a:spLocks noGrp="1"/>
+          </p:cNvSpPr>
+          <p:nvPr>
+            <p:ph type="sldNum" idx="5" sz="quarter"/>
+          </p:nvPr>
+        </p:nvSpPr>
+        <p:spPr/>
+      </p:sp>
+    </p:spTree>
+  </p:cSld>
+  <p:clrMapOvr>
+    <a:masterClrMapping/>
+  </p:clrMapOvr>
+</p:notes>
+</file>
+
+<file path=ppt/notesSlides/notesSlide54.xml><?xml version="1.0" encoding="utf-8"?>
+<p:notes xmlns:a="http://schemas.openxmlformats.org/drawingml/2006/main" xmlns:p="http://schemas.openxmlformats.org/presentationml/2006/main" xmlns:r="http://schemas.openxmlformats.org/officeDocument/2006/relationships">
+  <p:cSld>
+    <p:spTree>
+      <p:nvGrpSpPr>
+        <p:cNvPr id="1" name=""/>
+        <p:cNvGrpSpPr/>
+        <p:nvPr/>
+      </p:nvGrpSpPr>
+      <p:grpSpPr>
+        <a:xfrm>
+          <a:off x="0" y="0"/>
+          <a:ext cx="0" cy="0"/>
+          <a:chOff x="0" y="0"/>
+          <a:chExt cx="0" cy="0"/>
+        </a:xfrm>
+      </p:grpSpPr>
+      <p:sp>
+        <p:nvSpPr>
+          <p:cNvPr id="2" name="Slide Image Placeholder 1"/>
+          <p:cNvSpPr>
+            <a:spLocks noGrp="1"/>
+          </p:cNvSpPr>
+          <p:nvPr>
+            <p:ph type="sldImg" idx="2"/>
+          </p:nvPr>
+        </p:nvSpPr>
+        <p:spPr/>
+      </p:sp>
+      <p:sp>
+        <p:nvSpPr>
+          <p:cNvPr id="3" name="Notes Placeholder 2"/>
+          <p:cNvSpPr>
+            <a:spLocks noGrp="1"/>
+          </p:cNvSpPr>
+          <p:nvPr>
+            <p:ph type="body" idx="3" sz="quarter"/>
+          </p:nvPr>
+        </p:nvSpPr>
+        <p:spPr/>
+        <p:txBody>
+          <a:bodyPr/>
+          <a:lstStyle/>
+          <a:p>
+            <a:r>
+              <a:t>The community-sourced disclaimer goes here: questions are calibration practice, NOT exam predictors. Use Anthropic's official Practice Exam as the authoritative signal before scheduling. Read the disclaimer out loud once at the start.</a:t>
+            </a:r>
+          </a:p>
+        </p:txBody>
+      </p:sp>
+      <p:sp>
+        <p:nvSpPr>
+          <p:cNvPr id="4" name="Slide Number Placeholder 3"/>
+          <p:cNvSpPr>
+            <a:spLocks noGrp="1"/>
+          </p:cNvSpPr>
+          <p:nvPr>
+            <p:ph type="sldNum" idx="5" sz="quarter"/>
+          </p:nvPr>
+        </p:nvSpPr>
+        <p:spPr/>
+      </p:sp>
+    </p:spTree>
+  </p:cSld>
+  <p:clrMapOvr>
+    <a:masterClrMapping/>
+  </p:clrMapOvr>
+</p:notes>
+</file>
+
+<file path=ppt/notesSlides/notesSlide55.xml><?xml version="1.0" encoding="utf-8"?>
+<p:notes xmlns:a="http://schemas.openxmlformats.org/drawingml/2006/main" xmlns:p="http://schemas.openxmlformats.org/presentationml/2006/main" xmlns:r="http://schemas.openxmlformats.org/officeDocument/2006/relationships">
+  <p:cSld>
+    <p:spTree>
+      <p:nvGrpSpPr>
+        <p:cNvPr id="1" name=""/>
+        <p:cNvGrpSpPr/>
+        <p:nvPr/>
+      </p:nvGrpSpPr>
+      <p:grpSpPr>
+        <a:xfrm>
+          <a:off x="0" y="0"/>
+          <a:ext cx="0" cy="0"/>
+          <a:chOff x="0" y="0"/>
+          <a:chExt cx="0" cy="0"/>
+        </a:xfrm>
+      </p:grpSpPr>
+      <p:sp>
+        <p:nvSpPr>
+          <p:cNvPr id="2" name="Slide Image Placeholder 1"/>
+          <p:cNvSpPr>
+            <a:spLocks noGrp="1"/>
+          </p:cNvSpPr>
+          <p:nvPr>
+            <p:ph type="sldImg" idx="2"/>
+          </p:nvPr>
+        </p:nvSpPr>
+        <p:spPr/>
+      </p:sp>
+      <p:sp>
+        <p:nvSpPr>
+          <p:cNvPr id="3" name="Notes Placeholder 2"/>
+          <p:cNvSpPr>
+            <a:spLocks noGrp="1"/>
+          </p:cNvSpPr>
+          <p:nvPr>
+            <p:ph type="body" idx="3" sz="quarter"/>
+          </p:nvPr>
+        </p:nvSpPr>
+        <p:spPr/>
+        <p:txBody>
+          <a:bodyPr/>
+          <a:lstStyle/>
+          <a:p>
+            <a:r>
+              <a:t>Full 13-item version lives in CERT-PROGRAM-BRIEFING.md. Six headlines on the slide. Rebuilding Segment 1 from memory in 30 minutes is the load-bearing readiness test - if you can't, you're not ready to sit the exam.</a:t>
+            </a:r>
+          </a:p>
+        </p:txBody>
+      </p:sp>
+      <p:sp>
+        <p:nvSpPr>
+          <p:cNvPr id="4" name="Slide Number Placeholder 3"/>
+          <p:cNvSpPr>
+            <a:spLocks noGrp="1"/>
+          </p:cNvSpPr>
+          <p:nvPr>
+            <p:ph type="sldNum" idx="5" sz="quarter"/>
+          </p:nvPr>
+        </p:nvSpPr>
+        <p:spPr/>
+      </p:sp>
+    </p:spTree>
+  </p:cSld>
+  <p:clrMapOvr>
+    <a:masterClrMapping/>
+  </p:clrMapOvr>
+</p:notes>
+</file>
+
+<file path=ppt/notesSlides/notesSlide56.xml><?xml version="1.0" encoding="utf-8"?>
+<p:notes xmlns:a="http://schemas.openxmlformats.org/drawingml/2006/main" xmlns:p="http://schemas.openxmlformats.org/presentationml/2006/main" xmlns:r="http://schemas.openxmlformats.org/officeDocument/2006/relationships">
+  <p:cSld>
+    <p:spTree>
+      <p:nvGrpSpPr>
+        <p:cNvPr id="1" name=""/>
+        <p:cNvGrpSpPr/>
+        <p:nvPr/>
+      </p:nvGrpSpPr>
+      <p:grpSpPr>
+        <a:xfrm>
+          <a:off x="0" y="0"/>
+          <a:ext cx="0" cy="0"/>
+          <a:chOff x="0" y="0"/>
+          <a:chExt cx="0" cy="0"/>
+        </a:xfrm>
+      </p:grpSpPr>
+      <p:sp>
+        <p:nvSpPr>
+          <p:cNvPr id="2" name="Slide Image Placeholder 1"/>
+          <p:cNvSpPr>
+            <a:spLocks noGrp="1"/>
+          </p:cNvSpPr>
+          <p:nvPr>
+            <p:ph type="sldImg" idx="2"/>
+          </p:nvPr>
+        </p:nvSpPr>
+        <p:spPr/>
+      </p:sp>
+      <p:sp>
+        <p:nvSpPr>
+          <p:cNvPr id="3" name="Notes Placeholder 2"/>
+          <p:cNvSpPr>
+            <a:spLocks noGrp="1"/>
+          </p:cNvSpPr>
+          <p:nvPr>
+            <p:ph type="body" idx="3" sz="quarter"/>
+          </p:nvPr>
+        </p:nvSpPr>
+        <p:spPr/>
+        <p:txBody>
+          <a:bodyPr/>
+          <a:lstStyle/>
+          <a:p>
+            <a:r>
+              <a:t>Recap the four live artifacts plus the self-study fifth. Tie back to the cold-open quote: model is non-deterministic, your architecture cannot be. Every artifact today is an instance of that pattern.</a:t>
+            </a:r>
+          </a:p>
+        </p:txBody>
+      </p:sp>
+      <p:sp>
+        <p:nvSpPr>
+          <p:cNvPr id="4" name="Slide Number Placeholder 3"/>
+          <p:cNvSpPr>
+            <a:spLocks noGrp="1"/>
+          </p:cNvSpPr>
+          <p:nvPr>
+            <p:ph type="sldNum" idx="5" sz="quarter"/>
+          </p:nvPr>
+        </p:nvSpPr>
+        <p:spPr/>
+      </p:sp>
+    </p:spTree>
+  </p:cSld>
+  <p:clrMapOvr>
+    <a:masterClrMapping/>
+  </p:clrMapOvr>
+</p:notes>
+</file>
+
+<file path=ppt/notesSlides/notesSlide57.xml><?xml version="1.0" encoding="utf-8"?>
+<p:notes xmlns:a="http://schemas.openxmlformats.org/drawingml/2006/main" xmlns:p="http://schemas.openxmlformats.org/presentationml/2006/main" xmlns:r="http://schemas.openxmlformats.org/officeDocument/2006/relationships">
+  <p:cSld>
+    <p:spTree>
+      <p:nvGrpSpPr>
+        <p:cNvPr id="1" name=""/>
+        <p:cNvGrpSpPr/>
+        <p:nvPr/>
+      </p:nvGrpSpPr>
+      <p:grpSpPr>
+        <a:xfrm>
+          <a:off x="0" y="0"/>
+          <a:ext cx="0" cy="0"/>
+          <a:chOff x="0" y="0"/>
+          <a:chExt cx="0" cy="0"/>
+        </a:xfrm>
+      </p:grpSpPr>
+      <p:sp>
+        <p:nvSpPr>
+          <p:cNvPr id="2" name="Slide Image Placeholder 1"/>
+          <p:cNvSpPr>
+            <a:spLocks noGrp="1"/>
+          </p:cNvSpPr>
+          <p:nvPr>
+            <p:ph type="sldImg" idx="2"/>
+          </p:nvPr>
+        </p:nvSpPr>
+        <p:spPr/>
+      </p:sp>
+      <p:sp>
+        <p:nvSpPr>
+          <p:cNvPr id="3" name="Notes Placeholder 2"/>
+          <p:cNvSpPr>
+            <a:spLocks noGrp="1"/>
+          </p:cNvSpPr>
+          <p:nvPr>
+            <p:ph type="body" idx="3" sz="quarter"/>
+          </p:nvPr>
+        </p:nvSpPr>
+        <p:spPr/>
+        <p:txBody>
+          <a:bodyPr/>
+          <a:lstStyle/>
+          <a:p>
+            <a:r>
+              <a:t>If they don't ship something in 7 days, the muscle memory fades. Pick the smallest possible win and ship it. The repo carries EXAM-STUDY-PATH.md which is the post-class anchor for CCA-F prep - notebook to domain to scenario family in one table.</a:t>
+            </a:r>
+          </a:p>
+        </p:txBody>
+      </p:sp>
+      <p:sp>
+        <p:nvSpPr>
+          <p:cNvPr id="4" name="Slide Number Placeholder 3"/>
+          <p:cNvSpPr>
+            <a:spLocks noGrp="1"/>
+          </p:cNvSpPr>
+          <p:nvPr>
+            <p:ph type="sldNum" idx="5" sz="quarter"/>
+          </p:nvPr>
+        </p:nvSpPr>
+        <p:spPr/>
+      </p:sp>
+    </p:spTree>
+  </p:cSld>
+  <p:clrMapOvr>
+    <a:masterClrMapping/>
+  </p:clrMapOvr>
+</p:notes>
+</file>
+
+<file path=ppt/notesSlides/notesSlide58.xml><?xml version="1.0" encoding="utf-8"?>
+<p:notes xmlns:a="http://schemas.openxmlformats.org/drawingml/2006/main" xmlns:p="http://schemas.openxmlformats.org/presentationml/2006/main" xmlns:r="http://schemas.openxmlformats.org/officeDocument/2006/relationships">
+  <p:cSld>
+    <p:spTree>
+      <p:nvGrpSpPr>
+        <p:cNvPr id="1" name=""/>
+        <p:cNvGrpSpPr/>
+        <p:nvPr/>
+      </p:nvGrpSpPr>
+      <p:grpSpPr>
+        <a:xfrm>
+          <a:off x="0" y="0"/>
+          <a:ext cx="0" cy="0"/>
+          <a:chOff x="0" y="0"/>
+          <a:chExt cx="0" cy="0"/>
+        </a:xfrm>
+      </p:grpSpPr>
+      <p:sp>
+        <p:nvSpPr>
+          <p:cNvPr id="2" name="Slide Image Placeholder 1"/>
+          <p:cNvSpPr>
+            <a:spLocks noGrp="1"/>
+          </p:cNvSpPr>
+          <p:nvPr>
+            <p:ph type="sldImg" idx="2"/>
+          </p:nvPr>
+        </p:nvSpPr>
+        <p:spPr/>
+      </p:sp>
+      <p:sp>
+        <p:nvSpPr>
+          <p:cNvPr id="3" name="Notes Placeholder 2"/>
+          <p:cNvSpPr>
+            <a:spLocks noGrp="1"/>
+          </p:cNvSpPr>
+          <p:nvPr>
+            <p:ph type="body" idx="3" sz="quarter"/>
+          </p:nvPr>
+        </p:nvSpPr>
+        <p:spPr/>
+        <p:txBody>
+          <a:bodyPr/>
+          <a:lstStyle/>
+          <a:p>
+            <a:r>
+              <a:t>Anticipated questions to invite. Pre-answer the renewal one: Anthropic reserves the right to retire and refresh exams; certifications tied to beta products may expire when the production exam goes live. Watch the cert page.</a:t>
+            </a:r>
+          </a:p>
+        </p:txBody>
+      </p:sp>
+      <p:sp>
+        <p:nvSpPr>
+          <p:cNvPr id="4" name="Slide Number Placeholder 3"/>
+          <p:cNvSpPr>
+            <a:spLocks noGrp="1"/>
+          </p:cNvSpPr>
+          <p:nvPr>
+            <p:ph type="sldNum" idx="5" sz="quarter"/>
+          </p:nvPr>
+        </p:nvSpPr>
+        <p:spPr/>
+      </p:sp>
+    </p:spTree>
+  </p:cSld>
+  <p:clrMapOvr>
+    <a:masterClrMapping/>
+  </p:clrMapOvr>
+</p:notes>
+</file>
+
+<file path=ppt/notesSlides/notesSlide59.xml><?xml version="1.0" encoding="utf-8"?>
+<p:notes xmlns:a="http://schemas.openxmlformats.org/drawingml/2006/main" xmlns:p="http://schemas.openxmlformats.org/presentationml/2006/main" xmlns:r="http://schemas.openxmlformats.org/officeDocument/2006/relationships">
+  <p:cSld>
+    <p:spTree>
+      <p:nvGrpSpPr>
+        <p:cNvPr id="1" name=""/>
+        <p:cNvGrpSpPr/>
+        <p:nvPr/>
+      </p:nvGrpSpPr>
+      <p:grpSpPr>
+        <a:xfrm>
+          <a:off x="0" y="0"/>
+          <a:ext cx="0" cy="0"/>
+          <a:chOff x="0" y="0"/>
+          <a:chExt cx="0" cy="0"/>
+        </a:xfrm>
+      </p:grpSpPr>
+      <p:sp>
+        <p:nvSpPr>
+          <p:cNvPr id="2" name="Slide Image Placeholder 1"/>
+          <p:cNvSpPr>
+            <a:spLocks noGrp="1"/>
+          </p:cNvSpPr>
+          <p:nvPr>
+            <p:ph type="sldImg" idx="2"/>
+          </p:nvPr>
+        </p:nvSpPr>
+        <p:spPr/>
+      </p:sp>
+      <p:sp>
+        <p:nvSpPr>
+          <p:cNvPr id="3" name="Notes Placeholder 2"/>
+          <p:cNvSpPr>
+            <a:spLocks noGrp="1"/>
+          </p:cNvSpPr>
+          <p:nvPr>
+            <p:ph type="body" idx="3" sz="quarter"/>
+          </p:nvPr>
+        </p:nvSpPr>
+        <p:spPr/>
+        <p:txBody>
+          <a:bodyPr/>
+          <a:lstStyle/>
+          <a:p>
+            <a:r>
+              <a:t>Final close. The 'memento mori, ship the PR' line is the personal sign-off. Open for one last round of questions, then wrap. Recording stops after the chat clears.</a:t>
             </a:r>
           </a:p>
         </p:txBody>
@@ -5052,37 +4430,7 @@
           <a:lstStyle/>
           <a:p>
             <a:r>
-              <a:t>FRAMER: Set expectations for the live build. What you walk away with, what to watch for, what NOT to fear.</a:t>
-            </a:r>
-          </a:p>
-          <a:p>
-            <a:r>
-              <a:t>[A customer support agent with 4 tools (lookup + refund + escalate)]: Four tools is the floor before tool-selection accuracy starts to degrade. We'll wire get_customer, lookup_order, process_refund, and escalate_to_human.</a:t>
-            </a:r>
-          </a:p>
-          <a:p>
-            <a:r>
-              <a:t>[Hook-enforced policy - the $500 refund cap can't be talked around]: This is the load-bearing demo beat. The prompt says don't exceed cap. The tool description says don't exceed cap. The hook physically blocks it. When all three layers agree, the hook never fires. The hook is there for when they disagree.</a:t>
-            </a:r>
-          </a:p>
-          <a:p>
-            <a:r>
-              <a:t>[Structured escalation to human review with a typed summary]: When the agent escalates, it passes a STRUCTURED summary, not the raw transcript. The human picks up faster. The agent's notes become signal.</a:t>
-            </a:r>
-          </a:p>
-          <a:p>
-            <a:r>
-              <a:t>[Coordinator + subagent isolation demo]: At the bottom of the notebook. Parent agent delegates to a subagent via the Task tool; subagent's working notes stay isolated from the parent's context.</a:t>
-            </a:r>
-          </a:p>
-          <a:p>
-            <a:r>
-              <a:t>[By the end of the segment: you can sketch any agent topology]: Production agent design is mostly four questions - what tools, what hook, what isolation, what escalation. You'll have answers by the next break.</a:t>
-            </a:r>
-          </a:p>
-          <a:p>
-            <a:r>
-              <a:t>CCA-F EXAM TIP: When the exam asks about agent design, the wrong answer almost always involves the model "trying really hard not to violate policy." The right answer involves a hook, a structured error, or a forced tool_choice.</a:t>
+              <a:t>This is the live build. Set expectations: we WILL hit edge cases - that's the point. The model is going to TRY to refund more than the cap. The hook is going to say no. The aha moment is watching the model re-plan and escalate correctly.</a:t>
             </a:r>
           </a:p>
         </p:txBody>
@@ -5152,42 +4500,7 @@
           <a:lstStyle/>
           <a:p>
             <a:r>
-              <a:t>FRAMER: The four-step loop is the agentic pattern. Memorize the branches; the rest of the course is built on top.</a:t>
-            </a:r>
-          </a:p>
-          <a:p>
-            <a:r>
-              <a:t>[1. Send request - model returns content + stop_reason]: Every messages.create call returns a Message with a stop_reason field. That field is the dispatcher in your code.</a:t>
-            </a:r>
-          </a:p>
-          <a:p>
-            <a:r>
-              <a:t>[2. Read stop_reason - branch on the value, never on prose]: The hard rule. Six possible values, each with a defined next action. Never inspect the text to decide what to do next.</a:t>
-            </a:r>
-          </a:p>
-          <a:p>
-            <a:r>
-              <a:t>[3. tool_use? Execute tool, append tool_result, loop]: This is the agentic part. You execute the tool YOUR code defines, append a tool_result block, send the whole conversation back. Loop.</a:t>
-            </a:r>
-          </a:p>
-          <a:p>
-            <a:r>
-              <a:t>[4. end_turn? Return to user, done]: Clean termination. The model has nothing more to add.</a:t>
-            </a:r>
-          </a:p>
-          <a:p>
-            <a:r>
-              <a:t>[5. pause_turn? Resume in the next request, no state change]: Long-running server tools (web_search, computer_use) sometimes return pause_turn. Send the message back unchanged in the next request and the model resumes where it left off.</a:t>
-            </a:r>
-          </a:p>
-          <a:p>
-            <a:r>
-              <a:t>[Six stop_reason values: end_turn, max_tokens, stop_sequence, tool_use, pause_turn, refusal]: Memorize these. They're the API contract. The demo prints [iter N] stop_reason= on every loop iteration so you SEE the state transitions live.</a:t>
-            </a:r>
-          </a:p>
-          <a:p>
-            <a:r>
-              <a:t>CCA-F EXAM TIP: If you see an answer that says "check the assistant message for keywords like 'done' or 'finished' to detect completion," it's wrong. The exam tests whether you branch on stop_reason.</a:t>
+              <a:t>FRAMER: this is the slide they screenshot. Walk it twice.  First pass:  point at the center node ('Your code reads response.stop_reason'), then trace each of the six branches outward. Spend ~5 seconds per branch.  Second pass:  ask the room which branch they have NEVER handled in production. Most people have never handled 'refusal' or 'pause_turn'. Use that to set up the next slide.  Production tip:  refusal carries a 'category' field (cyber, bio) when the model flags a policy stop. Surface that category to the human queue verbatim. Do not paraphrase, do not retry, do not 'work around.' The orange anti-pattern band at the bottom is the punchline:  branch on the enum, never on prose. Cookbook anchor for further study: claude-cookbooks-main/tool_use/customer_service_agent.ipynb.</a:t>
             </a:r>
           </a:p>
         </p:txBody>
@@ -5257,37 +4570,7 @@
           <a:lstStyle/>
           <a:p>
             <a:r>
-              <a:t>FRAMER: When you split an agent into pieces, the boundaries matter more than the names. Coordinator-subagent is the production pattern for context isolation.</a:t>
-            </a:r>
-          </a:p>
-          <a:p>
-            <a:r>
-              <a:t>[ONE coordinator holds the user-facing thread]: There's exactly one place where the user is talking. Multiple coordinators is two cars driving the same lane - confusion, slow handoffs, lost state.</a:t>
-            </a:r>
-          </a:p>
-          <a:p>
-            <a:r>
-              <a:t>[Subagents get ISOLATED contexts via the Task tool]: The Task tool is the boundary. The subagent runs in its own context window, with its own tool set, returning only what it produces. The parent never sees the subagent's working notes.</a:t>
-            </a:r>
-          </a:p>
-          <a:p>
-            <a:r>
-              <a:t>[Subagent returns its FINAL answer to the parent, not its working notes]: This is the isolation contract. If the parent had to read every turn the subagent took, you've gained nothing.</a:t>
-            </a:r>
-          </a:p>
-          <a:p>
-            <a:r>
-              <a:t>[Split when: own success criteria, own tool subset, own context discipline]: Three conditions, all three required. If a subtask shares success criteria with its parent, it's not a separate agent - it's a step.</a:t>
-            </a:r>
-          </a:p>
-          <a:p>
-            <a:r>
-              <a:t>[Don't split for splitting's sake - two coordinators chatting is one slow agent]: Resist the urge to over-decompose. Most monolithic agents work fine. Split when you have a reason, not when it sounds architecturally pure.</a:t>
-            </a:r>
-          </a:p>
-          <a:p>
-            <a:r>
-              <a:t>CCA-F EXAM TIP: The wrong answer on subagent questions usually involves the parent reading the subagent's intermediate tool calls. The right answer involves the parent reading only the subagent's structured return value.</a:t>
+              <a:t>The hard rule: never parse natural language to detect completion. Always branch on the API field. Demo segment-1 prints [iter N] stop_reason= on every iteration so learners see the state transitions live. Refusal is rare; pause_turn shows up with long-running server tools like web_search.</a:t>
             </a:r>
           </a:p>
         </p:txBody>
@@ -5357,37 +4640,7 @@
           <a:lstStyle/>
           <a:p>
             <a:r>
-              <a:t>FRAMER: Hooks turn "should" into "must." The prompt is advisory; the hook is enforcement. This is the deterministic shell around the non-deterministic model.</a:t>
-            </a:r>
-          </a:p>
-          <a:p>
-            <a:r>
-              <a:t>[PreToolUse - gate a call BEFORE it runs (the bouncer)]: Your code inspects the tool name and inputs. Return a structured error to block; return None to allow. The model gets a tool_result with is_error=true and re-plans.</a:t>
-            </a:r>
-          </a:p>
-          <a:p>
-            <a:r>
-              <a:t>[PostToolUse - audit, transform, log AFTER (the auditor)]: The tool ran. You see what happened. Strip sensitive fields, log the call for audit, transform shapes if needed.</a:t>
-            </a:r>
-          </a:p>
-          <a:p>
-            <a:r>
-              <a:t>[SessionStart - inject context (the briefing room)]: Loaded at the top of every session. Tools, identity, policy. The agent boots with the context already in hand.</a:t>
-            </a:r>
-          </a:p>
-          <a:p>
-            <a:r>
-              <a:t>[Stop - final verification before returning to user]: One last check before the response leaves your code. Useful for final-output policy (don't echo PII, redact credit card numbers).</a:t>
-            </a:r>
-          </a:p>
-          <a:p>
-            <a:r>
-              <a:t>[Hooks run as YOUR code, not the model's. Anything that MUST happen, hook it.]: The rule. If a behavior is a business invariant, it lives in a hook. The prompt and tool description help the model do the right thing; the hook makes sure it CANNOT do the wrong thing.</a:t>
-            </a:r>
-          </a:p>
-          <a:p>
-            <a:r>
-              <a:t>CCA-F EXAM TIP: When the exam describes a policy that the agent "must" enforce, the answer involves a hook. When it says the agent "should" prefer one approach, the answer involves prompting and tool descriptions. Memorize the must-vs-should split.</a:t>
+              <a:t>Isolation is the feature. The parent doesn't drown in subagent reasoning, the parent sees a clean return value. Reference cookbook: claude-cookbooks-main/claude_agent_sdk/01_The_chief_of_staff_agent.ipynb. Segment 1 demo notebook contains a stripped-down coordinator-subagent at the end.</a:t>
             </a:r>
           </a:p>
         </p:txBody>
@@ -45435,53 +44688,30 @@
         <p:nvPr/>
       </p:nvGrpSpPr>
       <p:grpSpPr/>
-      <p:sp>
-        <p:nvSpPr>
-          <p:cNvPr id="2" name="Text Placeholder 1"/>
-          <p:cNvSpPr>
-            <a:spLocks noGrp="1"/>
-          </p:cNvSpPr>
-          <p:nvPr>
-            <p:ph type="body" idx="14" sz="quarter"/>
-          </p:nvPr>
-        </p:nvSpPr>
-        <p:spPr/>
-        <p:txBody>
-          <a:bodyPr wrap="square"/>
-          <a:lstStyle/>
-          <a:p>
-            <a:r>
-              <a:t>Demo - customer support agent (15 min)</a:t>
-            </a:r>
-          </a:p>
-          <a:p/>
-          <a:p>
-            <a:r>
-              <a:t>Open notebooks/segment-1-customer-support-agent.ipynb</a:t>
-            </a:r>
-          </a:p>
-          <a:p>
-            <a:r>
-              <a:t>Wire 4 tools, run Scenario A ($80 refund, in-cap, agent cooperates)</a:t>
-            </a:r>
-          </a:p>
-          <a:p>
-            <a:r>
-              <a:t>Add the PreToolUse hook from hooks-example.py</a:t>
-            </a:r>
-          </a:p>
-          <a:p>
-            <a:r>
-              <a:t>Run Scenario B ($750 refund, over-cap, hook blocks, agent escalates)</a:t>
-            </a:r>
-          </a:p>
-          <a:p>
-            <a:r>
-              <a:t>Coordinator-subagent demo at the bottom of the notebook</a:t>
-            </a:r>
-          </a:p>
-        </p:txBody>
-      </p:sp>
+      <p:pic>
+        <p:nvPicPr>
+          <p:cNvPr id="2" name="Picture 1" descr="02-defense-in-depth.png"/>
+          <p:cNvPicPr>
+            <a:picLocks noChangeAspect="1"/>
+          </p:cNvPicPr>
+          <p:nvPr/>
+        </p:nvPicPr>
+        <p:blipFill>
+          <a:blip r:embed="rId2"/>
+          <a:stretch>
+            <a:fillRect/>
+          </a:stretch>
+        </p:blipFill>
+        <p:spPr>
+          <a:xfrm>
+            <a:off x="0" y="0"/>
+            <a:ext cx="12192000" cy="6858000"/>
+          </a:xfrm>
+          <a:prstGeom prst="rect">
+            <a:avLst/>
+          </a:prstGeom>
+        </p:spPr>
+      </p:pic>
     </p:spTree>
   </p:cSld>
   <p:clrMapOvr>
@@ -45516,7 +44746,7 @@
           <a:lstStyle/>
           <a:p>
             <a:r>
-              <a:t>Exercise (5 min)</a:t>
+              <a:t>Hooks - deterministic guarantees</a:t>
             </a:r>
           </a:p>
         </p:txBody>
@@ -45537,27 +44767,28 @@
           <a:lstStyle/>
           <a:p>
             <a:r>
-              <a:t>Sketch architecture for a Developer Productivity scenario</a:t>
-            </a:r>
-          </a:p>
-          <a:p>
-            <a:r>
-              <a:t>On paper or in chat: coordinator + 3 subagents + tool scope per agent</a:t>
-            </a:r>
-          </a:p>
-          <a:p>
-            <a:r>
-              <a:t>What does each subagent specialize in?</a:t>
-            </a:r>
-          </a:p>
-          <a:p>
-            <a:r>
-              <a:t>What is each subagent's success criterion?</a:t>
-            </a:r>
-          </a:p>
-          <a:p>
-            <a:r>
-              <a:t>What tools does each one get? Cap each at ~5.</a:t>
+              <a:t>PreToolUse - gate a call BEFORE it runs (the bouncer)</a:t>
+            </a:r>
+          </a:p>
+          <a:p>
+            <a:r>
+              <a:t>PostToolUse - audit, transform, log AFTER (the auditor)</a:t>
+            </a:r>
+          </a:p>
+          <a:p>
+            <a:r>
+              <a:t>SessionStart - inject context (the briefing room)</a:t>
+            </a:r>
+          </a:p>
+          <a:p>
+            <a:r>
+              <a:t>Stop - final verification before returning to user</a:t>
+            </a:r>
+          </a:p>
+          <a:p/>
+          <a:p>
+            <a:r>
+              <a:t>Hooks run as YOUR code, not the model's. Anything that MUST happen, hook it.</a:t>
             </a:r>
           </a:p>
         </p:txBody>
@@ -45587,7 +44818,7 @@
             <a:spLocks noGrp="1"/>
           </p:cNvSpPr>
           <p:nvPr>
-            <p:ph type="body" idx="13" sz="quarter"/>
+            <p:ph type="body" idx="14" sz="quarter"/>
           </p:nvPr>
         </p:nvSpPr>
         <p:spPr/>
@@ -45596,42 +44827,35 @@
           <a:lstStyle/>
           <a:p>
             <a:r>
-              <a:t>Segment 1 takeaways</a:t>
+              <a:t>Demo - customer support agent (15 min)</a:t>
             </a:r>
           </a:p>
           <a:p/>
           <a:p>
             <a:r>
-              <a:t>Branch on stop_reason, never on natural-language signals</a:t>
-            </a:r>
-          </a:p>
-          <a:p>
-            <a:r>
-              <a:t>Coordinator + isolated subagents beats one giant context</a:t>
-            </a:r>
-          </a:p>
-          <a:p>
-            <a:r>
-              <a:t>Hooks turn 'should' into 'must' - the prompt advises, the hook enforces</a:t>
-            </a:r>
-          </a:p>
-        </p:txBody>
-      </p:sp>
-      <p:sp>
-        <p:nvSpPr>
-          <p:cNvPr id="3" name="Text Placeholder 2"/>
-          <p:cNvSpPr>
-            <a:spLocks noGrp="1"/>
-          </p:cNvSpPr>
-          <p:nvPr>
-            <p:ph type="body" idx="14" sz="quarter"/>
-          </p:nvPr>
-        </p:nvSpPr>
-        <p:spPr/>
-        <p:txBody>
-          <a:bodyPr/>
-          <a:lstStyle/>
-          <a:p/>
+              <a:t>Open notebooks/segment-1-customer-support-agent.ipynb</a:t>
+            </a:r>
+          </a:p>
+          <a:p>
+            <a:r>
+              <a:t>Wire 4 tools, run Scenario A ($80 refund, in-cap, agent cooperates)</a:t>
+            </a:r>
+          </a:p>
+          <a:p>
+            <a:r>
+              <a:t>Add the PreToolUse hook from hooks-example.py</a:t>
+            </a:r>
+          </a:p>
+          <a:p>
+            <a:r>
+              <a:t>Run Scenario B ($750 refund, over-cap, hook blocks, agent escalates)</a:t>
+            </a:r>
+          </a:p>
+          <a:p>
+            <a:r>
+              <a:t>Coordinator-subagent demo at the bottom of the notebook</a:t>
+            </a:r>
+          </a:p>
         </p:txBody>
       </p:sp>
     </p:spTree>
@@ -45668,7 +44892,48 @@
           <a:lstStyle/>
           <a:p>
             <a:r>
-              <a:t>Segment 2: Tool Design, Integration, Claude Code</a:t>
+              <a:t>Exercise (5 min)</a:t>
+            </a:r>
+          </a:p>
+        </p:txBody>
+      </p:sp>
+      <p:sp>
+        <p:nvSpPr>
+          <p:cNvPr id="3" name="Content Placeholder 2"/>
+          <p:cNvSpPr>
+            <a:spLocks noGrp="1"/>
+          </p:cNvSpPr>
+          <p:nvPr>
+            <p:ph idx="1"/>
+          </p:nvPr>
+        </p:nvSpPr>
+        <p:spPr/>
+        <p:txBody>
+          <a:bodyPr wrap="square"/>
+          <a:lstStyle/>
+          <a:p>
+            <a:r>
+              <a:t>Sketch architecture for a Developer Productivity scenario</a:t>
+            </a:r>
+          </a:p>
+          <a:p>
+            <a:r>
+              <a:t>On paper or in chat: coordinator + 3 subagents + tool scope per agent</a:t>
+            </a:r>
+          </a:p>
+          <a:p>
+            <a:r>
+              <a:t>What does each subagent specialize in?</a:t>
+            </a:r>
+          </a:p>
+          <a:p>
+            <a:r>
+              <a:t>What is each subagent's success criterion?</a:t>
+            </a:r>
+          </a:p>
+          <a:p>
+            <a:r>
+              <a:t>What tools does each one get? Cap each at ~5.</a:t>
             </a:r>
           </a:p>
         </p:txBody>
@@ -45693,65 +44958,56 @@
       <p:grpSpPr/>
       <p:sp>
         <p:nvSpPr>
-          <p:cNvPr id="2" name="Title 1"/>
-          <p:cNvSpPr>
-            <a:spLocks noGrp="1"/>
-          </p:cNvSpPr>
-          <p:nvPr>
-            <p:ph type="title"/>
+          <p:cNvPr id="2" name="Text Placeholder 1"/>
+          <p:cNvSpPr>
+            <a:spLocks noGrp="1"/>
+          </p:cNvSpPr>
+          <p:nvPr>
+            <p:ph type="body" idx="13" sz="quarter"/>
+          </p:nvPr>
+        </p:nvSpPr>
+        <p:spPr/>
+        <p:txBody>
+          <a:bodyPr wrap="square"/>
+          <a:lstStyle/>
+          <a:p>
+            <a:r>
+              <a:t>Segment 1 takeaways</a:t>
+            </a:r>
+          </a:p>
+          <a:p/>
+          <a:p>
+            <a:r>
+              <a:t>Branch on stop_reason, never on natural-language signals</a:t>
+            </a:r>
+          </a:p>
+          <a:p>
+            <a:r>
+              <a:t>Coordinator + isolated subagents beats one giant context</a:t>
+            </a:r>
+          </a:p>
+          <a:p>
+            <a:r>
+              <a:t>Hooks turn 'should' into 'must' - the prompt advises, the hook enforces</a:t>
+            </a:r>
+          </a:p>
+        </p:txBody>
+      </p:sp>
+      <p:sp>
+        <p:nvSpPr>
+          <p:cNvPr id="3" name="Text Placeholder 2"/>
+          <p:cNvSpPr>
+            <a:spLocks noGrp="1"/>
+          </p:cNvSpPr>
+          <p:nvPr>
+            <p:ph type="body" idx="14" sz="quarter"/>
           </p:nvPr>
         </p:nvSpPr>
         <p:spPr/>
         <p:txBody>
           <a:bodyPr/>
           <a:lstStyle/>
-          <a:p>
-            <a:r>
-              <a:t>Two domains, one segment</a:t>
-            </a:r>
-          </a:p>
-        </p:txBody>
-      </p:sp>
-      <p:sp>
-        <p:nvSpPr>
-          <p:cNvPr id="3" name="Content Placeholder 2"/>
-          <p:cNvSpPr>
-            <a:spLocks noGrp="1"/>
-          </p:cNvSpPr>
-          <p:nvPr>
-            <p:ph idx="1"/>
-          </p:nvPr>
-        </p:nvSpPr>
-        <p:spPr/>
-        <p:txBody>
-          <a:bodyPr wrap="square"/>
-          <a:lstStyle/>
-          <a:p>
-            <a:r>
-              <a:t>Domain 2 - Tool Design and MCP Integration (18%)</a:t>
-            </a:r>
-          </a:p>
-          <a:p>
-            <a:r>
-              <a:t>Domain 3 - Claude Code Configuration and Workflows (20%)</a:t>
-            </a:r>
-          </a:p>
-          <a:p>
-            <a:r>
-              <a:t>Combined = 38% of the cert, the biggest single chunk</a:t>
-            </a:r>
-          </a:p>
           <a:p/>
-          <a:p>
-            <a:r>
-              <a:t>Why combined? Claude Code IS the primary MCP-consuming surface</a:t>
-            </a:r>
-          </a:p>
-          <a:p>
-            <a:r>
-              <a:t>You cannot teach one without the other in production</a:t>
-            </a:r>
-          </a:p>
         </p:txBody>
       </p:sp>
     </p:spTree>
@@ -45788,49 +45044,7 @@
           <a:lstStyle/>
           <a:p>
             <a:r>
-              <a:t>Tool definitions - name + description + input_schema</a:t>
-            </a:r>
-          </a:p>
-        </p:txBody>
-      </p:sp>
-      <p:sp>
-        <p:nvSpPr>
-          <p:cNvPr id="3" name="Content Placeholder 2"/>
-          <p:cNvSpPr>
-            <a:spLocks noGrp="1"/>
-          </p:cNvSpPr>
-          <p:nvPr>
-            <p:ph idx="1"/>
-          </p:nvPr>
-        </p:nvSpPr>
-        <p:spPr/>
-        <p:txBody>
-          <a:bodyPr wrap="square"/>
-          <a:lstStyle/>
-          <a:p>
-            <a:r>
-              <a:t>name        - how the model invokes the tool</a:t>
-            </a:r>
-          </a:p>
-          <a:p>
-            <a:r>
-              <a:t>description - STRONGLY recommended, drives tool selection</a:t>
-            </a:r>
-          </a:p>
-          <a:p>
-            <a:r>
-              <a:t>input_schema - JSON Schema draft 2020-12 (type, properties, required)</a:t>
-            </a:r>
-          </a:p>
-          <a:p>
-            <a:r>
-              <a:t>Optional: cache_control ephemeral (5m / 1h), strict: true</a:t>
-            </a:r>
-          </a:p>
-          <a:p/>
-          <a:p>
-            <a:r>
-              <a:t>Tool DESCRIPTIONS do the work, not tool NAMES</a:t>
+              <a:t>Segment 2: Tool Design, Integration, Claude Code</a:t>
             </a:r>
           </a:p>
         </p:txBody>
@@ -45869,7 +45083,7 @@
           <a:lstStyle/>
           <a:p>
             <a:r>
-              <a:t>Structured tool errors</a:t>
+              <a:t>Two domains, one segment</a:t>
             </a:r>
           </a:p>
         </p:txBody>
@@ -45890,28 +45104,28 @@
           <a:lstStyle/>
           <a:p>
             <a:r>
-              <a:t>Anti-pattern: raise exceptions from tool implementations</a:t>
-            </a:r>
-          </a:p>
-          <a:p>
-            <a:r>
-              <a:t>Anti-pattern: return empty strings on failure</a:t>
-            </a:r>
-          </a:p>
-          <a:p>
-            <a:r>
-              <a:t>Pattern: return tool_result with is_error: true</a:t>
-            </a:r>
-          </a:p>
-          <a:p>
-            <a:r>
-              <a:t>Add structured fields: errorCategory, isRetryable</a:t>
+              <a:t>Domain 2 - Tool Design and MCP Integration (18%)</a:t>
+            </a:r>
+          </a:p>
+          <a:p>
+            <a:r>
+              <a:t>Domain 3 - Claude Code Configuration and Workflows (20%)</a:t>
+            </a:r>
+          </a:p>
+          <a:p>
+            <a:r>
+              <a:t>Combined = 38% of the cert, the biggest single chunk</a:t>
             </a:r>
           </a:p>
           <a:p/>
           <a:p>
             <a:r>
-              <a:t>The model can then DECIDE: retry, fall back, or escalate</a:t>
+              <a:t>Why combined? Claude Code IS the primary MCP-consuming surface</a:t>
+            </a:r>
+          </a:p>
+          <a:p>
+            <a:r>
+              <a:t>You cannot teach one without the other in production</a:t>
             </a:r>
           </a:p>
         </p:txBody>
@@ -45950,19 +45164,19 @@
           <a:lstStyle/>
           <a:p>
             <a:r>
-              <a:t>tool_choice modes</a:t>
-            </a:r>
-          </a:p>
-        </p:txBody>
-      </p:sp>
-      <p:sp>
-        <p:nvSpPr>
-          <p:cNvPr id="3" name="Text Placeholder 2"/>
-          <p:cNvSpPr>
-            <a:spLocks noGrp="1"/>
-          </p:cNvSpPr>
-          <p:nvPr>
-            <p:ph type="body" idx="10" sz="quarter"/>
+              <a:t>Tool definitions - name + description + input_schema</a:t>
+            </a:r>
+          </a:p>
+        </p:txBody>
+      </p:sp>
+      <p:sp>
+        <p:nvSpPr>
+          <p:cNvPr id="3" name="Content Placeholder 2"/>
+          <p:cNvSpPr>
+            <a:spLocks noGrp="1"/>
+          </p:cNvSpPr>
+          <p:nvPr>
+            <p:ph idx="1"/>
           </p:nvPr>
         </p:nvSpPr>
         <p:spPr/>
@@ -45971,95 +45185,30 @@
           <a:lstStyle/>
           <a:p>
             <a:r>
-              <a:t>auto</a:t>
-            </a:r>
-          </a:p>
-          <a:p>
-            <a:r>
-              <a:t>Model decides whether to call a tool. Default. May answer in prose. Pick when the model's judgment is the right call.</a:t>
-            </a:r>
-          </a:p>
-          <a:p>
-            <a:r>
-              <a:t>any</a:t>
-            </a:r>
-          </a:p>
-          <a:p>
-            <a:r>
-              <a:t>Model MUST call some tool, model picks which. Use when action is required.</a:t>
-            </a:r>
-          </a:p>
-          <a:p>
-            <a:r>
-              <a:t>tool</a:t>
-            </a:r>
-          </a:p>
-          <a:p>
-            <a:r>
-              <a:t>Model MUST call THIS specific tool. The structured-output cheat code. {type: tool, name: extract_X}.</a:t>
-            </a:r>
-          </a:p>
-          <a:p>
-            <a:r>
-              <a:t>none</a:t>
-            </a:r>
-          </a:p>
-          <a:p>
-            <a:r>
-              <a:t>Tools registered but model CANNOT call them. 'Explain, don't act' turns.</a:t>
-            </a:r>
-          </a:p>
-        </p:txBody>
-      </p:sp>
-      <p:sp>
-        <p:nvSpPr>
-          <p:cNvPr id="4" name="Text Placeholder 3"/>
-          <p:cNvSpPr>
-            <a:spLocks noGrp="1"/>
-          </p:cNvSpPr>
-          <p:nvPr>
-            <p:ph type="body" idx="15" sz="quarter"/>
-          </p:nvPr>
-        </p:nvSpPr>
-        <p:spPr/>
-        <p:txBody>
-          <a:bodyPr/>
-          <a:lstStyle/>
+              <a:t>name        - how the model invokes the tool</a:t>
+            </a:r>
+          </a:p>
+          <a:p>
+            <a:r>
+              <a:t>description - STRONGLY recommended, drives tool selection</a:t>
+            </a:r>
+          </a:p>
+          <a:p>
+            <a:r>
+              <a:t>input_schema - JSON Schema draft 2020-12 (type, properties, required)</a:t>
+            </a:r>
+          </a:p>
+          <a:p>
+            <a:r>
+              <a:t>Optional: cache_control ephemeral (5m / 1h), strict: true</a:t>
+            </a:r>
+          </a:p>
           <a:p/>
-        </p:txBody>
-      </p:sp>
-      <p:sp>
-        <p:nvSpPr>
-          <p:cNvPr id="5" name="Text Placeholder 4"/>
-          <p:cNvSpPr>
-            <a:spLocks noGrp="1"/>
-          </p:cNvSpPr>
-          <p:nvPr>
-            <p:ph type="body" idx="16" sz="quarter"/>
-          </p:nvPr>
-        </p:nvSpPr>
-        <p:spPr/>
-        <p:txBody>
-          <a:bodyPr/>
-          <a:lstStyle/>
-          <a:p/>
-        </p:txBody>
-      </p:sp>
-      <p:sp>
-        <p:nvSpPr>
-          <p:cNvPr id="6" name="Text Placeholder 5"/>
-          <p:cNvSpPr>
-            <a:spLocks noGrp="1"/>
-          </p:cNvSpPr>
-          <p:nvPr>
-            <p:ph type="body" idx="17" sz="quarter"/>
-          </p:nvPr>
-        </p:nvSpPr>
-        <p:spPr/>
-        <p:txBody>
-          <a:bodyPr/>
-          <a:lstStyle/>
-          <a:p/>
+          <a:p>
+            <a:r>
+              <a:t>Tool DESCRIPTIONS do the work, not tool NAMES</a:t>
+            </a:r>
+          </a:p>
         </p:txBody>
       </p:sp>
     </p:spTree>
@@ -46096,7 +45245,7 @@
           <a:lstStyle/>
           <a:p>
             <a:r>
-              <a:t>Cap agents at ~5 tools</a:t>
+              <a:t>Structured tool errors</a:t>
             </a:r>
           </a:p>
         </p:txBody>
@@ -46117,23 +45266,28 @@
           <a:lstStyle/>
           <a:p>
             <a:r>
-              <a:t>More tools = worse selection accuracy (well-documented effect)</a:t>
-            </a:r>
-          </a:p>
-          <a:p>
-            <a:r>
-              <a:t>Beyond 5: split into subagents with scoped tool sets</a:t>
-            </a:r>
-          </a:p>
-          <a:p>
-            <a:r>
-              <a:t>Specificity in descriptions beats quantity of tools</a:t>
+              <a:t>Anti-pattern: raise exceptions from tool implementations</a:t>
+            </a:r>
+          </a:p>
+          <a:p>
+            <a:r>
+              <a:t>Anti-pattern: return empty strings on failure</a:t>
+            </a:r>
+          </a:p>
+          <a:p>
+            <a:r>
+              <a:t>Pattern: return tool_result with is_error: true</a:t>
+            </a:r>
+          </a:p>
+          <a:p>
+            <a:r>
+              <a:t>Add structured fields: errorCategory, isRetryable</a:t>
             </a:r>
           </a:p>
           <a:p/>
           <a:p>
             <a:r>
-              <a:t>Anti-pattern: dump 30 tools into one agent because 'flexibility'</a:t>
+              <a:t>The model can then DECIDE: retry, fall back, or escalate</a:t>
             </a:r>
           </a:p>
         </p:txBody>
@@ -46172,19 +45326,19 @@
           <a:lstStyle/>
           <a:p>
             <a:r>
-              <a:t>MCP server config - .mcp.json</a:t>
-            </a:r>
-          </a:p>
-        </p:txBody>
-      </p:sp>
-      <p:sp>
-        <p:nvSpPr>
-          <p:cNvPr id="3" name="Content Placeholder 2"/>
-          <p:cNvSpPr>
-            <a:spLocks noGrp="1"/>
-          </p:cNvSpPr>
-          <p:nvPr>
-            <p:ph idx="1"/>
+              <a:t>tool_choice modes</a:t>
+            </a:r>
+          </a:p>
+        </p:txBody>
+      </p:sp>
+      <p:sp>
+        <p:nvSpPr>
+          <p:cNvPr id="3" name="Text Placeholder 2"/>
+          <p:cNvSpPr>
+            <a:spLocks noGrp="1"/>
+          </p:cNvSpPr>
+          <p:nvPr>
+            <p:ph type="body" idx="10" sz="quarter"/>
           </p:nvPr>
         </p:nvSpPr>
         <p:spPr/>
@@ -46193,30 +45347,95 @@
           <a:lstStyle/>
           <a:p>
             <a:r>
-              <a:t>Three transports: stdio, SSE, HTTP</a:t>
-            </a:r>
-          </a:p>
-          <a:p>
-            <a:r>
-              <a:t>stdio: command + args + env (local subprocess)</a:t>
-            </a:r>
-          </a:p>
-          <a:p>
-            <a:r>
-              <a:t>SSE / HTTP: type + url + headers (remote)</a:t>
-            </a:r>
-          </a:p>
-          <a:p>
-            <a:r>
-              <a:t>${ENV_VAR} expansion works in env, args, AND headers</a:t>
-            </a:r>
-          </a:p>
+              <a:t>auto</a:t>
+            </a:r>
+          </a:p>
+          <a:p>
+            <a:r>
+              <a:t>Model decides whether to call a tool. Default. May answer in prose. Pick when the model's judgment is the right call.</a:t>
+            </a:r>
+          </a:p>
+          <a:p>
+            <a:r>
+              <a:t>any</a:t>
+            </a:r>
+          </a:p>
+          <a:p>
+            <a:r>
+              <a:t>Model MUST call some tool, model picks which. Use when action is required.</a:t>
+            </a:r>
+          </a:p>
+          <a:p>
+            <a:r>
+              <a:t>tool</a:t>
+            </a:r>
+          </a:p>
+          <a:p>
+            <a:r>
+              <a:t>Model MUST call THIS specific tool. The structured-output cheat code. {type: tool, name: extract_X}.</a:t>
+            </a:r>
+          </a:p>
+          <a:p>
+            <a:r>
+              <a:t>none</a:t>
+            </a:r>
+          </a:p>
+          <a:p>
+            <a:r>
+              <a:t>Tools registered but model CANNOT call them. 'Explain, don't act' turns.</a:t>
+            </a:r>
+          </a:p>
+        </p:txBody>
+      </p:sp>
+      <p:sp>
+        <p:nvSpPr>
+          <p:cNvPr id="4" name="Text Placeholder 3"/>
+          <p:cNvSpPr>
+            <a:spLocks noGrp="1"/>
+          </p:cNvSpPr>
+          <p:nvPr>
+            <p:ph type="body" idx="15" sz="quarter"/>
+          </p:nvPr>
+        </p:nvSpPr>
+        <p:spPr/>
+        <p:txBody>
+          <a:bodyPr/>
+          <a:lstStyle/>
           <a:p/>
-          <a:p>
-            <a:r>
-              <a:t>Project scope: ./.mcp.json    User scope: ~/.claude.json</a:t>
-            </a:r>
-          </a:p>
+        </p:txBody>
+      </p:sp>
+      <p:sp>
+        <p:nvSpPr>
+          <p:cNvPr id="5" name="Text Placeholder 4"/>
+          <p:cNvSpPr>
+            <a:spLocks noGrp="1"/>
+          </p:cNvSpPr>
+          <p:nvPr>
+            <p:ph type="body" idx="16" sz="quarter"/>
+          </p:nvPr>
+        </p:nvSpPr>
+        <p:spPr/>
+        <p:txBody>
+          <a:bodyPr/>
+          <a:lstStyle/>
+          <a:p/>
+        </p:txBody>
+      </p:sp>
+      <p:sp>
+        <p:nvSpPr>
+          <p:cNvPr id="6" name="Text Placeholder 5"/>
+          <p:cNvSpPr>
+            <a:spLocks noGrp="1"/>
+          </p:cNvSpPr>
+          <p:nvPr>
+            <p:ph type="body" idx="17" sz="quarter"/>
+          </p:nvPr>
+        </p:nvSpPr>
+        <p:spPr/>
+        <p:txBody>
+          <a:bodyPr/>
+          <a:lstStyle/>
+          <a:p/>
         </p:txBody>
       </p:sp>
     </p:spTree>
@@ -46325,12 +45544,33 @@
       <p:grpSpPr/>
       <p:sp>
         <p:nvSpPr>
-          <p:cNvPr id="2" name="Text Placeholder 1"/>
-          <p:cNvSpPr>
-            <a:spLocks noGrp="1"/>
-          </p:cNvSpPr>
-          <p:nvPr>
-            <p:ph type="body" idx="14" sz="quarter"/>
+          <p:cNvPr id="2" name="Title 1"/>
+          <p:cNvSpPr>
+            <a:spLocks noGrp="1"/>
+          </p:cNvSpPr>
+          <p:nvPr>
+            <p:ph type="title"/>
+          </p:nvPr>
+        </p:nvSpPr>
+        <p:spPr/>
+        <p:txBody>
+          <a:bodyPr/>
+          <a:lstStyle/>
+          <a:p>
+            <a:r>
+              <a:t>Cap agents at ~5 tools</a:t>
+            </a:r>
+          </a:p>
+        </p:txBody>
+      </p:sp>
+      <p:sp>
+        <p:nvSpPr>
+          <p:cNvPr id="3" name="Content Placeholder 2"/>
+          <p:cNvSpPr>
+            <a:spLocks noGrp="1"/>
+          </p:cNvSpPr>
+          <p:nvPr>
+            <p:ph idx="1"/>
           </p:nvPr>
         </p:nvSpPr>
         <p:spPr/>
@@ -46339,28 +45579,23 @@
           <a:lstStyle/>
           <a:p>
             <a:r>
-              <a:t>Demo A - MCP config walkthrough (10 min)</a:t>
+              <a:t>More tools = worse selection accuracy (well-documented effect)</a:t>
+            </a:r>
+          </a:p>
+          <a:p>
+            <a:r>
+              <a:t>Beyond 5: split into subagents with scoped tool sets</a:t>
+            </a:r>
+          </a:p>
+          <a:p>
+            <a:r>
+              <a:t>Specificity in descriptions beats quantity of tools</a:t>
             </a:r>
           </a:p>
           <a:p/>
           <a:p>
             <a:r>
-              <a:t>Open C:/github/claude-architect/.mcp.json in VS Code</a:t>
-            </a:r>
-          </a:p>
-          <a:p>
-            <a:r>
-              <a:t>Walk server-by-server: filesystem (stdio), github (stdio + ${GITHUB_TOKEN})</a:t>
-            </a:r>
-          </a:p>
-          <a:p>
-            <a:r>
-              <a:t>Show context7 (HTTP + header), internal-knowledge-base (SSE + bearer)</a:t>
-            </a:r>
-          </a:p>
-          <a:p>
-            <a:r>
-              <a:t>Show what happens when GITHUB_TOKEN is unset</a:t>
+              <a:t>Anti-pattern: dump 30 tools into one agent because 'flexibility'</a:t>
             </a:r>
           </a:p>
         </p:txBody>
@@ -46383,69 +45618,30 @@
         <p:nvPr/>
       </p:nvGrpSpPr>
       <p:grpSpPr/>
-      <p:sp>
-        <p:nvSpPr>
-          <p:cNvPr id="2" name="Title 1"/>
-          <p:cNvSpPr>
-            <a:spLocks noGrp="1"/>
-          </p:cNvSpPr>
-          <p:nvPr>
-            <p:ph type="title"/>
-          </p:nvPr>
-        </p:nvSpPr>
-        <p:spPr/>
-        <p:txBody>
-          <a:bodyPr/>
-          <a:lstStyle/>
-          <a:p>
-            <a:r>
-              <a:t>CLAUDE.md hierarchy</a:t>
-            </a:r>
-          </a:p>
-        </p:txBody>
-      </p:sp>
-      <p:sp>
-        <p:nvSpPr>
-          <p:cNvPr id="3" name="Content Placeholder 2"/>
-          <p:cNvSpPr>
-            <a:spLocks noGrp="1"/>
-          </p:cNvSpPr>
-          <p:nvPr>
-            <p:ph idx="1"/>
-          </p:nvPr>
-        </p:nvSpPr>
-        <p:spPr/>
-        <p:txBody>
-          <a:bodyPr wrap="square"/>
-          <a:lstStyle/>
-          <a:p>
-            <a:r>
-              <a:t>User     ~/.claude/CLAUDE.md     - your machine, every project</a:t>
-            </a:r>
-          </a:p>
-          <a:p>
-            <a:r>
-              <a:t>Project  ./CLAUDE.md             - team conventions, in git</a:t>
-            </a:r>
-          </a:p>
-          <a:p>
-            <a:r>
-              <a:t>Subtree  ./&lt;subdir&gt;/CLAUDE.md    - loads on demand when files in subdir are read</a:t>
-            </a:r>
-          </a:p>
-          <a:p>
-            <a:r>
-              <a:t>Local    ./CLAUDE.local.md       - gitignored personal override</a:t>
-            </a:r>
-          </a:p>
-          <a:p/>
-          <a:p>
-            <a:r>
-              <a:t>Agent SDK: settingSources [user, project] loads both</a:t>
-            </a:r>
-          </a:p>
-        </p:txBody>
-      </p:sp>
+      <p:pic>
+        <p:nvPicPr>
+          <p:cNvPr id="2" name="Picture 1" descr="04-mcp-transports.png"/>
+          <p:cNvPicPr>
+            <a:picLocks noChangeAspect="1"/>
+          </p:cNvPicPr>
+          <p:nvPr/>
+        </p:nvPicPr>
+        <p:blipFill>
+          <a:blip r:embed="rId2"/>
+          <a:stretch>
+            <a:fillRect/>
+          </a:stretch>
+        </p:blipFill>
+        <p:spPr>
+          <a:xfrm>
+            <a:off x="0" y="0"/>
+            <a:ext cx="12192000" cy="6858000"/>
+          </a:xfrm>
+          <a:prstGeom prst="rect">
+            <a:avLst/>
+          </a:prstGeom>
+        </p:spPr>
+      </p:pic>
     </p:spTree>
   </p:cSld>
   <p:clrMapOvr>
@@ -46480,7 +45676,7 @@
           <a:lstStyle/>
           <a:p>
             <a:r>
-              <a:t>Plan mode vs. headless mode</a:t>
+              <a:t>MCP server config - .mcp.json</a:t>
             </a:r>
           </a:p>
         </p:txBody>
@@ -46501,28 +45697,28 @@
           <a:lstStyle/>
           <a:p>
             <a:r>
-              <a:t>Plan mode   - interactive, proposes plan, waits for approval (default)</a:t>
-            </a:r>
-          </a:p>
-          <a:p>
-            <a:r>
-              <a:t>Headless    - claude -p 'prompt' - non-interactive, pipe-friendly</a:t>
-            </a:r>
-          </a:p>
-          <a:p>
-            <a:r>
-              <a:t>            - --output-format json|stream-json for parsing</a:t>
-            </a:r>
-          </a:p>
-          <a:p>
-            <a:r>
-              <a:t>            - --allowed-tools 'Read,Edit,Bash' to scope</a:t>
+              <a:t>Three transports: stdio, SSE, HTTP</a:t>
+            </a:r>
+          </a:p>
+          <a:p>
+            <a:r>
+              <a:t>stdio: command + args + env (local subprocess)</a:t>
+            </a:r>
+          </a:p>
+          <a:p>
+            <a:r>
+              <a:t>SSE / HTTP: type + url + headers (remote)</a:t>
+            </a:r>
+          </a:p>
+          <a:p>
+            <a:r>
+              <a:t>${ENV_VAR} expansion works in env, args, AND headers</a:t>
             </a:r>
           </a:p>
           <a:p/>
           <a:p>
             <a:r>
-              <a:t>Headless is THE CI/CD answer - pre-commit hooks, PR review, release notes</a:t>
+              <a:t>Project scope: ./.mcp.json    User scope: ~/.claude.json</a:t>
             </a:r>
           </a:p>
         </p:txBody>
@@ -46561,28 +45757,28 @@
           <a:lstStyle/>
           <a:p>
             <a:r>
-              <a:t>Demo B - CLAUDE.md hierarchy + claude -p (5 min)</a:t>
+              <a:t>Demo A - MCP config walkthrough (10 min)</a:t>
             </a:r>
           </a:p>
           <a:p/>
           <a:p>
             <a:r>
-              <a:t>Open this repo's own CLAUDE.md - walk the structure</a:t>
-            </a:r>
-          </a:p>
-          <a:p>
-            <a:r>
-              <a:t>Run: claude -p 'audit this CLAUDE.md against the documented conventions'</a:t>
-            </a:r>
-          </a:p>
-          <a:p>
-            <a:r>
-              <a:t>Show the headless output</a:t>
-            </a:r>
-          </a:p>
-          <a:p>
-            <a:r>
-              <a:t>Pipe a git log into it - get a release-notes draft in seconds</a:t>
+              <a:t>Open C:/github/claude-architect/.mcp.json in VS Code</a:t>
+            </a:r>
+          </a:p>
+          <a:p>
+            <a:r>
+              <a:t>Walk server-by-server: filesystem (stdio), github (stdio + ${GITHUB_TOKEN})</a:t>
+            </a:r>
+          </a:p>
+          <a:p>
+            <a:r>
+              <a:t>Show context7 (HTTP + header), internal-knowledge-base (SSE + bearer)</a:t>
+            </a:r>
+          </a:p>
+          <a:p>
+            <a:r>
+              <a:t>Show what happens when GITHUB_TOKEN is unset</a:t>
             </a:r>
           </a:p>
         </p:txBody>
@@ -46605,68 +45801,30 @@
         <p:nvPr/>
       </p:nvGrpSpPr>
       <p:grpSpPr/>
-      <p:sp>
-        <p:nvSpPr>
-          <p:cNvPr id="2" name="Title 1"/>
-          <p:cNvSpPr>
-            <a:spLocks noGrp="1"/>
-          </p:cNvSpPr>
-          <p:nvPr>
-            <p:ph type="title"/>
-          </p:nvPr>
-        </p:nvSpPr>
-        <p:spPr/>
-        <p:txBody>
-          <a:bodyPr/>
-          <a:lstStyle/>
-          <a:p>
-            <a:r>
-              <a:t>Exercise (5 min)</a:t>
-            </a:r>
-          </a:p>
-        </p:txBody>
-      </p:sp>
-      <p:sp>
-        <p:nvSpPr>
-          <p:cNvPr id="3" name="Content Placeholder 2"/>
-          <p:cNvSpPr>
-            <a:spLocks noGrp="1"/>
-          </p:cNvSpPr>
-          <p:nvPr>
-            <p:ph idx="1"/>
-          </p:nvPr>
-        </p:nvSpPr>
-        <p:spPr/>
-        <p:txBody>
-          <a:bodyPr wrap="square"/>
-          <a:lstStyle/>
-          <a:p>
-            <a:r>
-              <a:t>Design a CLAUDE.md hierarchy for a 3-team monorepo</a:t>
-            </a:r>
-          </a:p>
-          <a:p>
-            <a:r>
-              <a:t>Teams: backend (Go), frontend (React/TS), infra (Terraform)</a:t>
-            </a:r>
-          </a:p>
-          <a:p>
-            <a:r>
-              <a:t>Each team has different conventions</a:t>
-            </a:r>
-          </a:p>
-          <a:p>
-            <a:r>
-              <a:t>Where does each rule go? User, project, subtree, or .claude/rules?</a:t>
-            </a:r>
-          </a:p>
-          <a:p>
-            <a:r>
-              <a:t>What goes in .claude/rules/ with paths: globs?</a:t>
-            </a:r>
-          </a:p>
-        </p:txBody>
-      </p:sp>
+      <p:pic>
+        <p:nvPicPr>
+          <p:cNvPr id="2" name="Picture 1" descr="05-claude-md-hierarchy.png"/>
+          <p:cNvPicPr>
+            <a:picLocks noChangeAspect="1"/>
+          </p:cNvPicPr>
+          <p:nvPr/>
+        </p:nvPicPr>
+        <p:blipFill>
+          <a:blip r:embed="rId2"/>
+          <a:stretch>
+            <a:fillRect/>
+          </a:stretch>
+        </p:blipFill>
+        <p:spPr>
+          <a:xfrm>
+            <a:off x="0" y="0"/>
+            <a:ext cx="12192000" cy="6858000"/>
+          </a:xfrm>
+          <a:prstGeom prst="rect">
+            <a:avLst/>
+          </a:prstGeom>
+        </p:spPr>
+      </p:pic>
     </p:spTree>
   </p:cSld>
   <p:clrMapOvr>
@@ -46687,12 +45845,33 @@
       <p:grpSpPr/>
       <p:sp>
         <p:nvSpPr>
-          <p:cNvPr id="2" name="Text Placeholder 1"/>
-          <p:cNvSpPr>
-            <a:spLocks noGrp="1"/>
-          </p:cNvSpPr>
-          <p:nvPr>
-            <p:ph type="body" idx="13" sz="quarter"/>
+          <p:cNvPr id="2" name="Title 1"/>
+          <p:cNvSpPr>
+            <a:spLocks noGrp="1"/>
+          </p:cNvSpPr>
+          <p:nvPr>
+            <p:ph type="title"/>
+          </p:nvPr>
+        </p:nvSpPr>
+        <p:spPr/>
+        <p:txBody>
+          <a:bodyPr/>
+          <a:lstStyle/>
+          <a:p>
+            <a:r>
+              <a:t>CLAUDE.md hierarchy</a:t>
+            </a:r>
+          </a:p>
+        </p:txBody>
+      </p:sp>
+      <p:sp>
+        <p:nvSpPr>
+          <p:cNvPr id="3" name="Content Placeholder 2"/>
+          <p:cNvSpPr>
+            <a:spLocks noGrp="1"/>
+          </p:cNvSpPr>
+          <p:nvPr>
+            <p:ph idx="1"/>
           </p:nvPr>
         </p:nvSpPr>
         <p:spPr/>
@@ -46701,42 +45880,30 @@
           <a:lstStyle/>
           <a:p>
             <a:r>
-              <a:t>Segment 2 takeaways</a:t>
+              <a:t>User     ~/.claude/CLAUDE.md     - your machine, every project</a:t>
+            </a:r>
+          </a:p>
+          <a:p>
+            <a:r>
+              <a:t>Project  ./CLAUDE.md             - team conventions, in git</a:t>
+            </a:r>
+          </a:p>
+          <a:p>
+            <a:r>
+              <a:t>Subtree  ./&lt;subdir&gt;/CLAUDE.md    - loads on demand when files in subdir are read</a:t>
+            </a:r>
+          </a:p>
+          <a:p>
+            <a:r>
+              <a:t>Local    ./CLAUDE.local.md       - gitignored personal override</a:t>
             </a:r>
           </a:p>
           <a:p/>
           <a:p>
             <a:r>
-              <a:t>Descriptions, not names, drive tool selection</a:t>
-            </a:r>
-          </a:p>
-          <a:p>
-            <a:r>
-              <a:t>.mcp.json - three transports, ${ENV} expansion, secrets in env never in file</a:t>
-            </a:r>
-          </a:p>
-          <a:p>
-            <a:r>
-              <a:t>CLAUDE.md hierarchy is additive; claude -p is your CI/CD primitive</a:t>
-            </a:r>
-          </a:p>
-        </p:txBody>
-      </p:sp>
-      <p:sp>
-        <p:nvSpPr>
-          <p:cNvPr id="3" name="Text Placeholder 2"/>
-          <p:cNvSpPr>
-            <a:spLocks noGrp="1"/>
-          </p:cNvSpPr>
-          <p:nvPr>
-            <p:ph type="body" idx="14" sz="quarter"/>
-          </p:nvPr>
-        </p:nvSpPr>
-        <p:spPr/>
-        <p:txBody>
-          <a:bodyPr/>
-          <a:lstStyle/>
-          <a:p/>
+              <a:t>Agent SDK: settingSources [user, project] loads both</a:t>
+            </a:r>
+          </a:p>
         </p:txBody>
       </p:sp>
     </p:spTree>
@@ -46773,7 +45940,7 @@
           <a:lstStyle/>
           <a:p>
             <a:r>
-              <a:t>Three tiers tools come from</a:t>
+              <a:t>Plan mode vs. headless mode</a:t>
             </a:r>
           </a:p>
         </p:txBody>
@@ -46785,121 +45952,37 @@
             <a:spLocks noGrp="1"/>
           </p:cNvSpPr>
           <p:nvPr>
-            <p:ph idx="12" sz="quarter"/>
+            <p:ph idx="1"/>
           </p:nvPr>
         </p:nvSpPr>
         <p:spPr/>
         <p:txBody>
-          <a:bodyPr/>
+          <a:bodyPr wrap="square"/>
           <a:lstStyle/>
           <a:p>
             <a:r>
-              <a:t>Tier 1 - Server tools</a:t>
-            </a:r>
-          </a:p>
-        </p:txBody>
-      </p:sp>
-      <p:sp>
-        <p:nvSpPr>
-          <p:cNvPr id="4" name="Text Placeholder 3"/>
-          <p:cNvSpPr>
-            <a:spLocks noGrp="1"/>
-          </p:cNvSpPr>
-          <p:nvPr>
-            <p:ph type="body" idx="15" sz="quarter"/>
-          </p:nvPr>
-        </p:nvSpPr>
-        <p:spPr/>
-        <p:txBody>
-          <a:bodyPr/>
-          <a:lstStyle/>
-          <a:p>
-            <a:r>
-              <a:t>Anthropic hosts. You register by type (bash_20250124, code_execution_20250522, web_search_20250305). Model invokes, Anthropic executes server-side.</a:t>
-            </a:r>
-          </a:p>
-        </p:txBody>
-      </p:sp>
-      <p:sp>
-        <p:nvSpPr>
-          <p:cNvPr id="5" name="Content Placeholder 4"/>
-          <p:cNvSpPr>
-            <a:spLocks noGrp="1"/>
-          </p:cNvSpPr>
-          <p:nvPr>
-            <p:ph idx="16" sz="quarter"/>
-          </p:nvPr>
-        </p:nvSpPr>
-        <p:spPr/>
-        <p:txBody>
-          <a:bodyPr/>
-          <a:lstStyle/>
-          <a:p>
-            <a:r>
-              <a:t>Tier 2 - MCP tools</a:t>
-            </a:r>
-          </a:p>
-        </p:txBody>
-      </p:sp>
-      <p:sp>
-        <p:nvSpPr>
-          <p:cNvPr id="6" name="Text Placeholder 5"/>
-          <p:cNvSpPr>
-            <a:spLocks noGrp="1"/>
-          </p:cNvSpPr>
-          <p:nvPr>
-            <p:ph type="body" idx="17" sz="quarter"/>
-          </p:nvPr>
-        </p:nvSpPr>
-        <p:spPr/>
-        <p:txBody>
-          <a:bodyPr/>
-          <a:lstStyle/>
-          <a:p>
-            <a:r>
-              <a:t>You (or a vendor) host. Discovered at runtime via list_tools(). The pattern that scales by configuration, not code.</a:t>
-            </a:r>
-          </a:p>
-        </p:txBody>
-      </p:sp>
-      <p:sp>
-        <p:nvSpPr>
-          <p:cNvPr id="7" name="Content Placeholder 6"/>
-          <p:cNvSpPr>
-            <a:spLocks noGrp="1"/>
-          </p:cNvSpPr>
-          <p:nvPr>
-            <p:ph idx="18" sz="quarter"/>
-          </p:nvPr>
-        </p:nvSpPr>
-        <p:spPr/>
-        <p:txBody>
-          <a:bodyPr/>
-          <a:lstStyle/>
-          <a:p>
-            <a:r>
-              <a:t>Tier 3 - Harness tools</a:t>
-            </a:r>
-          </a:p>
-        </p:txBody>
-      </p:sp>
-      <p:sp>
-        <p:nvSpPr>
-          <p:cNvPr id="8" name="Text Placeholder 7"/>
-          <p:cNvSpPr>
-            <a:spLocks noGrp="1"/>
-          </p:cNvSpPr>
-          <p:nvPr>
-            <p:ph type="body" idx="19" sz="quarter"/>
-          </p:nvPr>
-        </p:nvSpPr>
-        <p:spPr/>
-        <p:txBody>
-          <a:bodyPr/>
-          <a:lstStyle/>
-          <a:p>
-            <a:r>
-              <a:t>Claude Code's Read, Edit, Bash, Grep. Harness-private TypeScript. NOT API-reachable. Same noun, different runtime.</a:t>
+              <a:t>Plan mode   - interactive, proposes plan, waits for approval (default)</a:t>
+            </a:r>
+          </a:p>
+          <a:p>
+            <a:r>
+              <a:t>Headless    - claude -p 'prompt' - non-interactive, pipe-friendly</a:t>
+            </a:r>
+          </a:p>
+          <a:p>
+            <a:r>
+              <a:t>            - --output-format json|stream-json for parsing</a:t>
+            </a:r>
+          </a:p>
+          <a:p>
+            <a:r>
+              <a:t>            - --allowed-tools 'Read,Edit,Bash' to scope</a:t>
+            </a:r>
+          </a:p>
+          <a:p/>
+          <a:p>
+            <a:r>
+              <a:t>Headless is THE CI/CD answer - pre-commit hooks, PR review, release notes</a:t>
             </a:r>
           </a:p>
         </p:txBody>
@@ -46929,7 +46012,7 @@
             <a:spLocks noGrp="1"/>
           </p:cNvSpPr>
           <p:nvPr>
-            <p:ph type="body" idx="10" sz="quarter"/>
+            <p:ph type="body" idx="14" sz="quarter"/>
           </p:nvPr>
         </p:nvSpPr>
         <p:spPr/>
@@ -46938,39 +46021,28 @@
           <a:lstStyle/>
           <a:p>
             <a:r>
-              <a:t>notebooks/segment-2-5-control-surfaces.ipynb</a:t>
+              <a:t>Demo B - CLAUDE.md hierarchy + claude -p (5 min)</a:t>
             </a:r>
           </a:p>
           <a:p/>
           <a:p>
             <a:r>
-              <a:t>Three tiers tools come from - server tools, MCP, Claude Code harness</a:t>
-            </a:r>
-          </a:p>
-          <a:p>
-            <a:r>
-              <a:t>All four tool_choice modes + disable_parallel_tool_use</a:t>
-            </a:r>
-          </a:p>
-          <a:p>
-            <a:r>
-              <a:t>stop_sequences + max_tokens as control levers + pause_turn + refusal</a:t>
-            </a:r>
-          </a:p>
-          <a:p>
-            <a:r>
-              <a:t>MCP list_tools runtime discovery</a:t>
-            </a:r>
-          </a:p>
-          <a:p>
-            <a:r>
-              <a:t>The live Claude Console asset surface - memory_stores, vaults, agents, sessions</a:t>
-            </a:r>
-          </a:p>
-          <a:p/>
-          <a:p>
-            <a:r>
-              <a:t>Highest exam-objective density in the repo. Walk it for CCA-F prep.</a:t>
+              <a:t>Open this repo's own CLAUDE.md - walk the structure</a:t>
+            </a:r>
+          </a:p>
+          <a:p>
+            <a:r>
+              <a:t>Run: claude -p 'audit this CLAUDE.md against the documented conventions'</a:t>
+            </a:r>
+          </a:p>
+          <a:p>
+            <a:r>
+              <a:t>Show the headless output</a:t>
+            </a:r>
+          </a:p>
+          <a:p>
+            <a:r>
+              <a:t>Pipe a git log into it - get a release-notes draft in seconds</a:t>
             </a:r>
           </a:p>
         </p:txBody>
@@ -47009,7 +46081,48 @@
           <a:lstStyle/>
           <a:p>
             <a:r>
-              <a:t>Segment 3: Structured Output and Reliability</a:t>
+              <a:t>Exercise (5 min)</a:t>
+            </a:r>
+          </a:p>
+        </p:txBody>
+      </p:sp>
+      <p:sp>
+        <p:nvSpPr>
+          <p:cNvPr id="3" name="Content Placeholder 2"/>
+          <p:cNvSpPr>
+            <a:spLocks noGrp="1"/>
+          </p:cNvSpPr>
+          <p:nvPr>
+            <p:ph idx="1"/>
+          </p:nvPr>
+        </p:nvSpPr>
+        <p:spPr/>
+        <p:txBody>
+          <a:bodyPr wrap="square"/>
+          <a:lstStyle/>
+          <a:p>
+            <a:r>
+              <a:t>Design a CLAUDE.md hierarchy for a 3-team monorepo</a:t>
+            </a:r>
+          </a:p>
+          <a:p>
+            <a:r>
+              <a:t>Teams: backend (Go), frontend (React/TS), infra (Terraform)</a:t>
+            </a:r>
+          </a:p>
+          <a:p>
+            <a:r>
+              <a:t>Each team has different conventions</a:t>
+            </a:r>
+          </a:p>
+          <a:p>
+            <a:r>
+              <a:t>Where does each rule go? User, project, subtree, or .claude/rules?</a:t>
+            </a:r>
+          </a:p>
+          <a:p>
+            <a:r>
+              <a:t>What goes in .claude/rules/ with paths: globs?</a:t>
             </a:r>
           </a:p>
         </p:txBody>
@@ -47034,65 +46147,56 @@
       <p:grpSpPr/>
       <p:sp>
         <p:nvSpPr>
-          <p:cNvPr id="2" name="Title 1"/>
-          <p:cNvSpPr>
-            <a:spLocks noGrp="1"/>
-          </p:cNvSpPr>
-          <p:nvPr>
-            <p:ph type="title"/>
+          <p:cNvPr id="2" name="Text Placeholder 1"/>
+          <p:cNvSpPr>
+            <a:spLocks noGrp="1"/>
+          </p:cNvSpPr>
+          <p:nvPr>
+            <p:ph type="body" idx="13" sz="quarter"/>
+          </p:nvPr>
+        </p:nvSpPr>
+        <p:spPr/>
+        <p:txBody>
+          <a:bodyPr wrap="square"/>
+          <a:lstStyle/>
+          <a:p>
+            <a:r>
+              <a:t>Segment 2 takeaways</a:t>
+            </a:r>
+          </a:p>
+          <a:p/>
+          <a:p>
+            <a:r>
+              <a:t>Descriptions, not names, drive tool selection</a:t>
+            </a:r>
+          </a:p>
+          <a:p>
+            <a:r>
+              <a:t>.mcp.json - three transports, ${ENV} expansion, secrets in env never in file</a:t>
+            </a:r>
+          </a:p>
+          <a:p>
+            <a:r>
+              <a:t>CLAUDE.md hierarchy is additive; claude -p is your CI/CD primitive</a:t>
+            </a:r>
+          </a:p>
+        </p:txBody>
+      </p:sp>
+      <p:sp>
+        <p:nvSpPr>
+          <p:cNvPr id="3" name="Text Placeholder 2"/>
+          <p:cNvSpPr>
+            <a:spLocks noGrp="1"/>
+          </p:cNvSpPr>
+          <p:nvPr>
+            <p:ph type="body" idx="14" sz="quarter"/>
           </p:nvPr>
         </p:nvSpPr>
         <p:spPr/>
         <p:txBody>
           <a:bodyPr/>
           <a:lstStyle/>
-          <a:p>
-            <a:r>
-              <a:t>Two domains, one segment (again)</a:t>
-            </a:r>
-          </a:p>
-        </p:txBody>
-      </p:sp>
-      <p:sp>
-        <p:nvSpPr>
-          <p:cNvPr id="3" name="Content Placeholder 2"/>
-          <p:cNvSpPr>
-            <a:spLocks noGrp="1"/>
-          </p:cNvSpPr>
-          <p:nvPr>
-            <p:ph idx="1"/>
-          </p:nvPr>
-        </p:nvSpPr>
-        <p:spPr/>
-        <p:txBody>
-          <a:bodyPr wrap="square"/>
-          <a:lstStyle/>
-          <a:p>
-            <a:r>
-              <a:t>Domain 4 - Prompt Engineering and Structured Output (20%)</a:t>
-            </a:r>
-          </a:p>
-          <a:p>
-            <a:r>
-              <a:t>Domain 5 - Context Management and Reliability (15%)</a:t>
-            </a:r>
-          </a:p>
-          <a:p>
-            <a:r>
-              <a:t>Combined = 35% of the cert</a:t>
-            </a:r>
-          </a:p>
           <a:p/>
-          <a:p>
-            <a:r>
-              <a:t>Why combined? Structured extraction without context discipline is fragile</a:t>
-            </a:r>
-          </a:p>
-          <a:p>
-            <a:r>
-              <a:t>Long sessions need context pinning; structured output needs validation retry</a:t>
-            </a:r>
-          </a:p>
         </p:txBody>
       </p:sp>
     </p:spTree>
@@ -47216,7 +46320,7 @@
           <a:lstStyle/>
           <a:p>
             <a:r>
-              <a:t>What you'll build</a:t>
+              <a:t>Three tiers tools come from</a:t>
             </a:r>
           </a:p>
         </p:txBody>
@@ -47228,37 +46332,121 @@
             <a:spLocks noGrp="1"/>
           </p:cNvSpPr>
           <p:nvPr>
-            <p:ph idx="1"/>
+            <p:ph idx="12" sz="quarter"/>
           </p:nvPr>
         </p:nvSpPr>
         <p:spPr/>
         <p:txBody>
-          <a:bodyPr wrap="square"/>
+          <a:bodyPr/>
           <a:lstStyle/>
           <a:p>
             <a:r>
-              <a:t>An invoice extractor with a Pydantic schema</a:t>
-            </a:r>
-          </a:p>
-          <a:p>
-            <a:r>
-              <a:t>tool_choice {type: tool, name: extract_invoice} forces valid JSON</a:t>
-            </a:r>
-          </a:p>
-          <a:p>
-            <a:r>
-              <a:t>Validation-retry loop handles malformed output (max_retries=1)</a:t>
-            </a:r>
-          </a:p>
-          <a:p>
-            <a:r>
-              <a:t>Three invoices: clean, missing field, ambiguous line item</a:t>
-            </a:r>
-          </a:p>
-          <a:p/>
-          <a:p>
-            <a:r>
-              <a:t>By the end of the segment: you can extract typed data from anything</a:t>
+              <a:t>Tier 1 - Server tools</a:t>
+            </a:r>
+          </a:p>
+        </p:txBody>
+      </p:sp>
+      <p:sp>
+        <p:nvSpPr>
+          <p:cNvPr id="4" name="Text Placeholder 3"/>
+          <p:cNvSpPr>
+            <a:spLocks noGrp="1"/>
+          </p:cNvSpPr>
+          <p:nvPr>
+            <p:ph type="body" idx="15" sz="quarter"/>
+          </p:nvPr>
+        </p:nvSpPr>
+        <p:spPr/>
+        <p:txBody>
+          <a:bodyPr/>
+          <a:lstStyle/>
+          <a:p>
+            <a:r>
+              <a:t>Anthropic hosts. You register by type (bash_20250124, code_execution_20250522, web_search_20250305). Model invokes, Anthropic executes server-side.</a:t>
+            </a:r>
+          </a:p>
+        </p:txBody>
+      </p:sp>
+      <p:sp>
+        <p:nvSpPr>
+          <p:cNvPr id="5" name="Content Placeholder 4"/>
+          <p:cNvSpPr>
+            <a:spLocks noGrp="1"/>
+          </p:cNvSpPr>
+          <p:nvPr>
+            <p:ph idx="16" sz="quarter"/>
+          </p:nvPr>
+        </p:nvSpPr>
+        <p:spPr/>
+        <p:txBody>
+          <a:bodyPr/>
+          <a:lstStyle/>
+          <a:p>
+            <a:r>
+              <a:t>Tier 2 - MCP tools</a:t>
+            </a:r>
+          </a:p>
+        </p:txBody>
+      </p:sp>
+      <p:sp>
+        <p:nvSpPr>
+          <p:cNvPr id="6" name="Text Placeholder 5"/>
+          <p:cNvSpPr>
+            <a:spLocks noGrp="1"/>
+          </p:cNvSpPr>
+          <p:nvPr>
+            <p:ph type="body" idx="17" sz="quarter"/>
+          </p:nvPr>
+        </p:nvSpPr>
+        <p:spPr/>
+        <p:txBody>
+          <a:bodyPr/>
+          <a:lstStyle/>
+          <a:p>
+            <a:r>
+              <a:t>You (or a vendor) host. Discovered at runtime via list_tools(). The pattern that scales by configuration, not code.</a:t>
+            </a:r>
+          </a:p>
+        </p:txBody>
+      </p:sp>
+      <p:sp>
+        <p:nvSpPr>
+          <p:cNvPr id="7" name="Content Placeholder 6"/>
+          <p:cNvSpPr>
+            <a:spLocks noGrp="1"/>
+          </p:cNvSpPr>
+          <p:nvPr>
+            <p:ph idx="18" sz="quarter"/>
+          </p:nvPr>
+        </p:nvSpPr>
+        <p:spPr/>
+        <p:txBody>
+          <a:bodyPr/>
+          <a:lstStyle/>
+          <a:p>
+            <a:r>
+              <a:t>Tier 3 - Harness tools</a:t>
+            </a:r>
+          </a:p>
+        </p:txBody>
+      </p:sp>
+      <p:sp>
+        <p:nvSpPr>
+          <p:cNvPr id="8" name="Text Placeholder 7"/>
+          <p:cNvSpPr>
+            <a:spLocks noGrp="1"/>
+          </p:cNvSpPr>
+          <p:nvPr>
+            <p:ph type="body" idx="19" sz="quarter"/>
+          </p:nvPr>
+        </p:nvSpPr>
+        <p:spPr/>
+        <p:txBody>
+          <a:bodyPr/>
+          <a:lstStyle/>
+          <a:p>
+            <a:r>
+              <a:t>Claude Code's Read, Edit, Bash, Grep. Harness-private TypeScript. NOT API-reachable. Same noun, different runtime.</a:t>
             </a:r>
           </a:p>
         </p:txBody>
@@ -47281,68 +46469,30 @@
         <p:nvPr/>
       </p:nvGrpSpPr>
       <p:grpSpPr/>
-      <p:sp>
-        <p:nvSpPr>
-          <p:cNvPr id="2" name="Title 1"/>
-          <p:cNvSpPr>
-            <a:spLocks noGrp="1"/>
-          </p:cNvSpPr>
-          <p:nvPr>
-            <p:ph type="title"/>
-          </p:nvPr>
-        </p:nvSpPr>
-        <p:spPr/>
-        <p:txBody>
-          <a:bodyPr/>
-          <a:lstStyle/>
-          <a:p>
-            <a:r>
-              <a:t>Precise prompts beat vague prompts</a:t>
-            </a:r>
-          </a:p>
-        </p:txBody>
-      </p:sp>
-      <p:sp>
-        <p:nvSpPr>
-          <p:cNvPr id="3" name="Content Placeholder 2"/>
-          <p:cNvSpPr>
-            <a:spLocks noGrp="1"/>
-          </p:cNvSpPr>
-          <p:nvPr>
-            <p:ph idx="1"/>
-          </p:nvPr>
-        </p:nvSpPr>
-        <p:spPr/>
-        <p:txBody>
-          <a:bodyPr wrap="square"/>
-          <a:lstStyle/>
-          <a:p>
-            <a:r>
-              <a:t>Be specific: format, edge cases, missing-data handling</a:t>
-            </a:r>
-          </a:p>
-          <a:p>
-            <a:r>
-              <a:t>Plausible hallucinations: model invents values for nullable fields</a:t>
-            </a:r>
-          </a:p>
-          <a:p>
-            <a:r>
-              <a:t>Fix: explicit 'return null if not directly stated' instruction</a:t>
-            </a:r>
-          </a:p>
-          <a:p>
-            <a:r>
-              <a:t>Inconsistent formats: 'cotton blend' vs 'Cotton/Polyester mix'</a:t>
-            </a:r>
-          </a:p>
-          <a:p>
-            <a:r>
-              <a:t>Fix: 2-3 few-shot examples, NOT lower temperature</a:t>
-            </a:r>
-          </a:p>
-        </p:txBody>
-      </p:sp>
+      <p:pic>
+        <p:nvPicPr>
+          <p:cNvPr id="2" name="Picture 1" descr="03-three-tier-tools.png"/>
+          <p:cNvPicPr>
+            <a:picLocks noChangeAspect="1"/>
+          </p:cNvPicPr>
+          <p:nvPr/>
+        </p:nvPicPr>
+        <p:blipFill>
+          <a:blip r:embed="rId2"/>
+          <a:stretch>
+            <a:fillRect/>
+          </a:stretch>
+        </p:blipFill>
+        <p:spPr>
+          <a:xfrm>
+            <a:off x="0" y="0"/>
+            <a:ext cx="12192000" cy="6858000"/>
+          </a:xfrm>
+          <a:prstGeom prst="rect">
+            <a:avLst/>
+          </a:prstGeom>
+        </p:spPr>
+      </p:pic>
     </p:spTree>
   </p:cSld>
   <p:clrMapOvr>
@@ -47363,33 +46513,12 @@
       <p:grpSpPr/>
       <p:sp>
         <p:nvSpPr>
-          <p:cNvPr id="2" name="Title 1"/>
-          <p:cNvSpPr>
-            <a:spLocks noGrp="1"/>
-          </p:cNvSpPr>
-          <p:nvPr>
-            <p:ph type="title"/>
-          </p:nvPr>
-        </p:nvSpPr>
-        <p:spPr/>
-        <p:txBody>
-          <a:bodyPr/>
-          <a:lstStyle/>
-          <a:p>
-            <a:r>
-              <a:t>JSON schema via tool use - the cheat code</a:t>
-            </a:r>
-          </a:p>
-        </p:txBody>
-      </p:sp>
-      <p:sp>
-        <p:nvSpPr>
-          <p:cNvPr id="3" name="Content Placeholder 2"/>
-          <p:cNvSpPr>
-            <a:spLocks noGrp="1"/>
-          </p:cNvSpPr>
-          <p:nvPr>
-            <p:ph idx="1"/>
+          <p:cNvPr id="2" name="Text Placeholder 1"/>
+          <p:cNvSpPr>
+            <a:spLocks noGrp="1"/>
+          </p:cNvSpPr>
+          <p:nvPr>
+            <p:ph type="body" idx="10" sz="quarter"/>
           </p:nvPr>
         </p:nvSpPr>
         <p:spPr/>
@@ -47398,27 +46527,39 @@
           <a:lstStyle/>
           <a:p>
             <a:r>
-              <a:t>1. Define a Pydantic model with your fields</a:t>
-            </a:r>
-          </a:p>
-          <a:p>
-            <a:r>
-              <a:t>2. Convert to JSON Schema (model.model_json_schema())</a:t>
-            </a:r>
-          </a:p>
-          <a:p>
-            <a:r>
-              <a:t>3. Register as a tool's input_schema</a:t>
-            </a:r>
-          </a:p>
-          <a:p>
-            <a:r>
-              <a:t>4. Set tool_choice {type: tool, name: &lt;your_schema&gt;}</a:t>
-            </a:r>
-          </a:p>
-          <a:p>
-            <a:r>
-              <a:t>5. block.input is now a typed dict matching the schema</a:t>
+              <a:t>notebooks/segment-2-5-control-surfaces.ipynb</a:t>
+            </a:r>
+          </a:p>
+          <a:p/>
+          <a:p>
+            <a:r>
+              <a:t>Three tiers tools come from - server tools, MCP, Claude Code harness</a:t>
+            </a:r>
+          </a:p>
+          <a:p>
+            <a:r>
+              <a:t>All four tool_choice modes + disable_parallel_tool_use</a:t>
+            </a:r>
+          </a:p>
+          <a:p>
+            <a:r>
+              <a:t>stop_sequences + max_tokens as control levers + pause_turn + refusal</a:t>
+            </a:r>
+          </a:p>
+          <a:p>
+            <a:r>
+              <a:t>MCP list_tools runtime discovery</a:t>
+            </a:r>
+          </a:p>
+          <a:p>
+            <a:r>
+              <a:t>The live Claude Console asset surface - memory_stores, vaults, agents, sessions</a:t>
+            </a:r>
+          </a:p>
+          <a:p/>
+          <a:p>
+            <a:r>
+              <a:t>Highest exam-objective density in the repo. Walk it for CCA-F prep.</a:t>
             </a:r>
           </a:p>
         </p:txBody>
@@ -47457,137 +46598,7 @@
           <a:lstStyle/>
           <a:p>
             <a:r>
-              <a:t>The forced-tool_choice pattern in code</a:t>
-            </a:r>
-          </a:p>
-        </p:txBody>
-      </p:sp>
-      <p:sp>
-        <p:nvSpPr>
-          <p:cNvPr id="3" name="Text Placeholder 2"/>
-          <p:cNvSpPr>
-            <a:spLocks noGrp="1"/>
-          </p:cNvSpPr>
-          <p:nvPr>
-            <p:ph type="body" idx="10" sz="quarter"/>
-          </p:nvPr>
-        </p:nvSpPr>
-        <p:spPr/>
-        <p:txBody>
-          <a:bodyPr wrap="square"/>
-          <a:lstStyle/>
-          <a:p>
-            <a:r>
-              <a:t>class Invoice(BaseModel):</a:t>
-            </a:r>
-          </a:p>
-          <a:p>
-            <a:r>
-              <a:t>    invoice_number: str</a:t>
-            </a:r>
-          </a:p>
-          <a:p>
-            <a:r>
-              <a:t>    vendor: str</a:t>
-            </a:r>
-          </a:p>
-          <a:p>
-            <a:r>
-              <a:t>    total: float</a:t>
-            </a:r>
-          </a:p>
-          <a:p>
-            <a:r>
-              <a:t>    po_number: Optional[str] = None</a:t>
-            </a:r>
-          </a:p>
-          <a:p/>
-          <a:p>
-            <a:r>
-              <a:t>EXTRACT_TOOL = {</a:t>
-            </a:r>
-          </a:p>
-          <a:p>
-            <a:r>
-              <a:t>    "name": "extract_invoice",</a:t>
-            </a:r>
-          </a:p>
-          <a:p>
-            <a:r>
-              <a:t>    "description": "Extract invoice fields. Do NOT invent values.",</a:t>
-            </a:r>
-          </a:p>
-          <a:p>
-            <a:r>
-              <a:t>    "input_schema": Invoice.model_json_schema(),</a:t>
-            </a:r>
-          </a:p>
-          <a:p>
-            <a:r>
-              <a:t>}</a:t>
-            </a:r>
-          </a:p>
-          <a:p/>
-          <a:p>
-            <a:r>
-              <a:t>resp = client.messages.create(</a:t>
-            </a:r>
-          </a:p>
-          <a:p>
-            <a:r>
-              <a:t>    model=MODEL,</a:t>
-            </a:r>
-          </a:p>
-          <a:p>
-            <a:r>
-              <a:t>    tools=[EXTRACT_TOOL],</a:t>
-            </a:r>
-          </a:p>
-          <a:p>
-            <a:r>
-              <a:t>    tool_choice={"type": "tool", "name": "extract_invoice"},</a:t>
-            </a:r>
-          </a:p>
-          <a:p>
-            <a:r>
-              <a:t>    messages=[{"role": "user", "content": raw_invoice_text}],</a:t>
-            </a:r>
-          </a:p>
-          <a:p>
-            <a:r>
-              <a:t>)</a:t>
-            </a:r>
-          </a:p>
-          <a:p/>
-          <a:p>
-            <a:r>
-              <a:t>tool_block = next(b for b in resp.content if b.type == "tool_use")</a:t>
-            </a:r>
-          </a:p>
-          <a:p>
-            <a:r>
-              <a:t>invoice = Invoice(**tool_block.input)   # validated, typed</a:t>
-            </a:r>
-          </a:p>
-        </p:txBody>
-      </p:sp>
-      <p:sp>
-        <p:nvSpPr>
-          <p:cNvPr id="4" name="Text Placeholder 3"/>
-          <p:cNvSpPr>
-            <a:spLocks noGrp="1"/>
-          </p:cNvSpPr>
-          <p:nvPr>
-            <p:ph type="body" idx="18" sz="quarter"/>
-          </p:nvPr>
-        </p:nvSpPr>
-        <p:spPr/>
-        <p:txBody>
-          <a:bodyPr/>
-          <a:lstStyle/>
-          <a:p>
-            <a:r>
-              <a:t>Three load-bearing lines. tool_choice={"type": "tool", "name": ...} forces the model to call that exact tool. block.input is a typed dict matching the schema. Invoice(**tool_block.input) is the validation gate. The full retry loop lives in segment-3-invoice-extractor.ipynb; this is the skeleton.</a:t>
+              <a:t>Segment 3: Structured Output and Reliability</a:t>
             </a:r>
           </a:p>
         </p:txBody>
@@ -47626,7 +46637,7 @@
           <a:lstStyle/>
           <a:p>
             <a:r>
-              <a:t>Validation + retry loops</a:t>
+              <a:t>Two domains, one segment (again)</a:t>
             </a:r>
           </a:p>
         </p:txBody>
@@ -47647,33 +46658,28 @@
           <a:lstStyle/>
           <a:p>
             <a:r>
-              <a:t>Effective: format errors, JSON parse failures, schema mismatches</a:t>
-            </a:r>
-          </a:p>
-          <a:p>
-            <a:r>
-              <a:t>    -&gt; append the error as a tool_result with is_error: true, retry</a:t>
-            </a:r>
-          </a:p>
-          <a:p>
-            <a:r>
-              <a:t>    -&gt; succeeds in 2-3 attempts</a:t>
+              <a:t>Domain 4 - Prompt Engineering and Structured Output (20%)</a:t>
+            </a:r>
+          </a:p>
+          <a:p>
+            <a:r>
+              <a:t>Domain 5 - Context Management and Reliability (15%)</a:t>
+            </a:r>
+          </a:p>
+          <a:p>
+            <a:r>
+              <a:t>Combined = 35% of the cert</a:t>
             </a:r>
           </a:p>
           <a:p/>
           <a:p>
             <a:r>
-              <a:t>INEFFECTIVE: knowledge gaps, ambiguous source data</a:t>
-            </a:r>
-          </a:p>
-          <a:p>
-            <a:r>
-              <a:t>    -&gt; retries DO NOT help</a:t>
-            </a:r>
-          </a:p>
-          <a:p>
-            <a:r>
-              <a:t>    -&gt; cap at 2-3, then escalate to human review</a:t>
+              <a:t>Why combined? Structured extraction without context discipline is fragile</a:t>
+            </a:r>
+          </a:p>
+          <a:p>
+            <a:r>
+              <a:t>Long sessions need context pinning; structured output needs validation retry</a:t>
             </a:r>
           </a:p>
         </p:txBody>
@@ -47712,7 +46718,7 @@
           <a:lstStyle/>
           <a:p>
             <a:r>
-              <a:t>Confidence-based routing</a:t>
+              <a:t>What you'll build</a:t>
             </a:r>
           </a:p>
         </p:txBody>
@@ -47733,23 +46739,28 @@
           <a:lstStyle/>
           <a:p>
             <a:r>
-              <a:t>Have the model output field-level confidence: high | medium | low</a:t>
-            </a:r>
-          </a:p>
-          <a:p>
-            <a:r>
-              <a:t>Route: high -&gt; automated, medium -&gt; spot-check, low -&gt; human</a:t>
+              <a:t>An invoice extractor with a Pydantic schema</a:t>
+            </a:r>
+          </a:p>
+          <a:p>
+            <a:r>
+              <a:t>tool_choice {type: tool, name: extract_invoice} forces valid JSON</a:t>
+            </a:r>
+          </a:p>
+          <a:p>
+            <a:r>
+              <a:t>Validation-retry loop handles malformed output (max_retries=1)</a:t>
+            </a:r>
+          </a:p>
+          <a:p>
+            <a:r>
+              <a:t>Three invoices: clean, missing field, ambiguous line item</a:t>
             </a:r>
           </a:p>
           <a:p/>
           <a:p>
             <a:r>
-              <a:t>CRITICAL: validate accuracy by document type AND field</a:t>
-            </a:r>
-          </a:p>
-          <a:p>
-            <a:r>
-              <a:t>Aggregate 95% accuracy can mask 60% accuracy on specific segments</a:t>
+              <a:t>By the end of the segment: you can extract typed data from anything</a:t>
             </a:r>
           </a:p>
         </p:txBody>
@@ -47774,12 +46785,33 @@
       <p:grpSpPr/>
       <p:sp>
         <p:nvSpPr>
-          <p:cNvPr id="2" name="Text Placeholder 1"/>
-          <p:cNvSpPr>
-            <a:spLocks noGrp="1"/>
-          </p:cNvSpPr>
-          <p:nvPr>
-            <p:ph type="body" idx="14" sz="quarter"/>
+          <p:cNvPr id="2" name="Title 1"/>
+          <p:cNvSpPr>
+            <a:spLocks noGrp="1"/>
+          </p:cNvSpPr>
+          <p:nvPr>
+            <p:ph type="title"/>
+          </p:nvPr>
+        </p:nvSpPr>
+        <p:spPr/>
+        <p:txBody>
+          <a:bodyPr/>
+          <a:lstStyle/>
+          <a:p>
+            <a:r>
+              <a:t>Precise prompts beat vague prompts</a:t>
+            </a:r>
+          </a:p>
+        </p:txBody>
+      </p:sp>
+      <p:sp>
+        <p:nvSpPr>
+          <p:cNvPr id="3" name="Content Placeholder 2"/>
+          <p:cNvSpPr>
+            <a:spLocks noGrp="1"/>
+          </p:cNvSpPr>
+          <p:nvPr>
+            <p:ph idx="1"/>
           </p:nvPr>
         </p:nvSpPr>
         <p:spPr/>
@@ -47788,33 +46820,27 @@
           <a:lstStyle/>
           <a:p>
             <a:r>
-              <a:t>Demo - invoice extractor live build (20 min)</a:t>
-            </a:r>
-          </a:p>
-          <a:p/>
-          <a:p>
-            <a:r>
-              <a:t>Open notebooks/segment-3-invoice-extractor.ipynb</a:t>
-            </a:r>
-          </a:p>
-          <a:p>
-            <a:r>
-              <a:t>Build the Pydantic schema, register as a tool</a:t>
-            </a:r>
-          </a:p>
-          <a:p>
-            <a:r>
-              <a:t>Force tool_choice = {type: tool, name: extract_invoice}</a:t>
-            </a:r>
-          </a:p>
-          <a:p>
-            <a:r>
-              <a:t>Run on 3 invoices: clean, missing PO, ambiguous total</a:t>
-            </a:r>
-          </a:p>
-          <a:p>
-            <a:r>
-              <a:t>Add validation-retry loop, watch it recover from a parse failure</a:t>
+              <a:t>Be specific: format, edge cases, missing-data handling</a:t>
+            </a:r>
+          </a:p>
+          <a:p>
+            <a:r>
+              <a:t>Plausible hallucinations: model invents values for nullable fields</a:t>
+            </a:r>
+          </a:p>
+          <a:p>
+            <a:r>
+              <a:t>Fix: explicit 'return null if not directly stated' instruction</a:t>
+            </a:r>
+          </a:p>
+          <a:p>
+            <a:r>
+              <a:t>Inconsistent formats: 'cotton blend' vs 'Cotton/Polyester mix'</a:t>
+            </a:r>
+          </a:p>
+          <a:p>
+            <a:r>
+              <a:t>Fix: 2-3 few-shot examples, NOT lower temperature</a:t>
             </a:r>
           </a:p>
         </p:txBody>
@@ -47853,7 +46879,7 @@
           <a:lstStyle/>
           <a:p>
             <a:r>
-              <a:t>Context preservation in long sessions</a:t>
+              <a:t>JSON schema via tool use - the cheat code</a:t>
             </a:r>
           </a:p>
         </p:txBody>
@@ -47874,28 +46900,27 @@
           <a:lstStyle/>
           <a:p>
             <a:r>
-              <a:t>Pin case-facts at the top of every turn</a:t>
-            </a:r>
-          </a:p>
-          <a:p>
-            <a:r>
-              <a:t>Summarize resolved turns into narrative, drop verbatim history</a:t>
-            </a:r>
-          </a:p>
-          <a:p>
-            <a:r>
-              <a:t>Prune verbose tool outputs - extract the fields you used, drop the rest</a:t>
-            </a:r>
-          </a:p>
-          <a:p>
-            <a:r>
-              <a:t>Application-side filtering, before the next turn</a:t>
-            </a:r>
-          </a:p>
-          <a:p/>
-          <a:p>
-            <a:r>
-              <a:t>How lawyers manage case files. Same discipline for long agent sessions.</a:t>
+              <a:t>1. Define a Pydantic model with your fields</a:t>
+            </a:r>
+          </a:p>
+          <a:p>
+            <a:r>
+              <a:t>2. Convert to JSON Schema (model.model_json_schema())</a:t>
+            </a:r>
+          </a:p>
+          <a:p>
+            <a:r>
+              <a:t>3. Register as a tool's input_schema</a:t>
+            </a:r>
+          </a:p>
+          <a:p>
+            <a:r>
+              <a:t>4. Set tool_choice {type: tool, name: &lt;your_schema&gt;}</a:t>
+            </a:r>
+          </a:p>
+          <a:p>
+            <a:r>
+              <a:t>5. block.input is now a typed dict matching the schema</a:t>
             </a:r>
           </a:p>
         </p:txBody>
@@ -47918,68 +46943,30 @@
         <p:nvPr/>
       </p:nvGrpSpPr>
       <p:grpSpPr/>
-      <p:sp>
-        <p:nvSpPr>
-          <p:cNvPr id="2" name="Title 1"/>
-          <p:cNvSpPr>
-            <a:spLocks noGrp="1"/>
-          </p:cNvSpPr>
-          <p:nvPr>
-            <p:ph type="title"/>
-          </p:nvPr>
-        </p:nvSpPr>
-        <p:spPr/>
-        <p:txBody>
-          <a:bodyPr/>
-          <a:lstStyle/>
-          <a:p>
-            <a:r>
-              <a:t>Escalation design</a:t>
-            </a:r>
-          </a:p>
-        </p:txBody>
-      </p:sp>
-      <p:sp>
-        <p:nvSpPr>
-          <p:cNvPr id="3" name="Content Placeholder 2"/>
-          <p:cNvSpPr>
-            <a:spLocks noGrp="1"/>
-          </p:cNvSpPr>
-          <p:nvPr>
-            <p:ph idx="1"/>
-          </p:nvPr>
-        </p:nvSpPr>
-        <p:spPr/>
-        <p:txBody>
-          <a:bodyPr wrap="square"/>
-          <a:lstStyle/>
-          <a:p>
-            <a:r>
-              <a:t>Honor explicit human requests IMMEDIATELY</a:t>
-            </a:r>
-          </a:p>
-          <a:p>
-            <a:r>
-              <a:t>    'I want a human NOW' = escalate, don't clarify, don't try one more tool</a:t>
-            </a:r>
-          </a:p>
-          <a:p>
-            <a:r>
-              <a:t>Pass STRUCTURED summary to the human queue, not the transcript</a:t>
-            </a:r>
-          </a:p>
-          <a:p>
-            <a:r>
-              <a:t>Never escalate on sentiment alone (frustration != complexity)</a:t>
-            </a:r>
-          </a:p>
-          <a:p>
-            <a:r>
-              <a:t>Confidence-based escalation: low confidence -&gt; human review</a:t>
-            </a:r>
-          </a:p>
-        </p:txBody>
-      </p:sp>
+      <p:pic>
+        <p:nvPicPr>
+          <p:cNvPr id="2" name="Picture 1" descr="06-forced-tool-choice.png"/>
+          <p:cNvPicPr>
+            <a:picLocks noChangeAspect="1"/>
+          </p:cNvPicPr>
+          <p:nvPr/>
+        </p:nvPicPr>
+        <p:blipFill>
+          <a:blip r:embed="rId2"/>
+          <a:stretch>
+            <a:fillRect/>
+          </a:stretch>
+        </p:blipFill>
+        <p:spPr>
+          <a:xfrm>
+            <a:off x="0" y="0"/>
+            <a:ext cx="12192000" cy="6858000"/>
+          </a:xfrm>
+          <a:prstGeom prst="rect">
+            <a:avLst/>
+          </a:prstGeom>
+        </p:spPr>
+      </p:pic>
     </p:spTree>
   </p:cSld>
   <p:clrMapOvr>
@@ -48014,19 +47001,19 @@
           <a:lstStyle/>
           <a:p>
             <a:r>
-              <a:t>Exercise (5 min)</a:t>
-            </a:r>
-          </a:p>
-        </p:txBody>
-      </p:sp>
-      <p:sp>
-        <p:nvSpPr>
-          <p:cNvPr id="3" name="Content Placeholder 2"/>
-          <p:cNvSpPr>
-            <a:spLocks noGrp="1"/>
-          </p:cNvSpPr>
-          <p:nvPr>
-            <p:ph idx="1"/>
+              <a:t>The forced-tool_choice pattern in code</a:t>
+            </a:r>
+          </a:p>
+        </p:txBody>
+      </p:sp>
+      <p:sp>
+        <p:nvSpPr>
+          <p:cNvPr id="3" name="Text Placeholder 2"/>
+          <p:cNvSpPr>
+            <a:spLocks noGrp="1"/>
+          </p:cNvSpPr>
+          <p:nvPr>
+            <p:ph type="body" idx="10" sz="quarter"/>
           </p:nvPr>
         </p:nvSpPr>
         <p:spPr/>
@@ -48035,27 +47022,116 @@
           <a:lstStyle/>
           <a:p>
             <a:r>
-              <a:t>Design an extraction schema for a domain you know</a:t>
-            </a:r>
-          </a:p>
-          <a:p>
-            <a:r>
-              <a:t>Fields: required vs Optional[]</a:t>
-            </a:r>
-          </a:p>
-          <a:p>
-            <a:r>
-              <a:t>Add a confidence Literal: 'high' | 'medium' | 'low'</a:t>
-            </a:r>
-          </a:p>
-          <a:p>
-            <a:r>
-              <a:t>Add a notes Optional[str] for ambiguity</a:t>
-            </a:r>
-          </a:p>
-          <a:p>
-            <a:r>
-              <a:t>Share your schema in chat</a:t>
+              <a:t>class Invoice(BaseModel):</a:t>
+            </a:r>
+          </a:p>
+          <a:p>
+            <a:r>
+              <a:t>    invoice_number: str</a:t>
+            </a:r>
+          </a:p>
+          <a:p>
+            <a:r>
+              <a:t>    vendor: str</a:t>
+            </a:r>
+          </a:p>
+          <a:p>
+            <a:r>
+              <a:t>    total: float</a:t>
+            </a:r>
+          </a:p>
+          <a:p>
+            <a:r>
+              <a:t>    po_number: Optional[str] = None</a:t>
+            </a:r>
+          </a:p>
+          <a:p/>
+          <a:p>
+            <a:r>
+              <a:t>EXTRACT_TOOL = {</a:t>
+            </a:r>
+          </a:p>
+          <a:p>
+            <a:r>
+              <a:t>    "name": "extract_invoice",</a:t>
+            </a:r>
+          </a:p>
+          <a:p>
+            <a:r>
+              <a:t>    "description": "Extract invoice fields. Do NOT invent values.",</a:t>
+            </a:r>
+          </a:p>
+          <a:p>
+            <a:r>
+              <a:t>    "input_schema": Invoice.model_json_schema(),</a:t>
+            </a:r>
+          </a:p>
+          <a:p>
+            <a:r>
+              <a:t>}</a:t>
+            </a:r>
+          </a:p>
+          <a:p/>
+          <a:p>
+            <a:r>
+              <a:t>resp = client.messages.create(</a:t>
+            </a:r>
+          </a:p>
+          <a:p>
+            <a:r>
+              <a:t>    model=MODEL,</a:t>
+            </a:r>
+          </a:p>
+          <a:p>
+            <a:r>
+              <a:t>    tools=[EXTRACT_TOOL],</a:t>
+            </a:r>
+          </a:p>
+          <a:p>
+            <a:r>
+              <a:t>    tool_choice={"type": "tool", "name": "extract_invoice"},</a:t>
+            </a:r>
+          </a:p>
+          <a:p>
+            <a:r>
+              <a:t>    messages=[{"role": "user", "content": raw_invoice_text}],</a:t>
+            </a:r>
+          </a:p>
+          <a:p>
+            <a:r>
+              <a:t>)</a:t>
+            </a:r>
+          </a:p>
+          <a:p/>
+          <a:p>
+            <a:r>
+              <a:t>tool_block = next(b for b in resp.content if b.type == "tool_use")</a:t>
+            </a:r>
+          </a:p>
+          <a:p>
+            <a:r>
+              <a:t>invoice = Invoice(**tool_block.input)   # validated, typed</a:t>
+            </a:r>
+          </a:p>
+        </p:txBody>
+      </p:sp>
+      <p:sp>
+        <p:nvSpPr>
+          <p:cNvPr id="4" name="Text Placeholder 3"/>
+          <p:cNvSpPr>
+            <a:spLocks noGrp="1"/>
+          </p:cNvSpPr>
+          <p:nvPr>
+            <p:ph type="body" idx="18" sz="quarter"/>
+          </p:nvPr>
+        </p:nvSpPr>
+        <p:spPr/>
+        <p:txBody>
+          <a:bodyPr/>
+          <a:lstStyle/>
+          <a:p>
+            <a:r>
+              <a:t>Three load-bearing lines. tool_choice={"type": "tool", "name": ...} forces the model to call that exact tool. block.input is a typed dict matching the schema. Invoice(**tool_block.input) is the validation gate. The full retry loop lives in segment-3-invoice-extractor.ipynb; this is the skeleton.</a:t>
             </a:r>
           </a:p>
         </p:txBody>
@@ -48119,12 +47195,33 @@
       <p:grpSpPr/>
       <p:sp>
         <p:nvSpPr>
-          <p:cNvPr id="2" name="Text Placeholder 1"/>
-          <p:cNvSpPr>
-            <a:spLocks noGrp="1"/>
-          </p:cNvSpPr>
-          <p:nvPr>
-            <p:ph type="body" idx="13" sz="quarter"/>
+          <p:cNvPr id="2" name="Title 1"/>
+          <p:cNvSpPr>
+            <a:spLocks noGrp="1"/>
+          </p:cNvSpPr>
+          <p:nvPr>
+            <p:ph type="title"/>
+          </p:nvPr>
+        </p:nvSpPr>
+        <p:spPr/>
+        <p:txBody>
+          <a:bodyPr/>
+          <a:lstStyle/>
+          <a:p>
+            <a:r>
+              <a:t>Validation + retry loops</a:t>
+            </a:r>
+          </a:p>
+        </p:txBody>
+      </p:sp>
+      <p:sp>
+        <p:nvSpPr>
+          <p:cNvPr id="3" name="Content Placeholder 2"/>
+          <p:cNvSpPr>
+            <a:spLocks noGrp="1"/>
+          </p:cNvSpPr>
+          <p:nvPr>
+            <p:ph idx="1"/>
           </p:nvPr>
         </p:nvSpPr>
         <p:spPr/>
@@ -48133,47 +47230,35 @@
           <a:lstStyle/>
           <a:p>
             <a:r>
-              <a:t>Segment 3 takeaways</a:t>
+              <a:t>Effective: format errors, JSON parse failures, schema mismatches</a:t>
+            </a:r>
+          </a:p>
+          <a:p>
+            <a:r>
+              <a:t>    -&gt; append the error as a tool_result with is_error: true, retry</a:t>
+            </a:r>
+          </a:p>
+          <a:p>
+            <a:r>
+              <a:t>    -&gt; succeeds in 2-3 attempts</a:t>
             </a:r>
           </a:p>
           <a:p/>
           <a:p>
             <a:r>
-              <a:t>Pydantic + tool_choice tool = guaranteed valid JSON</a:t>
-            </a:r>
-          </a:p>
-          <a:p>
-            <a:r>
-              <a:t>Few-shot examples beat temperature tuning every time</a:t>
-            </a:r>
-          </a:p>
-          <a:p>
-            <a:r>
-              <a:t>Retries help format errors; retries do NOT help missing info</a:t>
-            </a:r>
-          </a:p>
-          <a:p>
-            <a:r>
-              <a:t>Cache the system block with cache_control - amortize policy across calls</a:t>
-            </a:r>
-          </a:p>
-        </p:txBody>
-      </p:sp>
-      <p:sp>
-        <p:nvSpPr>
-          <p:cNvPr id="3" name="Text Placeholder 2"/>
-          <p:cNvSpPr>
-            <a:spLocks noGrp="1"/>
-          </p:cNvSpPr>
-          <p:nvPr>
-            <p:ph type="body" idx="14" sz="quarter"/>
-          </p:nvPr>
-        </p:nvSpPr>
-        <p:spPr/>
-        <p:txBody>
-          <a:bodyPr/>
-          <a:lstStyle/>
-          <a:p/>
+              <a:t>INEFFECTIVE: knowledge gaps, ambiguous source data</a:t>
+            </a:r>
+          </a:p>
+          <a:p>
+            <a:r>
+              <a:t>    -&gt; retries DO NOT help</a:t>
+            </a:r>
+          </a:p>
+          <a:p>
+            <a:r>
+              <a:t>    -&gt; cap at 2-3, then escalate to human review</a:t>
+            </a:r>
+          </a:p>
         </p:txBody>
       </p:sp>
     </p:spTree>
@@ -48210,7 +47295,44 @@
           <a:lstStyle/>
           <a:p>
             <a:r>
-              <a:t>Segment 4: CCA-F Certification Capstone</a:t>
+              <a:t>Confidence-based routing</a:t>
+            </a:r>
+          </a:p>
+        </p:txBody>
+      </p:sp>
+      <p:sp>
+        <p:nvSpPr>
+          <p:cNvPr id="3" name="Content Placeholder 2"/>
+          <p:cNvSpPr>
+            <a:spLocks noGrp="1"/>
+          </p:cNvSpPr>
+          <p:nvPr>
+            <p:ph idx="1"/>
+          </p:nvPr>
+        </p:nvSpPr>
+        <p:spPr/>
+        <p:txBody>
+          <a:bodyPr wrap="square"/>
+          <a:lstStyle/>
+          <a:p>
+            <a:r>
+              <a:t>Have the model output field-level confidence: high | medium | low</a:t>
+            </a:r>
+          </a:p>
+          <a:p>
+            <a:r>
+              <a:t>Route: high -&gt; automated, medium -&gt; spot-check, low -&gt; human</a:t>
+            </a:r>
+          </a:p>
+          <a:p/>
+          <a:p>
+            <a:r>
+              <a:t>CRITICAL: validate accuracy by document type AND field</a:t>
+            </a:r>
+          </a:p>
+          <a:p>
+            <a:r>
+              <a:t>Aggregate 95% accuracy can mask 60% accuracy on specific segments</a:t>
             </a:r>
           </a:p>
         </p:txBody>
@@ -48235,33 +47357,12 @@
       <p:grpSpPr/>
       <p:sp>
         <p:nvSpPr>
-          <p:cNvPr id="2" name="Title 1"/>
-          <p:cNvSpPr>
-            <a:spLocks noGrp="1"/>
-          </p:cNvSpPr>
-          <p:nvPr>
-            <p:ph type="title"/>
-          </p:nvPr>
-        </p:nvSpPr>
-        <p:spPr/>
-        <p:txBody>
-          <a:bodyPr/>
-          <a:lstStyle/>
-          <a:p>
-            <a:r>
-              <a:t>What CCA-F is</a:t>
-            </a:r>
-          </a:p>
-        </p:txBody>
-      </p:sp>
-      <p:sp>
-        <p:nvSpPr>
-          <p:cNvPr id="3" name="Content Placeholder 2"/>
-          <p:cNvSpPr>
-            <a:spLocks noGrp="1"/>
-          </p:cNvSpPr>
-          <p:nvPr>
-            <p:ph idx="1"/>
+          <p:cNvPr id="2" name="Text Placeholder 1"/>
+          <p:cNvSpPr>
+            <a:spLocks noGrp="1"/>
+          </p:cNvSpPr>
+          <p:nvPr>
+            <p:ph type="body" idx="14" sz="quarter"/>
           </p:nvPr>
         </p:nvSpPr>
         <p:spPr/>
@@ -48270,23 +47371,33 @@
           <a:lstStyle/>
           <a:p>
             <a:r>
-              <a:t>Claude Certified Architect: Foundations - Anthropic's first official certification</a:t>
-            </a:r>
-          </a:p>
-          <a:p>
-            <a:r>
-              <a:t>Targets architects shipping with Agent SDK, Claude Code, Claude API, MCP</a:t>
-            </a:r>
-          </a:p>
-          <a:p>
-            <a:r>
-              <a:t>Roughly the 301 skill level - past 'hello world', not yet 'I run distillation pipelines'</a:t>
+              <a:t>Demo - invoice extractor live build (20 min)</a:t>
             </a:r>
           </a:p>
           <a:p/>
           <a:p>
             <a:r>
-              <a:t>Beta product as of 2026 - watch the official cert page for changes</a:t>
+              <a:t>Open notebooks/segment-3-invoice-extractor.ipynb</a:t>
+            </a:r>
+          </a:p>
+          <a:p>
+            <a:r>
+              <a:t>Build the Pydantic schema, register as a tool</a:t>
+            </a:r>
+          </a:p>
+          <a:p>
+            <a:r>
+              <a:t>Force tool_choice = {type: tool, name: extract_invoice}</a:t>
+            </a:r>
+          </a:p>
+          <a:p>
+            <a:r>
+              <a:t>Run on 3 invoices: clean, missing PO, ambiguous total</a:t>
+            </a:r>
+          </a:p>
+          <a:p>
+            <a:r>
+              <a:t>Add validation-retry loop, watch it recover from a parse failure</a:t>
             </a:r>
           </a:p>
         </p:txBody>
@@ -48325,7 +47436,7 @@
           <a:lstStyle/>
           <a:p>
             <a:r>
-              <a:t>Exam mechanics (the load-bearing facts)</a:t>
+              <a:t>Context preservation in long sessions</a:t>
             </a:r>
           </a:p>
         </p:txBody>
@@ -48346,37 +47457,28 @@
           <a:lstStyle/>
           <a:p>
             <a:r>
-              <a:t>Questions: 60 multiple-choice</a:t>
-            </a:r>
-          </a:p>
-          <a:p>
-            <a:r>
-              <a:t>Time: 120 minutes, single session, no breaks</a:t>
-            </a:r>
-          </a:p>
-          <a:p>
-            <a:r>
-              <a:t>Scoring: scaled 100-1000, passing = 720, no guess penalty</a:t>
-            </a:r>
-          </a:p>
-          <a:p>
-            <a:r>
-              <a:t>Delivery: ProctorFree, English</a:t>
-            </a:r>
-          </a:p>
-          <a:p>
-            <a:r>
-              <a:t>Results: 2 business days</a:t>
-            </a:r>
-          </a:p>
-          <a:p>
-            <a:r>
-              <a:t>Cost: $99 per attempt</a:t>
-            </a:r>
-          </a:p>
-          <a:p>
-            <a:r>
-              <a:t>Attempts: ONE - this is the policy that catches people</a:t>
+              <a:t>Pin case-facts at the top of every turn</a:t>
+            </a:r>
+          </a:p>
+          <a:p>
+            <a:r>
+              <a:t>Summarize resolved turns into narrative, drop verbatim history</a:t>
+            </a:r>
+          </a:p>
+          <a:p>
+            <a:r>
+              <a:t>Prune verbose tool outputs - extract the fields you used, drop the rest</a:t>
+            </a:r>
+          </a:p>
+          <a:p>
+            <a:r>
+              <a:t>Application-side filtering, before the next turn</a:t>
+            </a:r>
+          </a:p>
+          <a:p/>
+          <a:p>
+            <a:r>
+              <a:t>How lawyers manage case files. Same discipline for long agent sessions.</a:t>
             </a:r>
           </a:p>
         </p:txBody>
@@ -48415,19 +47517,19 @@
           <a:lstStyle/>
           <a:p>
             <a:r>
-              <a:t>Domain weights and where each was taught</a:t>
-            </a:r>
-          </a:p>
-        </p:txBody>
-      </p:sp>
-      <p:sp>
-        <p:nvSpPr>
-          <p:cNvPr id="3" name="Text Placeholder 2"/>
-          <p:cNvSpPr>
-            <a:spLocks noGrp="1"/>
-          </p:cNvSpPr>
-          <p:nvPr>
-            <p:ph type="body" idx="10" sz="quarter"/>
+              <a:t>Escalation design</a:t>
+            </a:r>
+          </a:p>
+        </p:txBody>
+      </p:sp>
+      <p:sp>
+        <p:nvSpPr>
+          <p:cNvPr id="3" name="Content Placeholder 2"/>
+          <p:cNvSpPr>
+            <a:spLocks noGrp="1"/>
+          </p:cNvSpPr>
+          <p:nvPr>
+            <p:ph idx="1"/>
           </p:nvPr>
         </p:nvSpPr>
         <p:spPr/>
@@ -48436,105 +47538,29 @@
           <a:lstStyle/>
           <a:p>
             <a:r>
-              <a:t>Domain 1 - Agentic Architecture (27%)</a:t>
-            </a:r>
-          </a:p>
-          <a:p>
-            <a:r>
-              <a:t>Heaviest. Segment 1 - agents, hooks, coordinator-subagent. Re-walk segment-1.</a:t>
-            </a:r>
-          </a:p>
-          <a:p>
-            <a:r>
-              <a:t>Domain 2 - Tool Design and MCP (18%)</a:t>
-            </a:r>
-          </a:p>
-          <a:p>
-            <a:r>
-              <a:t>Segment 2 + 2.5. Tool descriptions, structured errors, MCP list_tools.</a:t>
-            </a:r>
-          </a:p>
-          <a:p>
-            <a:r>
-              <a:t>Domain 3 - Claude Code (20%)</a:t>
-            </a:r>
-          </a:p>
-          <a:p>
-            <a:r>
-              <a:t>Segment 2. CLAUDE.md hierarchy, skills, slash commands, claude -p headless.</a:t>
-            </a:r>
-          </a:p>
-          <a:p>
-            <a:r>
-              <a:t>Domain 4 - Prompts and Structured Output (20%)</a:t>
-            </a:r>
-          </a:p>
-          <a:p>
-            <a:r>
-              <a:t>Segment 3. Forced tool_choice, Pydantic schemas, few-shot, retry loops.</a:t>
-            </a:r>
-          </a:p>
-          <a:p>
-            <a:r>
-              <a:t>Domain 5 - Context and Reliability (15%)</a:t>
-            </a:r>
-          </a:p>
-          <a:p>
-            <a:r>
-              <a:t>Segment 3 + parts of Segment 1. Context pinning, escalation, structured errors.</a:t>
-            </a:r>
-          </a:p>
-        </p:txBody>
-      </p:sp>
-      <p:sp>
-        <p:nvSpPr>
-          <p:cNvPr id="4" name="Text Placeholder 3"/>
-          <p:cNvSpPr>
-            <a:spLocks noGrp="1"/>
-          </p:cNvSpPr>
-          <p:nvPr>
-            <p:ph type="body" idx="15" sz="quarter"/>
-          </p:nvPr>
-        </p:nvSpPr>
-        <p:spPr/>
-        <p:txBody>
-          <a:bodyPr/>
-          <a:lstStyle/>
-          <a:p/>
-        </p:txBody>
-      </p:sp>
-      <p:sp>
-        <p:nvSpPr>
-          <p:cNvPr id="5" name="Text Placeholder 4"/>
-          <p:cNvSpPr>
-            <a:spLocks noGrp="1"/>
-          </p:cNvSpPr>
-          <p:nvPr>
-            <p:ph type="body" idx="16" sz="quarter"/>
-          </p:nvPr>
-        </p:nvSpPr>
-        <p:spPr/>
-        <p:txBody>
-          <a:bodyPr/>
-          <a:lstStyle/>
-          <a:p/>
-        </p:txBody>
-      </p:sp>
-      <p:sp>
-        <p:nvSpPr>
-          <p:cNvPr id="6" name="Text Placeholder 5"/>
-          <p:cNvSpPr>
-            <a:spLocks noGrp="1"/>
-          </p:cNvSpPr>
-          <p:nvPr>
-            <p:ph type="body" idx="17" sz="quarter"/>
-          </p:nvPr>
-        </p:nvSpPr>
-        <p:spPr/>
-        <p:txBody>
-          <a:bodyPr/>
-          <a:lstStyle/>
-          <a:p/>
+              <a:t>Honor explicit human requests IMMEDIATELY</a:t>
+            </a:r>
+          </a:p>
+          <a:p>
+            <a:r>
+              <a:t>    'I want a human NOW' = escalate, don't clarify, don't try one more tool</a:t>
+            </a:r>
+          </a:p>
+          <a:p>
+            <a:r>
+              <a:t>Pass STRUCTURED summary to the human queue, not the transcript</a:t>
+            </a:r>
+          </a:p>
+          <a:p>
+            <a:r>
+              <a:t>Never escalate on sentiment alone (frustration != complexity)</a:t>
+            </a:r>
+          </a:p>
+          <a:p>
+            <a:r>
+              <a:t>Confidence-based escalation: low confidence -&gt; human review</a:t>
+            </a:r>
+          </a:p>
         </p:txBody>
       </p:sp>
     </p:spTree>
@@ -48555,80 +47581,30 @@
         <p:nvPr/>
       </p:nvGrpSpPr>
       <p:grpSpPr/>
-      <p:sp>
-        <p:nvSpPr>
-          <p:cNvPr id="2" name="Title 1"/>
-          <p:cNvSpPr>
-            <a:spLocks noGrp="1"/>
-          </p:cNvSpPr>
-          <p:nvPr>
-            <p:ph type="title"/>
-          </p:nvPr>
-        </p:nvSpPr>
-        <p:spPr/>
-        <p:txBody>
-          <a:bodyPr/>
-          <a:lstStyle/>
-          <a:p>
-            <a:r>
-              <a:t>Why the practice sampler is domain-weighted</a:t>
-            </a:r>
-          </a:p>
-        </p:txBody>
-      </p:sp>
-      <p:sp>
-        <p:nvSpPr>
-          <p:cNvPr id="3" name="Text Placeholder 2"/>
-          <p:cNvSpPr>
-            <a:spLocks noGrp="1"/>
-          </p:cNvSpPr>
-          <p:nvPr>
-            <p:ph type="body" idx="10" sz="quarter"/>
-          </p:nvPr>
-        </p:nvSpPr>
-        <p:spPr/>
-        <p:txBody>
-          <a:bodyPr wrap="square"/>
-          <a:lstStyle/>
-          <a:p>
-            <a:r>
-              <a:t>The naive sampler</a:t>
-            </a:r>
-          </a:p>
-          <a:p>
-            <a:r>
-              <a:t>Pulls questions evenly across scenario families - which over-tests Claude Code (two scenarios are heavily D3) and under-tests context management (only fits in one).</a:t>
-            </a:r>
-          </a:p>
-          <a:p>
-            <a:r>
-              <a:t>Our sampler</a:t>
-            </a:r>
-          </a:p>
-          <a:p>
-            <a:r>
-              <a:t>Draws 3 D1 + 2 D2 + 2 D3 + 2 D4 + 1 D5 - matches the exam's 27/18/20/20/15 weighting exactly. Every cohort sees the SAME 10 questions in the same order (seed=2026) for consistency across deliveries.</a:t>
-            </a:r>
-          </a:p>
-        </p:txBody>
-      </p:sp>
-      <p:sp>
-        <p:nvSpPr>
-          <p:cNvPr id="4" name="Text Placeholder 3"/>
-          <p:cNvSpPr>
-            <a:spLocks noGrp="1"/>
-          </p:cNvSpPr>
-          <p:nvPr>
-            <p:ph type="body" idx="12" sz="quarter"/>
-          </p:nvPr>
-        </p:nvSpPr>
-        <p:spPr/>
-        <p:txBody>
-          <a:bodyPr/>
-          <a:lstStyle/>
-          <a:p/>
-        </p:txBody>
-      </p:sp>
+      <p:pic>
+        <p:nvPicPr>
+          <p:cNvPr id="2" name="Picture 1" descr="07-escalation-tree.png"/>
+          <p:cNvPicPr>
+            <a:picLocks noChangeAspect="1"/>
+          </p:cNvPicPr>
+          <p:nvPr/>
+        </p:nvPicPr>
+        <p:blipFill>
+          <a:blip r:embed="rId2"/>
+          <a:stretch>
+            <a:fillRect/>
+          </a:stretch>
+        </p:blipFill>
+        <p:spPr>
+          <a:xfrm>
+            <a:off x="0" y="0"/>
+            <a:ext cx="12192000" cy="6858000"/>
+          </a:xfrm>
+          <a:prstGeom prst="rect">
+            <a:avLst/>
+          </a:prstGeom>
+        </p:spPr>
+      </p:pic>
     </p:spTree>
   </p:cSld>
   <p:clrMapOvr>
@@ -48649,12 +47625,33 @@
       <p:grpSpPr/>
       <p:sp>
         <p:nvSpPr>
-          <p:cNvPr id="2" name="Text Placeholder 1"/>
-          <p:cNvSpPr>
-            <a:spLocks noGrp="1"/>
-          </p:cNvSpPr>
-          <p:nvPr>
-            <p:ph type="body" idx="14" sz="quarter"/>
+          <p:cNvPr id="2" name="Title 1"/>
+          <p:cNvSpPr>
+            <a:spLocks noGrp="1"/>
+          </p:cNvSpPr>
+          <p:nvPr>
+            <p:ph type="title"/>
+          </p:nvPr>
+        </p:nvSpPr>
+        <p:spPr/>
+        <p:txBody>
+          <a:bodyPr/>
+          <a:lstStyle/>
+          <a:p>
+            <a:r>
+              <a:t>Exercise (5 min)</a:t>
+            </a:r>
+          </a:p>
+        </p:txBody>
+      </p:sp>
+      <p:sp>
+        <p:nvSpPr>
+          <p:cNvPr id="3" name="Content Placeholder 2"/>
+          <p:cNvSpPr>
+            <a:spLocks noGrp="1"/>
+          </p:cNvSpPr>
+          <p:nvPr>
+            <p:ph idx="1"/>
           </p:nvPr>
         </p:nvSpPr>
         <p:spPr/>
@@ -48663,43 +47660,27 @@
           <a:lstStyle/>
           <a:p>
             <a:r>
-              <a:t>Live practice - 10 weighted questions (~28 min)</a:t>
-            </a:r>
-          </a:p>
-          <a:p/>
-          <a:p>
-            <a:r>
-              <a:t>Open notebooks/segment-4-cca-f-capstone.ipynb</a:t>
-            </a:r>
-          </a:p>
-          <a:p>
-            <a:r>
-              <a:t>Sampler draws 10 questions by CCA-F domain weight (3/2/2/2/1)</a:t>
-            </a:r>
-          </a:p>
-          <a:p>
-            <a:r>
-              <a:t>Per question (~2.5 min):</a:t>
-            </a:r>
-          </a:p>
-          <a:p>
-            <a:r>
-              <a:t>  1. Read the situation</a:t>
-            </a:r>
-          </a:p>
-          <a:p>
-            <a:r>
-              <a:t>  2. Cohort votes A/B/C/D in chat</a:t>
-            </a:r>
-          </a:p>
-          <a:p>
-            <a:r>
-              <a:t>  3. Reveal answer + explanation</a:t>
-            </a:r>
-          </a:p>
-          <a:p>
-            <a:r>
-              <a:t>  4. Color with a production tip from the matching domain-N-*.md</a:t>
+              <a:t>Design an extraction schema for a domain you know</a:t>
+            </a:r>
+          </a:p>
+          <a:p>
+            <a:r>
+              <a:t>Fields: required vs Optional[]</a:t>
+            </a:r>
+          </a:p>
+          <a:p>
+            <a:r>
+              <a:t>Add a confidence Literal: 'high' | 'medium' | 'low'</a:t>
+            </a:r>
+          </a:p>
+          <a:p>
+            <a:r>
+              <a:t>Add a notes Optional[str] for ambiguity</a:t>
+            </a:r>
+          </a:p>
+          <a:p>
+            <a:r>
+              <a:t>Share your schema in chat</a:t>
             </a:r>
           </a:p>
         </p:txBody>
@@ -48724,69 +47705,61 @@
       <p:grpSpPr/>
       <p:sp>
         <p:nvSpPr>
-          <p:cNvPr id="2" name="Title 1"/>
-          <p:cNvSpPr>
-            <a:spLocks noGrp="1"/>
-          </p:cNvSpPr>
-          <p:nvPr>
-            <p:ph type="title"/>
+          <p:cNvPr id="2" name="Text Placeholder 1"/>
+          <p:cNvSpPr>
+            <a:spLocks noGrp="1"/>
+          </p:cNvSpPr>
+          <p:nvPr>
+            <p:ph type="body" idx="13" sz="quarter"/>
+          </p:nvPr>
+        </p:nvSpPr>
+        <p:spPr/>
+        <p:txBody>
+          <a:bodyPr wrap="square"/>
+          <a:lstStyle/>
+          <a:p>
+            <a:r>
+              <a:t>Segment 3 takeaways</a:t>
+            </a:r>
+          </a:p>
+          <a:p/>
+          <a:p>
+            <a:r>
+              <a:t>Pydantic + tool_choice tool = guaranteed valid JSON</a:t>
+            </a:r>
+          </a:p>
+          <a:p>
+            <a:r>
+              <a:t>Few-shot examples beat temperature tuning every time</a:t>
+            </a:r>
+          </a:p>
+          <a:p>
+            <a:r>
+              <a:t>Retries help format errors; retries do NOT help missing info</a:t>
+            </a:r>
+          </a:p>
+          <a:p>
+            <a:r>
+              <a:t>Cache the system block with cache_control - amortize policy across calls</a:t>
+            </a:r>
+          </a:p>
+        </p:txBody>
+      </p:sp>
+      <p:sp>
+        <p:nvSpPr>
+          <p:cNvPr id="3" name="Text Placeholder 2"/>
+          <p:cNvSpPr>
+            <a:spLocks noGrp="1"/>
+          </p:cNvSpPr>
+          <p:nvPr>
+            <p:ph type="body" idx="14" sz="quarter"/>
           </p:nvPr>
         </p:nvSpPr>
         <p:spPr/>
         <p:txBody>
           <a:bodyPr/>
           <a:lstStyle/>
-          <a:p>
-            <a:r>
-              <a:t>Tim's week-before-the-exam punchlist</a:t>
-            </a:r>
-          </a:p>
-        </p:txBody>
-      </p:sp>
-      <p:sp>
-        <p:nvSpPr>
-          <p:cNvPr id="3" name="Content Placeholder 2"/>
-          <p:cNvSpPr>
-            <a:spLocks noGrp="1"/>
-          </p:cNvSpPr>
-          <p:nvPr>
-            <p:ph idx="1"/>
-          </p:nvPr>
-        </p:nvSpPr>
-        <p:spPr/>
-        <p:txBody>
-          <a:bodyPr wrap="square"/>
-          <a:lstStyle/>
-          <a:p>
-            <a:r>
-              <a:t>1. Score &gt;900 on the Anthropic Practice Exam cold</a:t>
-            </a:r>
-          </a:p>
-          <a:p>
-            <a:r>
-              <a:t>2. Rebuild Segment 1 from memory in 30 minutes</a:t>
-            </a:r>
-          </a:p>
-          <a:p>
-            <a:r>
-              <a:t>3. Re-read domain-1-agentic.md - the 27% domain</a:t>
-            </a:r>
-          </a:p>
-          <a:p>
-            <a:r>
-              <a:t>4. Skim domain-3-claude-code.md and domain-4-prompts.md - the 20% domains</a:t>
-            </a:r>
-          </a:p>
-          <a:p>
-            <a:r>
-              <a:t>5. Verify proctoring setup the night before (camera, mic, ID)</a:t>
-            </a:r>
-          </a:p>
-          <a:p>
-            <a:r>
-              <a:t>6. Single attempt. Do not schedule until 1-4 are green.</a:t>
-            </a:r>
-          </a:p>
+          <a:p/>
         </p:txBody>
       </p:sp>
     </p:spTree>
@@ -48823,49 +47796,7 @@
           <a:lstStyle/>
           <a:p>
             <a:r>
-              <a:t>What you built today</a:t>
-            </a:r>
-          </a:p>
-        </p:txBody>
-      </p:sp>
-      <p:sp>
-        <p:nvSpPr>
-          <p:cNvPr id="3" name="Content Placeholder 2"/>
-          <p:cNvSpPr>
-            <a:spLocks noGrp="1"/>
-          </p:cNvSpPr>
-          <p:nvPr>
-            <p:ph idx="1"/>
-          </p:nvPr>
-        </p:nvSpPr>
-        <p:spPr/>
-        <p:txBody>
-          <a:bodyPr wrap="square"/>
-          <a:lstStyle/>
-          <a:p>
-            <a:r>
-              <a:t>Customer support agent with PreToolUse hook enforcement</a:t>
-            </a:r>
-          </a:p>
-          <a:p>
-            <a:r>
-              <a:t>Configured Claude Code env with .mcp.json + CLAUDE.md hierarchy</a:t>
-            </a:r>
-          </a:p>
-          <a:p>
-            <a:r>
-              <a:t>Invoice extractor with Pydantic schema + validation retry</a:t>
-            </a:r>
-          </a:p>
-          <a:p>
-            <a:r>
-              <a:t>Production reliability mental model - context, escalation, errors, provenance</a:t>
-            </a:r>
-          </a:p>
-          <a:p/>
-          <a:p>
-            <a:r>
-              <a:t>Plus self-study: control surfaces and the Console asset surface (Segment 2.5)</a:t>
+              <a:t>Segment 4: CCA-F Certification Capstone</a:t>
             </a:r>
           </a:p>
         </p:txBody>
@@ -48904,19 +47835,19 @@
           <a:lstStyle/>
           <a:p>
             <a:r>
-              <a:t>Resources and next steps</a:t>
-            </a:r>
-          </a:p>
-        </p:txBody>
-      </p:sp>
-      <p:sp>
-        <p:nvSpPr>
-          <p:cNvPr id="3" name="Text Placeholder 2"/>
-          <p:cNvSpPr>
-            <a:spLocks noGrp="1"/>
-          </p:cNvSpPr>
-          <p:nvPr>
-            <p:ph type="body" idx="15" sz="quarter"/>
+              <a:t>What CCA-F is</a:t>
+            </a:r>
+          </a:p>
+        </p:txBody>
+      </p:sp>
+      <p:sp>
+        <p:nvSpPr>
+          <p:cNvPr id="3" name="Content Placeholder 2"/>
+          <p:cNvSpPr>
+            <a:spLocks noGrp="1"/>
+          </p:cNvSpPr>
+          <p:nvPr>
+            <p:ph idx="1"/>
           </p:nvPr>
         </p:nvSpPr>
         <p:spPr/>
@@ -48925,159 +47856,25 @@
           <a:lstStyle/>
           <a:p>
             <a:r>
-              <a:t>Repo</a:t>
-            </a:r>
-          </a:p>
-          <a:p>
-            <a:r>
-              <a:t>github.com/timothywarner-org/claude-architect</a:t>
-            </a:r>
-          </a:p>
-          <a:p>
-            <a:r>
-              <a:t>Anthropic cookbook (official, MIT, vendored in this repo)</a:t>
-            </a:r>
-          </a:p>
-          <a:p>
-            <a:r>
-              <a:t>github.com/anthropics/claude-cookbooks   |   claude-cookbooks-main/</a:t>
-            </a:r>
-          </a:p>
-          <a:p>
-            <a:r>
-              <a:t>CCA-F study path</a:t>
-            </a:r>
-          </a:p>
-          <a:p>
-            <a:r>
-              <a:t>EXAM-STUDY-PATH.md - notebook -&gt; CCA-F domain -&gt; scenario mapping</a:t>
-            </a:r>
-          </a:p>
-          <a:p>
-            <a:r>
-              <a:t>Anthropic Academy</a:t>
-            </a:r>
-          </a:p>
-          <a:p>
-            <a:r>
-              <a:t>anthropic.skilljar.com - free courses, official Practice Exam</a:t>
-            </a:r>
-          </a:p>
-        </p:txBody>
-      </p:sp>
-      <p:sp>
-        <p:nvSpPr>
-          <p:cNvPr id="4" name="Text Placeholder 3"/>
-          <p:cNvSpPr>
-            <a:spLocks noGrp="1"/>
-          </p:cNvSpPr>
-          <p:nvPr>
-            <p:ph type="body" idx="17" sz="quarter"/>
-          </p:nvPr>
-        </p:nvSpPr>
-        <p:spPr/>
-        <p:txBody>
-          <a:bodyPr/>
-          <a:lstStyle/>
+              <a:t>Claude Certified Architect: Foundations - Anthropic's first official certification</a:t>
+            </a:r>
+          </a:p>
+          <a:p>
+            <a:r>
+              <a:t>Targets architects shipping with Agent SDK, Claude Code, Claude API, MCP</a:t>
+            </a:r>
+          </a:p>
+          <a:p>
+            <a:r>
+              <a:t>Roughly the 301 skill level - past 'hello world', not yet 'I run distillation pipelines'</a:t>
+            </a:r>
+          </a:p>
           <a:p/>
-        </p:txBody>
-      </p:sp>
-      <p:sp>
-        <p:nvSpPr>
-          <p:cNvPr id="5" name="Text Placeholder 4"/>
-          <p:cNvSpPr>
-            <a:spLocks noGrp="1"/>
-          </p:cNvSpPr>
-          <p:nvPr>
-            <p:ph type="body" idx="19" sz="quarter"/>
-          </p:nvPr>
-        </p:nvSpPr>
-        <p:spPr/>
-        <p:txBody>
-          <a:bodyPr/>
-          <a:lstStyle/>
-          <a:p/>
-        </p:txBody>
-      </p:sp>
-      <p:sp>
-        <p:nvSpPr>
-          <p:cNvPr id="6" name="Text Placeholder 5"/>
-          <p:cNvSpPr>
-            <a:spLocks noGrp="1"/>
-          </p:cNvSpPr>
-          <p:nvPr>
-            <p:ph type="body" idx="21" sz="quarter"/>
-          </p:nvPr>
-        </p:nvSpPr>
-        <p:spPr/>
-        <p:txBody>
-          <a:bodyPr/>
-          <a:lstStyle/>
-          <a:p/>
-        </p:txBody>
-      </p:sp>
-      <p:sp>
-        <p:nvSpPr>
-          <p:cNvPr id="7" name="Picture Placeholder 6"/>
-          <p:cNvSpPr>
-            <a:spLocks noGrp="1"/>
-          </p:cNvSpPr>
-          <p:nvPr>
-            <p:ph type="pic" idx="22" sz="quarter"/>
-          </p:nvPr>
-        </p:nvSpPr>
-        <p:spPr/>
-        <p:txBody>
-          <a:bodyPr/>
-          <a:p/>
-        </p:txBody>
-      </p:sp>
-      <p:sp>
-        <p:nvSpPr>
-          <p:cNvPr id="8" name="Picture Placeholder 7"/>
-          <p:cNvSpPr>
-            <a:spLocks noGrp="1"/>
-          </p:cNvSpPr>
-          <p:nvPr>
-            <p:ph type="pic" idx="23" sz="quarter"/>
-          </p:nvPr>
-        </p:nvSpPr>
-        <p:spPr/>
-        <p:txBody>
-          <a:bodyPr/>
-          <a:p/>
-        </p:txBody>
-      </p:sp>
-      <p:sp>
-        <p:nvSpPr>
-          <p:cNvPr id="9" name="Picture Placeholder 8"/>
-          <p:cNvSpPr>
-            <a:spLocks noGrp="1"/>
-          </p:cNvSpPr>
-          <p:nvPr>
-            <p:ph type="pic" idx="24" sz="quarter"/>
-          </p:nvPr>
-        </p:nvSpPr>
-        <p:spPr/>
-        <p:txBody>
-          <a:bodyPr/>
-          <a:p/>
-        </p:txBody>
-      </p:sp>
-      <p:sp>
-        <p:nvSpPr>
-          <p:cNvPr id="10" name="Picture Placeholder 9"/>
-          <p:cNvSpPr>
-            <a:spLocks noGrp="1"/>
-          </p:cNvSpPr>
-          <p:nvPr>
-            <p:ph type="pic" idx="25" sz="quarter"/>
-          </p:nvPr>
-        </p:nvSpPr>
-        <p:spPr/>
-        <p:txBody>
-          <a:bodyPr/>
-          <a:p/>
+          <a:p>
+            <a:r>
+              <a:t>Beta product as of 2026 - watch the official cert page for changes</a:t>
+            </a:r>
+          </a:p>
         </p:txBody>
       </p:sp>
     </p:spTree>
@@ -49153,7 +47950,7 @@
           <a:lstStyle/>
           <a:p>
             <a:r>
-              <a:t>Final Q&amp;A (10 min)</a:t>
+              <a:t>Exam mechanics (the load-bearing facts)</a:t>
             </a:r>
           </a:p>
         </p:txBody>
@@ -49174,27 +47971,37 @@
           <a:lstStyle/>
           <a:p>
             <a:r>
-              <a:t>How do I monitor an agent in production?</a:t>
-            </a:r>
-          </a:p>
-          <a:p>
-            <a:r>
-              <a:t>When do I split a monolithic agent into coordinator + subagents?</a:t>
-            </a:r>
-          </a:p>
-          <a:p>
-            <a:r>
-              <a:t>What is the cost story for prompt caching?</a:t>
-            </a:r>
-          </a:p>
-          <a:p>
-            <a:r>
-              <a:t>How do I know when I am ready to sit the exam?</a:t>
-            </a:r>
-          </a:p>
-          <a:p>
-            <a:r>
-              <a:t>What is the renewal path for CCA-F?</a:t>
+              <a:t>Questions: 60 multiple-choice</a:t>
+            </a:r>
+          </a:p>
+          <a:p>
+            <a:r>
+              <a:t>Time: 120 minutes, single session, no breaks</a:t>
+            </a:r>
+          </a:p>
+          <a:p>
+            <a:r>
+              <a:t>Scoring: scaled 100-1000, passing = 720, no guess penalty</a:t>
+            </a:r>
+          </a:p>
+          <a:p>
+            <a:r>
+              <a:t>Delivery: ProctorFree, English</a:t>
+            </a:r>
+          </a:p>
+          <a:p>
+            <a:r>
+              <a:t>Results: 2 business days</a:t>
+            </a:r>
+          </a:p>
+          <a:p>
+            <a:r>
+              <a:t>Cost: $99 per attempt</a:t>
+            </a:r>
+          </a:p>
+          <a:p>
+            <a:r>
+              <a:t>Attempts: ONE - this is the policy that catches people</a:t>
             </a:r>
           </a:p>
         </p:txBody>
@@ -49224,6 +48031,811 @@
             <a:spLocks noGrp="1"/>
           </p:cNvSpPr>
           <p:nvPr>
+            <p:ph type="title"/>
+          </p:nvPr>
+        </p:nvSpPr>
+        <p:spPr/>
+        <p:txBody>
+          <a:bodyPr/>
+          <a:lstStyle/>
+          <a:p>
+            <a:r>
+              <a:t>Domain weights and where each was taught</a:t>
+            </a:r>
+          </a:p>
+        </p:txBody>
+      </p:sp>
+      <p:sp>
+        <p:nvSpPr>
+          <p:cNvPr id="3" name="Text Placeholder 2"/>
+          <p:cNvSpPr>
+            <a:spLocks noGrp="1"/>
+          </p:cNvSpPr>
+          <p:nvPr>
+            <p:ph type="body" idx="10" sz="quarter"/>
+          </p:nvPr>
+        </p:nvSpPr>
+        <p:spPr/>
+        <p:txBody>
+          <a:bodyPr wrap="square"/>
+          <a:lstStyle/>
+          <a:p>
+            <a:r>
+              <a:t>Domain 1 - Agentic Architecture (27%)</a:t>
+            </a:r>
+          </a:p>
+          <a:p>
+            <a:r>
+              <a:t>Heaviest. Segment 1 - agents, hooks, coordinator-subagent. Re-walk segment-1.</a:t>
+            </a:r>
+          </a:p>
+          <a:p>
+            <a:r>
+              <a:t>Domain 2 - Tool Design and MCP (18%)</a:t>
+            </a:r>
+          </a:p>
+          <a:p>
+            <a:r>
+              <a:t>Segment 2 + 2.5. Tool descriptions, structured errors, MCP list_tools.</a:t>
+            </a:r>
+          </a:p>
+          <a:p>
+            <a:r>
+              <a:t>Domain 3 - Claude Code (20%)</a:t>
+            </a:r>
+          </a:p>
+          <a:p>
+            <a:r>
+              <a:t>Segment 2. CLAUDE.md hierarchy, skills, slash commands, claude -p headless.</a:t>
+            </a:r>
+          </a:p>
+          <a:p>
+            <a:r>
+              <a:t>Domain 4 - Prompts and Structured Output (20%)</a:t>
+            </a:r>
+          </a:p>
+          <a:p>
+            <a:r>
+              <a:t>Segment 3. Forced tool_choice, Pydantic schemas, few-shot, retry loops.</a:t>
+            </a:r>
+          </a:p>
+          <a:p>
+            <a:r>
+              <a:t>Domain 5 - Context and Reliability (15%)</a:t>
+            </a:r>
+          </a:p>
+          <a:p>
+            <a:r>
+              <a:t>Segment 3 + parts of Segment 1. Context pinning, escalation, structured errors.</a:t>
+            </a:r>
+          </a:p>
+        </p:txBody>
+      </p:sp>
+      <p:sp>
+        <p:nvSpPr>
+          <p:cNvPr id="4" name="Text Placeholder 3"/>
+          <p:cNvSpPr>
+            <a:spLocks noGrp="1"/>
+          </p:cNvSpPr>
+          <p:nvPr>
+            <p:ph type="body" idx="15" sz="quarter"/>
+          </p:nvPr>
+        </p:nvSpPr>
+        <p:spPr/>
+        <p:txBody>
+          <a:bodyPr/>
+          <a:lstStyle/>
+          <a:p/>
+        </p:txBody>
+      </p:sp>
+      <p:sp>
+        <p:nvSpPr>
+          <p:cNvPr id="5" name="Text Placeholder 4"/>
+          <p:cNvSpPr>
+            <a:spLocks noGrp="1"/>
+          </p:cNvSpPr>
+          <p:nvPr>
+            <p:ph type="body" idx="16" sz="quarter"/>
+          </p:nvPr>
+        </p:nvSpPr>
+        <p:spPr/>
+        <p:txBody>
+          <a:bodyPr/>
+          <a:lstStyle/>
+          <a:p/>
+        </p:txBody>
+      </p:sp>
+      <p:sp>
+        <p:nvSpPr>
+          <p:cNvPr id="6" name="Text Placeholder 5"/>
+          <p:cNvSpPr>
+            <a:spLocks noGrp="1"/>
+          </p:cNvSpPr>
+          <p:nvPr>
+            <p:ph type="body" idx="17" sz="quarter"/>
+          </p:nvPr>
+        </p:nvSpPr>
+        <p:spPr/>
+        <p:txBody>
+          <a:bodyPr/>
+          <a:lstStyle/>
+          <a:p/>
+        </p:txBody>
+      </p:sp>
+    </p:spTree>
+  </p:cSld>
+  <p:clrMapOvr>
+    <a:masterClrMapping/>
+  </p:clrMapOvr>
+</p:sld>
+</file>
+
+<file path=ppt/slides/slide52.xml><?xml version="1.0" encoding="utf-8"?>
+<p:sld xmlns:a="http://schemas.openxmlformats.org/drawingml/2006/main" xmlns:p="http://schemas.openxmlformats.org/presentationml/2006/main" xmlns:r="http://schemas.openxmlformats.org/officeDocument/2006/relationships">
+  <p:cSld>
+    <p:spTree>
+      <p:nvGrpSpPr>
+        <p:cNvPr id="1" name=""/>
+        <p:cNvGrpSpPr/>
+        <p:nvPr/>
+      </p:nvGrpSpPr>
+      <p:grpSpPr/>
+      <p:pic>
+        <p:nvPicPr>
+          <p:cNvPr id="2" name="Picture 1" descr="08-cca-f-weights.png"/>
+          <p:cNvPicPr>
+            <a:picLocks noChangeAspect="1"/>
+          </p:cNvPicPr>
+          <p:nvPr/>
+        </p:nvPicPr>
+        <p:blipFill>
+          <a:blip r:embed="rId2"/>
+          <a:stretch>
+            <a:fillRect/>
+          </a:stretch>
+        </p:blipFill>
+        <p:spPr>
+          <a:xfrm>
+            <a:off x="0" y="0"/>
+            <a:ext cx="12192000" cy="6858000"/>
+          </a:xfrm>
+          <a:prstGeom prst="rect">
+            <a:avLst/>
+          </a:prstGeom>
+        </p:spPr>
+      </p:pic>
+    </p:spTree>
+  </p:cSld>
+  <p:clrMapOvr>
+    <a:masterClrMapping/>
+  </p:clrMapOvr>
+</p:sld>
+</file>
+
+<file path=ppt/slides/slide53.xml><?xml version="1.0" encoding="utf-8"?>
+<p:sld xmlns:a="http://schemas.openxmlformats.org/drawingml/2006/main" xmlns:p="http://schemas.openxmlformats.org/presentationml/2006/main" xmlns:r="http://schemas.openxmlformats.org/officeDocument/2006/relationships">
+  <p:cSld>
+    <p:spTree>
+      <p:nvGrpSpPr>
+        <p:cNvPr id="1" name=""/>
+        <p:cNvGrpSpPr/>
+        <p:nvPr/>
+      </p:nvGrpSpPr>
+      <p:grpSpPr/>
+      <p:sp>
+        <p:nvSpPr>
+          <p:cNvPr id="2" name="Title 1"/>
+          <p:cNvSpPr>
+            <a:spLocks noGrp="1"/>
+          </p:cNvSpPr>
+          <p:nvPr>
+            <p:ph type="title"/>
+          </p:nvPr>
+        </p:nvSpPr>
+        <p:spPr/>
+        <p:txBody>
+          <a:bodyPr/>
+          <a:lstStyle/>
+          <a:p>
+            <a:r>
+              <a:t>Why the practice sampler is domain-weighted</a:t>
+            </a:r>
+          </a:p>
+        </p:txBody>
+      </p:sp>
+      <p:sp>
+        <p:nvSpPr>
+          <p:cNvPr id="3" name="Text Placeholder 2"/>
+          <p:cNvSpPr>
+            <a:spLocks noGrp="1"/>
+          </p:cNvSpPr>
+          <p:nvPr>
+            <p:ph type="body" idx="10" sz="quarter"/>
+          </p:nvPr>
+        </p:nvSpPr>
+        <p:spPr/>
+        <p:txBody>
+          <a:bodyPr wrap="square"/>
+          <a:lstStyle/>
+          <a:p>
+            <a:r>
+              <a:t>The naive sampler</a:t>
+            </a:r>
+          </a:p>
+          <a:p>
+            <a:r>
+              <a:t>Pulls questions evenly across scenario families - which over-tests Claude Code (two scenarios are heavily D3) and under-tests context management (only fits in one).</a:t>
+            </a:r>
+          </a:p>
+          <a:p>
+            <a:r>
+              <a:t>Our sampler</a:t>
+            </a:r>
+          </a:p>
+          <a:p>
+            <a:r>
+              <a:t>Draws 3 D1 + 2 D2 + 2 D3 + 2 D4 + 1 D5 - matches the exam's 27/18/20/20/15 weighting exactly. Every cohort sees the SAME 10 questions in the same order (seed=2026) for consistency across deliveries.</a:t>
+            </a:r>
+          </a:p>
+        </p:txBody>
+      </p:sp>
+      <p:sp>
+        <p:nvSpPr>
+          <p:cNvPr id="4" name="Text Placeholder 3"/>
+          <p:cNvSpPr>
+            <a:spLocks noGrp="1"/>
+          </p:cNvSpPr>
+          <p:nvPr>
+            <p:ph type="body" idx="12" sz="quarter"/>
+          </p:nvPr>
+        </p:nvSpPr>
+        <p:spPr/>
+        <p:txBody>
+          <a:bodyPr/>
+          <a:lstStyle/>
+          <a:p/>
+        </p:txBody>
+      </p:sp>
+    </p:spTree>
+  </p:cSld>
+  <p:clrMapOvr>
+    <a:masterClrMapping/>
+  </p:clrMapOvr>
+</p:sld>
+</file>
+
+<file path=ppt/slides/slide54.xml><?xml version="1.0" encoding="utf-8"?>
+<p:sld xmlns:a="http://schemas.openxmlformats.org/drawingml/2006/main" xmlns:p="http://schemas.openxmlformats.org/presentationml/2006/main" xmlns:r="http://schemas.openxmlformats.org/officeDocument/2006/relationships">
+  <p:cSld>
+    <p:spTree>
+      <p:nvGrpSpPr>
+        <p:cNvPr id="1" name=""/>
+        <p:cNvGrpSpPr/>
+        <p:nvPr/>
+      </p:nvGrpSpPr>
+      <p:grpSpPr/>
+      <p:sp>
+        <p:nvSpPr>
+          <p:cNvPr id="2" name="Text Placeholder 1"/>
+          <p:cNvSpPr>
+            <a:spLocks noGrp="1"/>
+          </p:cNvSpPr>
+          <p:nvPr>
+            <p:ph type="body" idx="14" sz="quarter"/>
+          </p:nvPr>
+        </p:nvSpPr>
+        <p:spPr/>
+        <p:txBody>
+          <a:bodyPr wrap="square"/>
+          <a:lstStyle/>
+          <a:p>
+            <a:r>
+              <a:t>Live practice - 10 weighted questions (~28 min)</a:t>
+            </a:r>
+          </a:p>
+          <a:p/>
+          <a:p>
+            <a:r>
+              <a:t>Open notebooks/segment-4-cca-f-capstone.ipynb</a:t>
+            </a:r>
+          </a:p>
+          <a:p>
+            <a:r>
+              <a:t>Sampler draws 10 questions by CCA-F domain weight (3/2/2/2/1)</a:t>
+            </a:r>
+          </a:p>
+          <a:p>
+            <a:r>
+              <a:t>Per question (~2.5 min):</a:t>
+            </a:r>
+          </a:p>
+          <a:p>
+            <a:r>
+              <a:t>  1. Read the situation</a:t>
+            </a:r>
+          </a:p>
+          <a:p>
+            <a:r>
+              <a:t>  2. Cohort votes A/B/C/D in chat</a:t>
+            </a:r>
+          </a:p>
+          <a:p>
+            <a:r>
+              <a:t>  3. Reveal answer + explanation</a:t>
+            </a:r>
+          </a:p>
+          <a:p>
+            <a:r>
+              <a:t>  4. Color with a production tip from the matching domain-N-*.md</a:t>
+            </a:r>
+          </a:p>
+        </p:txBody>
+      </p:sp>
+    </p:spTree>
+  </p:cSld>
+  <p:clrMapOvr>
+    <a:masterClrMapping/>
+  </p:clrMapOvr>
+</p:sld>
+</file>
+
+<file path=ppt/slides/slide55.xml><?xml version="1.0" encoding="utf-8"?>
+<p:sld xmlns:a="http://schemas.openxmlformats.org/drawingml/2006/main" xmlns:p="http://schemas.openxmlformats.org/presentationml/2006/main" xmlns:r="http://schemas.openxmlformats.org/officeDocument/2006/relationships">
+  <p:cSld>
+    <p:spTree>
+      <p:nvGrpSpPr>
+        <p:cNvPr id="1" name=""/>
+        <p:cNvGrpSpPr/>
+        <p:nvPr/>
+      </p:nvGrpSpPr>
+      <p:grpSpPr/>
+      <p:sp>
+        <p:nvSpPr>
+          <p:cNvPr id="2" name="Title 1"/>
+          <p:cNvSpPr>
+            <a:spLocks noGrp="1"/>
+          </p:cNvSpPr>
+          <p:nvPr>
+            <p:ph type="title"/>
+          </p:nvPr>
+        </p:nvSpPr>
+        <p:spPr/>
+        <p:txBody>
+          <a:bodyPr/>
+          <a:lstStyle/>
+          <a:p>
+            <a:r>
+              <a:t>Tim's week-before-the-exam punchlist</a:t>
+            </a:r>
+          </a:p>
+        </p:txBody>
+      </p:sp>
+      <p:sp>
+        <p:nvSpPr>
+          <p:cNvPr id="3" name="Content Placeholder 2"/>
+          <p:cNvSpPr>
+            <a:spLocks noGrp="1"/>
+          </p:cNvSpPr>
+          <p:nvPr>
+            <p:ph idx="1"/>
+          </p:nvPr>
+        </p:nvSpPr>
+        <p:spPr/>
+        <p:txBody>
+          <a:bodyPr wrap="square"/>
+          <a:lstStyle/>
+          <a:p>
+            <a:r>
+              <a:t>1. Score &gt;900 on the Anthropic Practice Exam cold</a:t>
+            </a:r>
+          </a:p>
+          <a:p>
+            <a:r>
+              <a:t>2. Rebuild Segment 1 from memory in 30 minutes</a:t>
+            </a:r>
+          </a:p>
+          <a:p>
+            <a:r>
+              <a:t>3. Re-read domain-1-agentic.md - the 27% domain</a:t>
+            </a:r>
+          </a:p>
+          <a:p>
+            <a:r>
+              <a:t>4. Skim domain-3-claude-code.md and domain-4-prompts.md - the 20% domains</a:t>
+            </a:r>
+          </a:p>
+          <a:p>
+            <a:r>
+              <a:t>5. Verify proctoring setup the night before (camera, mic, ID)</a:t>
+            </a:r>
+          </a:p>
+          <a:p>
+            <a:r>
+              <a:t>6. Single attempt. Do not schedule until 1-4 are green.</a:t>
+            </a:r>
+          </a:p>
+        </p:txBody>
+      </p:sp>
+    </p:spTree>
+  </p:cSld>
+  <p:clrMapOvr>
+    <a:masterClrMapping/>
+  </p:clrMapOvr>
+</p:sld>
+</file>
+
+<file path=ppt/slides/slide56.xml><?xml version="1.0" encoding="utf-8"?>
+<p:sld xmlns:a="http://schemas.openxmlformats.org/drawingml/2006/main" xmlns:p="http://schemas.openxmlformats.org/presentationml/2006/main" xmlns:r="http://schemas.openxmlformats.org/officeDocument/2006/relationships">
+  <p:cSld>
+    <p:spTree>
+      <p:nvGrpSpPr>
+        <p:cNvPr id="1" name=""/>
+        <p:cNvGrpSpPr/>
+        <p:nvPr/>
+      </p:nvGrpSpPr>
+      <p:grpSpPr/>
+      <p:sp>
+        <p:nvSpPr>
+          <p:cNvPr id="2" name="Title 1"/>
+          <p:cNvSpPr>
+            <a:spLocks noGrp="1"/>
+          </p:cNvSpPr>
+          <p:nvPr>
+            <p:ph type="title"/>
+          </p:nvPr>
+        </p:nvSpPr>
+        <p:spPr/>
+        <p:txBody>
+          <a:bodyPr/>
+          <a:lstStyle/>
+          <a:p>
+            <a:r>
+              <a:t>What you built today</a:t>
+            </a:r>
+          </a:p>
+        </p:txBody>
+      </p:sp>
+      <p:sp>
+        <p:nvSpPr>
+          <p:cNvPr id="3" name="Content Placeholder 2"/>
+          <p:cNvSpPr>
+            <a:spLocks noGrp="1"/>
+          </p:cNvSpPr>
+          <p:nvPr>
+            <p:ph idx="1"/>
+          </p:nvPr>
+        </p:nvSpPr>
+        <p:spPr/>
+        <p:txBody>
+          <a:bodyPr wrap="square"/>
+          <a:lstStyle/>
+          <a:p>
+            <a:r>
+              <a:t>Customer support agent with PreToolUse hook enforcement</a:t>
+            </a:r>
+          </a:p>
+          <a:p>
+            <a:r>
+              <a:t>Configured Claude Code env with .mcp.json + CLAUDE.md hierarchy</a:t>
+            </a:r>
+          </a:p>
+          <a:p>
+            <a:r>
+              <a:t>Invoice extractor with Pydantic schema + validation retry</a:t>
+            </a:r>
+          </a:p>
+          <a:p>
+            <a:r>
+              <a:t>Production reliability mental model - context, escalation, errors, provenance</a:t>
+            </a:r>
+          </a:p>
+          <a:p/>
+          <a:p>
+            <a:r>
+              <a:t>Plus self-study: control surfaces and the Console asset surface (Segment 2.5)</a:t>
+            </a:r>
+          </a:p>
+        </p:txBody>
+      </p:sp>
+    </p:spTree>
+  </p:cSld>
+  <p:clrMapOvr>
+    <a:masterClrMapping/>
+  </p:clrMapOvr>
+</p:sld>
+</file>
+
+<file path=ppt/slides/slide57.xml><?xml version="1.0" encoding="utf-8"?>
+<p:sld xmlns:a="http://schemas.openxmlformats.org/drawingml/2006/main" xmlns:p="http://schemas.openxmlformats.org/presentationml/2006/main" xmlns:r="http://schemas.openxmlformats.org/officeDocument/2006/relationships">
+  <p:cSld>
+    <p:spTree>
+      <p:nvGrpSpPr>
+        <p:cNvPr id="1" name=""/>
+        <p:cNvGrpSpPr/>
+        <p:nvPr/>
+      </p:nvGrpSpPr>
+      <p:grpSpPr/>
+      <p:sp>
+        <p:nvSpPr>
+          <p:cNvPr id="2" name="Title 1"/>
+          <p:cNvSpPr>
+            <a:spLocks noGrp="1"/>
+          </p:cNvSpPr>
+          <p:nvPr>
+            <p:ph type="title"/>
+          </p:nvPr>
+        </p:nvSpPr>
+        <p:spPr/>
+        <p:txBody>
+          <a:bodyPr/>
+          <a:lstStyle/>
+          <a:p>
+            <a:r>
+              <a:t>Resources and next steps</a:t>
+            </a:r>
+          </a:p>
+        </p:txBody>
+      </p:sp>
+      <p:sp>
+        <p:nvSpPr>
+          <p:cNvPr id="3" name="Text Placeholder 2"/>
+          <p:cNvSpPr>
+            <a:spLocks noGrp="1"/>
+          </p:cNvSpPr>
+          <p:nvPr>
+            <p:ph type="body" idx="15" sz="quarter"/>
+          </p:nvPr>
+        </p:nvSpPr>
+        <p:spPr/>
+        <p:txBody>
+          <a:bodyPr wrap="square"/>
+          <a:lstStyle/>
+          <a:p>
+            <a:r>
+              <a:t>Repo</a:t>
+            </a:r>
+          </a:p>
+          <a:p>
+            <a:r>
+              <a:t>github.com/timothywarner-org/claude-architect</a:t>
+            </a:r>
+          </a:p>
+          <a:p>
+            <a:r>
+              <a:t>Anthropic cookbook (official, MIT, vendored in this repo)</a:t>
+            </a:r>
+          </a:p>
+          <a:p>
+            <a:r>
+              <a:t>github.com/anthropics/claude-cookbooks   |   claude-cookbooks-main/</a:t>
+            </a:r>
+          </a:p>
+          <a:p>
+            <a:r>
+              <a:t>CCA-F study path</a:t>
+            </a:r>
+          </a:p>
+          <a:p>
+            <a:r>
+              <a:t>EXAM-STUDY-PATH.md - notebook -&gt; CCA-F domain -&gt; scenario mapping</a:t>
+            </a:r>
+          </a:p>
+          <a:p>
+            <a:r>
+              <a:t>Anthropic Academy</a:t>
+            </a:r>
+          </a:p>
+          <a:p>
+            <a:r>
+              <a:t>anthropic.skilljar.com - free courses, official Practice Exam</a:t>
+            </a:r>
+          </a:p>
+        </p:txBody>
+      </p:sp>
+      <p:sp>
+        <p:nvSpPr>
+          <p:cNvPr id="4" name="Text Placeholder 3"/>
+          <p:cNvSpPr>
+            <a:spLocks noGrp="1"/>
+          </p:cNvSpPr>
+          <p:nvPr>
+            <p:ph type="body" idx="17" sz="quarter"/>
+          </p:nvPr>
+        </p:nvSpPr>
+        <p:spPr/>
+        <p:txBody>
+          <a:bodyPr/>
+          <a:lstStyle/>
+          <a:p/>
+        </p:txBody>
+      </p:sp>
+      <p:sp>
+        <p:nvSpPr>
+          <p:cNvPr id="5" name="Text Placeholder 4"/>
+          <p:cNvSpPr>
+            <a:spLocks noGrp="1"/>
+          </p:cNvSpPr>
+          <p:nvPr>
+            <p:ph type="body" idx="19" sz="quarter"/>
+          </p:nvPr>
+        </p:nvSpPr>
+        <p:spPr/>
+        <p:txBody>
+          <a:bodyPr/>
+          <a:lstStyle/>
+          <a:p/>
+        </p:txBody>
+      </p:sp>
+      <p:sp>
+        <p:nvSpPr>
+          <p:cNvPr id="6" name="Text Placeholder 5"/>
+          <p:cNvSpPr>
+            <a:spLocks noGrp="1"/>
+          </p:cNvSpPr>
+          <p:nvPr>
+            <p:ph type="body" idx="21" sz="quarter"/>
+          </p:nvPr>
+        </p:nvSpPr>
+        <p:spPr/>
+        <p:txBody>
+          <a:bodyPr/>
+          <a:lstStyle/>
+          <a:p/>
+        </p:txBody>
+      </p:sp>
+      <p:sp>
+        <p:nvSpPr>
+          <p:cNvPr id="7" name="Picture Placeholder 6"/>
+          <p:cNvSpPr>
+            <a:spLocks noGrp="1"/>
+          </p:cNvSpPr>
+          <p:nvPr>
+            <p:ph type="pic" idx="22" sz="quarter"/>
+          </p:nvPr>
+        </p:nvSpPr>
+        <p:spPr/>
+      </p:sp>
+      <p:sp>
+        <p:nvSpPr>
+          <p:cNvPr id="8" name="Picture Placeholder 7"/>
+          <p:cNvSpPr>
+            <a:spLocks noGrp="1"/>
+          </p:cNvSpPr>
+          <p:nvPr>
+            <p:ph type="pic" idx="23" sz="quarter"/>
+          </p:nvPr>
+        </p:nvSpPr>
+        <p:spPr/>
+      </p:sp>
+      <p:sp>
+        <p:nvSpPr>
+          <p:cNvPr id="9" name="Picture Placeholder 8"/>
+          <p:cNvSpPr>
+            <a:spLocks noGrp="1"/>
+          </p:cNvSpPr>
+          <p:nvPr>
+            <p:ph type="pic" idx="24" sz="quarter"/>
+          </p:nvPr>
+        </p:nvSpPr>
+        <p:spPr/>
+      </p:sp>
+      <p:sp>
+        <p:nvSpPr>
+          <p:cNvPr id="10" name="Picture Placeholder 9"/>
+          <p:cNvSpPr>
+            <a:spLocks noGrp="1"/>
+          </p:cNvSpPr>
+          <p:nvPr>
+            <p:ph type="pic" idx="25" sz="quarter"/>
+          </p:nvPr>
+        </p:nvSpPr>
+        <p:spPr/>
+      </p:sp>
+    </p:spTree>
+  </p:cSld>
+  <p:clrMapOvr>
+    <a:masterClrMapping/>
+  </p:clrMapOvr>
+</p:sld>
+</file>
+
+<file path=ppt/slides/slide58.xml><?xml version="1.0" encoding="utf-8"?>
+<p:sld xmlns:a="http://schemas.openxmlformats.org/drawingml/2006/main" xmlns:p="http://schemas.openxmlformats.org/presentationml/2006/main" xmlns:r="http://schemas.openxmlformats.org/officeDocument/2006/relationships">
+  <p:cSld>
+    <p:spTree>
+      <p:nvGrpSpPr>
+        <p:cNvPr id="1" name=""/>
+        <p:cNvGrpSpPr/>
+        <p:nvPr/>
+      </p:nvGrpSpPr>
+      <p:grpSpPr/>
+      <p:sp>
+        <p:nvSpPr>
+          <p:cNvPr id="2" name="Title 1"/>
+          <p:cNvSpPr>
+            <a:spLocks noGrp="1"/>
+          </p:cNvSpPr>
+          <p:nvPr>
+            <p:ph type="title"/>
+          </p:nvPr>
+        </p:nvSpPr>
+        <p:spPr/>
+        <p:txBody>
+          <a:bodyPr/>
+          <a:lstStyle/>
+          <a:p>
+            <a:r>
+              <a:t>Final Q&amp;A (10 min)</a:t>
+            </a:r>
+          </a:p>
+        </p:txBody>
+      </p:sp>
+      <p:sp>
+        <p:nvSpPr>
+          <p:cNvPr id="3" name="Content Placeholder 2"/>
+          <p:cNvSpPr>
+            <a:spLocks noGrp="1"/>
+          </p:cNvSpPr>
+          <p:nvPr>
+            <p:ph idx="1"/>
+          </p:nvPr>
+        </p:nvSpPr>
+        <p:spPr/>
+        <p:txBody>
+          <a:bodyPr wrap="square"/>
+          <a:lstStyle/>
+          <a:p>
+            <a:r>
+              <a:t>How do I monitor an agent in production?</a:t>
+            </a:r>
+          </a:p>
+          <a:p>
+            <a:r>
+              <a:t>When do I split a monolithic agent into coordinator + subagents?</a:t>
+            </a:r>
+          </a:p>
+          <a:p>
+            <a:r>
+              <a:t>What is the cost story for prompt caching?</a:t>
+            </a:r>
+          </a:p>
+          <a:p>
+            <a:r>
+              <a:t>How do I know when I am ready to sit the exam?</a:t>
+            </a:r>
+          </a:p>
+          <a:p>
+            <a:r>
+              <a:t>What is the renewal path for CCA-F?</a:t>
+            </a:r>
+          </a:p>
+        </p:txBody>
+      </p:sp>
+    </p:spTree>
+  </p:cSld>
+  <p:clrMapOvr>
+    <a:masterClrMapping/>
+  </p:clrMapOvr>
+</p:sld>
+</file>
+
+<file path=ppt/slides/slide59.xml><?xml version="1.0" encoding="utf-8"?>
+<p:sld xmlns:a="http://schemas.openxmlformats.org/drawingml/2006/main" xmlns:p="http://schemas.openxmlformats.org/presentationml/2006/main" xmlns:r="http://schemas.openxmlformats.org/officeDocument/2006/relationships">
+  <p:cSld>
+    <p:spTree>
+      <p:nvGrpSpPr>
+        <p:cNvPr id="1" name=""/>
+        <p:cNvGrpSpPr/>
+        <p:nvPr/>
+      </p:nvGrpSpPr>
+      <p:grpSpPr/>
+      <p:sp>
+        <p:nvSpPr>
+          <p:cNvPr id="2" name="Title 1"/>
+          <p:cNvSpPr>
+            <a:spLocks noGrp="1"/>
+          </p:cNvSpPr>
+          <p:nvPr>
             <p:ph type="ctrTitle"/>
           </p:nvPr>
         </p:nvSpPr>
@@ -49369,74 +48981,30 @@
         <p:nvPr/>
       </p:nvGrpSpPr>
       <p:grpSpPr/>
-      <p:sp>
-        <p:nvSpPr>
-          <p:cNvPr id="2" name="Title 1"/>
-          <p:cNvSpPr>
-            <a:spLocks noGrp="1"/>
-          </p:cNvSpPr>
-          <p:nvPr>
-            <p:ph type="title"/>
-          </p:nvPr>
-        </p:nvSpPr>
-        <p:spPr/>
-        <p:txBody>
-          <a:bodyPr/>
-          <a:lstStyle/>
-          <a:p>
-            <a:r>
-              <a:t>The agentic loop</a:t>
-            </a:r>
-          </a:p>
-        </p:txBody>
-      </p:sp>
-      <p:sp>
-        <p:nvSpPr>
-          <p:cNvPr id="3" name="Content Placeholder 2"/>
-          <p:cNvSpPr>
-            <a:spLocks noGrp="1"/>
-          </p:cNvSpPr>
-          <p:nvPr>
-            <p:ph idx="1"/>
-          </p:nvPr>
-        </p:nvSpPr>
-        <p:spPr/>
-        <p:txBody>
-          <a:bodyPr wrap="square"/>
-          <a:lstStyle/>
-          <a:p>
-            <a:r>
-              <a:t>1. Send request - model returns content + stop_reason</a:t>
-            </a:r>
-          </a:p>
-          <a:p>
-            <a:r>
-              <a:t>2. Read stop_reason - branch on the value, never on prose</a:t>
-            </a:r>
-          </a:p>
-          <a:p>
-            <a:r>
-              <a:t>3. tool_use? Execute tool, append tool_result, loop</a:t>
-            </a:r>
-          </a:p>
-          <a:p>
-            <a:r>
-              <a:t>4. end_turn? Return to user, done</a:t>
-            </a:r>
-          </a:p>
-          <a:p>
-            <a:r>
-              <a:t>5. pause_turn? Resume in the next request, no state change</a:t>
-            </a:r>
-          </a:p>
-          <a:p/>
-          <a:p>
-            <a:r>
-              <a:t>Six stop_reason values: end_turn, max_tokens, stop_sequence, tool_use, pause_turn, refusal</a:t>
-            </a:r>
-          </a:p>
-        </p:txBody>
-      </p:sp>
+      <p:pic>
+        <p:nvPicPr>
+          <p:cNvPr id="2" name="Picture 1" descr="01-agentic-loop.png"/>
+          <p:cNvPicPr>
+            <a:picLocks noChangeAspect="1"/>
+          </p:cNvPicPr>
+          <p:nvPr/>
+        </p:nvPicPr>
+        <p:blipFill>
+          <a:blip r:embed="rId2"/>
+          <a:stretch>
+            <a:fillRect/>
+          </a:stretch>
+        </p:blipFill>
+        <p:spPr>
+          <a:xfrm>
+            <a:off x="0" y="0"/>
+            <a:ext cx="12192000" cy="6858000"/>
+          </a:xfrm>
+          <a:prstGeom prst="rect">
+            <a:avLst/>
+          </a:prstGeom>
+        </p:spPr>
+      </p:pic>
     </p:spTree>
   </p:cSld>
   <p:clrMapOvr>
@@ -49471,7 +49039,7 @@
           <a:lstStyle/>
           <a:p>
             <a:r>
-              <a:t>Coordinator + subagents</a:t>
+              <a:t>The agentic loop</a:t>
             </a:r>
           </a:p>
         </p:txBody>
@@ -49492,28 +49060,33 @@
           <a:lstStyle/>
           <a:p>
             <a:r>
-              <a:t>ONE coordinator holds the user-facing thread</a:t>
-            </a:r>
-          </a:p>
-          <a:p>
-            <a:r>
-              <a:t>Subagents get ISOLATED contexts via the Task tool</a:t>
-            </a:r>
-          </a:p>
-          <a:p>
-            <a:r>
-              <a:t>Subagent returns its FINAL answer to the parent, not its working notes</a:t>
-            </a:r>
-          </a:p>
-          <a:p>
-            <a:r>
-              <a:t>Split when: own success criteria, own tool subset, own context discipline</a:t>
+              <a:t>1. Send request - model returns content + stop_reason</a:t>
+            </a:r>
+          </a:p>
+          <a:p>
+            <a:r>
+              <a:t>2. Read stop_reason - branch on the value, never on prose</a:t>
+            </a:r>
+          </a:p>
+          <a:p>
+            <a:r>
+              <a:t>3. tool_use? Execute tool, append tool_result, loop</a:t>
+            </a:r>
+          </a:p>
+          <a:p>
+            <a:r>
+              <a:t>4. end_turn? Return to user, done</a:t>
+            </a:r>
+          </a:p>
+          <a:p>
+            <a:r>
+              <a:t>5. pause_turn? Resume in the next request, no state change</a:t>
             </a:r>
           </a:p>
           <a:p/>
           <a:p>
             <a:r>
-              <a:t>Don't split for splitting's sake - two coordinators chatting is one slow agent</a:t>
+              <a:t>Six stop_reason values: end_turn, max_tokens, stop_sequence, tool_use, pause_turn, refusal</a:t>
             </a:r>
           </a:p>
         </p:txBody>
@@ -49552,7 +49125,7 @@
           <a:lstStyle/>
           <a:p>
             <a:r>
-              <a:t>Hooks - deterministic guarantees</a:t>
+              <a:t>Coordinator + subagents</a:t>
             </a:r>
           </a:p>
         </p:txBody>
@@ -49573,28 +49146,28 @@
           <a:lstStyle/>
           <a:p>
             <a:r>
-              <a:t>PreToolUse - gate a call BEFORE it runs (the bouncer)</a:t>
-            </a:r>
-          </a:p>
-          <a:p>
-            <a:r>
-              <a:t>PostToolUse - audit, transform, log AFTER (the auditor)</a:t>
-            </a:r>
-          </a:p>
-          <a:p>
-            <a:r>
-              <a:t>SessionStart - inject context (the briefing room)</a:t>
-            </a:r>
-          </a:p>
-          <a:p>
-            <a:r>
-              <a:t>Stop - final verification before returning to user</a:t>
+              <a:t>ONE coordinator holds the user-facing thread</a:t>
+            </a:r>
+          </a:p>
+          <a:p>
+            <a:r>
+              <a:t>Subagents get ISOLATED contexts via the Task tool</a:t>
+            </a:r>
+          </a:p>
+          <a:p>
+            <a:r>
+              <a:t>Subagent returns its FINAL answer to the parent, not its working notes</a:t>
+            </a:r>
+          </a:p>
+          <a:p>
+            <a:r>
+              <a:t>Split when: own success criteria, own tool subset, own context discipline</a:t>
             </a:r>
           </a:p>
           <a:p/>
           <a:p>
             <a:r>
-              <a:t>Hooks run as YOUR code, not the model's. Anything that MUST happen, hook it.</a:t>
+              <a:t>Don't split for splitting's sake - two coordinators chatting is one slow agent</a:t>
             </a:r>
           </a:p>
         </p:txBody>
